--- a/Drafts/Design Draft.pptx
+++ b/Drafts/Design Draft.pptx
@@ -104,6 +104,11 @@
       </a:defRPr>
     </a:lvl9pPr>
   </p:defaultTextStyle>
+  <p:extLst>
+    <p:ext uri="{EFAFB233-063F-42B5-8137-9DF3F51BA10A}">
+      <p15:sldGuideLst xmlns:p15="http://schemas.microsoft.com/office/powerpoint/2012/main"/>
+    </p:ext>
+  </p:extLst>
 </p:presentation>
 </file>
 
@@ -239,7 +244,7 @@
             <a:fld id="{8256C2ED-54A4-480D-B5C8-65C0D62359B9}" type="datetime2">
               <a:rPr lang="en-US" smtClean="0"/>
               <a:pPr/>
-              <a:t>Wednesday, April 22, 2026</a:t>
+              <a:t>Thursday, April 23, 2026</a:t>
             </a:fld>
             <a:endParaRPr lang="en-US" dirty="0"/>
           </a:p>
@@ -416,7 +421,7 @@
             <a:fld id="{8256C2ED-54A4-480D-B5C8-65C0D62359B9}" type="datetime2">
               <a:rPr lang="en-US" smtClean="0"/>
               <a:pPr/>
-              <a:t>Wednesday, April 22, 2026</a:t>
+              <a:t>Thursday, April 23, 2026</a:t>
             </a:fld>
             <a:endParaRPr lang="en-US" dirty="0"/>
           </a:p>
@@ -603,7 +608,7 @@
             <a:fld id="{8256C2ED-54A4-480D-B5C8-65C0D62359B9}" type="datetime2">
               <a:rPr lang="en-US" smtClean="0"/>
               <a:pPr/>
-              <a:t>Wednesday, April 22, 2026</a:t>
+              <a:t>Thursday, April 23, 2026</a:t>
             </a:fld>
             <a:endParaRPr lang="en-US" dirty="0"/>
           </a:p>
@@ -780,7 +785,7 @@
             <a:fld id="{8256C2ED-54A4-480D-B5C8-65C0D62359B9}" type="datetime2">
               <a:rPr lang="en-US" smtClean="0"/>
               <a:pPr/>
-              <a:t>Wednesday, April 22, 2026</a:t>
+              <a:t>Thursday, April 23, 2026</a:t>
             </a:fld>
             <a:endParaRPr lang="en-US" dirty="0"/>
           </a:p>
@@ -1033,7 +1038,7 @@
             <a:fld id="{8256C2ED-54A4-480D-B5C8-65C0D62359B9}" type="datetime2">
               <a:rPr lang="en-US" smtClean="0"/>
               <a:pPr/>
-              <a:t>Wednesday, April 22, 2026</a:t>
+              <a:t>Thursday, April 23, 2026</a:t>
             </a:fld>
             <a:endParaRPr lang="en-US" dirty="0"/>
           </a:p>
@@ -1272,7 +1277,7 @@
             <a:fld id="{8256C2ED-54A4-480D-B5C8-65C0D62359B9}" type="datetime2">
               <a:rPr lang="en-US" smtClean="0"/>
               <a:pPr/>
-              <a:t>Wednesday, April 22, 2026</a:t>
+              <a:t>Thursday, April 23, 2026</a:t>
             </a:fld>
             <a:endParaRPr lang="en-US" dirty="0"/>
           </a:p>
@@ -1646,7 +1651,7 @@
             <a:fld id="{8256C2ED-54A4-480D-B5C8-65C0D62359B9}" type="datetime2">
               <a:rPr lang="en-US" smtClean="0"/>
               <a:pPr/>
-              <a:t>Wednesday, April 22, 2026</a:t>
+              <a:t>Thursday, April 23, 2026</a:t>
             </a:fld>
             <a:endParaRPr lang="en-US" dirty="0"/>
           </a:p>
@@ -1771,7 +1776,7 @@
             <a:fld id="{8256C2ED-54A4-480D-B5C8-65C0D62359B9}" type="datetime2">
               <a:rPr lang="en-US" smtClean="0"/>
               <a:pPr/>
-              <a:t>Wednesday, April 22, 2026</a:t>
+              <a:t>Thursday, April 23, 2026</a:t>
             </a:fld>
             <a:endParaRPr lang="en-US" dirty="0"/>
           </a:p>
@@ -1873,7 +1878,7 @@
             <a:fld id="{8256C2ED-54A4-480D-B5C8-65C0D62359B9}" type="datetime2">
               <a:rPr lang="en-US" smtClean="0"/>
               <a:pPr/>
-              <a:t>Wednesday, April 22, 2026</a:t>
+              <a:t>Thursday, April 23, 2026</a:t>
             </a:fld>
             <a:endParaRPr lang="en-US" dirty="0"/>
           </a:p>
@@ -2157,7 +2162,7 @@
             <a:fld id="{8256C2ED-54A4-480D-B5C8-65C0D62359B9}" type="datetime2">
               <a:rPr lang="en-US" smtClean="0"/>
               <a:pPr/>
-              <a:t>Wednesday, April 22, 2026</a:t>
+              <a:t>Thursday, April 23, 2026</a:t>
             </a:fld>
             <a:endParaRPr lang="en-US" dirty="0"/>
           </a:p>
@@ -2421,7 +2426,7 @@
             <a:fld id="{8256C2ED-54A4-480D-B5C8-65C0D62359B9}" type="datetime2">
               <a:rPr lang="en-US" smtClean="0"/>
               <a:pPr/>
-              <a:t>Wednesday, April 22, 2026</a:t>
+              <a:t>Thursday, April 23, 2026</a:t>
             </a:fld>
             <a:endParaRPr lang="en-US" dirty="0"/>
           </a:p>
@@ -2641,7 +2646,7 @@
             <a:fld id="{8256C2ED-54A4-480D-B5C8-65C0D62359B9}" type="datetime2">
               <a:rPr lang="en-US" smtClean="0"/>
               <a:pPr/>
-              <a:t>Wednesday, April 22, 2026</a:t>
+              <a:t>Thursday, April 23, 2026</a:t>
             </a:fld>
             <a:endParaRPr lang="en-US" dirty="0"/>
           </a:p>
@@ -3757,8 +3762,8 @@
         </p:nvSpPr>
         <p:spPr>
           <a:xfrm>
-            <a:off x="345486" y="4332458"/>
-            <a:ext cx="1435188" cy="282437"/>
+            <a:off x="345485" y="4332458"/>
+            <a:ext cx="4093811" cy="282437"/>
           </a:xfrm>
           <a:prstGeom prst="roundRect">
             <a:avLst>
@@ -4627,4 +4632,39 @@
     </a:ext>
   </a:extLst>
 </a:theme>
+</file>
+
+<file path=ppt/webextensions/taskpanes.xml><?xml version="1.0" encoding="utf-8"?>
+<wetp:taskpanes xmlns:wetp="http://schemas.microsoft.com/office/webextensions/taskpanes/2010/11">
+  <wetp:taskpane dockstate="right" visibility="0" width="350" row="0">
+    <wetp:webextensionref xmlns:r="http://schemas.openxmlformats.org/officeDocument/2006/relationships" r:id="rId1"/>
+  </wetp:taskpane>
+  <wetp:taskpane dockstate="right" visibility="0" width="350" row="0">
+    <wetp:webextensionref xmlns:r="http://schemas.openxmlformats.org/officeDocument/2006/relationships" r:id="rId2"/>
+  </wetp:taskpane>
+</wetp:taskpanes>
+</file>
+
+<file path=ppt/webextensions/webextension1.xml><?xml version="1.0" encoding="utf-8"?>
+<we:webextension xmlns:we="http://schemas.microsoft.com/office/webextensions/webextension/2010/11" id="{91DE601F-B7A8-924F-B134-54C42D7F4152}">
+  <we:reference id="wa200005566" version="3.0.0.2" store="zh-CN" storeType="OMEX"/>
+  <we:alternateReferences>
+    <we:reference id="WA200005566" version="3.0.0.2" store="" storeType="OMEX"/>
+  </we:alternateReferences>
+  <we:properties/>
+  <we:bindings/>
+  <we:snapshot xmlns:r="http://schemas.openxmlformats.org/officeDocument/2006/relationships"/>
+</we:webextension>
+</file>
+
+<file path=ppt/webextensions/webextension2.xml><?xml version="1.0" encoding="utf-8"?>
+<we:webextension xmlns:we="http://schemas.microsoft.com/office/webextensions/webextension/2010/11" id="{D944C907-A97A-BB44-B28C-C528CE1366E1}">
+  <we:reference id="wa104381909" version="3.14.0.0" store="en-US" storeType="OMEX"/>
+  <we:alternateReferences>
+    <we:reference id="WA104381909" version="3.14.0.0" store="" storeType="OMEX"/>
+  </we:alternateReferences>
+  <we:properties/>
+  <we:bindings/>
+  <we:snapshot xmlns:r="http://schemas.openxmlformats.org/officeDocument/2006/relationships"/>
+</we:webextension>
 </file>
--- a/Drafts/Design Draft.pptx
+++ b/Drafts/Design Draft.pptx
@@ -1,11 +1,12 @@
 
 <file path=ppt/presentation.xml><?xml version="1.0" encoding="utf-8"?>
-<p:presentation xmlns:a="http://schemas.openxmlformats.org/drawingml/2006/main" xmlns:r="http://schemas.openxmlformats.org/officeDocument/2006/relationships" xmlns:p="http://schemas.openxmlformats.org/presentationml/2006/main" saveSubsetFonts="1" autoCompressPictures="0">
+<p:presentation xmlns:p15="http://schemas.microsoft.com/office/powerpoint/2012/main" xmlns:a="http://schemas.openxmlformats.org/drawingml/2006/main" xmlns:r="http://schemas.openxmlformats.org/officeDocument/2006/relationships" xmlns:p="http://schemas.openxmlformats.org/presentationml/2006/main" saveSubsetFonts="1" autoCompressPictures="0">
   <p:sldMasterIdLst>
     <p:sldMasterId id="2147483786" r:id="rId1"/>
   </p:sldMasterIdLst>
   <p:sldIdLst>
     <p:sldId id="256" r:id="rId2"/>
+    <p:sldId id="257" r:id="R0660a2a2297a4cf7"/>
   </p:sldIdLst>
   <p:sldSz cx="12192000" cy="6858000"/>
   <p:notesSz cx="6858000" cy="9144000"/>
@@ -113,7 +114,7 @@
 </file>
 
 <file path=ppt/slideLayouts/slideLayout1.xml><?xml version="1.0" encoding="utf-8"?>
-<p:sldLayout xmlns:a="http://schemas.openxmlformats.org/drawingml/2006/main" xmlns:r="http://schemas.openxmlformats.org/officeDocument/2006/relationships" xmlns:p="http://schemas.openxmlformats.org/presentationml/2006/main" type="title" preserve="1">
+<p:sldLayout xmlns:p14="http://schemas.microsoft.com/office/powerpoint/2010/main" xmlns:a="http://schemas.openxmlformats.org/drawingml/2006/main" xmlns:r="http://schemas.openxmlformats.org/officeDocument/2006/relationships" xmlns:p="http://schemas.openxmlformats.org/presentationml/2006/main" type="title" preserve="1">
   <p:cSld name="标题幻灯片">
     <p:spTree>
       <p:nvGrpSpPr>
@@ -1946,7 +1947,7 @@
 </file>
 
 <file path=ppt/slideLayouts/slideLayout8.xml><?xml version="1.0" encoding="utf-8"?>
-<p:sldLayout xmlns:a="http://schemas.openxmlformats.org/drawingml/2006/main" xmlns:r="http://schemas.openxmlformats.org/officeDocument/2006/relationships" xmlns:p="http://schemas.openxmlformats.org/presentationml/2006/main" type="objTx" preserve="1">
+<p:sldLayout xmlns:p14="http://schemas.microsoft.com/office/powerpoint/2010/main" xmlns:a="http://schemas.openxmlformats.org/drawingml/2006/main" xmlns:r="http://schemas.openxmlformats.org/officeDocument/2006/relationships" xmlns:p="http://schemas.openxmlformats.org/presentationml/2006/main" type="objTx" preserve="1">
   <p:cSld name="内容与标题">
     <p:spTree>
       <p:nvGrpSpPr>
@@ -2494,7 +2495,7 @@
 </file>
 
 <file path=ppt/slideMasters/slideMaster1.xml><?xml version="1.0" encoding="utf-8"?>
-<p:sldMaster xmlns:a="http://schemas.openxmlformats.org/drawingml/2006/main" xmlns:r="http://schemas.openxmlformats.org/officeDocument/2006/relationships" xmlns:p="http://schemas.openxmlformats.org/presentationml/2006/main">
+<p:sldMaster xmlns:p14="http://schemas.microsoft.com/office/powerpoint/2010/main" xmlns:a="http://schemas.openxmlformats.org/drawingml/2006/main" xmlns:r="http://schemas.openxmlformats.org/officeDocument/2006/relationships" xmlns:p="http://schemas.openxmlformats.org/presentationml/2006/main">
   <p:cSld>
     <p:bg>
       <p:bgRef idx="1001">
@@ -3041,7 +3042,7 @@
 </file>
 
 <file path=ppt/slides/slide1.xml><?xml version="1.0" encoding="utf-8"?>
-<p:sld xmlns:a="http://schemas.openxmlformats.org/drawingml/2006/main" xmlns:r="http://schemas.openxmlformats.org/officeDocument/2006/relationships" xmlns:p="http://schemas.openxmlformats.org/presentationml/2006/main">
+<p:sld xmlns:a16="http://schemas.microsoft.com/office/drawing/2014/main" xmlns:asvg="http://schemas.microsoft.com/office/drawing/2016/SVG/main" xmlns:p14="http://schemas.microsoft.com/office/powerpoint/2010/main" xmlns:a="http://schemas.openxmlformats.org/drawingml/2006/main" xmlns:r="http://schemas.openxmlformats.org/officeDocument/2006/relationships" xmlns:p="http://schemas.openxmlformats.org/presentationml/2006/main">
   <p:cSld>
     <p:bg>
       <p:bgPr>
@@ -3194,7 +3195,7 @@
                 <a:ea typeface="Palatino" pitchFamily="2" charset="0"/>
                 <a:cs typeface="Mongolian Baiti" panose="03000500000000000000" pitchFamily="66" charset="0"/>
               </a:rPr>
-              <a:t>Exclusive Summary: grow Fruit Co. by store expansion with supply chain optimization, product diversification, and purchasing experience management</a:t>
+              <a:t>Executive Summary: Drive Fruit Co. growth through store expansion, supply chain optimization, product diversification, and improved purchasing experience</a:t>
             </a:r>
           </a:p>
         </p:txBody>
@@ -3311,7 +3312,7 @@
                   <a:schemeClr val="tx1"/>
                 </a:solidFill>
               </a:rPr>
-              <a:t>Retrofit merchant projects to stabilize cash flows while expanding EE’s global BESS network in high-return markets. Convert German standalone tolling projects to boost equity growth. Optimized portfolio equity allocations were achieved using </a:t>
+              <a:t>Restructure merchant projects to stabilize cash flows while expanding EE’s global BESS network in high-return markets. Convert German standalone tolling projects to drive equity growth. Portfolio equity allocations optimized via </a:t>
             </a:r>
             <a:r>
               <a:rPr kumimoji="1" lang="en-US" altLang="zh-CN" sz="1400" b="1" dirty="0">
@@ -3488,7 +3489,7 @@
             </a:pPr>
             <a:r>
               <a:rPr kumimoji="1" lang="en-US" altLang="zh-CN" sz="1400" dirty="0"/>
-              <a:t>Use short development cycles to adapt swiftly to rapidly evolving battery technology</a:t>
+              <a:t>Adopt short development cycles to keep pace with rapidly evolving battery tech</a:t>
             </a:r>
           </a:p>
           <a:p>
@@ -3498,7 +3499,7 @@
             </a:pPr>
             <a:r>
               <a:rPr kumimoji="1" lang="en-US" altLang="zh-CN" sz="1400" dirty="0"/>
-              <a:t>Reduce costs with 30% of CAPEX grants</a:t>
+              <a:t>Slash costs with 30% CAPEX grants</a:t>
             </a:r>
             <a:endParaRPr kumimoji="1" lang="zh-CN" altLang="en-US" sz="1400" dirty="0"/>
           </a:p>
@@ -3654,7 +3655,7 @@
                   <a:schemeClr val="tx1"/>
                 </a:solidFill>
               </a:rPr>
-              <a:t>Close the value gap between high-output and low-revenue markets through full-chain control</a:t>
+              <a:t>Bridge the value gap between high-output and low-revenue markets via full-chain control</a:t>
             </a:r>
             <a:endParaRPr kumimoji="1" lang="en-US" altLang="zh-CN" sz="1400" b="1" dirty="0">
               <a:solidFill>
@@ -3735,7 +3736,7 @@
                   </a:schemeClr>
                 </a:solidFill>
               </a:rPr>
-              <a:t>Source: expert call, lit research, analysis</a:t>
+              <a:t>Source: expert interviews, literature review, analysis</a:t>
             </a:r>
             <a:endParaRPr kumimoji="1" lang="zh-CN" altLang="en-US" sz="1400" dirty="0">
               <a:solidFill>
@@ -4022,7 +4023,7 @@
                   <a:schemeClr val="tx1"/>
                 </a:solidFill>
               </a:rPr>
-              <a:t>Genki Forest is suggested to raise ex-factory price by CN¥0.25–0.30 per bottle</a:t>
+              <a:t>Recommend raising ex-factory prices by CN¥0.25–0.30 per bottle for Genki Forest</a:t>
             </a:r>
           </a:p>
           <a:p>
@@ -4036,7 +4037,7 @@
                   <a:schemeClr val="tx1"/>
                 </a:solidFill>
               </a:rPr>
-              <a:t>Terminal price could raise CN¥0.30–0.50 per bottle</a:t>
+              <a:t>Retail prices could rise CN¥0.30–0.50 per bottle</a:t>
             </a:r>
           </a:p>
           <a:p>
@@ -4050,7 +4051,7 @@
                   <a:schemeClr val="tx1"/>
                 </a:solidFill>
               </a:rPr>
-              <a:t>Potential risk and mitigation exist in implementation</a:t>
+              <a:t>Implementation risks and mitigations identified</a:t>
             </a:r>
           </a:p>
         </p:txBody>
@@ -4085,7 +4086,7 @@
           <a:p>
             <a:r>
               <a:rPr kumimoji="1" lang="en-US" altLang="zh-CN" sz="1600" b="1" dirty="0"/>
-              <a:t>Original customer base has relatively lower price sensitivity</a:t>
+              <a:t>Existing customers show relatively lower price sensitivity</a:t>
             </a:r>
             <a:endParaRPr kumimoji="1" lang="zh-CN" altLang="en-US" sz="1600" b="1" dirty="0"/>
           </a:p>
@@ -4262,7 +4263,7 @@
                   <a:schemeClr val="tx1"/>
                 </a:solidFill>
               </a:rPr>
-              <a:t>Close the value gap between high-output and low-revenue markets through full-chain control</a:t>
+              <a:t>Bridge the value gap between high-output and low-revenue markets via full-chain control</a:t>
             </a:r>
             <a:endParaRPr kumimoji="1" lang="en-US" altLang="zh-CN" sz="1400" b="1" dirty="0">
               <a:solidFill>
@@ -4319,8 +4320,867 @@
 </p:sld>
 </file>
 
+<file path=ppt/slides/slide2.xml><?xml version="1.0" encoding="utf-8"?>
+<p:sld xmlns:a="http://schemas.openxmlformats.org/drawingml/2006/main" xmlns:a16="http://schemas.microsoft.com/office/drawing/2014/main" xmlns:asvg="http://schemas.microsoft.com/office/drawing/2016/SVG/main" xmlns:r="http://schemas.openxmlformats.org/officeDocument/2006/relationships" xmlns:p="http://schemas.openxmlformats.org/presentationml/2006/main">
+  <p:cSld>
+    <p:spTree>
+      <p:nvGrpSpPr>
+        <p:cNvPr id="1" name=""/>
+        <p:cNvGrpSpPr/>
+        <p:nvPr/>
+      </p:nvGrpSpPr>
+      <p:grpSpPr/>
+      <p:sp>
+        <p:nvSpPr>
+          <p:cNvPr id="2" name="Title"/>
+          <p:cNvSpPr/>
+          <p:nvPr>
+            <p:ph type="title"/>
+          </p:nvPr>
+        </p:nvSpPr>
+        <p:spPr>
+          <a:xfrm xmlns:a="http://schemas.openxmlformats.org/drawingml/2006/main">
+            <a:off x="838200" y="365125"/>
+            <a:ext cx="10515600" cy="1325563"/>
+          </a:xfrm>
+        </p:spPr>
+        <p:txBody>
+          <a:bodyPr xmlns:a="http://schemas.openxmlformats.org/drawingml/2006/main"/>
+          <a:lstStyle xmlns:a="http://schemas.openxmlformats.org/drawingml/2006/main"/>
+          <a:p xmlns:a="http://schemas.openxmlformats.org/drawingml/2006/main">
+            <a:r>
+              <a:rPr lang="en-US"/>
+              <a:t>New Slide</a:t>
+            </a:r>
+          </a:p>
+        </p:txBody>
+      </p:sp>
+      <p:pic>
+        <p:nvPicPr>
+          <p:cNvPr id="10000" name="图形 60">
+            <a:extLst xmlns:a="http://schemas.openxmlformats.org/drawingml/2006/main">
+              <a:ext uri="{FF2B5EF4-FFF2-40B4-BE49-F238E27FC236}">
+                <a16:creationId xmlns:a16="http://schemas.microsoft.com/office/drawing/2014/main" id="{CD67FE52-B21D-D467-FA8C-18471F8E339A}"/>
+              </a:ext>
+            </a:extLst>
+          </p:cNvPr>
+          <p:cNvPicPr>
+            <a:picLocks xmlns:a="http://schemas.openxmlformats.org/drawingml/2006/main" noChangeAspect="1"/>
+          </p:cNvPicPr>
+          <p:nvPr/>
+        </p:nvPicPr>
+        <p:blipFill>
+          <a:blip xmlns:a="http://schemas.openxmlformats.org/drawingml/2006/main">
+            <a:extLst>
+              <a:ext uri="{96DAC541-7B7A-43D3-8B79-37D633B846F1}">
+                <asvg:svgBlip xmlns:asvg="http://schemas.microsoft.com/office/drawing/2016/SVG/main" xmlns:r="http://schemas.openxmlformats.org/officeDocument/2006/relationships" r:embed="R4708a209b2ba47fa"/>
+              </a:ext>
+            </a:extLst>
+          </a:blip>
+          <a:srcRect xmlns:a="http://schemas.openxmlformats.org/drawingml/2006/main"/>
+          <a:stretch xmlns:a="http://schemas.openxmlformats.org/drawingml/2006/main"/>
+        </p:blipFill>
+        <p:spPr>
+          <a:xfrm xmlns:a="http://schemas.openxmlformats.org/drawingml/2006/main">
+            <a:off x="10888462" y="6534398"/>
+            <a:ext cx="762838" cy="203586"/>
+          </a:xfrm>
+          <a:prstGeom xmlns:a="http://schemas.openxmlformats.org/drawingml/2006/main" prst="rect">
+            <a:avLst/>
+          </a:prstGeom>
+        </p:spPr>
+      </p:pic>
+      <p:cxnSp>
+        <p:nvCxnSpPr>
+          <p:cNvPr id="10001" name="直线连接符 37">
+            <a:extLst xmlns:a="http://schemas.openxmlformats.org/drawingml/2006/main">
+              <a:ext uri="{FF2B5EF4-FFF2-40B4-BE49-F238E27FC236}">
+                <a16:creationId xmlns:a16="http://schemas.microsoft.com/office/drawing/2014/main" id="{02F3A8E7-106F-591D-F7DE-2793A8B3EA7F}"/>
+              </a:ext>
+            </a:extLst>
+          </p:cNvPr>
+          <p:cNvCxnSpPr/>
+          <p:nvPr/>
+        </p:nvCxnSpPr>
+        <p:spPr>
+          <a:xfrm xmlns:a="http://schemas.openxmlformats.org/drawingml/2006/main" flipV="1">
+            <a:off x="6153443" y="2759531"/>
+            <a:ext cx="0" cy="265626"/>
+          </a:xfrm>
+          <a:prstGeom xmlns:a="http://schemas.openxmlformats.org/drawingml/2006/main" prst="line">
+            <a:avLst/>
+          </a:prstGeom>
+          <a:ln xmlns:a="http://schemas.openxmlformats.org/drawingml/2006/main" w="31750" cap="sq">
+            <a:solidFill>
+              <a:schemeClr val="tx2"/>
+            </a:solidFill>
+            <a:miter lim="800000"/>
+            <a:tailEnd w="sm" len="sm"/>
+          </a:ln>
+        </p:spPr>
+        <p:style>
+          <a:lnRef xmlns:a="http://schemas.openxmlformats.org/drawingml/2006/main" idx="2">
+            <a:schemeClr val="accent1"/>
+          </a:lnRef>
+          <a:fillRef xmlns:a="http://schemas.openxmlformats.org/drawingml/2006/main" idx="0">
+            <a:schemeClr val="accent1"/>
+          </a:fillRef>
+          <a:effectRef xmlns:a="http://schemas.openxmlformats.org/drawingml/2006/main" idx="1">
+            <a:schemeClr val="accent1"/>
+          </a:effectRef>
+          <a:fontRef xmlns:a="http://schemas.openxmlformats.org/drawingml/2006/main" idx="minor">
+            <a:schemeClr val="tx1"/>
+          </a:fontRef>
+        </p:style>
+      </p:cxnSp>
+      <p:cxnSp>
+        <p:nvCxnSpPr>
+          <p:cNvPr id="10002" name="直线连接符 39">
+            <a:extLst xmlns:a="http://schemas.openxmlformats.org/drawingml/2006/main">
+              <a:ext uri="{FF2B5EF4-FFF2-40B4-BE49-F238E27FC236}">
+                <a16:creationId xmlns:a16="http://schemas.microsoft.com/office/drawing/2014/main" id="{A2AA58F1-8C5F-12B1-E566-EF8BAB04F2C1}"/>
+              </a:ext>
+            </a:extLst>
+          </p:cNvPr>
+          <p:cNvCxnSpPr/>
+          <p:nvPr/>
+        </p:nvCxnSpPr>
+        <p:spPr>
+          <a:xfrm xmlns:a="http://schemas.openxmlformats.org/drawingml/2006/main">
+            <a:off x="6153443" y="2759531"/>
+            <a:ext cx="1140643" cy="0"/>
+          </a:xfrm>
+          <a:prstGeom xmlns:a="http://schemas.openxmlformats.org/drawingml/2006/main" prst="line">
+            <a:avLst/>
+          </a:prstGeom>
+          <a:ln xmlns:a="http://schemas.openxmlformats.org/drawingml/2006/main" w="31750" cap="sq">
+            <a:solidFill>
+              <a:schemeClr val="tx2"/>
+            </a:solidFill>
+            <a:miter lim="800000"/>
+            <a:tailEnd type="oval" w="sm" len="sm"/>
+          </a:ln>
+        </p:spPr>
+        <p:style>
+          <a:lnRef xmlns:a="http://schemas.openxmlformats.org/drawingml/2006/main" idx="2">
+            <a:schemeClr val="accent1"/>
+          </a:lnRef>
+          <a:fillRef xmlns:a="http://schemas.openxmlformats.org/drawingml/2006/main" idx="0">
+            <a:schemeClr val="accent1"/>
+          </a:fillRef>
+          <a:effectRef xmlns:a="http://schemas.openxmlformats.org/drawingml/2006/main" idx="1">
+            <a:schemeClr val="accent1"/>
+          </a:effectRef>
+          <a:fontRef xmlns:a="http://schemas.openxmlformats.org/drawingml/2006/main" idx="minor">
+            <a:schemeClr val="tx1"/>
+          </a:fontRef>
+        </p:style>
+      </p:cxnSp>
+      <p:cxnSp>
+        <p:nvCxnSpPr>
+          <p:cNvPr id="10003" name="直线连接符 57">
+            <a:extLst xmlns:a="http://schemas.openxmlformats.org/drawingml/2006/main">
+              <a:ext uri="{FF2B5EF4-FFF2-40B4-BE49-F238E27FC236}">
+                <a16:creationId xmlns:a16="http://schemas.microsoft.com/office/drawing/2014/main" id="{4CC9D08D-A330-065D-B982-D792D996573E}"/>
+              </a:ext>
+            </a:extLst>
+          </p:cNvPr>
+          <p:cNvCxnSpPr>
+            <a:cxnSpLocks xmlns:a="http://schemas.openxmlformats.org/drawingml/2006/main"/>
+          </p:cNvCxnSpPr>
+          <p:nvPr/>
+        </p:nvCxnSpPr>
+        <p:spPr>
+          <a:xfrm xmlns:a="http://schemas.openxmlformats.org/drawingml/2006/main">
+            <a:off x="345486" y="872723"/>
+            <a:ext cx="11501023" cy="0"/>
+          </a:xfrm>
+          <a:prstGeom xmlns:a="http://schemas.openxmlformats.org/drawingml/2006/main" prst="line">
+            <a:avLst/>
+          </a:prstGeom>
+          <a:ln xmlns:a="http://schemas.openxmlformats.org/drawingml/2006/main">
+            <a:solidFill>
+              <a:schemeClr val="tx2"/>
+            </a:solidFill>
+          </a:ln>
+        </p:spPr>
+        <p:style>
+          <a:lnRef xmlns:a="http://schemas.openxmlformats.org/drawingml/2006/main" idx="2">
+            <a:schemeClr val="accent1"/>
+          </a:lnRef>
+          <a:fillRef xmlns:a="http://schemas.openxmlformats.org/drawingml/2006/main" idx="0">
+            <a:schemeClr val="accent1"/>
+          </a:fillRef>
+          <a:effectRef xmlns:a="http://schemas.openxmlformats.org/drawingml/2006/main" idx="1">
+            <a:schemeClr val="accent1"/>
+          </a:effectRef>
+          <a:fontRef xmlns:a="http://schemas.openxmlformats.org/drawingml/2006/main" idx="minor">
+            <a:schemeClr val="tx1"/>
+          </a:fontRef>
+        </p:style>
+      </p:cxnSp>
+      <p:cxnSp>
+        <p:nvCxnSpPr>
+          <p:cNvPr id="10004" name="直线连接符 78">
+            <a:extLst xmlns:a="http://schemas.openxmlformats.org/drawingml/2006/main">
+              <a:ext uri="{FF2B5EF4-FFF2-40B4-BE49-F238E27FC236}">
+                <a16:creationId xmlns:a16="http://schemas.microsoft.com/office/drawing/2014/main" id="{7B9A5B20-BEFA-0ADD-2D2A-70ED7D6302C9}"/>
+              </a:ext>
+            </a:extLst>
+          </p:cNvPr>
+          <p:cNvCxnSpPr>
+            <a:cxnSpLocks xmlns:a="http://schemas.openxmlformats.org/drawingml/2006/main"/>
+          </p:cNvCxnSpPr>
+          <p:nvPr/>
+        </p:nvCxnSpPr>
+        <p:spPr>
+          <a:xfrm xmlns:a="http://schemas.openxmlformats.org/drawingml/2006/main">
+            <a:off x="345486" y="2444416"/>
+            <a:ext cx="4093812" cy="0"/>
+          </a:xfrm>
+          <a:prstGeom xmlns:a="http://schemas.openxmlformats.org/drawingml/2006/main" prst="line">
+            <a:avLst/>
+          </a:prstGeom>
+          <a:ln xmlns:a="http://schemas.openxmlformats.org/drawingml/2006/main">
+            <a:solidFill>
+              <a:schemeClr val="tx2"/>
+            </a:solidFill>
+          </a:ln>
+        </p:spPr>
+        <p:style>
+          <a:lnRef xmlns:a="http://schemas.openxmlformats.org/drawingml/2006/main" idx="2">
+            <a:schemeClr val="accent1"/>
+          </a:lnRef>
+          <a:fillRef xmlns:a="http://schemas.openxmlformats.org/drawingml/2006/main" idx="0">
+            <a:schemeClr val="accent1"/>
+          </a:fillRef>
+          <a:effectRef xmlns:a="http://schemas.openxmlformats.org/drawingml/2006/main" idx="1">
+            <a:schemeClr val="accent1"/>
+          </a:effectRef>
+          <a:fontRef xmlns:a="http://schemas.openxmlformats.org/drawingml/2006/main" idx="minor">
+            <a:schemeClr val="tx1"/>
+          </a:fontRef>
+        </p:style>
+      </p:cxnSp>
+      <p:cxnSp>
+        <p:nvCxnSpPr>
+          <p:cNvPr id="10005" name="直线连接符 87">
+            <a:extLst xmlns:a="http://schemas.openxmlformats.org/drawingml/2006/main">
+              <a:ext uri="{FF2B5EF4-FFF2-40B4-BE49-F238E27FC236}">
+                <a16:creationId xmlns:a16="http://schemas.microsoft.com/office/drawing/2014/main" id="{90C26054-AA2D-AD8B-BC84-E6DEC9B17FA7}"/>
+              </a:ext>
+            </a:extLst>
+          </p:cNvPr>
+          <p:cNvCxnSpPr>
+            <a:cxnSpLocks xmlns:a="http://schemas.openxmlformats.org/drawingml/2006/main"/>
+          </p:cNvCxnSpPr>
+          <p:nvPr/>
+        </p:nvCxnSpPr>
+        <p:spPr>
+          <a:xfrm xmlns:a="http://schemas.openxmlformats.org/drawingml/2006/main">
+            <a:off x="5139910" y="4756113"/>
+            <a:ext cx="6708559" cy="0"/>
+          </a:xfrm>
+          <a:prstGeom xmlns:a="http://schemas.openxmlformats.org/drawingml/2006/main" prst="line">
+            <a:avLst/>
+          </a:prstGeom>
+          <a:ln xmlns:a="http://schemas.openxmlformats.org/drawingml/2006/main">
+            <a:solidFill>
+              <a:schemeClr val="tx2"/>
+            </a:solidFill>
+          </a:ln>
+        </p:spPr>
+        <p:style>
+          <a:lnRef xmlns:a="http://schemas.openxmlformats.org/drawingml/2006/main" idx="2">
+            <a:schemeClr val="accent1"/>
+          </a:lnRef>
+          <a:fillRef xmlns:a="http://schemas.openxmlformats.org/drawingml/2006/main" idx="0">
+            <a:schemeClr val="accent1"/>
+          </a:fillRef>
+          <a:effectRef xmlns:a="http://schemas.openxmlformats.org/drawingml/2006/main" idx="1">
+            <a:schemeClr val="accent1"/>
+          </a:effectRef>
+          <a:fontRef xmlns:a="http://schemas.openxmlformats.org/drawingml/2006/main" idx="minor">
+            <a:schemeClr val="tx1"/>
+          </a:fontRef>
+        </p:style>
+      </p:cxnSp>
+      <p:sp>
+        <p:nvSpPr>
+          <p:cNvPr id="10006" name="矩形 91">
+            <a:extLst xmlns:a="http://schemas.openxmlformats.org/drawingml/2006/main">
+              <a:ext uri="{FF2B5EF4-FFF2-40B4-BE49-F238E27FC236}">
+                <a16:creationId xmlns:a16="http://schemas.microsoft.com/office/drawing/2014/main" id="{8867E2AE-94E7-1A73-6E90-690A565127A1}"/>
+              </a:ext>
+            </a:extLst>
+          </p:cNvPr>
+          <p:cNvSpPr/>
+          <p:nvPr/>
+        </p:nvSpPr>
+        <p:spPr>
+          <a:xfrm xmlns:a="http://schemas.openxmlformats.org/drawingml/2006/main">
+            <a:off x="345486" y="2133920"/>
+            <a:ext cx="4093812" cy="2035744"/>
+          </a:xfrm>
+          <a:prstGeom xmlns:a="http://schemas.openxmlformats.org/drawingml/2006/main" prst="rect">
+            <a:avLst/>
+          </a:prstGeom>
+          <a:solidFill xmlns:a="http://schemas.openxmlformats.org/drawingml/2006/main">
+            <a:schemeClr val="bg1"/>
+          </a:solidFill>
+          <a:ln xmlns:a="http://schemas.openxmlformats.org/drawingml/2006/main">
+            <a:noFill/>
+          </a:ln>
+          <a:effectLst xmlns:a="http://schemas.openxmlformats.org/drawingml/2006/main">
+            <a:outerShdw blurRad="50800" dist="38100" dir="2700000" algn="tl" rotWithShape="0">
+              <a:prstClr val="black">
+                <a:alpha val="10000"/>
+              </a:prstClr>
+            </a:outerShdw>
+          </a:effectLst>
+        </p:spPr>
+        <p:style>
+          <a:lnRef xmlns:a="http://schemas.openxmlformats.org/drawingml/2006/main" idx="2">
+            <a:schemeClr val="accent1">
+              <a:shade val="15000"/>
+            </a:schemeClr>
+          </a:lnRef>
+          <a:fillRef xmlns:a="http://schemas.openxmlformats.org/drawingml/2006/main" idx="1">
+            <a:schemeClr val="accent1"/>
+          </a:fillRef>
+          <a:effectRef xmlns:a="http://schemas.openxmlformats.org/drawingml/2006/main" idx="0">
+            <a:schemeClr val="accent1"/>
+          </a:effectRef>
+          <a:fontRef xmlns:a="http://schemas.openxmlformats.org/drawingml/2006/main" idx="minor">
+            <a:schemeClr val="lt1"/>
+          </a:fontRef>
+        </p:style>
+        <p:txBody>
+          <a:bodyPr xmlns:a="http://schemas.openxmlformats.org/drawingml/2006/main" rtlCol="0" anchor="ctr"/>
+          <a:lstStyle xmlns:a="http://schemas.openxmlformats.org/drawingml/2006/main"/>
+          <a:p xmlns:a="http://schemas.openxmlformats.org/drawingml/2006/main">
+            <a:pPr algn="ctr"/>
+            <a:endParaRPr kumimoji="1" lang="zh-CN" altLang="en-US"/>
+          </a:p>
+        </p:txBody>
+      </p:sp>
+      <p:sp>
+        <p:nvSpPr>
+          <p:cNvPr id="10007" name="圆角矩形 24">
+            <a:extLst xmlns:a="http://schemas.openxmlformats.org/drawingml/2006/main">
+              <a:ext uri="{FF2B5EF4-FFF2-40B4-BE49-F238E27FC236}">
+                <a16:creationId xmlns:a16="http://schemas.microsoft.com/office/drawing/2014/main" id="{E397D437-4E52-D22D-6B27-72E8C793A13C}"/>
+              </a:ext>
+            </a:extLst>
+          </p:cNvPr>
+          <p:cNvSpPr/>
+          <p:nvPr/>
+        </p:nvSpPr>
+        <p:spPr>
+          <a:xfrm xmlns:a="http://schemas.openxmlformats.org/drawingml/2006/main">
+            <a:off x="345489" y="1076700"/>
+            <a:ext cx="2012699" cy="282437"/>
+          </a:xfrm>
+          <a:prstGeom xmlns:a="http://schemas.openxmlformats.org/drawingml/2006/main" prst="roundRect">
+            <a:avLst>
+              <a:gd name="adj" fmla="val 0"/>
+            </a:avLst>
+          </a:prstGeom>
+          <a:solidFill xmlns:a="http://schemas.openxmlformats.org/drawingml/2006/main">
+            <a:schemeClr val="tx2"/>
+          </a:solidFill>
+          <a:ln xmlns:a="http://schemas.openxmlformats.org/drawingml/2006/main" w="6350">
+            <a:noFill/>
+          </a:ln>
+        </p:spPr>
+        <p:style>
+          <a:lnRef xmlns:a="http://schemas.openxmlformats.org/drawingml/2006/main" idx="2">
+            <a:schemeClr val="accent1">
+              <a:shade val="15000"/>
+            </a:schemeClr>
+          </a:lnRef>
+          <a:fillRef xmlns:a="http://schemas.openxmlformats.org/drawingml/2006/main" idx="1">
+            <a:schemeClr val="accent1"/>
+          </a:fillRef>
+          <a:effectRef xmlns:a="http://schemas.openxmlformats.org/drawingml/2006/main" idx="0">
+            <a:schemeClr val="accent1"/>
+          </a:effectRef>
+          <a:fontRef xmlns:a="http://schemas.openxmlformats.org/drawingml/2006/main" idx="minor">
+            <a:schemeClr val="lt1"/>
+          </a:fontRef>
+        </p:style>
+        <p:txBody>
+          <a:bodyPr xmlns:a="http://schemas.openxmlformats.org/drawingml/2006/main" rtlCol="0" anchor="ctr"/>
+          <a:lstStyle xmlns:a="http://schemas.openxmlformats.org/drawingml/2006/main"/>
+          <a:p xmlns:a="http://schemas.openxmlformats.org/drawingml/2006/main">
+            <a:pPr algn="ctr"/>
+            <a:r>
+              <a:rPr kumimoji="1" lang="en-US" altLang="zh-CN" sz="1600" b="1" dirty="0"/>
+              <a:t>Optimizing Returns</a:t>
+            </a:r>
+            <a:endParaRPr kumimoji="1" lang="zh-CN" altLang="en-US" sz="1600" b="1" dirty="0"/>
+          </a:p>
+        </p:txBody>
+      </p:sp>
+      <p:sp>
+        <p:nvSpPr>
+          <p:cNvPr id="10008" name="矩形 27">
+            <a:extLst xmlns:a="http://schemas.openxmlformats.org/drawingml/2006/main">
+              <a:ext uri="{FF2B5EF4-FFF2-40B4-BE49-F238E27FC236}">
+                <a16:creationId xmlns:a16="http://schemas.microsoft.com/office/drawing/2014/main" id="{79E0164F-8AEF-E13C-5944-82136D1891B0}"/>
+              </a:ext>
+            </a:extLst>
+          </p:cNvPr>
+          <p:cNvSpPr/>
+          <p:nvPr/>
+        </p:nvSpPr>
+        <p:spPr>
+          <a:xfrm xmlns:a="http://schemas.openxmlformats.org/drawingml/2006/main">
+            <a:off x="345488" y="1356860"/>
+            <a:ext cx="11501023" cy="612535"/>
+          </a:xfrm>
+          <a:prstGeom xmlns:a="http://schemas.openxmlformats.org/drawingml/2006/main" prst="rect">
+            <a:avLst/>
+          </a:prstGeom>
+          <a:solidFill xmlns:a="http://schemas.openxmlformats.org/drawingml/2006/main">
+            <a:schemeClr val="bg2"/>
+          </a:solidFill>
+          <a:ln xmlns:a="http://schemas.openxmlformats.org/drawingml/2006/main">
+            <a:noFill/>
+          </a:ln>
+        </p:spPr>
+        <p:style>
+          <a:lnRef xmlns:a="http://schemas.openxmlformats.org/drawingml/2006/main" idx="2">
+            <a:schemeClr val="accent1">
+              <a:shade val="15000"/>
+            </a:schemeClr>
+          </a:lnRef>
+          <a:fillRef xmlns:a="http://schemas.openxmlformats.org/drawingml/2006/main" idx="1">
+            <a:schemeClr val="accent1"/>
+          </a:fillRef>
+          <a:effectRef xmlns:a="http://schemas.openxmlformats.org/drawingml/2006/main" idx="0">
+            <a:schemeClr val="accent1"/>
+          </a:effectRef>
+          <a:fontRef xmlns:a="http://schemas.openxmlformats.org/drawingml/2006/main" idx="minor">
+            <a:schemeClr val="lt1"/>
+          </a:fontRef>
+        </p:style>
+        <p:txBody>
+          <a:bodyPr xmlns:a="http://schemas.openxmlformats.org/drawingml/2006/main" rtlCol="0" anchor="ctr"/>
+          <a:lstStyle xmlns:a="http://schemas.openxmlformats.org/drawingml/2006/main"/>
+          <a:p xmlns:a="http://schemas.openxmlformats.org/drawingml/2006/main">
+            <a:pPr algn="just"/>
+            <a:r>
+              <a:rPr kumimoji="1" lang="en-US" altLang="zh-CN" sz="1400" dirty="0">
+                <a:solidFill>
+                  <a:schemeClr val="tx1"/>
+                </a:solidFill>
+              </a:rPr>
+              <a:t>Retrofit merchant projects to stabilize cash flows while expanding EE’s global BESS network in high-return markets. Convert German standalone tolling projects to boost equity growth. Optimized portfolio equity allocations were achieved using </a:t>
+            </a:r>
+            <a:r>
+              <a:rPr kumimoji="1" lang="en-US" altLang="zh-CN" sz="1400" b="1" dirty="0">
+                <a:solidFill>
+                  <a:schemeClr val="tx1"/>
+                </a:solidFill>
+              </a:rPr>
+              <a:t>Mixed-Integer Linear Programming.</a:t>
+            </a:r>
+          </a:p>
+        </p:txBody>
+      </p:sp>
+      <p:sp>
+        <p:nvSpPr>
+          <p:cNvPr id="10009" name="圆角矩形 61">
+            <a:extLst xmlns:a="http://schemas.openxmlformats.org/drawingml/2006/main">
+              <a:ext uri="{FF2B5EF4-FFF2-40B4-BE49-F238E27FC236}">
+                <a16:creationId xmlns:a16="http://schemas.microsoft.com/office/drawing/2014/main" id="{E69AE45E-1DE2-4DAB-7FF4-44303F245327}"/>
+              </a:ext>
+            </a:extLst>
+          </p:cNvPr>
+          <p:cNvSpPr/>
+          <p:nvPr/>
+        </p:nvSpPr>
+        <p:spPr>
+          <a:xfrm xmlns:a="http://schemas.openxmlformats.org/drawingml/2006/main">
+            <a:off x="345485" y="4332458"/>
+            <a:ext cx="4093811" cy="282437"/>
+          </a:xfrm>
+          <a:prstGeom xmlns:a="http://schemas.openxmlformats.org/drawingml/2006/main" prst="roundRect">
+            <a:avLst>
+              <a:gd name="adj" fmla="val 0"/>
+            </a:avLst>
+          </a:prstGeom>
+          <a:solidFill xmlns:a="http://schemas.openxmlformats.org/drawingml/2006/main">
+            <a:schemeClr val="bg2"/>
+          </a:solidFill>
+          <a:ln xmlns:a="http://schemas.openxmlformats.org/drawingml/2006/main" w="19050">
+            <a:solidFill>
+              <a:schemeClr val="bg2"/>
+            </a:solidFill>
+          </a:ln>
+        </p:spPr>
+        <p:style>
+          <a:lnRef xmlns:a="http://schemas.openxmlformats.org/drawingml/2006/main" idx="2">
+            <a:schemeClr val="accent1">
+              <a:shade val="15000"/>
+            </a:schemeClr>
+          </a:lnRef>
+          <a:fillRef xmlns:a="http://schemas.openxmlformats.org/drawingml/2006/main" idx="1">
+            <a:schemeClr val="accent1"/>
+          </a:fillRef>
+          <a:effectRef xmlns:a="http://schemas.openxmlformats.org/drawingml/2006/main" idx="0">
+            <a:schemeClr val="accent1"/>
+          </a:effectRef>
+          <a:fontRef xmlns:a="http://schemas.openxmlformats.org/drawingml/2006/main" idx="minor">
+            <a:schemeClr val="lt1"/>
+          </a:fontRef>
+        </p:style>
+        <p:txBody>
+          <a:bodyPr xmlns:a="http://schemas.openxmlformats.org/drawingml/2006/main" rtlCol="0" anchor="ctr"/>
+          <a:lstStyle xmlns:a="http://schemas.openxmlformats.org/drawingml/2006/main"/>
+          <a:p xmlns:a="http://schemas.openxmlformats.org/drawingml/2006/main">
+            <a:pPr algn="ctr"/>
+            <a:r>
+              <a:rPr kumimoji="1" lang="en-US" altLang="zh-CN" sz="1600" b="1" dirty="0">
+                <a:solidFill>
+                  <a:schemeClr val="tx2"/>
+                </a:solidFill>
+              </a:rPr>
+              <a:t>Key Priorities</a:t>
+            </a:r>
+            <a:endParaRPr kumimoji="1" lang="zh-CN" altLang="en-US" sz="1600" b="1" dirty="0">
+              <a:solidFill>
+                <a:schemeClr val="tx2"/>
+              </a:solidFill>
+            </a:endParaRPr>
+          </a:p>
+        </p:txBody>
+      </p:sp>
+      <p:sp>
+        <p:nvSpPr>
+          <p:cNvPr id="10010" name="矩形 84">
+            <a:extLst xmlns:a="http://schemas.openxmlformats.org/drawingml/2006/main">
+              <a:ext uri="{FF2B5EF4-FFF2-40B4-BE49-F238E27FC236}">
+                <a16:creationId xmlns:a16="http://schemas.microsoft.com/office/drawing/2014/main" id="{746FE38C-0400-C837-CAC2-BBFE1F7867E4}"/>
+              </a:ext>
+            </a:extLst>
+          </p:cNvPr>
+          <p:cNvSpPr/>
+          <p:nvPr/>
+        </p:nvSpPr>
+        <p:spPr>
+          <a:xfrm xmlns:a="http://schemas.openxmlformats.org/drawingml/2006/main">
+            <a:off x="5137950" y="4993701"/>
+            <a:ext cx="6708559" cy="885478"/>
+          </a:xfrm>
+          <a:prstGeom xmlns:a="http://schemas.openxmlformats.org/drawingml/2006/main" prst="rect">
+            <a:avLst/>
+          </a:prstGeom>
+          <a:solidFill xmlns:a="http://schemas.openxmlformats.org/drawingml/2006/main">
+            <a:schemeClr val="bg2"/>
+          </a:solidFill>
+          <a:ln xmlns:a="http://schemas.openxmlformats.org/drawingml/2006/main">
+            <a:noFill/>
+          </a:ln>
+        </p:spPr>
+        <p:style>
+          <a:lnRef xmlns:a="http://schemas.openxmlformats.org/drawingml/2006/main" idx="2">
+            <a:schemeClr val="accent1">
+              <a:shade val="15000"/>
+            </a:schemeClr>
+          </a:lnRef>
+          <a:fillRef xmlns:a="http://schemas.openxmlformats.org/drawingml/2006/main" idx="1">
+            <a:schemeClr val="accent1"/>
+          </a:fillRef>
+          <a:effectRef xmlns:a="http://schemas.openxmlformats.org/drawingml/2006/main" idx="0">
+            <a:schemeClr val="accent1"/>
+          </a:effectRef>
+          <a:fontRef xmlns:a="http://schemas.openxmlformats.org/drawingml/2006/main" idx="minor">
+            <a:schemeClr val="lt1"/>
+          </a:fontRef>
+        </p:style>
+        <p:txBody>
+          <a:bodyPr xmlns:a="http://schemas.openxmlformats.org/drawingml/2006/main" rtlCol="0" anchor="ctr"/>
+          <a:lstStyle xmlns:a="http://schemas.openxmlformats.org/drawingml/2006/main"/>
+          <a:p xmlns:a="http://schemas.openxmlformats.org/drawingml/2006/main">
+            <a:pPr algn="just"/>
+            <a:r>
+              <a:rPr kumimoji="1" lang="en-US" altLang="zh-CN" sz="1400" b="1" dirty="0">
+                <a:solidFill>
+                  <a:schemeClr val="tx1"/>
+                </a:solidFill>
+              </a:rPr>
+              <a:t>Genki Forest is suggested to raise ex-factory price by CN¥0.25–0.30 per bottle</a:t>
+            </a:r>
+          </a:p>
+          <a:p xmlns:a="http://schemas.openxmlformats.org/drawingml/2006/main">
+            <a:pPr marL="285750" indent="-285750" algn="just">
+              <a:buFont typeface="Arial" panose="020B0604020202020204" pitchFamily="34" charset="0"/>
+              <a:buChar char="•"/>
+            </a:pPr>
+            <a:r>
+              <a:rPr kumimoji="1" lang="en-US" altLang="zh-CN" sz="1400" dirty="0">
+                <a:solidFill>
+                  <a:schemeClr val="tx1"/>
+                </a:solidFill>
+              </a:rPr>
+              <a:t>Terminal price could raise CN¥0.30–0.50 per bottle</a:t>
+            </a:r>
+          </a:p>
+          <a:p xmlns:a="http://schemas.openxmlformats.org/drawingml/2006/main">
+            <a:pPr marL="285750" indent="-285750" algn="just">
+              <a:buFont typeface="Arial" panose="020B0604020202020204" pitchFamily="34" charset="0"/>
+              <a:buChar char="•"/>
+            </a:pPr>
+            <a:r>
+              <a:rPr kumimoji="1" lang="en-US" altLang="zh-CN" sz="1400" dirty="0">
+                <a:solidFill>
+                  <a:schemeClr val="tx1"/>
+                </a:solidFill>
+              </a:rPr>
+              <a:t>Potential risk and mitigation exist in implementation</a:t>
+            </a:r>
+          </a:p>
+        </p:txBody>
+      </p:sp>
+      <p:sp>
+        <p:nvSpPr>
+          <p:cNvPr id="10011" name="矩形 92">
+            <a:extLst xmlns:a="http://schemas.openxmlformats.org/drawingml/2006/main">
+              <a:ext uri="{FF2B5EF4-FFF2-40B4-BE49-F238E27FC236}">
+                <a16:creationId xmlns:a16="http://schemas.microsoft.com/office/drawing/2014/main" id="{EFCC0494-57AE-3F1D-B961-E866DE11BFD4}"/>
+              </a:ext>
+            </a:extLst>
+          </p:cNvPr>
+          <p:cNvSpPr/>
+          <p:nvPr/>
+        </p:nvSpPr>
+        <p:spPr>
+          <a:xfrm xmlns:a="http://schemas.openxmlformats.org/drawingml/2006/main">
+            <a:off x="345486" y="2472474"/>
+            <a:ext cx="4093812" cy="1694464"/>
+          </a:xfrm>
+          <a:prstGeom xmlns:a="http://schemas.openxmlformats.org/drawingml/2006/main" prst="rect">
+            <a:avLst/>
+          </a:prstGeom>
+          <a:noFill xmlns:a="http://schemas.openxmlformats.org/drawingml/2006/main"/>
+          <a:ln xmlns:a="http://schemas.openxmlformats.org/drawingml/2006/main">
+            <a:noFill/>
+          </a:ln>
+        </p:spPr>
+        <p:style>
+          <a:lnRef xmlns:a="http://schemas.openxmlformats.org/drawingml/2006/main" idx="2">
+            <a:schemeClr val="accent1">
+              <a:shade val="15000"/>
+            </a:schemeClr>
+          </a:lnRef>
+          <a:fillRef xmlns:a="http://schemas.openxmlformats.org/drawingml/2006/main" idx="1">
+            <a:schemeClr val="accent1"/>
+          </a:fillRef>
+          <a:effectRef xmlns:a="http://schemas.openxmlformats.org/drawingml/2006/main" idx="0">
+            <a:schemeClr val="accent1"/>
+          </a:effectRef>
+          <a:fontRef xmlns:a="http://schemas.openxmlformats.org/drawingml/2006/main" idx="minor">
+            <a:schemeClr val="lt1"/>
+          </a:fontRef>
+        </p:style>
+        <p:txBody>
+          <a:bodyPr xmlns:a="http://schemas.openxmlformats.org/drawingml/2006/main" rtlCol="0" anchor="t"/>
+          <a:lstStyle xmlns:a="http://schemas.openxmlformats.org/drawingml/2006/main"/>
+          <a:p xmlns:a="http://schemas.openxmlformats.org/drawingml/2006/main">
+            <a:pPr>
+              <a:lnSpc>
+                <a:spcPct val="150000"/>
+              </a:lnSpc>
+            </a:pPr>
+            <a:r>
+              <a:rPr kumimoji="1" lang="en-US" altLang="zh-CN" sz="1400" b="1" dirty="0">
+                <a:solidFill>
+                  <a:schemeClr val="tx1"/>
+                </a:solidFill>
+              </a:rPr>
+              <a:t>Long-Term Value Creation</a:t>
+            </a:r>
+          </a:p>
+          <a:p xmlns:a="http://schemas.openxmlformats.org/drawingml/2006/main">
+            <a:pPr marL="285750" indent="-285750">
+              <a:buFont typeface="Arial" panose="020B0604020202020204" pitchFamily="34" charset="0"/>
+              <a:buChar char="•"/>
+            </a:pPr>
+            <a:r>
+              <a:rPr kumimoji="1" lang="en-US" altLang="zh-CN" sz="1400" dirty="0">
+                <a:solidFill>
+                  <a:schemeClr val="tx1"/>
+                </a:solidFill>
+              </a:rPr>
+              <a:t>Close the value gap between high-output and low-revenue markets through full-chain control</a:t>
+            </a:r>
+            <a:endParaRPr kumimoji="1" lang="en-US" altLang="zh-CN" sz="1400" b="1" dirty="0">
+              <a:solidFill>
+                <a:schemeClr val="tx1"/>
+              </a:solidFill>
+            </a:endParaRPr>
+          </a:p>
+          <a:p xmlns:a="http://schemas.openxmlformats.org/drawingml/2006/main">
+            <a:pPr>
+              <a:lnSpc>
+                <a:spcPct val="150000"/>
+              </a:lnSpc>
+            </a:pPr>
+            <a:r>
+              <a:rPr kumimoji="1" lang="en-US" altLang="zh-CN" sz="1400" b="1" dirty="0">
+                <a:solidFill>
+                  <a:schemeClr val="tx1"/>
+                </a:solidFill>
+              </a:rPr>
+              <a:t>Capital Recycling</a:t>
+            </a:r>
+          </a:p>
+          <a:p xmlns:a="http://schemas.openxmlformats.org/drawingml/2006/main">
+            <a:pPr marL="285750" indent="-285750">
+              <a:buFont typeface="Arial" panose="020B0604020202020204" pitchFamily="34" charset="0"/>
+              <a:buChar char="•"/>
+            </a:pPr>
+            <a:r>
+              <a:rPr kumimoji="1" lang="en-US" altLang="zh-CN" sz="1400" dirty="0">
+                <a:solidFill>
+                  <a:schemeClr val="tx1"/>
+                </a:solidFill>
+              </a:rPr>
+              <a:t>Anchor BESS growth in high-capability markets for reliable expansion</a:t>
+            </a:r>
+            <a:endParaRPr kumimoji="1" lang="en-US" altLang="zh-CN" sz="1400" b="1" dirty="0">
+              <a:solidFill>
+                <a:schemeClr val="tx1"/>
+              </a:solidFill>
+            </a:endParaRPr>
+          </a:p>
+        </p:txBody>
+      </p:sp>
+      <p:sp>
+        <p:nvSpPr>
+          <p:cNvPr id="10012" name="圆角矩形 76">
+            <a:extLst xmlns:a="http://schemas.openxmlformats.org/drawingml/2006/main">
+              <a:ext uri="{FF2B5EF4-FFF2-40B4-BE49-F238E27FC236}">
+                <a16:creationId xmlns:a16="http://schemas.microsoft.com/office/drawing/2014/main" id="{BFAE422C-1765-50D1-BEB2-2C81DA15E6BC}"/>
+              </a:ext>
+            </a:extLst>
+          </p:cNvPr>
+          <p:cNvSpPr/>
+          <p:nvPr/>
+        </p:nvSpPr>
+        <p:spPr>
+          <a:xfrm xmlns:a="http://schemas.openxmlformats.org/drawingml/2006/main">
+            <a:off x="345486" y="2161979"/>
+            <a:ext cx="261417" cy="282437"/>
+          </a:xfrm>
+          <a:prstGeom xmlns:a="http://schemas.openxmlformats.org/drawingml/2006/main" prst="roundRect">
+            <a:avLst>
+              <a:gd name="adj" fmla="val 0"/>
+            </a:avLst>
+          </a:prstGeom>
+          <a:solidFill xmlns:a="http://schemas.openxmlformats.org/drawingml/2006/main">
+            <a:schemeClr val="tx2"/>
+          </a:solidFill>
+          <a:ln xmlns:a="http://schemas.openxmlformats.org/drawingml/2006/main" w="6350">
+            <a:noFill/>
+          </a:ln>
+        </p:spPr>
+        <p:style>
+          <a:lnRef xmlns:a="http://schemas.openxmlformats.org/drawingml/2006/main" idx="2">
+            <a:schemeClr val="accent1">
+              <a:shade val="15000"/>
+            </a:schemeClr>
+          </a:lnRef>
+          <a:fillRef xmlns:a="http://schemas.openxmlformats.org/drawingml/2006/main" idx="1">
+            <a:schemeClr val="accent1"/>
+          </a:fillRef>
+          <a:effectRef xmlns:a="http://schemas.openxmlformats.org/drawingml/2006/main" idx="0">
+            <a:schemeClr val="accent1"/>
+          </a:effectRef>
+          <a:fontRef xmlns:a="http://schemas.openxmlformats.org/drawingml/2006/main" idx="minor">
+            <a:schemeClr val="lt1"/>
+          </a:fontRef>
+        </p:style>
+        <p:txBody>
+          <a:bodyPr xmlns:a="http://schemas.openxmlformats.org/drawingml/2006/main" rtlCol="0" anchor="ctr"/>
+          <a:lstStyle xmlns:a="http://schemas.openxmlformats.org/drawingml/2006/main"/>
+          <a:p xmlns:a="http://schemas.openxmlformats.org/drawingml/2006/main">
+            <a:pPr algn="ctr"/>
+            <a:r>
+              <a:rPr kumimoji="1" lang="en-US" altLang="zh-CN" sz="1600" b="1" dirty="0"/>
+              <a:t>1</a:t>
+            </a:r>
+            <a:endParaRPr kumimoji="1" lang="zh-CN" altLang="en-US" sz="1600" b="1" dirty="0"/>
+          </a:p>
+        </p:txBody>
+      </p:sp>
+      <p:sp>
+        <p:nvSpPr>
+          <p:cNvPr id="10013" name="圆角矩形 86">
+            <a:extLst xmlns:a="http://schemas.openxmlformats.org/drawingml/2006/main">
+              <a:ext uri="{FF2B5EF4-FFF2-40B4-BE49-F238E27FC236}">
+                <a16:creationId xmlns:a16="http://schemas.microsoft.com/office/drawing/2014/main" id="{60904E53-D94C-507F-8CAF-55E868BA4139}"/>
+              </a:ext>
+            </a:extLst>
+          </p:cNvPr>
+          <p:cNvSpPr/>
+          <p:nvPr/>
+        </p:nvSpPr>
+        <p:spPr>
+          <a:xfrm xmlns:a="http://schemas.openxmlformats.org/drawingml/2006/main">
+            <a:off x="5139910" y="4473676"/>
+            <a:ext cx="261417" cy="282437"/>
+          </a:xfrm>
+          <a:prstGeom xmlns:a="http://schemas.openxmlformats.org/drawingml/2006/main" prst="roundRect">
+            <a:avLst>
+              <a:gd name="adj" fmla="val 0"/>
+            </a:avLst>
+          </a:prstGeom>
+          <a:solidFill xmlns:a="http://schemas.openxmlformats.org/drawingml/2006/main">
+            <a:schemeClr val="tx2"/>
+          </a:solidFill>
+          <a:ln xmlns:a="http://schemas.openxmlformats.org/drawingml/2006/main" w="6350">
+            <a:noFill/>
+          </a:ln>
+        </p:spPr>
+        <p:style>
+          <a:lnRef xmlns:a="http://schemas.openxmlformats.org/drawingml/2006/main" idx="2">
+            <a:schemeClr val="accent1">
+              <a:shade val="15000"/>
+            </a:schemeClr>
+          </a:lnRef>
+          <a:fillRef xmlns:a="http://schemas.openxmlformats.org/drawingml/2006/main" idx="1">
+            <a:schemeClr val="accent1"/>
+          </a:fillRef>
+          <a:effectRef xmlns:a="http://schemas.openxmlformats.org/drawingml/2006/main" idx="0">
+            <a:schemeClr val="accent1"/>
+          </a:effectRef>
+          <a:fontRef xmlns:a="http://schemas.openxmlformats.org/drawingml/2006/main" idx="minor">
+            <a:schemeClr val="lt1"/>
+          </a:fontRef>
+        </p:style>
+        <p:txBody>
+          <a:bodyPr xmlns:a="http://schemas.openxmlformats.org/drawingml/2006/main" rtlCol="0" anchor="ctr"/>
+          <a:lstStyle xmlns:a="http://schemas.openxmlformats.org/drawingml/2006/main"/>
+          <a:p xmlns:a="http://schemas.openxmlformats.org/drawingml/2006/main">
+            <a:pPr algn="ctr"/>
+            <a:r>
+              <a:rPr kumimoji="1" lang="en-US" altLang="zh-CN" sz="1600" b="1" dirty="0"/>
+              <a:t>3</a:t>
+            </a:r>
+            <a:endParaRPr kumimoji="1" lang="zh-CN" altLang="en-US" sz="1600" b="1" dirty="0"/>
+          </a:p>
+        </p:txBody>
+      </p:sp>
+    </p:spTree>
+  </p:cSld>
+</p:sld>
+</file>
+
 <file path=ppt/theme/theme1.xml><?xml version="1.0" encoding="utf-8"?>
-<a:theme xmlns:a="http://schemas.openxmlformats.org/drawingml/2006/main" name="Office 主题​​">
+<a:theme xmlns:thm15="http://schemas.microsoft.com/office/thememl/2012/main" xmlns:a="http://schemas.openxmlformats.org/drawingml/2006/main" name="Office 主题​​">
   <a:themeElements>
     <a:clrScheme name="自定义 7">
       <a:dk1>

--- a/Drafts/Design Draft.pptx
+++ b/Drafts/Design Draft.pptx
@@ -1,12 +1,18 @@
 
 <file path=ppt/presentation.xml><?xml version="1.0" encoding="utf-8"?>
-<p:presentation xmlns:p15="http://schemas.microsoft.com/office/powerpoint/2012/main" xmlns:a="http://schemas.openxmlformats.org/drawingml/2006/main" xmlns:r="http://schemas.openxmlformats.org/officeDocument/2006/relationships" xmlns:p="http://schemas.openxmlformats.org/presentationml/2006/main" saveSubsetFonts="1" autoCompressPictures="0">
+<p:presentation xmlns:a="http://schemas.openxmlformats.org/drawingml/2006/main" xmlns:r="http://schemas.openxmlformats.org/officeDocument/2006/relationships" xmlns:p="http://schemas.openxmlformats.org/presentationml/2006/main" saveSubsetFonts="1" autoCompressPictures="0">
   <p:sldMasterIdLst>
     <p:sldMasterId id="2147483786" r:id="rId1"/>
   </p:sldMasterIdLst>
+  <p:notesMasterIdLst>
+    <p:notesMasterId r:id="rId7"/>
+  </p:notesMasterIdLst>
   <p:sldIdLst>
     <p:sldId id="256" r:id="rId2"/>
-    <p:sldId id="257" r:id="R0660a2a2297a4cf7"/>
+    <p:sldId id="260" r:id="rId3"/>
+    <p:sldId id="257" r:id="rId4"/>
+    <p:sldId id="258" r:id="rId5"/>
+    <p:sldId id="259" r:id="rId6"/>
   </p:sldIdLst>
   <p:sldSz cx="12192000" cy="6858000"/>
   <p:notesSz cx="6858000" cy="9144000"/>
@@ -113,8 +119,609 @@
 </p:presentation>
 </file>
 
+<file path=ppt/notesMasters/notesMaster1.xml><?xml version="1.0" encoding="utf-8"?>
+<p:notesMaster xmlns:a="http://schemas.openxmlformats.org/drawingml/2006/main" xmlns:r="http://schemas.openxmlformats.org/officeDocument/2006/relationships" xmlns:p="http://schemas.openxmlformats.org/presentationml/2006/main">
+  <p:cSld>
+    <p:bg>
+      <p:bgRef idx="1001">
+        <a:schemeClr val="bg1"/>
+      </p:bgRef>
+    </p:bg>
+    <p:spTree>
+      <p:nvGrpSpPr>
+        <p:cNvPr id="1" name=""/>
+        <p:cNvGrpSpPr/>
+        <p:nvPr/>
+      </p:nvGrpSpPr>
+      <p:grpSpPr>
+        <a:xfrm>
+          <a:off x="0" y="0"/>
+          <a:ext cx="0" cy="0"/>
+          <a:chOff x="0" y="0"/>
+          <a:chExt cx="0" cy="0"/>
+        </a:xfrm>
+      </p:grpSpPr>
+      <p:sp>
+        <p:nvSpPr>
+          <p:cNvPr id="2" name="页眉占位符 1"/>
+          <p:cNvSpPr>
+            <a:spLocks noGrp="1"/>
+          </p:cNvSpPr>
+          <p:nvPr>
+            <p:ph type="hdr" sz="quarter"/>
+          </p:nvPr>
+        </p:nvSpPr>
+        <p:spPr>
+          <a:xfrm>
+            <a:off x="0" y="0"/>
+            <a:ext cx="2971800" cy="458788"/>
+          </a:xfrm>
+          <a:prstGeom prst="rect">
+            <a:avLst/>
+          </a:prstGeom>
+        </p:spPr>
+        <p:txBody>
+          <a:bodyPr vert="horz" lIns="91440" tIns="45720" rIns="91440" bIns="45720" rtlCol="0"/>
+          <a:lstStyle>
+            <a:lvl1pPr algn="l">
+              <a:defRPr sz="1200"/>
+            </a:lvl1pPr>
+          </a:lstStyle>
+          <a:p>
+            <a:endParaRPr kumimoji="1" lang="zh-CN" altLang="en-US"/>
+          </a:p>
+        </p:txBody>
+      </p:sp>
+      <p:sp>
+        <p:nvSpPr>
+          <p:cNvPr id="3" name="日期占位符 2"/>
+          <p:cNvSpPr>
+            <a:spLocks noGrp="1"/>
+          </p:cNvSpPr>
+          <p:nvPr>
+            <p:ph type="dt" idx="1"/>
+          </p:nvPr>
+        </p:nvSpPr>
+        <p:spPr>
+          <a:xfrm>
+            <a:off x="3884613" y="0"/>
+            <a:ext cx="2971800" cy="458788"/>
+          </a:xfrm>
+          <a:prstGeom prst="rect">
+            <a:avLst/>
+          </a:prstGeom>
+        </p:spPr>
+        <p:txBody>
+          <a:bodyPr vert="horz" lIns="91440" tIns="45720" rIns="91440" bIns="45720" rtlCol="0"/>
+          <a:lstStyle>
+            <a:lvl1pPr algn="r">
+              <a:defRPr sz="1200"/>
+            </a:lvl1pPr>
+          </a:lstStyle>
+          <a:p>
+            <a:fld id="{B9146174-E007-4443-AA94-7AEBB96592B4}" type="datetimeFigureOut">
+              <a:rPr kumimoji="1" lang="zh-CN" altLang="en-US" smtClean="0"/>
+              <a:t>2026/4/23</a:t>
+            </a:fld>
+            <a:endParaRPr kumimoji="1" lang="zh-CN" altLang="en-US"/>
+          </a:p>
+        </p:txBody>
+      </p:sp>
+      <p:sp>
+        <p:nvSpPr>
+          <p:cNvPr id="4" name="幻灯片图像占位符 3"/>
+          <p:cNvSpPr>
+            <a:spLocks noGrp="1" noRot="1" noChangeAspect="1"/>
+          </p:cNvSpPr>
+          <p:nvPr>
+            <p:ph type="sldImg" idx="2"/>
+          </p:nvPr>
+        </p:nvSpPr>
+        <p:spPr>
+          <a:xfrm>
+            <a:off x="685800" y="1143000"/>
+            <a:ext cx="5486400" cy="3086100"/>
+          </a:xfrm>
+          <a:prstGeom prst="rect">
+            <a:avLst/>
+          </a:prstGeom>
+          <a:noFill/>
+          <a:ln w="12700">
+            <a:solidFill>
+              <a:prstClr val="black"/>
+            </a:solidFill>
+          </a:ln>
+        </p:spPr>
+        <p:txBody>
+          <a:bodyPr vert="horz" lIns="91440" tIns="45720" rIns="91440" bIns="45720" rtlCol="0" anchor="ctr"/>
+          <a:lstStyle/>
+          <a:p>
+            <a:endParaRPr lang="zh-CN" altLang="en-US"/>
+          </a:p>
+        </p:txBody>
+      </p:sp>
+      <p:sp>
+        <p:nvSpPr>
+          <p:cNvPr id="5" name="备注占位符 4"/>
+          <p:cNvSpPr>
+            <a:spLocks noGrp="1"/>
+          </p:cNvSpPr>
+          <p:nvPr>
+            <p:ph type="body" sz="quarter" idx="3"/>
+          </p:nvPr>
+        </p:nvSpPr>
+        <p:spPr>
+          <a:xfrm>
+            <a:off x="685800" y="4400550"/>
+            <a:ext cx="5486400" cy="3600450"/>
+          </a:xfrm>
+          <a:prstGeom prst="rect">
+            <a:avLst/>
+          </a:prstGeom>
+        </p:spPr>
+        <p:txBody>
+          <a:bodyPr vert="horz" lIns="91440" tIns="45720" rIns="91440" bIns="45720" rtlCol="0"/>
+          <a:lstStyle/>
+          <a:p>
+            <a:pPr lvl="0"/>
+            <a:r>
+              <a:rPr kumimoji="1" lang="zh-CN" altLang="en-US"/>
+              <a:t>单击此处编辑母版文本样式</a:t>
+            </a:r>
+          </a:p>
+          <a:p>
+            <a:pPr lvl="1"/>
+            <a:r>
+              <a:rPr kumimoji="1" lang="zh-CN" altLang="en-US"/>
+              <a:t>二级</a:t>
+            </a:r>
+          </a:p>
+          <a:p>
+            <a:pPr lvl="2"/>
+            <a:r>
+              <a:rPr kumimoji="1" lang="zh-CN" altLang="en-US"/>
+              <a:t>三级</a:t>
+            </a:r>
+          </a:p>
+          <a:p>
+            <a:pPr lvl="3"/>
+            <a:r>
+              <a:rPr kumimoji="1" lang="zh-CN" altLang="en-US"/>
+              <a:t>四级</a:t>
+            </a:r>
+          </a:p>
+          <a:p>
+            <a:pPr lvl="4"/>
+            <a:r>
+              <a:rPr kumimoji="1" lang="zh-CN" altLang="en-US"/>
+              <a:t>五级</a:t>
+            </a:r>
+          </a:p>
+        </p:txBody>
+      </p:sp>
+      <p:sp>
+        <p:nvSpPr>
+          <p:cNvPr id="6" name="页脚占位符 5"/>
+          <p:cNvSpPr>
+            <a:spLocks noGrp="1"/>
+          </p:cNvSpPr>
+          <p:nvPr>
+            <p:ph type="ftr" sz="quarter" idx="4"/>
+          </p:nvPr>
+        </p:nvSpPr>
+        <p:spPr>
+          <a:xfrm>
+            <a:off x="0" y="8685213"/>
+            <a:ext cx="2971800" cy="458787"/>
+          </a:xfrm>
+          <a:prstGeom prst="rect">
+            <a:avLst/>
+          </a:prstGeom>
+        </p:spPr>
+        <p:txBody>
+          <a:bodyPr vert="horz" lIns="91440" tIns="45720" rIns="91440" bIns="45720" rtlCol="0" anchor="b"/>
+          <a:lstStyle>
+            <a:lvl1pPr algn="l">
+              <a:defRPr sz="1200"/>
+            </a:lvl1pPr>
+          </a:lstStyle>
+          <a:p>
+            <a:endParaRPr kumimoji="1" lang="zh-CN" altLang="en-US"/>
+          </a:p>
+        </p:txBody>
+      </p:sp>
+      <p:sp>
+        <p:nvSpPr>
+          <p:cNvPr id="7" name="灯片编号占位符 6"/>
+          <p:cNvSpPr>
+            <a:spLocks noGrp="1"/>
+          </p:cNvSpPr>
+          <p:nvPr>
+            <p:ph type="sldNum" sz="quarter" idx="5"/>
+          </p:nvPr>
+        </p:nvSpPr>
+        <p:spPr>
+          <a:xfrm>
+            <a:off x="3884613" y="8685213"/>
+            <a:ext cx="2971800" cy="458787"/>
+          </a:xfrm>
+          <a:prstGeom prst="rect">
+            <a:avLst/>
+          </a:prstGeom>
+        </p:spPr>
+        <p:txBody>
+          <a:bodyPr vert="horz" lIns="91440" tIns="45720" rIns="91440" bIns="45720" rtlCol="0" anchor="b"/>
+          <a:lstStyle>
+            <a:lvl1pPr algn="r">
+              <a:defRPr sz="1200"/>
+            </a:lvl1pPr>
+          </a:lstStyle>
+          <a:p>
+            <a:fld id="{9947C5D3-9599-C14E-9FB9-F6E331DD554C}" type="slidenum">
+              <a:rPr kumimoji="1" lang="zh-CN" altLang="en-US" smtClean="0"/>
+              <a:t>‹#›</a:t>
+            </a:fld>
+            <a:endParaRPr kumimoji="1" lang="zh-CN" altLang="en-US"/>
+          </a:p>
+        </p:txBody>
+      </p:sp>
+    </p:spTree>
+    <p:extLst>
+      <p:ext uri="{BB962C8B-B14F-4D97-AF65-F5344CB8AC3E}">
+        <p14:creationId xmlns:p14="http://schemas.microsoft.com/office/powerpoint/2010/main" val="2731843034"/>
+      </p:ext>
+    </p:extLst>
+  </p:cSld>
+  <p:clrMap bg1="lt1" tx1="dk1" bg2="lt2" tx2="dk2" accent1="accent1" accent2="accent2" accent3="accent3" accent4="accent4" accent5="accent5" accent6="accent6" hlink="hlink" folHlink="folHlink"/>
+  <p:notesStyle>
+    <a:lvl1pPr marL="0" algn="l" defTabSz="914400" rtl="0" eaLnBrk="1" latinLnBrk="0" hangingPunct="1">
+      <a:defRPr sz="1200" kern="1200">
+        <a:solidFill>
+          <a:schemeClr val="tx1"/>
+        </a:solidFill>
+        <a:latin typeface="+mn-lt"/>
+        <a:ea typeface="+mn-ea"/>
+        <a:cs typeface="+mn-cs"/>
+      </a:defRPr>
+    </a:lvl1pPr>
+    <a:lvl2pPr marL="457200" algn="l" defTabSz="914400" rtl="0" eaLnBrk="1" latinLnBrk="0" hangingPunct="1">
+      <a:defRPr sz="1200" kern="1200">
+        <a:solidFill>
+          <a:schemeClr val="tx1"/>
+        </a:solidFill>
+        <a:latin typeface="+mn-lt"/>
+        <a:ea typeface="+mn-ea"/>
+        <a:cs typeface="+mn-cs"/>
+      </a:defRPr>
+    </a:lvl2pPr>
+    <a:lvl3pPr marL="914400" algn="l" defTabSz="914400" rtl="0" eaLnBrk="1" latinLnBrk="0" hangingPunct="1">
+      <a:defRPr sz="1200" kern="1200">
+        <a:solidFill>
+          <a:schemeClr val="tx1"/>
+        </a:solidFill>
+        <a:latin typeface="+mn-lt"/>
+        <a:ea typeface="+mn-ea"/>
+        <a:cs typeface="+mn-cs"/>
+      </a:defRPr>
+    </a:lvl3pPr>
+    <a:lvl4pPr marL="1371600" algn="l" defTabSz="914400" rtl="0" eaLnBrk="1" latinLnBrk="0" hangingPunct="1">
+      <a:defRPr sz="1200" kern="1200">
+        <a:solidFill>
+          <a:schemeClr val="tx1"/>
+        </a:solidFill>
+        <a:latin typeface="+mn-lt"/>
+        <a:ea typeface="+mn-ea"/>
+        <a:cs typeface="+mn-cs"/>
+      </a:defRPr>
+    </a:lvl4pPr>
+    <a:lvl5pPr marL="1828800" algn="l" defTabSz="914400" rtl="0" eaLnBrk="1" latinLnBrk="0" hangingPunct="1">
+      <a:defRPr sz="1200" kern="1200">
+        <a:solidFill>
+          <a:schemeClr val="tx1"/>
+        </a:solidFill>
+        <a:latin typeface="+mn-lt"/>
+        <a:ea typeface="+mn-ea"/>
+        <a:cs typeface="+mn-cs"/>
+      </a:defRPr>
+    </a:lvl5pPr>
+    <a:lvl6pPr marL="2286000" algn="l" defTabSz="914400" rtl="0" eaLnBrk="1" latinLnBrk="0" hangingPunct="1">
+      <a:defRPr sz="1200" kern="1200">
+        <a:solidFill>
+          <a:schemeClr val="tx1"/>
+        </a:solidFill>
+        <a:latin typeface="+mn-lt"/>
+        <a:ea typeface="+mn-ea"/>
+        <a:cs typeface="+mn-cs"/>
+      </a:defRPr>
+    </a:lvl6pPr>
+    <a:lvl7pPr marL="2743200" algn="l" defTabSz="914400" rtl="0" eaLnBrk="1" latinLnBrk="0" hangingPunct="1">
+      <a:defRPr sz="1200" kern="1200">
+        <a:solidFill>
+          <a:schemeClr val="tx1"/>
+        </a:solidFill>
+        <a:latin typeface="+mn-lt"/>
+        <a:ea typeface="+mn-ea"/>
+        <a:cs typeface="+mn-cs"/>
+      </a:defRPr>
+    </a:lvl7pPr>
+    <a:lvl8pPr marL="3200400" algn="l" defTabSz="914400" rtl="0" eaLnBrk="1" latinLnBrk="0" hangingPunct="1">
+      <a:defRPr sz="1200" kern="1200">
+        <a:solidFill>
+          <a:schemeClr val="tx1"/>
+        </a:solidFill>
+        <a:latin typeface="+mn-lt"/>
+        <a:ea typeface="+mn-ea"/>
+        <a:cs typeface="+mn-cs"/>
+      </a:defRPr>
+    </a:lvl8pPr>
+    <a:lvl9pPr marL="3657600" algn="l" defTabSz="914400" rtl="0" eaLnBrk="1" latinLnBrk="0" hangingPunct="1">
+      <a:defRPr sz="1200" kern="1200">
+        <a:solidFill>
+          <a:schemeClr val="tx1"/>
+        </a:solidFill>
+        <a:latin typeface="+mn-lt"/>
+        <a:ea typeface="+mn-ea"/>
+        <a:cs typeface="+mn-cs"/>
+      </a:defRPr>
+    </a:lvl9pPr>
+  </p:notesStyle>
+</p:notesMaster>
+</file>
+
+<file path=ppt/notesSlides/notesSlide1.xml><?xml version="1.0" encoding="utf-8"?>
+<p:notes xmlns:a="http://schemas.openxmlformats.org/drawingml/2006/main" xmlns:r="http://schemas.openxmlformats.org/officeDocument/2006/relationships" xmlns:p="http://schemas.openxmlformats.org/presentationml/2006/main">
+  <p:cSld>
+    <p:spTree>
+      <p:nvGrpSpPr>
+        <p:cNvPr id="1" name=""/>
+        <p:cNvGrpSpPr/>
+        <p:nvPr/>
+      </p:nvGrpSpPr>
+      <p:grpSpPr>
+        <a:xfrm>
+          <a:off x="0" y="0"/>
+          <a:ext cx="0" cy="0"/>
+          <a:chOff x="0" y="0"/>
+          <a:chExt cx="0" cy="0"/>
+        </a:xfrm>
+      </p:grpSpPr>
+      <p:sp>
+        <p:nvSpPr>
+          <p:cNvPr id="2" name="幻灯片图像占位符 1"/>
+          <p:cNvSpPr>
+            <a:spLocks noGrp="1" noRot="1" noChangeAspect="1"/>
+          </p:cNvSpPr>
+          <p:nvPr>
+            <p:ph type="sldImg"/>
+          </p:nvPr>
+        </p:nvSpPr>
+        <p:spPr/>
+      </p:sp>
+      <p:sp>
+        <p:nvSpPr>
+          <p:cNvPr id="3" name="备注占位符 2"/>
+          <p:cNvSpPr>
+            <a:spLocks noGrp="1"/>
+          </p:cNvSpPr>
+          <p:nvPr>
+            <p:ph type="body" idx="1"/>
+          </p:nvPr>
+        </p:nvSpPr>
+        <p:spPr/>
+        <p:txBody>
+          <a:bodyPr/>
+          <a:lstStyle/>
+          <a:p>
+            <a:endParaRPr kumimoji="1" lang="zh-CN" altLang="en-US" dirty="0"/>
+          </a:p>
+        </p:txBody>
+      </p:sp>
+      <p:sp>
+        <p:nvSpPr>
+          <p:cNvPr id="4" name="灯片编号占位符 3"/>
+          <p:cNvSpPr>
+            <a:spLocks noGrp="1"/>
+          </p:cNvSpPr>
+          <p:nvPr>
+            <p:ph type="sldNum" sz="quarter" idx="5"/>
+          </p:nvPr>
+        </p:nvSpPr>
+        <p:spPr/>
+        <p:txBody>
+          <a:bodyPr/>
+          <a:lstStyle/>
+          <a:p>
+            <a:fld id="{9947C5D3-9599-C14E-9FB9-F6E331DD554C}" type="slidenum">
+              <a:rPr kumimoji="1" lang="zh-CN" altLang="en-US" smtClean="0"/>
+              <a:t>2</a:t>
+            </a:fld>
+            <a:endParaRPr kumimoji="1" lang="zh-CN" altLang="en-US"/>
+          </a:p>
+        </p:txBody>
+      </p:sp>
+    </p:spTree>
+    <p:extLst>
+      <p:ext uri="{BB962C8B-B14F-4D97-AF65-F5344CB8AC3E}">
+        <p14:creationId xmlns:p14="http://schemas.microsoft.com/office/powerpoint/2010/main" val="1899977794"/>
+      </p:ext>
+    </p:extLst>
+  </p:cSld>
+  <p:clrMapOvr>
+    <a:masterClrMapping/>
+  </p:clrMapOvr>
+</p:notes>
+</file>
+
+<file path=ppt/notesSlides/notesSlide2.xml><?xml version="1.0" encoding="utf-8"?>
+<p:notes xmlns:a="http://schemas.openxmlformats.org/drawingml/2006/main" xmlns:r="http://schemas.openxmlformats.org/officeDocument/2006/relationships" xmlns:p="http://schemas.openxmlformats.org/presentationml/2006/main">
+  <p:cSld>
+    <p:spTree>
+      <p:nvGrpSpPr>
+        <p:cNvPr id="1" name=""/>
+        <p:cNvGrpSpPr/>
+        <p:nvPr/>
+      </p:nvGrpSpPr>
+      <p:grpSpPr>
+        <a:xfrm>
+          <a:off x="0" y="0"/>
+          <a:ext cx="0" cy="0"/>
+          <a:chOff x="0" y="0"/>
+          <a:chExt cx="0" cy="0"/>
+        </a:xfrm>
+      </p:grpSpPr>
+      <p:sp>
+        <p:nvSpPr>
+          <p:cNvPr id="2" name="幻灯片图像占位符 1"/>
+          <p:cNvSpPr>
+            <a:spLocks noGrp="1" noRot="1" noChangeAspect="1"/>
+          </p:cNvSpPr>
+          <p:nvPr>
+            <p:ph type="sldImg"/>
+          </p:nvPr>
+        </p:nvSpPr>
+        <p:spPr/>
+      </p:sp>
+      <p:sp>
+        <p:nvSpPr>
+          <p:cNvPr id="3" name="备注占位符 2"/>
+          <p:cNvSpPr>
+            <a:spLocks noGrp="1"/>
+          </p:cNvSpPr>
+          <p:nvPr>
+            <p:ph type="body" idx="1"/>
+          </p:nvPr>
+        </p:nvSpPr>
+        <p:spPr/>
+        <p:txBody>
+          <a:bodyPr/>
+          <a:lstStyle/>
+          <a:p>
+            <a:endParaRPr kumimoji="1" lang="zh-CN" altLang="en-US" dirty="0"/>
+          </a:p>
+        </p:txBody>
+      </p:sp>
+      <p:sp>
+        <p:nvSpPr>
+          <p:cNvPr id="4" name="灯片编号占位符 3"/>
+          <p:cNvSpPr>
+            <a:spLocks noGrp="1"/>
+          </p:cNvSpPr>
+          <p:nvPr>
+            <p:ph type="sldNum" sz="quarter" idx="5"/>
+          </p:nvPr>
+        </p:nvSpPr>
+        <p:spPr/>
+        <p:txBody>
+          <a:bodyPr/>
+          <a:lstStyle/>
+          <a:p>
+            <a:fld id="{9947C5D3-9599-C14E-9FB9-F6E331DD554C}" type="slidenum">
+              <a:rPr kumimoji="1" lang="zh-CN" altLang="en-US" smtClean="0"/>
+              <a:t>3</a:t>
+            </a:fld>
+            <a:endParaRPr kumimoji="1" lang="zh-CN" altLang="en-US"/>
+          </a:p>
+        </p:txBody>
+      </p:sp>
+    </p:spTree>
+    <p:extLst>
+      <p:ext uri="{BB962C8B-B14F-4D97-AF65-F5344CB8AC3E}">
+        <p14:creationId xmlns:p14="http://schemas.microsoft.com/office/powerpoint/2010/main" val="475501989"/>
+      </p:ext>
+    </p:extLst>
+  </p:cSld>
+  <p:clrMapOvr>
+    <a:masterClrMapping/>
+  </p:clrMapOvr>
+</p:notes>
+</file>
+
+<file path=ppt/notesSlides/notesSlide3.xml><?xml version="1.0" encoding="utf-8"?>
+<p:notes xmlns:a="http://schemas.openxmlformats.org/drawingml/2006/main" xmlns:r="http://schemas.openxmlformats.org/officeDocument/2006/relationships" xmlns:p="http://schemas.openxmlformats.org/presentationml/2006/main">
+  <p:cSld>
+    <p:spTree>
+      <p:nvGrpSpPr>
+        <p:cNvPr id="1" name=""/>
+        <p:cNvGrpSpPr/>
+        <p:nvPr/>
+      </p:nvGrpSpPr>
+      <p:grpSpPr>
+        <a:xfrm>
+          <a:off x="0" y="0"/>
+          <a:ext cx="0" cy="0"/>
+          <a:chOff x="0" y="0"/>
+          <a:chExt cx="0" cy="0"/>
+        </a:xfrm>
+      </p:grpSpPr>
+      <p:sp>
+        <p:nvSpPr>
+          <p:cNvPr id="2" name="幻灯片图像占位符 1"/>
+          <p:cNvSpPr>
+            <a:spLocks noGrp="1" noRot="1" noChangeAspect="1"/>
+          </p:cNvSpPr>
+          <p:nvPr>
+            <p:ph type="sldImg"/>
+          </p:nvPr>
+        </p:nvSpPr>
+        <p:spPr/>
+      </p:sp>
+      <p:sp>
+        <p:nvSpPr>
+          <p:cNvPr id="3" name="备注占位符 2"/>
+          <p:cNvSpPr>
+            <a:spLocks noGrp="1"/>
+          </p:cNvSpPr>
+          <p:nvPr>
+            <p:ph type="body" idx="1"/>
+          </p:nvPr>
+        </p:nvSpPr>
+        <p:spPr/>
+        <p:txBody>
+          <a:bodyPr/>
+          <a:lstStyle/>
+          <a:p>
+            <a:endParaRPr kumimoji="1" lang="zh-CN" altLang="en-US" dirty="0"/>
+          </a:p>
+        </p:txBody>
+      </p:sp>
+      <p:sp>
+        <p:nvSpPr>
+          <p:cNvPr id="4" name="灯片编号占位符 3"/>
+          <p:cNvSpPr>
+            <a:spLocks noGrp="1"/>
+          </p:cNvSpPr>
+          <p:nvPr>
+            <p:ph type="sldNum" sz="quarter" idx="5"/>
+          </p:nvPr>
+        </p:nvSpPr>
+        <p:spPr/>
+        <p:txBody>
+          <a:bodyPr/>
+          <a:lstStyle/>
+          <a:p>
+            <a:fld id="{9947C5D3-9599-C14E-9FB9-F6E331DD554C}" type="slidenum">
+              <a:rPr kumimoji="1" lang="zh-CN" altLang="en-US" smtClean="0"/>
+              <a:t>4</a:t>
+            </a:fld>
+            <a:endParaRPr kumimoji="1" lang="zh-CN" altLang="en-US"/>
+          </a:p>
+        </p:txBody>
+      </p:sp>
+    </p:spTree>
+    <p:extLst>
+      <p:ext uri="{BB962C8B-B14F-4D97-AF65-F5344CB8AC3E}">
+        <p14:creationId xmlns:p14="http://schemas.microsoft.com/office/powerpoint/2010/main" val="3223048310"/>
+      </p:ext>
+    </p:extLst>
+  </p:cSld>
+  <p:clrMapOvr>
+    <a:masterClrMapping/>
+  </p:clrMapOvr>
+</p:notes>
+</file>
+
 <file path=ppt/slideLayouts/slideLayout1.xml><?xml version="1.0" encoding="utf-8"?>
-<p:sldLayout xmlns:p14="http://schemas.microsoft.com/office/powerpoint/2010/main" xmlns:a="http://schemas.openxmlformats.org/drawingml/2006/main" xmlns:r="http://schemas.openxmlformats.org/officeDocument/2006/relationships" xmlns:p="http://schemas.openxmlformats.org/presentationml/2006/main" type="title" preserve="1">
+<p:sldLayout xmlns:a="http://schemas.openxmlformats.org/drawingml/2006/main" xmlns:r="http://schemas.openxmlformats.org/officeDocument/2006/relationships" xmlns:p="http://schemas.openxmlformats.org/presentationml/2006/main" type="title" preserve="1">
   <p:cSld name="标题幻灯片">
     <p:spTree>
       <p:nvGrpSpPr>
@@ -1947,7 +2554,7 @@
 </file>
 
 <file path=ppt/slideLayouts/slideLayout8.xml><?xml version="1.0" encoding="utf-8"?>
-<p:sldLayout xmlns:p14="http://schemas.microsoft.com/office/powerpoint/2010/main" xmlns:a="http://schemas.openxmlformats.org/drawingml/2006/main" xmlns:r="http://schemas.openxmlformats.org/officeDocument/2006/relationships" xmlns:p="http://schemas.openxmlformats.org/presentationml/2006/main" type="objTx" preserve="1">
+<p:sldLayout xmlns:a="http://schemas.openxmlformats.org/drawingml/2006/main" xmlns:r="http://schemas.openxmlformats.org/officeDocument/2006/relationships" xmlns:p="http://schemas.openxmlformats.org/presentationml/2006/main" type="objTx" preserve="1">
   <p:cSld name="内容与标题">
     <p:spTree>
       <p:nvGrpSpPr>
@@ -2495,7 +3102,7 @@
 </file>
 
 <file path=ppt/slideMasters/slideMaster1.xml><?xml version="1.0" encoding="utf-8"?>
-<p:sldMaster xmlns:p14="http://schemas.microsoft.com/office/powerpoint/2010/main" xmlns:a="http://schemas.openxmlformats.org/drawingml/2006/main" xmlns:r="http://schemas.openxmlformats.org/officeDocument/2006/relationships" xmlns:p="http://schemas.openxmlformats.org/presentationml/2006/main">
+<p:sldMaster xmlns:a="http://schemas.openxmlformats.org/drawingml/2006/main" xmlns:r="http://schemas.openxmlformats.org/officeDocument/2006/relationships" xmlns:p="http://schemas.openxmlformats.org/presentationml/2006/main">
   <p:cSld>
     <p:bg>
       <p:bgRef idx="1001">
@@ -3042,7 +3649,7 @@
 </file>
 
 <file path=ppt/slides/slide1.xml><?xml version="1.0" encoding="utf-8"?>
-<p:sld xmlns:a16="http://schemas.microsoft.com/office/drawing/2014/main" xmlns:asvg="http://schemas.microsoft.com/office/drawing/2016/SVG/main" xmlns:p14="http://schemas.microsoft.com/office/powerpoint/2010/main" xmlns:a="http://schemas.openxmlformats.org/drawingml/2006/main" xmlns:r="http://schemas.openxmlformats.org/officeDocument/2006/relationships" xmlns:p="http://schemas.openxmlformats.org/presentationml/2006/main">
+<p:sld xmlns:a="http://schemas.openxmlformats.org/drawingml/2006/main" xmlns:r="http://schemas.openxmlformats.org/officeDocument/2006/relationships" xmlns:p="http://schemas.openxmlformats.org/presentationml/2006/main">
   <p:cSld>
     <p:bg>
       <p:bgPr>
@@ -3175,8 +3782,8 @@
         </p:nvSpPr>
         <p:spPr>
           <a:xfrm>
-            <a:off x="244988" y="92571"/>
-            <a:ext cx="10063933" cy="707886"/>
+            <a:off x="244988" y="66891"/>
+            <a:ext cx="11601521" cy="759247"/>
           </a:xfrm>
           <a:prstGeom prst="rect">
             <a:avLst/>
@@ -3189,13 +3796,18 @@
           </a:bodyPr>
           <a:lstStyle/>
           <a:p>
-            <a:r>
-              <a:rPr kumimoji="1" lang="en-US" altLang="zh-CN" sz="2000" b="1" dirty="0">
-                <a:latin typeface="Aptos" panose="020B0004020202020204" pitchFamily="34" charset="0"/>
+            <a:pPr>
+              <a:lnSpc>
+                <a:spcPct val="90000"/>
+              </a:lnSpc>
+            </a:pPr>
+            <a:r>
+              <a:rPr kumimoji="1" lang="en-US" altLang="zh-CN" sz="2400" b="1" dirty="0">
+                <a:latin typeface="Aptos Narrow" panose="020B0004020202020204" pitchFamily="34" charset="0"/>
                 <a:ea typeface="Palatino" pitchFamily="2" charset="0"/>
                 <a:cs typeface="Mongolian Baiti" panose="03000500000000000000" pitchFamily="66" charset="0"/>
               </a:rPr>
-              <a:t>Executive Summary: Drive Fruit Co. growth through store expansion, supply chain optimization, product diversification, and improved purchasing experience</a:t>
+              <a:t>Summary: Drive Fruit Co. growth through store expansion, supply chain optimization, product diversification, and improved purchasing experience (Aptos Narrow, Bold, 20pt)</a:t>
             </a:r>
           </a:p>
         </p:txBody>
@@ -3320,8 +3932,21 @@
                   <a:schemeClr val="tx1"/>
                 </a:solidFill>
               </a:rPr>
-              <a:t>Mixed-Integer Linear Programming.</a:t>
-            </a:r>
+              <a:t>Mixed-Integer Linear Programming. </a:t>
+            </a:r>
+            <a:r>
+              <a:rPr kumimoji="1" lang="en-US" altLang="zh-CN" sz="1400" dirty="0">
+                <a:solidFill>
+                  <a:schemeClr val="tx1"/>
+                </a:solidFill>
+              </a:rPr>
+              <a:t>(Aptos, Regular, 14pt)</a:t>
+            </a:r>
+            <a:endParaRPr kumimoji="1" lang="en-US" altLang="zh-CN" sz="1400" b="1" dirty="0">
+              <a:solidFill>
+                <a:schemeClr val="tx1"/>
+              </a:solidFill>
+            </a:endParaRPr>
           </a:p>
         </p:txBody>
       </p:sp>
@@ -3339,7 +3964,7 @@
         </p:nvCxnSpPr>
         <p:spPr>
           <a:xfrm flipV="1">
-            <a:off x="6153443" y="2759531"/>
+            <a:off x="6714917" y="3579095"/>
             <a:ext cx="0" cy="265626"/>
           </a:xfrm>
           <a:prstGeom prst="line">
@@ -3382,7 +4007,7 @@
         </p:nvCxnSpPr>
         <p:spPr>
           <a:xfrm>
-            <a:off x="6153443" y="2759531"/>
+            <a:off x="6714917" y="3579095"/>
             <a:ext cx="1140643" cy="0"/>
           </a:xfrm>
           <a:prstGeom prst="line">
@@ -3425,7 +4050,7 @@
         </p:nvSpPr>
         <p:spPr>
           <a:xfrm>
-            <a:off x="7398837" y="2587180"/>
+            <a:off x="7960311" y="3406744"/>
             <a:ext cx="2451011" cy="338554"/>
           </a:xfrm>
           <a:prstGeom prst="rect">
@@ -3445,7 +4070,7 @@
                   <a:schemeClr val="tx2"/>
                 </a:solidFill>
               </a:rPr>
-              <a:t>Lithuania – €37.1M Y1 </a:t>
+              <a:t>Lithuania – €37.1Mn Y1 </a:t>
             </a:r>
             <a:endParaRPr lang="zh-CN" altLang="en-US" sz="1600" dirty="0">
               <a:solidFill>
@@ -3469,7 +4094,7 @@
         </p:nvSpPr>
         <p:spPr>
           <a:xfrm>
-            <a:off x="7398837" y="2887389"/>
+            <a:off x="7960311" y="3706953"/>
             <a:ext cx="3886198" cy="738664"/>
           </a:xfrm>
           <a:prstGeom prst="rect">
@@ -3714,7 +4339,7 @@
         <p:spPr>
           <a:xfrm>
             <a:off x="297118" y="6510854"/>
-            <a:ext cx="2856038" cy="276999"/>
+            <a:ext cx="6835202" cy="276999"/>
           </a:xfrm>
           <a:prstGeom prst="rect">
             <a:avLst/>
@@ -3722,7 +4347,7 @@
           <a:noFill/>
         </p:spPr>
         <p:txBody>
-          <a:bodyPr wrap="none" rtlCol="0" anchor="b">
+          <a:bodyPr wrap="square" rtlCol="0" anchor="b">
             <a:spAutoFit/>
           </a:bodyPr>
           <a:lstStyle/>
@@ -3736,7 +4361,7 @@
                   </a:schemeClr>
                 </a:solidFill>
               </a:rPr>
-              <a:t>Source: expert interviews, literature review, analysis</a:t>
+              <a:t>Source: expert interviews, literature review, analysis (Aptos, Regular, 12pt)</a:t>
             </a:r>
             <a:endParaRPr kumimoji="1" lang="zh-CN" altLang="en-US" sz="1400" dirty="0">
               <a:solidFill>
@@ -3807,7 +4432,7 @@
                   <a:schemeClr val="tx2"/>
                 </a:solidFill>
               </a:rPr>
-              <a:t>Key Priorities</a:t>
+              <a:t>Key Priorities (Aptos, Bold, 16pt)</a:t>
             </a:r>
             <a:endParaRPr kumimoji="1" lang="zh-CN" altLang="en-US" sz="1600" b="1" dirty="0">
               <a:solidFill>
@@ -4307,6 +4932,810 @@
           </a:p>
         </p:txBody>
       </p:sp>
+      <p:graphicFrame>
+        <p:nvGraphicFramePr>
+          <p:cNvPr id="2" name="表格 1">
+            <a:extLst>
+              <a:ext uri="{FF2B5EF4-FFF2-40B4-BE49-F238E27FC236}">
+                <a16:creationId xmlns:a16="http://schemas.microsoft.com/office/drawing/2014/main" id="{CD87E5DB-4BA9-9EE5-E538-E0378538C10F}"/>
+              </a:ext>
+            </a:extLst>
+          </p:cNvPr>
+          <p:cNvGraphicFramePr>
+            <a:graphicFrameLocks noGrp="1"/>
+          </p:cNvGraphicFramePr>
+          <p:nvPr>
+            <p:extLst>
+              <p:ext uri="{D42A27DB-BD31-4B8C-83A1-F6EECF244321}">
+                <p14:modId xmlns:p14="http://schemas.microsoft.com/office/powerpoint/2010/main" val="354468625"/>
+              </p:ext>
+            </p:extLst>
+          </p:nvPr>
+        </p:nvGraphicFramePr>
+        <p:xfrm>
+          <a:off x="5137949" y="2133920"/>
+          <a:ext cx="6708560" cy="1171624"/>
+        </p:xfrm>
+        <a:graphic>
+          <a:graphicData uri="http://schemas.openxmlformats.org/drawingml/2006/table">
+            <a:tbl>
+              <a:tblPr firstRow="1" bandRow="1">
+                <a:effectLst>
+                  <a:outerShdw blurRad="50800" dist="38100" dir="2700000" algn="tl" rotWithShape="0">
+                    <a:prstClr val="black">
+                      <a:alpha val="10000"/>
+                    </a:prstClr>
+                  </a:outerShdw>
+                </a:effectLst>
+                <a:tableStyleId>{5C22544A-7EE6-4342-B048-85BDC9FD1C3A}</a:tableStyleId>
+              </a:tblPr>
+              <a:tblGrid>
+                <a:gridCol w="1677140">
+                  <a:extLst>
+                    <a:ext uri="{9D8B030D-6E8A-4147-A177-3AD203B41FA5}">
+                      <a16:colId xmlns:a16="http://schemas.microsoft.com/office/drawing/2014/main" val="4112203043"/>
+                    </a:ext>
+                  </a:extLst>
+                </a:gridCol>
+                <a:gridCol w="1677140">
+                  <a:extLst>
+                    <a:ext uri="{9D8B030D-6E8A-4147-A177-3AD203B41FA5}">
+                      <a16:colId xmlns:a16="http://schemas.microsoft.com/office/drawing/2014/main" val="31620956"/>
+                    </a:ext>
+                  </a:extLst>
+                </a:gridCol>
+                <a:gridCol w="1677140">
+                  <a:extLst>
+                    <a:ext uri="{9D8B030D-6E8A-4147-A177-3AD203B41FA5}">
+                      <a16:colId xmlns:a16="http://schemas.microsoft.com/office/drawing/2014/main" val="1434327199"/>
+                    </a:ext>
+                  </a:extLst>
+                </a:gridCol>
+                <a:gridCol w="1677140">
+                  <a:extLst>
+                    <a:ext uri="{9D8B030D-6E8A-4147-A177-3AD203B41FA5}">
+                      <a16:colId xmlns:a16="http://schemas.microsoft.com/office/drawing/2014/main" val="1262303234"/>
+                    </a:ext>
+                  </a:extLst>
+                </a:gridCol>
+              </a:tblGrid>
+              <a:tr h="325501">
+                <a:tc>
+                  <a:txBody>
+                    <a:bodyPr/>
+                    <a:lstStyle/>
+                    <a:p>
+                      <a:pPr algn="ctr"/>
+                      <a:r>
+                        <a:rPr lang="en-US" altLang="zh-CN" sz="1600" dirty="0">
+                          <a:solidFill>
+                            <a:schemeClr val="tx2"/>
+                          </a:solidFill>
+                        </a:rPr>
+                        <a:t>Year</a:t>
+                      </a:r>
+                      <a:endParaRPr lang="zh-CN" altLang="en-US" sz="1600" dirty="0">
+                        <a:solidFill>
+                          <a:schemeClr val="tx2"/>
+                        </a:solidFill>
+                      </a:endParaRPr>
+                    </a:p>
+                  </a:txBody>
+                  <a:tcPr anchor="ctr">
+                    <a:lnL w="76200" cap="flat" cmpd="sng" algn="ctr">
+                      <a:noFill/>
+                      <a:prstDash val="solid"/>
+                      <a:round/>
+                      <a:headEnd type="none" w="med" len="med"/>
+                      <a:tailEnd type="none" w="med" len="med"/>
+                    </a:lnL>
+                    <a:lnR w="76200" cap="flat" cmpd="sng" algn="ctr">
+                      <a:solidFill>
+                        <a:schemeClr val="bg1"/>
+                      </a:solidFill>
+                      <a:prstDash val="solid"/>
+                      <a:round/>
+                      <a:headEnd type="none" w="med" len="med"/>
+                      <a:tailEnd type="none" w="med" len="med"/>
+                    </a:lnR>
+                    <a:lnT w="76200" cap="flat" cmpd="sng" algn="ctr">
+                      <a:noFill/>
+                      <a:prstDash val="solid"/>
+                      <a:round/>
+                      <a:headEnd type="none" w="med" len="med"/>
+                      <a:tailEnd type="none" w="med" len="med"/>
+                    </a:lnT>
+                    <a:lnB w="76200" cap="flat" cmpd="sng" algn="ctr">
+                      <a:noFill/>
+                      <a:prstDash val="solid"/>
+                      <a:round/>
+                      <a:headEnd type="none" w="med" len="med"/>
+                      <a:tailEnd type="none" w="med" len="med"/>
+                    </a:lnB>
+                    <a:lnTlToBr w="12700" cmpd="sng">
+                      <a:noFill/>
+                      <a:prstDash val="solid"/>
+                    </a:lnTlToBr>
+                    <a:lnBlToTr w="12700" cmpd="sng">
+                      <a:noFill/>
+                      <a:prstDash val="solid"/>
+                    </a:lnBlToTr>
+                    <a:solidFill>
+                      <a:schemeClr val="bg2"/>
+                    </a:solidFill>
+                  </a:tcPr>
+                </a:tc>
+                <a:tc>
+                  <a:txBody>
+                    <a:bodyPr/>
+                    <a:lstStyle/>
+                    <a:p>
+                      <a:pPr algn="ctr"/>
+                      <a:r>
+                        <a:rPr lang="en-US" altLang="zh-CN" sz="1600" dirty="0">
+                          <a:solidFill>
+                            <a:schemeClr val="tx2"/>
+                          </a:solidFill>
+                        </a:rPr>
+                        <a:t>Mkt Size</a:t>
+                      </a:r>
+                      <a:endParaRPr lang="zh-CN" altLang="en-US" sz="1600" dirty="0">
+                        <a:solidFill>
+                          <a:schemeClr val="tx2"/>
+                        </a:solidFill>
+                      </a:endParaRPr>
+                    </a:p>
+                  </a:txBody>
+                  <a:tcPr anchor="ctr">
+                    <a:lnL w="76200" cap="flat" cmpd="sng" algn="ctr">
+                      <a:solidFill>
+                        <a:schemeClr val="bg1"/>
+                      </a:solidFill>
+                      <a:prstDash val="solid"/>
+                      <a:round/>
+                      <a:headEnd type="none" w="med" len="med"/>
+                      <a:tailEnd type="none" w="med" len="med"/>
+                    </a:lnL>
+                    <a:lnR w="76200" cap="flat" cmpd="sng" algn="ctr">
+                      <a:solidFill>
+                        <a:schemeClr val="bg1"/>
+                      </a:solidFill>
+                      <a:prstDash val="solid"/>
+                      <a:round/>
+                      <a:headEnd type="none" w="med" len="med"/>
+                      <a:tailEnd type="none" w="med" len="med"/>
+                    </a:lnR>
+                    <a:lnT w="76200" cap="flat" cmpd="sng" algn="ctr">
+                      <a:noFill/>
+                      <a:prstDash val="solid"/>
+                      <a:round/>
+                      <a:headEnd type="none" w="med" len="med"/>
+                      <a:tailEnd type="none" w="med" len="med"/>
+                    </a:lnT>
+                    <a:lnB w="76200" cap="flat" cmpd="sng" algn="ctr">
+                      <a:noFill/>
+                      <a:prstDash val="solid"/>
+                      <a:round/>
+                      <a:headEnd type="none" w="med" len="med"/>
+                      <a:tailEnd type="none" w="med" len="med"/>
+                    </a:lnB>
+                    <a:lnTlToBr w="12700" cmpd="sng">
+                      <a:noFill/>
+                      <a:prstDash val="solid"/>
+                    </a:lnTlToBr>
+                    <a:lnBlToTr w="12700" cmpd="sng">
+                      <a:noFill/>
+                      <a:prstDash val="solid"/>
+                    </a:lnBlToTr>
+                    <a:solidFill>
+                      <a:schemeClr val="bg2"/>
+                    </a:solidFill>
+                  </a:tcPr>
+                </a:tc>
+                <a:tc>
+                  <a:txBody>
+                    <a:bodyPr/>
+                    <a:lstStyle/>
+                    <a:p>
+                      <a:pPr algn="ctr"/>
+                      <a:r>
+                        <a:rPr lang="en-US" altLang="zh-CN" sz="1600" dirty="0">
+                          <a:solidFill>
+                            <a:schemeClr val="tx2"/>
+                          </a:solidFill>
+                        </a:rPr>
+                        <a:t>Fut Mkt Size</a:t>
+                      </a:r>
+                      <a:endParaRPr lang="zh-CN" altLang="en-US" sz="1600" dirty="0">
+                        <a:solidFill>
+                          <a:schemeClr val="tx2"/>
+                        </a:solidFill>
+                      </a:endParaRPr>
+                    </a:p>
+                  </a:txBody>
+                  <a:tcPr anchor="ctr">
+                    <a:lnL w="76200" cap="flat" cmpd="sng" algn="ctr">
+                      <a:solidFill>
+                        <a:schemeClr val="bg1"/>
+                      </a:solidFill>
+                      <a:prstDash val="solid"/>
+                      <a:round/>
+                      <a:headEnd type="none" w="med" len="med"/>
+                      <a:tailEnd type="none" w="med" len="med"/>
+                    </a:lnL>
+                    <a:lnR w="76200" cap="flat" cmpd="sng" algn="ctr">
+                      <a:solidFill>
+                        <a:schemeClr val="bg1"/>
+                      </a:solidFill>
+                      <a:prstDash val="solid"/>
+                      <a:round/>
+                      <a:headEnd type="none" w="med" len="med"/>
+                      <a:tailEnd type="none" w="med" len="med"/>
+                    </a:lnR>
+                    <a:lnT w="76200" cap="flat" cmpd="sng" algn="ctr">
+                      <a:noFill/>
+                      <a:prstDash val="solid"/>
+                      <a:round/>
+                      <a:headEnd type="none" w="med" len="med"/>
+                      <a:tailEnd type="none" w="med" len="med"/>
+                    </a:lnT>
+                    <a:lnB w="76200" cap="flat" cmpd="sng" algn="ctr">
+                      <a:noFill/>
+                      <a:prstDash val="solid"/>
+                      <a:round/>
+                      <a:headEnd type="none" w="med" len="med"/>
+                      <a:tailEnd type="none" w="med" len="med"/>
+                    </a:lnB>
+                    <a:lnTlToBr w="12700" cmpd="sng">
+                      <a:noFill/>
+                      <a:prstDash val="solid"/>
+                    </a:lnTlToBr>
+                    <a:lnBlToTr w="12700" cmpd="sng">
+                      <a:noFill/>
+                      <a:prstDash val="solid"/>
+                    </a:lnBlToTr>
+                    <a:solidFill>
+                      <a:schemeClr val="bg2"/>
+                    </a:solidFill>
+                  </a:tcPr>
+                </a:tc>
+                <a:tc>
+                  <a:txBody>
+                    <a:bodyPr/>
+                    <a:lstStyle/>
+                    <a:p>
+                      <a:pPr algn="ctr"/>
+                      <a:r>
+                        <a:rPr lang="en-US" altLang="zh-CN" sz="1600" dirty="0">
+                          <a:solidFill>
+                            <a:schemeClr val="tx2"/>
+                          </a:solidFill>
+                        </a:rPr>
+                        <a:t>Item 4</a:t>
+                      </a:r>
+                      <a:endParaRPr lang="zh-CN" altLang="en-US" sz="1600" dirty="0">
+                        <a:solidFill>
+                          <a:schemeClr val="tx2"/>
+                        </a:solidFill>
+                      </a:endParaRPr>
+                    </a:p>
+                  </a:txBody>
+                  <a:tcPr anchor="ctr">
+                    <a:lnL w="76200" cap="flat" cmpd="sng" algn="ctr">
+                      <a:solidFill>
+                        <a:schemeClr val="bg1"/>
+                      </a:solidFill>
+                      <a:prstDash val="solid"/>
+                      <a:round/>
+                      <a:headEnd type="none" w="med" len="med"/>
+                      <a:tailEnd type="none" w="med" len="med"/>
+                    </a:lnL>
+                    <a:lnR w="76200" cap="flat" cmpd="sng" algn="ctr">
+                      <a:noFill/>
+                      <a:prstDash val="solid"/>
+                      <a:round/>
+                      <a:headEnd type="none" w="med" len="med"/>
+                      <a:tailEnd type="none" w="med" len="med"/>
+                    </a:lnR>
+                    <a:lnT w="76200" cap="flat" cmpd="sng" algn="ctr">
+                      <a:noFill/>
+                      <a:prstDash val="solid"/>
+                      <a:round/>
+                      <a:headEnd type="none" w="med" len="med"/>
+                      <a:tailEnd type="none" w="med" len="med"/>
+                    </a:lnT>
+                    <a:lnB w="76200" cap="flat" cmpd="sng" algn="ctr">
+                      <a:noFill/>
+                      <a:prstDash val="solid"/>
+                      <a:round/>
+                      <a:headEnd type="none" w="med" len="med"/>
+                      <a:tailEnd type="none" w="med" len="med"/>
+                    </a:lnB>
+                    <a:lnTlToBr w="12700" cmpd="sng">
+                      <a:noFill/>
+                      <a:prstDash val="solid"/>
+                    </a:lnTlToBr>
+                    <a:lnBlToTr w="12700" cmpd="sng">
+                      <a:noFill/>
+                      <a:prstDash val="solid"/>
+                    </a:lnBlToTr>
+                    <a:solidFill>
+                      <a:schemeClr val="bg2"/>
+                    </a:solidFill>
+                  </a:tcPr>
+                </a:tc>
+                <a:extLst>
+                  <a:ext uri="{0D108BD9-81ED-4DB2-BD59-A6C34878D82A}">
+                    <a16:rowId xmlns:a16="http://schemas.microsoft.com/office/drawing/2014/main" val="3591864886"/>
+                  </a:ext>
+                </a:extLst>
+              </a:tr>
+              <a:tr h="418172">
+                <a:tc>
+                  <a:txBody>
+                    <a:bodyPr/>
+                    <a:lstStyle/>
+                    <a:p>
+                      <a:pPr algn="ctr"/>
+                      <a:r>
+                        <a:rPr lang="en-US" altLang="zh-CN" sz="1600" dirty="0"/>
+                        <a:t>2020</a:t>
+                      </a:r>
+                      <a:endParaRPr lang="zh-CN" altLang="en-US" sz="1600" dirty="0"/>
+                    </a:p>
+                  </a:txBody>
+                  <a:tcPr anchor="ctr">
+                    <a:lnL w="76200" cap="flat" cmpd="sng" algn="ctr">
+                      <a:noFill/>
+                      <a:prstDash val="solid"/>
+                      <a:round/>
+                      <a:headEnd type="none" w="med" len="med"/>
+                      <a:tailEnd type="none" w="med" len="med"/>
+                    </a:lnL>
+                    <a:lnR w="76200" cap="flat" cmpd="sng" algn="ctr">
+                      <a:solidFill>
+                        <a:schemeClr val="bg1"/>
+                      </a:solidFill>
+                      <a:prstDash val="solid"/>
+                      <a:round/>
+                      <a:headEnd type="none" w="med" len="med"/>
+                      <a:tailEnd type="none" w="med" len="med"/>
+                    </a:lnR>
+                    <a:lnT w="76200" cap="flat" cmpd="sng" algn="ctr">
+                      <a:noFill/>
+                      <a:prstDash val="solid"/>
+                      <a:round/>
+                      <a:headEnd type="none" w="med" len="med"/>
+                      <a:tailEnd type="none" w="med" len="med"/>
+                    </a:lnT>
+                    <a:lnB w="76200" cap="flat" cmpd="sng" algn="ctr">
+                      <a:noFill/>
+                      <a:prstDash val="solid"/>
+                      <a:round/>
+                      <a:headEnd type="none" w="med" len="med"/>
+                      <a:tailEnd type="none" w="med" len="med"/>
+                    </a:lnB>
+                    <a:lnTlToBr w="12700" cmpd="sng">
+                      <a:noFill/>
+                      <a:prstDash val="solid"/>
+                    </a:lnTlToBr>
+                    <a:lnBlToTr w="12700" cmpd="sng">
+                      <a:noFill/>
+                      <a:prstDash val="solid"/>
+                    </a:lnBlToTr>
+                    <a:solidFill>
+                      <a:schemeClr val="bg1"/>
+                    </a:solidFill>
+                  </a:tcPr>
+                </a:tc>
+                <a:tc>
+                  <a:txBody>
+                    <a:bodyPr/>
+                    <a:lstStyle/>
+                    <a:p>
+                      <a:pPr algn="ctr"/>
+                      <a:r>
+                        <a:rPr lang="en-US" altLang="zh-CN" sz="1600" dirty="0"/>
+                        <a:t>$61Bn</a:t>
+                      </a:r>
+                      <a:endParaRPr lang="zh-CN" altLang="en-US" sz="1600" dirty="0"/>
+                    </a:p>
+                  </a:txBody>
+                  <a:tcPr anchor="ctr">
+                    <a:lnL w="76200" cap="flat" cmpd="sng" algn="ctr">
+                      <a:solidFill>
+                        <a:schemeClr val="bg1"/>
+                      </a:solidFill>
+                      <a:prstDash val="solid"/>
+                      <a:round/>
+                      <a:headEnd type="none" w="med" len="med"/>
+                      <a:tailEnd type="none" w="med" len="med"/>
+                    </a:lnL>
+                    <a:lnR w="76200" cap="flat" cmpd="sng" algn="ctr">
+                      <a:solidFill>
+                        <a:schemeClr val="bg1"/>
+                      </a:solidFill>
+                      <a:prstDash val="solid"/>
+                      <a:round/>
+                      <a:headEnd type="none" w="med" len="med"/>
+                      <a:tailEnd type="none" w="med" len="med"/>
+                    </a:lnR>
+                    <a:lnT w="76200" cap="flat" cmpd="sng" algn="ctr">
+                      <a:noFill/>
+                      <a:prstDash val="solid"/>
+                      <a:round/>
+                      <a:headEnd type="none" w="med" len="med"/>
+                      <a:tailEnd type="none" w="med" len="med"/>
+                    </a:lnT>
+                    <a:lnB w="76200" cap="flat" cmpd="sng" algn="ctr">
+                      <a:noFill/>
+                      <a:prstDash val="solid"/>
+                      <a:round/>
+                      <a:headEnd type="none" w="med" len="med"/>
+                      <a:tailEnd type="none" w="med" len="med"/>
+                    </a:lnB>
+                    <a:lnTlToBr w="12700" cmpd="sng">
+                      <a:noFill/>
+                      <a:prstDash val="solid"/>
+                    </a:lnTlToBr>
+                    <a:lnBlToTr w="12700" cmpd="sng">
+                      <a:noFill/>
+                      <a:prstDash val="solid"/>
+                    </a:lnBlToTr>
+                    <a:solidFill>
+                      <a:schemeClr val="bg1"/>
+                    </a:solidFill>
+                  </a:tcPr>
+                </a:tc>
+                <a:tc>
+                  <a:txBody>
+                    <a:bodyPr/>
+                    <a:lstStyle/>
+                    <a:p>
+                      <a:pPr algn="ctr"/>
+                      <a:endParaRPr lang="zh-CN" altLang="en-US" sz="1600" dirty="0"/>
+                    </a:p>
+                  </a:txBody>
+                  <a:tcPr anchor="ctr">
+                    <a:lnL w="76200" cap="flat" cmpd="sng" algn="ctr">
+                      <a:solidFill>
+                        <a:schemeClr val="bg1"/>
+                      </a:solidFill>
+                      <a:prstDash val="solid"/>
+                      <a:round/>
+                      <a:headEnd type="none" w="med" len="med"/>
+                      <a:tailEnd type="none" w="med" len="med"/>
+                    </a:lnL>
+                    <a:lnR w="76200" cap="flat" cmpd="sng" algn="ctr">
+                      <a:solidFill>
+                        <a:schemeClr val="bg1"/>
+                      </a:solidFill>
+                      <a:prstDash val="solid"/>
+                      <a:round/>
+                      <a:headEnd type="none" w="med" len="med"/>
+                      <a:tailEnd type="none" w="med" len="med"/>
+                    </a:lnR>
+                    <a:lnT w="76200" cap="flat" cmpd="sng" algn="ctr">
+                      <a:noFill/>
+                      <a:prstDash val="solid"/>
+                      <a:round/>
+                      <a:headEnd type="none" w="med" len="med"/>
+                      <a:tailEnd type="none" w="med" len="med"/>
+                    </a:lnT>
+                    <a:lnB w="76200" cap="flat" cmpd="sng" algn="ctr">
+                      <a:noFill/>
+                      <a:prstDash val="solid"/>
+                      <a:round/>
+                      <a:headEnd type="none" w="med" len="med"/>
+                      <a:tailEnd type="none" w="med" len="med"/>
+                    </a:lnB>
+                    <a:lnTlToBr w="12700" cmpd="sng">
+                      <a:noFill/>
+                      <a:prstDash val="solid"/>
+                    </a:lnTlToBr>
+                    <a:lnBlToTr w="12700" cmpd="sng">
+                      <a:noFill/>
+                      <a:prstDash val="solid"/>
+                    </a:lnBlToTr>
+                    <a:solidFill>
+                      <a:schemeClr val="bg1"/>
+                    </a:solidFill>
+                  </a:tcPr>
+                </a:tc>
+                <a:tc>
+                  <a:txBody>
+                    <a:bodyPr/>
+                    <a:lstStyle/>
+                    <a:p>
+                      <a:pPr algn="ctr"/>
+                      <a:endParaRPr lang="zh-CN" altLang="en-US" sz="1600" dirty="0"/>
+                    </a:p>
+                  </a:txBody>
+                  <a:tcPr anchor="ctr">
+                    <a:lnL w="76200" cap="flat" cmpd="sng" algn="ctr">
+                      <a:solidFill>
+                        <a:schemeClr val="bg1"/>
+                      </a:solidFill>
+                      <a:prstDash val="solid"/>
+                      <a:round/>
+                      <a:headEnd type="none" w="med" len="med"/>
+                      <a:tailEnd type="none" w="med" len="med"/>
+                    </a:lnL>
+                    <a:lnR w="76200" cap="flat" cmpd="sng" algn="ctr">
+                      <a:noFill/>
+                      <a:prstDash val="solid"/>
+                      <a:round/>
+                      <a:headEnd type="none" w="med" len="med"/>
+                      <a:tailEnd type="none" w="med" len="med"/>
+                    </a:lnR>
+                    <a:lnT w="76200" cap="flat" cmpd="sng" algn="ctr">
+                      <a:noFill/>
+                      <a:prstDash val="solid"/>
+                      <a:round/>
+                      <a:headEnd type="none" w="med" len="med"/>
+                      <a:tailEnd type="none" w="med" len="med"/>
+                    </a:lnT>
+                    <a:lnB w="76200" cap="flat" cmpd="sng" algn="ctr">
+                      <a:noFill/>
+                      <a:prstDash val="solid"/>
+                      <a:round/>
+                      <a:headEnd type="none" w="med" len="med"/>
+                      <a:tailEnd type="none" w="med" len="med"/>
+                    </a:lnB>
+                    <a:lnTlToBr w="12700" cmpd="sng">
+                      <a:noFill/>
+                      <a:prstDash val="solid"/>
+                    </a:lnTlToBr>
+                    <a:lnBlToTr w="12700" cmpd="sng">
+                      <a:noFill/>
+                      <a:prstDash val="solid"/>
+                    </a:lnBlToTr>
+                    <a:solidFill>
+                      <a:schemeClr val="bg1"/>
+                    </a:solidFill>
+                  </a:tcPr>
+                </a:tc>
+                <a:extLst>
+                  <a:ext uri="{0D108BD9-81ED-4DB2-BD59-A6C34878D82A}">
+                    <a16:rowId xmlns:a16="http://schemas.microsoft.com/office/drawing/2014/main" val="1064997956"/>
+                  </a:ext>
+                </a:extLst>
+              </a:tr>
+              <a:tr h="418172">
+                <a:tc>
+                  <a:txBody>
+                    <a:bodyPr/>
+                    <a:lstStyle/>
+                    <a:p>
+                      <a:pPr algn="ctr"/>
+                      <a:r>
+                        <a:rPr lang="en-US" altLang="zh-CN" sz="1600" dirty="0"/>
+                        <a:t>2030</a:t>
+                      </a:r>
+                      <a:endParaRPr lang="zh-CN" altLang="en-US" sz="1600" dirty="0"/>
+                    </a:p>
+                  </a:txBody>
+                  <a:tcPr anchor="ctr">
+                    <a:lnL w="76200" cap="flat" cmpd="sng" algn="ctr">
+                      <a:noFill/>
+                      <a:prstDash val="solid"/>
+                      <a:round/>
+                      <a:headEnd type="none" w="med" len="med"/>
+                      <a:tailEnd type="none" w="med" len="med"/>
+                    </a:lnL>
+                    <a:lnR w="76200" cap="flat" cmpd="sng" algn="ctr">
+                      <a:solidFill>
+                        <a:schemeClr val="bg1"/>
+                      </a:solidFill>
+                      <a:prstDash val="solid"/>
+                      <a:round/>
+                      <a:headEnd type="none" w="med" len="med"/>
+                      <a:tailEnd type="none" w="med" len="med"/>
+                    </a:lnR>
+                    <a:lnT w="76200" cap="flat" cmpd="sng" algn="ctr">
+                      <a:noFill/>
+                      <a:prstDash val="solid"/>
+                      <a:round/>
+                      <a:headEnd type="none" w="med" len="med"/>
+                      <a:tailEnd type="none" w="med" len="med"/>
+                    </a:lnT>
+                    <a:lnB w="76200" cap="flat" cmpd="sng" algn="ctr">
+                      <a:noFill/>
+                      <a:prstDash val="solid"/>
+                      <a:round/>
+                      <a:headEnd type="none" w="med" len="med"/>
+                      <a:tailEnd type="none" w="med" len="med"/>
+                    </a:lnB>
+                    <a:lnTlToBr w="12700" cmpd="sng">
+                      <a:noFill/>
+                      <a:prstDash val="solid"/>
+                    </a:lnTlToBr>
+                    <a:lnBlToTr w="12700" cmpd="sng">
+                      <a:noFill/>
+                      <a:prstDash val="solid"/>
+                    </a:lnBlToTr>
+                    <a:solidFill>
+                      <a:schemeClr val="bg1"/>
+                    </a:solidFill>
+                  </a:tcPr>
+                </a:tc>
+                <a:tc>
+                  <a:txBody>
+                    <a:bodyPr/>
+                    <a:lstStyle/>
+                    <a:p>
+                      <a:pPr algn="ctr"/>
+                      <a:r>
+                        <a:rPr lang="en-US" altLang="zh-CN" sz="1600" dirty="0"/>
+                        <a:t>$115Bn</a:t>
+                      </a:r>
+                      <a:endParaRPr lang="zh-CN" altLang="en-US" sz="1600" dirty="0"/>
+                    </a:p>
+                  </a:txBody>
+                  <a:tcPr anchor="ctr">
+                    <a:lnL w="76200" cap="flat" cmpd="sng" algn="ctr">
+                      <a:solidFill>
+                        <a:schemeClr val="bg1"/>
+                      </a:solidFill>
+                      <a:prstDash val="solid"/>
+                      <a:round/>
+                      <a:headEnd type="none" w="med" len="med"/>
+                      <a:tailEnd type="none" w="med" len="med"/>
+                    </a:lnL>
+                    <a:lnR w="76200" cap="flat" cmpd="sng" algn="ctr">
+                      <a:solidFill>
+                        <a:schemeClr val="bg1"/>
+                      </a:solidFill>
+                      <a:prstDash val="solid"/>
+                      <a:round/>
+                      <a:headEnd type="none" w="med" len="med"/>
+                      <a:tailEnd type="none" w="med" len="med"/>
+                    </a:lnR>
+                    <a:lnT w="76200" cap="flat" cmpd="sng" algn="ctr">
+                      <a:noFill/>
+                      <a:prstDash val="solid"/>
+                      <a:round/>
+                      <a:headEnd type="none" w="med" len="med"/>
+                      <a:tailEnd type="none" w="med" len="med"/>
+                    </a:lnT>
+                    <a:lnB w="76200" cap="flat" cmpd="sng" algn="ctr">
+                      <a:noFill/>
+                      <a:prstDash val="solid"/>
+                      <a:round/>
+                      <a:headEnd type="none" w="med" len="med"/>
+                      <a:tailEnd type="none" w="med" len="med"/>
+                    </a:lnB>
+                    <a:lnTlToBr w="12700" cmpd="sng">
+                      <a:noFill/>
+                      <a:prstDash val="solid"/>
+                    </a:lnTlToBr>
+                    <a:lnBlToTr w="12700" cmpd="sng">
+                      <a:noFill/>
+                      <a:prstDash val="solid"/>
+                    </a:lnBlToTr>
+                    <a:solidFill>
+                      <a:schemeClr val="bg1"/>
+                    </a:solidFill>
+                  </a:tcPr>
+                </a:tc>
+                <a:tc>
+                  <a:txBody>
+                    <a:bodyPr/>
+                    <a:lstStyle/>
+                    <a:p>
+                      <a:pPr algn="ctr"/>
+                      <a:endParaRPr lang="zh-CN" altLang="en-US" sz="1600" dirty="0"/>
+                    </a:p>
+                  </a:txBody>
+                  <a:tcPr anchor="ctr">
+                    <a:lnL w="76200" cap="flat" cmpd="sng" algn="ctr">
+                      <a:solidFill>
+                        <a:schemeClr val="bg1"/>
+                      </a:solidFill>
+                      <a:prstDash val="solid"/>
+                      <a:round/>
+                      <a:headEnd type="none" w="med" len="med"/>
+                      <a:tailEnd type="none" w="med" len="med"/>
+                    </a:lnL>
+                    <a:lnR w="76200" cap="flat" cmpd="sng" algn="ctr">
+                      <a:solidFill>
+                        <a:schemeClr val="bg1"/>
+                      </a:solidFill>
+                      <a:prstDash val="solid"/>
+                      <a:round/>
+                      <a:headEnd type="none" w="med" len="med"/>
+                      <a:tailEnd type="none" w="med" len="med"/>
+                    </a:lnR>
+                    <a:lnT w="76200" cap="flat" cmpd="sng" algn="ctr">
+                      <a:noFill/>
+                      <a:prstDash val="solid"/>
+                      <a:round/>
+                      <a:headEnd type="none" w="med" len="med"/>
+                      <a:tailEnd type="none" w="med" len="med"/>
+                    </a:lnT>
+                    <a:lnB w="76200" cap="flat" cmpd="sng" algn="ctr">
+                      <a:noFill/>
+                      <a:prstDash val="solid"/>
+                      <a:round/>
+                      <a:headEnd type="none" w="med" len="med"/>
+                      <a:tailEnd type="none" w="med" len="med"/>
+                    </a:lnB>
+                    <a:lnTlToBr w="12700" cmpd="sng">
+                      <a:noFill/>
+                      <a:prstDash val="solid"/>
+                    </a:lnTlToBr>
+                    <a:lnBlToTr w="12700" cmpd="sng">
+                      <a:noFill/>
+                      <a:prstDash val="solid"/>
+                    </a:lnBlToTr>
+                    <a:solidFill>
+                      <a:schemeClr val="bg1"/>
+                    </a:solidFill>
+                  </a:tcPr>
+                </a:tc>
+                <a:tc>
+                  <a:txBody>
+                    <a:bodyPr/>
+                    <a:lstStyle/>
+                    <a:p>
+                      <a:pPr algn="ctr"/>
+                      <a:endParaRPr lang="zh-CN" altLang="en-US" sz="1600" dirty="0"/>
+                    </a:p>
+                  </a:txBody>
+                  <a:tcPr anchor="ctr">
+                    <a:lnL w="76200" cap="flat" cmpd="sng" algn="ctr">
+                      <a:solidFill>
+                        <a:schemeClr val="bg1"/>
+                      </a:solidFill>
+                      <a:prstDash val="solid"/>
+                      <a:round/>
+                      <a:headEnd type="none" w="med" len="med"/>
+                      <a:tailEnd type="none" w="med" len="med"/>
+                    </a:lnL>
+                    <a:lnR w="76200" cap="flat" cmpd="sng" algn="ctr">
+                      <a:noFill/>
+                      <a:prstDash val="solid"/>
+                      <a:round/>
+                      <a:headEnd type="none" w="med" len="med"/>
+                      <a:tailEnd type="none" w="med" len="med"/>
+                    </a:lnR>
+                    <a:lnT w="76200" cap="flat" cmpd="sng" algn="ctr">
+                      <a:noFill/>
+                      <a:prstDash val="solid"/>
+                      <a:round/>
+                      <a:headEnd type="none" w="med" len="med"/>
+                      <a:tailEnd type="none" w="med" len="med"/>
+                    </a:lnT>
+                    <a:lnB w="76200" cap="flat" cmpd="sng" algn="ctr">
+                      <a:noFill/>
+                      <a:prstDash val="solid"/>
+                      <a:round/>
+                      <a:headEnd type="none" w="med" len="med"/>
+                      <a:tailEnd type="none" w="med" len="med"/>
+                    </a:lnB>
+                    <a:lnTlToBr w="12700" cmpd="sng">
+                      <a:noFill/>
+                      <a:prstDash val="solid"/>
+                    </a:lnTlToBr>
+                    <a:lnBlToTr w="12700" cmpd="sng">
+                      <a:noFill/>
+                      <a:prstDash val="solid"/>
+                    </a:lnBlToTr>
+                    <a:solidFill>
+                      <a:schemeClr val="bg1"/>
+                    </a:solidFill>
+                  </a:tcPr>
+                </a:tc>
+                <a:extLst>
+                  <a:ext uri="{0D108BD9-81ED-4DB2-BD59-A6C34878D82A}">
+                    <a16:rowId xmlns:a16="http://schemas.microsoft.com/office/drawing/2014/main" val="3830778738"/>
+                  </a:ext>
+                </a:extLst>
+              </a:tr>
+            </a:tbl>
+          </a:graphicData>
+        </a:graphic>
+      </p:graphicFrame>
     </p:spTree>
     <p:extLst>
       <p:ext uri="{BB962C8B-B14F-4D97-AF65-F5344CB8AC3E}">
@@ -4321,7 +5750,7 @@
 </file>
 
 <file path=ppt/slides/slide2.xml><?xml version="1.0" encoding="utf-8"?>
-<p:sld xmlns:a="http://schemas.openxmlformats.org/drawingml/2006/main" xmlns:a16="http://schemas.microsoft.com/office/drawing/2014/main" xmlns:asvg="http://schemas.microsoft.com/office/drawing/2016/SVG/main" xmlns:r="http://schemas.openxmlformats.org/officeDocument/2006/relationships" xmlns:p="http://schemas.openxmlformats.org/presentationml/2006/main">
+<p:sld xmlns:a="http://schemas.openxmlformats.org/drawingml/2006/main" xmlns:r="http://schemas.openxmlformats.org/officeDocument/2006/relationships" xmlns:p="http://schemas.openxmlformats.org/presentationml/2006/main">
   <p:cSld>
     <p:spTree>
       <p:nvGrpSpPr>
@@ -4329,288 +5758,5018 @@
         <p:cNvGrpSpPr/>
         <p:nvPr/>
       </p:nvGrpSpPr>
-      <p:grpSpPr/>
-      <p:sp>
-        <p:nvSpPr>
-          <p:cNvPr id="2" name="Title"/>
-          <p:cNvSpPr/>
-          <p:nvPr>
-            <p:ph type="title"/>
-          </p:nvPr>
-        </p:nvSpPr>
-        <p:spPr>
-          <a:xfrm xmlns:a="http://schemas.openxmlformats.org/drawingml/2006/main">
-            <a:off x="838200" y="365125"/>
-            <a:ext cx="10515600" cy="1325563"/>
-          </a:xfrm>
-        </p:spPr>
-        <p:txBody>
-          <a:bodyPr xmlns:a="http://schemas.openxmlformats.org/drawingml/2006/main"/>
-          <a:lstStyle xmlns:a="http://schemas.openxmlformats.org/drawingml/2006/main"/>
-          <a:p xmlns:a="http://schemas.openxmlformats.org/drawingml/2006/main">
-            <a:r>
-              <a:rPr lang="en-US"/>
-              <a:t>New Slide</a:t>
-            </a:r>
-          </a:p>
-        </p:txBody>
-      </p:sp>
-      <p:pic>
-        <p:nvPicPr>
-          <p:cNvPr id="10000" name="图形 60">
-            <a:extLst xmlns:a="http://schemas.openxmlformats.org/drawingml/2006/main">
+      <p:grpSpPr>
+        <a:xfrm>
+          <a:off x="0" y="0"/>
+          <a:ext cx="0" cy="0"/>
+          <a:chOff x="0" y="0"/>
+          <a:chExt cx="0" cy="0"/>
+        </a:xfrm>
+      </p:grpSpPr>
+      <p:sp>
+        <p:nvSpPr>
+          <p:cNvPr id="45" name="矩形 44">
+            <a:extLst>
               <a:ext uri="{FF2B5EF4-FFF2-40B4-BE49-F238E27FC236}">
-                <a16:creationId xmlns:a16="http://schemas.microsoft.com/office/drawing/2014/main" id="{CD67FE52-B21D-D467-FA8C-18471F8E339A}"/>
+                <a16:creationId xmlns:a16="http://schemas.microsoft.com/office/drawing/2014/main" id="{44BAB7D2-5269-E0B2-1A7F-AC2AEE973D8F}"/>
               </a:ext>
             </a:extLst>
           </p:cNvPr>
-          <p:cNvPicPr>
-            <a:picLocks xmlns:a="http://schemas.openxmlformats.org/drawingml/2006/main" noChangeAspect="1"/>
-          </p:cNvPicPr>
+          <p:cNvSpPr/>
           <p:nvPr/>
-        </p:nvPicPr>
-        <p:blipFill>
-          <a:blip xmlns:a="http://schemas.openxmlformats.org/drawingml/2006/main">
-            <a:extLst>
-              <a:ext uri="{96DAC541-7B7A-43D3-8B79-37D633B846F1}">
-                <asvg:svgBlip xmlns:asvg="http://schemas.microsoft.com/office/drawing/2016/SVG/main" xmlns:r="http://schemas.openxmlformats.org/officeDocument/2006/relationships" r:embed="R4708a209b2ba47fa"/>
-              </a:ext>
-            </a:extLst>
-          </a:blip>
-          <a:srcRect xmlns:a="http://schemas.openxmlformats.org/drawingml/2006/main"/>
-          <a:stretch xmlns:a="http://schemas.openxmlformats.org/drawingml/2006/main"/>
-        </p:blipFill>
-        <p:spPr>
-          <a:xfrm xmlns:a="http://schemas.openxmlformats.org/drawingml/2006/main">
-            <a:off x="10888462" y="6534398"/>
-            <a:ext cx="762838" cy="203586"/>
-          </a:xfrm>
-          <a:prstGeom xmlns:a="http://schemas.openxmlformats.org/drawingml/2006/main" prst="rect">
+        </p:nvSpPr>
+        <p:spPr>
+          <a:xfrm>
+            <a:off x="5376256" y="4247999"/>
+            <a:ext cx="6470253" cy="1409784"/>
+          </a:xfrm>
+          <a:prstGeom prst="rect">
             <a:avLst/>
           </a:prstGeom>
-        </p:spPr>
-      </p:pic>
-      <p:cxnSp>
-        <p:nvCxnSpPr>
-          <p:cNvPr id="10001" name="直线连接符 37">
-            <a:extLst xmlns:a="http://schemas.openxmlformats.org/drawingml/2006/main">
+          <a:solidFill>
+            <a:schemeClr val="bg1">
+              <a:lumMod val="95000"/>
+            </a:schemeClr>
+          </a:solidFill>
+          <a:ln w="19050">
+            <a:noFill/>
+          </a:ln>
+        </p:spPr>
+        <p:style>
+          <a:lnRef idx="2">
+            <a:schemeClr val="accent1">
+              <a:shade val="15000"/>
+            </a:schemeClr>
+          </a:lnRef>
+          <a:fillRef idx="1">
+            <a:schemeClr val="accent1"/>
+          </a:fillRef>
+          <a:effectRef idx="0">
+            <a:schemeClr val="accent1"/>
+          </a:effectRef>
+          <a:fontRef idx="minor">
+            <a:schemeClr val="lt1"/>
+          </a:fontRef>
+        </p:style>
+        <p:txBody>
+          <a:bodyPr rtlCol="0" anchor="ctr"/>
+          <a:lstStyle/>
+          <a:p>
+            <a:pPr>
+              <a:lnSpc>
+                <a:spcPct val="90000"/>
+              </a:lnSpc>
+            </a:pPr>
+            <a:r>
+              <a:rPr kumimoji="1" lang="en-US" altLang="zh-CN" dirty="0">
+                <a:solidFill>
+                  <a:schemeClr val="tx1"/>
+                </a:solidFill>
+              </a:rPr>
+              <a:t>Yada pension actively fulfills its social responsibility and pays attention to social welfare and elderly’s health security. Yada should implement strategies to reach a broader population and meet diverse needs.</a:t>
+            </a:r>
+          </a:p>
+        </p:txBody>
+      </p:sp>
+      <p:sp>
+        <p:nvSpPr>
+          <p:cNvPr id="12" name="矩形 11">
+            <a:extLst>
               <a:ext uri="{FF2B5EF4-FFF2-40B4-BE49-F238E27FC236}">
-                <a16:creationId xmlns:a16="http://schemas.microsoft.com/office/drawing/2014/main" id="{02F3A8E7-106F-591D-F7DE-2793A8B3EA7F}"/>
+                <a16:creationId xmlns:a16="http://schemas.microsoft.com/office/drawing/2014/main" id="{F390F5CD-2D12-B0EA-A28D-DFA77A11A421}"/>
               </a:ext>
             </a:extLst>
           </p:cNvPr>
-          <p:cNvCxnSpPr/>
+          <p:cNvSpPr/>
+          <p:nvPr/>
+        </p:nvSpPr>
+        <p:spPr>
+          <a:xfrm>
+            <a:off x="5376255" y="1704826"/>
+            <a:ext cx="3480306" cy="2280437"/>
+          </a:xfrm>
+          <a:prstGeom prst="rect">
+            <a:avLst/>
+          </a:prstGeom>
+          <a:solidFill>
+            <a:schemeClr val="bg1"/>
+          </a:solidFill>
+          <a:ln>
+            <a:noFill/>
+          </a:ln>
+          <a:effectLst>
+            <a:outerShdw blurRad="50800" dist="38100" dir="2700000" algn="tl" rotWithShape="0">
+              <a:prstClr val="black">
+                <a:alpha val="10000"/>
+              </a:prstClr>
+            </a:outerShdw>
+          </a:effectLst>
+        </p:spPr>
+        <p:style>
+          <a:lnRef idx="2">
+            <a:schemeClr val="accent1">
+              <a:shade val="15000"/>
+            </a:schemeClr>
+          </a:lnRef>
+          <a:fillRef idx="1">
+            <a:schemeClr val="accent1"/>
+          </a:fillRef>
+          <a:effectRef idx="0">
+            <a:schemeClr val="accent1"/>
+          </a:effectRef>
+          <a:fontRef idx="minor">
+            <a:schemeClr val="lt1"/>
+          </a:fontRef>
+        </p:style>
+        <p:txBody>
+          <a:bodyPr rtlCol="0" anchor="ctr"/>
+          <a:lstStyle/>
+          <a:p>
+            <a:r>
+              <a:rPr kumimoji="1" lang="en-US" altLang="zh-CN" b="1" dirty="0">
+                <a:solidFill>
+                  <a:schemeClr val="tx1"/>
+                </a:solidFill>
+              </a:rPr>
+              <a:t>Customer Segmentation</a:t>
+            </a:r>
+          </a:p>
+          <a:p>
+            <a:pPr marL="285750" indent="-285750">
+              <a:buFont typeface="Arial" panose="020B0604020202020204" pitchFamily="34" charset="0"/>
+              <a:buChar char="•"/>
+            </a:pPr>
+            <a:r>
+              <a:rPr kumimoji="1" lang="en-US" altLang="zh-CN" dirty="0">
+                <a:solidFill>
+                  <a:schemeClr val="tx1"/>
+                </a:solidFill>
+              </a:rPr>
+              <a:t>Shanghai, the Pilot Region</a:t>
+            </a:r>
+          </a:p>
+          <a:p>
+            <a:pPr marL="285750" indent="-285750">
+              <a:buFont typeface="Arial" panose="020B0604020202020204" pitchFamily="34" charset="0"/>
+              <a:buChar char="•"/>
+            </a:pPr>
+            <a:r>
+              <a:rPr kumimoji="1" lang="en-US" altLang="zh-CN" dirty="0">
+                <a:solidFill>
+                  <a:schemeClr val="tx1"/>
+                </a:solidFill>
+              </a:rPr>
+              <a:t>Private Service at Home</a:t>
+            </a:r>
+          </a:p>
+          <a:p>
+            <a:pPr marL="285750" indent="-285750">
+              <a:buFont typeface="Arial" panose="020B0604020202020204" pitchFamily="34" charset="0"/>
+              <a:buChar char="•"/>
+            </a:pPr>
+            <a:r>
+              <a:rPr kumimoji="1" lang="en-US" altLang="zh-CN" dirty="0">
+                <a:solidFill>
+                  <a:schemeClr val="tx1"/>
+                </a:solidFill>
+              </a:rPr>
+              <a:t>Intelligent Community</a:t>
+            </a:r>
+          </a:p>
+          <a:p>
+            <a:pPr marL="285750" indent="-285750">
+              <a:buFont typeface="Arial" panose="020B0604020202020204" pitchFamily="34" charset="0"/>
+              <a:buChar char="•"/>
+            </a:pPr>
+            <a:r>
+              <a:rPr kumimoji="1" lang="en-US" altLang="zh-CN" dirty="0">
+                <a:solidFill>
+                  <a:schemeClr val="tx1"/>
+                </a:solidFill>
+              </a:rPr>
+              <a:t>Mid-class Living at Home</a:t>
+            </a:r>
+          </a:p>
+          <a:p>
+            <a:pPr marL="285750" indent="-285750">
+              <a:buFont typeface="Arial" panose="020B0604020202020204" pitchFamily="34" charset="0"/>
+              <a:buChar char="•"/>
+            </a:pPr>
+            <a:r>
+              <a:rPr kumimoji="1" lang="en-US" altLang="zh-CN" dirty="0">
+                <a:solidFill>
+                  <a:schemeClr val="tx1"/>
+                </a:solidFill>
+              </a:rPr>
+              <a:t>Normal Community Service</a:t>
+            </a:r>
+            <a:endParaRPr kumimoji="1" lang="zh-CN" altLang="en-US" dirty="0">
+              <a:solidFill>
+                <a:schemeClr val="tx1"/>
+              </a:solidFill>
+            </a:endParaRPr>
+          </a:p>
+        </p:txBody>
+      </p:sp>
+      <p:sp>
+        <p:nvSpPr>
+          <p:cNvPr id="6" name="文本框 5">
+            <a:extLst>
+              <a:ext uri="{FF2B5EF4-FFF2-40B4-BE49-F238E27FC236}">
+                <a16:creationId xmlns:a16="http://schemas.microsoft.com/office/drawing/2014/main" id="{DC6E184D-B6AF-A51F-DD1D-8814D2A75483}"/>
+              </a:ext>
+            </a:extLst>
+          </p:cNvPr>
+          <p:cNvSpPr txBox="1"/>
+          <p:nvPr/>
+        </p:nvSpPr>
+        <p:spPr>
+          <a:xfrm>
+            <a:off x="244988" y="31016"/>
+            <a:ext cx="10063933" cy="830997"/>
+          </a:xfrm>
+          <a:prstGeom prst="rect">
+            <a:avLst/>
+          </a:prstGeom>
+          <a:noFill/>
+        </p:spPr>
+        <p:txBody>
+          <a:bodyPr wrap="square" anchor="ctr">
+            <a:spAutoFit/>
+          </a:bodyPr>
+          <a:lstStyle/>
+          <a:p>
+            <a:r>
+              <a:rPr kumimoji="1" lang="en-US" altLang="zh-CN" sz="2400" b="1" dirty="0">
+                <a:latin typeface="Aptos Narrow" panose="020B0004020202020204" pitchFamily="34" charset="0"/>
+                <a:ea typeface="Palatino" pitchFamily="2" charset="0"/>
+                <a:cs typeface="Mongolian Baiti" panose="03000500000000000000" pitchFamily="66" charset="0"/>
+              </a:rPr>
+              <a:t>Summary: Yada’s development strategy in China incorporates multi-level senior care patterns and more customized services</a:t>
+            </a:r>
+          </a:p>
+        </p:txBody>
+      </p:sp>
+      <p:cxnSp>
+        <p:nvCxnSpPr>
+          <p:cNvPr id="7" name="直线连接符 6">
+            <a:extLst>
+              <a:ext uri="{FF2B5EF4-FFF2-40B4-BE49-F238E27FC236}">
+                <a16:creationId xmlns:a16="http://schemas.microsoft.com/office/drawing/2014/main" id="{1C2E6875-BDC9-7937-44EE-CED172999E2A}"/>
+              </a:ext>
+            </a:extLst>
+          </p:cNvPr>
+          <p:cNvCxnSpPr>
+            <a:cxnSpLocks/>
+          </p:cNvCxnSpPr>
           <p:nvPr/>
         </p:nvCxnSpPr>
         <p:spPr>
-          <a:xfrm xmlns:a="http://schemas.openxmlformats.org/drawingml/2006/main" flipV="1">
-            <a:off x="6153443" y="2759531"/>
-            <a:ext cx="0" cy="265626"/>
-          </a:xfrm>
-          <a:prstGeom xmlns:a="http://schemas.openxmlformats.org/drawingml/2006/main" prst="line">
+          <a:xfrm>
+            <a:off x="345486" y="872723"/>
+            <a:ext cx="11501023" cy="0"/>
+          </a:xfrm>
+          <a:prstGeom prst="line">
             <a:avLst/>
           </a:prstGeom>
-          <a:ln xmlns:a="http://schemas.openxmlformats.org/drawingml/2006/main" w="31750" cap="sq">
+          <a:ln>
             <a:solidFill>
               <a:schemeClr val="tx2"/>
             </a:solidFill>
-            <a:miter lim="800000"/>
-            <a:tailEnd w="sm" len="sm"/>
           </a:ln>
         </p:spPr>
         <p:style>
-          <a:lnRef xmlns:a="http://schemas.openxmlformats.org/drawingml/2006/main" idx="2">
+          <a:lnRef idx="2">
             <a:schemeClr val="accent1"/>
           </a:lnRef>
-          <a:fillRef xmlns:a="http://schemas.openxmlformats.org/drawingml/2006/main" idx="0">
+          <a:fillRef idx="0">
             <a:schemeClr val="accent1"/>
           </a:fillRef>
-          <a:effectRef xmlns:a="http://schemas.openxmlformats.org/drawingml/2006/main" idx="1">
+          <a:effectRef idx="1">
             <a:schemeClr val="accent1"/>
           </a:effectRef>
-          <a:fontRef xmlns:a="http://schemas.openxmlformats.org/drawingml/2006/main" idx="minor">
+          <a:fontRef idx="minor">
+            <a:schemeClr val="tx1"/>
+          </a:fontRef>
+        </p:style>
+      </p:cxnSp>
+      <p:sp>
+        <p:nvSpPr>
+          <p:cNvPr id="9" name="文本框 8">
+            <a:extLst>
+              <a:ext uri="{FF2B5EF4-FFF2-40B4-BE49-F238E27FC236}">
+                <a16:creationId xmlns:a16="http://schemas.microsoft.com/office/drawing/2014/main" id="{6CF8E0F5-53A8-78A4-5C93-7B8BDAE3B77D}"/>
+              </a:ext>
+            </a:extLst>
+          </p:cNvPr>
+          <p:cNvSpPr txBox="1"/>
+          <p:nvPr/>
+        </p:nvSpPr>
+        <p:spPr>
+          <a:xfrm>
+            <a:off x="2003918" y="1101671"/>
+            <a:ext cx="995081" cy="400110"/>
+          </a:xfrm>
+          <a:prstGeom prst="rect">
+            <a:avLst/>
+          </a:prstGeom>
+          <a:noFill/>
+        </p:spPr>
+        <p:txBody>
+          <a:bodyPr wrap="none" rtlCol="0" anchor="b">
+            <a:spAutoFit/>
+          </a:bodyPr>
+          <a:lstStyle/>
+          <a:p>
+            <a:r>
+              <a:rPr kumimoji="1" lang="en-US" altLang="zh-CN" sz="2000" b="1" dirty="0"/>
+              <a:t>Market</a:t>
+            </a:r>
+            <a:endParaRPr kumimoji="1" lang="zh-CN" altLang="en-US" sz="2000" b="1" dirty="0"/>
+          </a:p>
+        </p:txBody>
+      </p:sp>
+      <p:cxnSp>
+        <p:nvCxnSpPr>
+          <p:cNvPr id="10" name="直线连接符 9">
+            <a:extLst>
+              <a:ext uri="{FF2B5EF4-FFF2-40B4-BE49-F238E27FC236}">
+                <a16:creationId xmlns:a16="http://schemas.microsoft.com/office/drawing/2014/main" id="{49C69077-E220-8815-E6AA-EECB2FB396C5}"/>
+              </a:ext>
+            </a:extLst>
+          </p:cNvPr>
+          <p:cNvCxnSpPr>
+            <a:cxnSpLocks/>
+          </p:cNvCxnSpPr>
+          <p:nvPr/>
+        </p:nvCxnSpPr>
+        <p:spPr>
+          <a:xfrm>
+            <a:off x="2008094" y="1501781"/>
+            <a:ext cx="3122706" cy="0"/>
+          </a:xfrm>
+          <a:prstGeom prst="line">
+            <a:avLst/>
+          </a:prstGeom>
+          <a:ln cap="rnd">
+            <a:solidFill>
+              <a:schemeClr val="tx2"/>
+            </a:solidFill>
+          </a:ln>
+        </p:spPr>
+        <p:style>
+          <a:lnRef idx="2">
+            <a:schemeClr val="accent1"/>
+          </a:lnRef>
+          <a:fillRef idx="0">
+            <a:schemeClr val="accent1"/>
+          </a:fillRef>
+          <a:effectRef idx="1">
+            <a:schemeClr val="accent1"/>
+          </a:effectRef>
+          <a:fontRef idx="minor">
+            <a:schemeClr val="tx1"/>
+          </a:fontRef>
+        </p:style>
+      </p:cxnSp>
+      <p:sp>
+        <p:nvSpPr>
+          <p:cNvPr id="15" name="圆角矩形 14">
+            <a:extLst>
+              <a:ext uri="{FF2B5EF4-FFF2-40B4-BE49-F238E27FC236}">
+                <a16:creationId xmlns:a16="http://schemas.microsoft.com/office/drawing/2014/main" id="{E19E487E-B744-D685-6A08-5C74C1118186}"/>
+              </a:ext>
+            </a:extLst>
+          </p:cNvPr>
+          <p:cNvSpPr/>
+          <p:nvPr/>
+        </p:nvSpPr>
+        <p:spPr>
+          <a:xfrm>
+            <a:off x="345486" y="1704826"/>
+            <a:ext cx="1412976" cy="2280448"/>
+          </a:xfrm>
+          <a:prstGeom prst="roundRect">
+            <a:avLst>
+              <a:gd name="adj" fmla="val 0"/>
+            </a:avLst>
+          </a:prstGeom>
+          <a:solidFill>
+            <a:schemeClr val="bg2"/>
+          </a:solidFill>
+          <a:ln w="19050">
+            <a:solidFill>
+              <a:schemeClr val="bg2"/>
+            </a:solidFill>
+          </a:ln>
+        </p:spPr>
+        <p:style>
+          <a:lnRef idx="2">
+            <a:schemeClr val="accent1">
+              <a:shade val="15000"/>
+            </a:schemeClr>
+          </a:lnRef>
+          <a:fillRef idx="1">
+            <a:schemeClr val="accent1"/>
+          </a:fillRef>
+          <a:effectRef idx="0">
+            <a:schemeClr val="accent1"/>
+          </a:effectRef>
+          <a:fontRef idx="minor">
+            <a:schemeClr val="lt1"/>
+          </a:fontRef>
+        </p:style>
+        <p:txBody>
+          <a:bodyPr rtlCol="0" anchor="ctr"/>
+          <a:lstStyle/>
+          <a:p>
+            <a:pPr algn="ctr"/>
+            <a:r>
+              <a:rPr kumimoji="1" lang="en-US" altLang="zh-CN" sz="1600" b="1" dirty="0">
+                <a:solidFill>
+                  <a:schemeClr val="tx2"/>
+                </a:solidFill>
+              </a:rPr>
+              <a:t>Analysis</a:t>
+            </a:r>
+          </a:p>
+          <a:p>
+            <a:pPr algn="ctr"/>
+            <a:r>
+              <a:rPr kumimoji="1" lang="en-US" altLang="zh-CN" sz="1600" b="1" dirty="0">
+                <a:solidFill>
+                  <a:schemeClr val="tx2"/>
+                </a:solidFill>
+              </a:rPr>
+              <a:t>Dimensions</a:t>
+            </a:r>
+            <a:endParaRPr kumimoji="1" lang="zh-CN" altLang="en-US" sz="1600" b="1" dirty="0">
+              <a:solidFill>
+                <a:schemeClr val="tx2"/>
+              </a:solidFill>
+            </a:endParaRPr>
+          </a:p>
+        </p:txBody>
+      </p:sp>
+      <p:sp>
+        <p:nvSpPr>
+          <p:cNvPr id="16" name="圆角矩形 15">
+            <a:extLst>
+              <a:ext uri="{FF2B5EF4-FFF2-40B4-BE49-F238E27FC236}">
+                <a16:creationId xmlns:a16="http://schemas.microsoft.com/office/drawing/2014/main" id="{D132D706-B860-FDDC-BFBA-AFB8F7DDF495}"/>
+              </a:ext>
+            </a:extLst>
+          </p:cNvPr>
+          <p:cNvSpPr/>
+          <p:nvPr/>
+        </p:nvSpPr>
+        <p:spPr>
+          <a:xfrm>
+            <a:off x="345486" y="4248001"/>
+            <a:ext cx="1412976" cy="1409783"/>
+          </a:xfrm>
+          <a:prstGeom prst="roundRect">
+            <a:avLst>
+              <a:gd name="adj" fmla="val 0"/>
+            </a:avLst>
+          </a:prstGeom>
+          <a:solidFill>
+            <a:schemeClr val="bg2"/>
+          </a:solidFill>
+          <a:ln w="19050">
+            <a:solidFill>
+              <a:schemeClr val="bg2"/>
+            </a:solidFill>
+          </a:ln>
+        </p:spPr>
+        <p:style>
+          <a:lnRef idx="2">
+            <a:schemeClr val="accent1">
+              <a:shade val="15000"/>
+            </a:schemeClr>
+          </a:lnRef>
+          <a:fillRef idx="1">
+            <a:schemeClr val="accent1"/>
+          </a:fillRef>
+          <a:effectRef idx="0">
+            <a:schemeClr val="accent1"/>
+          </a:effectRef>
+          <a:fontRef idx="minor">
+            <a:schemeClr val="lt1"/>
+          </a:fontRef>
+        </p:style>
+        <p:txBody>
+          <a:bodyPr rtlCol="0" anchor="ctr"/>
+          <a:lstStyle/>
+          <a:p>
+            <a:pPr algn="ctr"/>
+            <a:r>
+              <a:rPr kumimoji="1" lang="en-US" altLang="zh-CN" sz="1600" b="1" dirty="0">
+                <a:solidFill>
+                  <a:schemeClr val="tx2"/>
+                </a:solidFill>
+              </a:rPr>
+              <a:t>Implications</a:t>
+            </a:r>
+            <a:endParaRPr kumimoji="1" lang="zh-CN" altLang="en-US" sz="1600" b="1" dirty="0">
+              <a:solidFill>
+                <a:schemeClr val="tx2"/>
+              </a:solidFill>
+            </a:endParaRPr>
+          </a:p>
+        </p:txBody>
+      </p:sp>
+      <p:cxnSp>
+        <p:nvCxnSpPr>
+          <p:cNvPr id="18" name="直线连接符 17">
+            <a:extLst>
+              <a:ext uri="{FF2B5EF4-FFF2-40B4-BE49-F238E27FC236}">
+                <a16:creationId xmlns:a16="http://schemas.microsoft.com/office/drawing/2014/main" id="{C88317E2-EF10-7FCA-7D24-C0B5ED67B4B5}"/>
+              </a:ext>
+            </a:extLst>
+          </p:cNvPr>
+          <p:cNvCxnSpPr>
+            <a:cxnSpLocks/>
+          </p:cNvCxnSpPr>
+          <p:nvPr/>
+        </p:nvCxnSpPr>
+        <p:spPr>
+          <a:xfrm flipH="1">
+            <a:off x="5130800" y="1301726"/>
+            <a:ext cx="146154" cy="200055"/>
+          </a:xfrm>
+          <a:prstGeom prst="line">
+            <a:avLst/>
+          </a:prstGeom>
+          <a:ln cap="rnd">
+            <a:solidFill>
+              <a:schemeClr val="tx2"/>
+            </a:solidFill>
+          </a:ln>
+        </p:spPr>
+        <p:style>
+          <a:lnRef idx="2">
+            <a:schemeClr val="accent1"/>
+          </a:lnRef>
+          <a:fillRef idx="0">
+            <a:schemeClr val="accent1"/>
+          </a:fillRef>
+          <a:effectRef idx="1">
+            <a:schemeClr val="accent1"/>
+          </a:effectRef>
+          <a:fontRef idx="minor">
             <a:schemeClr val="tx1"/>
           </a:fontRef>
         </p:style>
       </p:cxnSp>
       <p:cxnSp>
         <p:nvCxnSpPr>
-          <p:cNvPr id="10002" name="直线连接符 39">
-            <a:extLst xmlns:a="http://schemas.openxmlformats.org/drawingml/2006/main">
+          <p:cNvPr id="24" name="直线连接符 23">
+            <a:extLst>
               <a:ext uri="{FF2B5EF4-FFF2-40B4-BE49-F238E27FC236}">
-                <a16:creationId xmlns:a16="http://schemas.microsoft.com/office/drawing/2014/main" id="{A2AA58F1-8C5F-12B1-E566-EF8BAB04F2C1}"/>
+                <a16:creationId xmlns:a16="http://schemas.microsoft.com/office/drawing/2014/main" id="{7BBD4D04-BBA4-D611-9313-90509644092F}"/>
               </a:ext>
             </a:extLst>
           </p:cNvPr>
-          <p:cNvCxnSpPr/>
+          <p:cNvCxnSpPr>
+            <a:cxnSpLocks/>
+          </p:cNvCxnSpPr>
           <p:nvPr/>
         </p:nvCxnSpPr>
         <p:spPr>
-          <a:xfrm xmlns:a="http://schemas.openxmlformats.org/drawingml/2006/main">
-            <a:off x="6153443" y="2759531"/>
-            <a:ext cx="1140643" cy="0"/>
-          </a:xfrm>
-          <a:prstGeom xmlns:a="http://schemas.openxmlformats.org/drawingml/2006/main" prst="line">
+          <a:xfrm>
+            <a:off x="5380688" y="1501781"/>
+            <a:ext cx="6315919" cy="0"/>
+          </a:xfrm>
+          <a:prstGeom prst="line">
             <a:avLst/>
           </a:prstGeom>
-          <a:ln xmlns:a="http://schemas.openxmlformats.org/drawingml/2006/main" w="31750" cap="sq">
+          <a:ln>
             <a:solidFill>
               <a:schemeClr val="tx2"/>
             </a:solidFill>
-            <a:miter lim="800000"/>
-            <a:tailEnd type="oval" w="sm" len="sm"/>
           </a:ln>
         </p:spPr>
         <p:style>
-          <a:lnRef xmlns:a="http://schemas.openxmlformats.org/drawingml/2006/main" idx="2">
+          <a:lnRef idx="2">
             <a:schemeClr val="accent1"/>
           </a:lnRef>
-          <a:fillRef xmlns:a="http://schemas.openxmlformats.org/drawingml/2006/main" idx="0">
+          <a:fillRef idx="0">
             <a:schemeClr val="accent1"/>
           </a:fillRef>
-          <a:effectRef xmlns:a="http://schemas.openxmlformats.org/drawingml/2006/main" idx="1">
+          <a:effectRef idx="1">
             <a:schemeClr val="accent1"/>
           </a:effectRef>
-          <a:fontRef xmlns:a="http://schemas.openxmlformats.org/drawingml/2006/main" idx="minor">
+          <a:fontRef idx="minor">
+            <a:schemeClr val="tx1"/>
+          </a:fontRef>
+        </p:style>
+      </p:cxnSp>
+      <p:sp>
+        <p:nvSpPr>
+          <p:cNvPr id="29" name="文本框 28">
+            <a:extLst>
+              <a:ext uri="{FF2B5EF4-FFF2-40B4-BE49-F238E27FC236}">
+                <a16:creationId xmlns:a16="http://schemas.microsoft.com/office/drawing/2014/main" id="{F16C364A-1B28-3C03-27CB-39CC91F8D4B5}"/>
+              </a:ext>
+            </a:extLst>
+          </p:cNvPr>
+          <p:cNvSpPr txBox="1"/>
+          <p:nvPr/>
+        </p:nvSpPr>
+        <p:spPr>
+          <a:xfrm>
+            <a:off x="5338568" y="1101671"/>
+            <a:ext cx="2008883" cy="400110"/>
+          </a:xfrm>
+          <a:prstGeom prst="rect">
+            <a:avLst/>
+          </a:prstGeom>
+          <a:noFill/>
+        </p:spPr>
+        <p:txBody>
+          <a:bodyPr wrap="none" rtlCol="0" anchor="b">
+            <a:spAutoFit/>
+          </a:bodyPr>
+          <a:lstStyle/>
+          <a:p>
+            <a:r>
+              <a:rPr kumimoji="1" lang="en-US" altLang="zh-CN" sz="2000" b="1" dirty="0"/>
+              <a:t>Strategy Design</a:t>
+            </a:r>
+            <a:endParaRPr kumimoji="1" lang="zh-CN" altLang="en-US" sz="2000" b="1" dirty="0"/>
+          </a:p>
+        </p:txBody>
+      </p:sp>
+      <p:sp>
+        <p:nvSpPr>
+          <p:cNvPr id="30" name="矩形 29">
+            <a:extLst>
+              <a:ext uri="{FF2B5EF4-FFF2-40B4-BE49-F238E27FC236}">
+                <a16:creationId xmlns:a16="http://schemas.microsoft.com/office/drawing/2014/main" id="{236C3395-7422-FB8D-5E1B-AA105843C331}"/>
+              </a:ext>
+            </a:extLst>
+          </p:cNvPr>
+          <p:cNvSpPr/>
+          <p:nvPr/>
+        </p:nvSpPr>
+        <p:spPr>
+          <a:xfrm>
+            <a:off x="9102016" y="1704826"/>
+            <a:ext cx="2744493" cy="2285671"/>
+          </a:xfrm>
+          <a:prstGeom prst="rect">
+            <a:avLst/>
+          </a:prstGeom>
+          <a:solidFill>
+            <a:schemeClr val="bg1"/>
+          </a:solidFill>
+          <a:ln>
+            <a:noFill/>
+          </a:ln>
+          <a:effectLst>
+            <a:outerShdw blurRad="50800" dist="38100" dir="2700000" algn="tl" rotWithShape="0">
+              <a:prstClr val="black">
+                <a:alpha val="10000"/>
+              </a:prstClr>
+            </a:outerShdw>
+          </a:effectLst>
+        </p:spPr>
+        <p:style>
+          <a:lnRef idx="2">
+            <a:schemeClr val="accent1">
+              <a:shade val="15000"/>
+            </a:schemeClr>
+          </a:lnRef>
+          <a:fillRef idx="1">
+            <a:schemeClr val="accent1"/>
+          </a:fillRef>
+          <a:effectRef idx="0">
+            <a:schemeClr val="accent1"/>
+          </a:effectRef>
+          <a:fontRef idx="minor">
+            <a:schemeClr val="lt1"/>
+          </a:fontRef>
+        </p:style>
+        <p:txBody>
+          <a:bodyPr rtlCol="0" anchor="ctr"/>
+          <a:lstStyle/>
+          <a:p>
+            <a:r>
+              <a:rPr kumimoji="1" lang="en-US" altLang="zh-CN" b="1" dirty="0">
+                <a:solidFill>
+                  <a:schemeClr val="tx1"/>
+                </a:solidFill>
+              </a:rPr>
+              <a:t>Business Expansion</a:t>
+            </a:r>
+          </a:p>
+          <a:p>
+            <a:pPr marL="285750" indent="-285750">
+              <a:buFont typeface="Arial" panose="020B0604020202020204" pitchFamily="34" charset="0"/>
+              <a:buChar char="•"/>
+            </a:pPr>
+            <a:r>
+              <a:rPr kumimoji="1" lang="en-US" altLang="zh-CN" dirty="0">
+                <a:solidFill>
+                  <a:schemeClr val="tx1"/>
+                </a:solidFill>
+              </a:rPr>
+              <a:t>Financial Products</a:t>
+            </a:r>
+          </a:p>
+          <a:p>
+            <a:pPr marL="285750" indent="-285750">
+              <a:buFont typeface="Arial" panose="020B0604020202020204" pitchFamily="34" charset="0"/>
+              <a:buChar char="•"/>
+            </a:pPr>
+            <a:r>
+              <a:rPr kumimoji="1" lang="en-US" altLang="zh-CN" dirty="0">
+                <a:solidFill>
+                  <a:schemeClr val="tx1"/>
+                </a:solidFill>
+              </a:rPr>
+              <a:t>Investment</a:t>
+            </a:r>
+          </a:p>
+          <a:p>
+            <a:pPr marL="285750" indent="-285750">
+              <a:buFont typeface="Arial" panose="020B0604020202020204" pitchFamily="34" charset="0"/>
+              <a:buChar char="•"/>
+            </a:pPr>
+            <a:r>
+              <a:rPr kumimoji="1" lang="en-US" altLang="zh-CN" dirty="0">
+                <a:solidFill>
+                  <a:schemeClr val="tx1"/>
+                </a:solidFill>
+              </a:rPr>
+              <a:t>Law Consultation</a:t>
+            </a:r>
+          </a:p>
+          <a:p>
+            <a:pPr marL="285750" indent="-285750">
+              <a:buFont typeface="Arial" panose="020B0604020202020204" pitchFamily="34" charset="0"/>
+              <a:buChar char="•"/>
+            </a:pPr>
+            <a:r>
+              <a:rPr kumimoji="1" lang="en-US" altLang="zh-CN" dirty="0">
+                <a:solidFill>
+                  <a:schemeClr val="tx1"/>
+                </a:solidFill>
+              </a:rPr>
+              <a:t>End-of-life Care</a:t>
+            </a:r>
+          </a:p>
+        </p:txBody>
+      </p:sp>
+      <p:cxnSp>
+        <p:nvCxnSpPr>
+          <p:cNvPr id="37" name="直线连接符 36">
+            <a:extLst>
+              <a:ext uri="{FF2B5EF4-FFF2-40B4-BE49-F238E27FC236}">
+                <a16:creationId xmlns:a16="http://schemas.microsoft.com/office/drawing/2014/main" id="{B1404906-0873-93BF-2BFF-D6D4AA1673C9}"/>
+              </a:ext>
+            </a:extLst>
+          </p:cNvPr>
+          <p:cNvCxnSpPr>
+            <a:cxnSpLocks/>
+          </p:cNvCxnSpPr>
+          <p:nvPr/>
+        </p:nvCxnSpPr>
+        <p:spPr>
+          <a:xfrm>
+            <a:off x="5119516" y="1091727"/>
+            <a:ext cx="154505" cy="209998"/>
+          </a:xfrm>
+          <a:prstGeom prst="line">
+            <a:avLst/>
+          </a:prstGeom>
+          <a:ln cap="rnd">
+            <a:solidFill>
+              <a:schemeClr val="tx2"/>
+            </a:solidFill>
+          </a:ln>
+        </p:spPr>
+        <p:style>
+          <a:lnRef idx="2">
+            <a:schemeClr val="accent1"/>
+          </a:lnRef>
+          <a:fillRef idx="0">
+            <a:schemeClr val="accent1"/>
+          </a:fillRef>
+          <a:effectRef idx="1">
+            <a:schemeClr val="accent1"/>
+          </a:effectRef>
+          <a:fontRef idx="minor">
             <a:schemeClr val="tx1"/>
           </a:fontRef>
         </p:style>
       </p:cxnSp>
       <p:cxnSp>
         <p:nvCxnSpPr>
-          <p:cNvPr id="10003" name="直线连接符 57">
-            <a:extLst xmlns:a="http://schemas.openxmlformats.org/drawingml/2006/main">
+          <p:cNvPr id="41" name="直线连接符 40">
+            <a:extLst>
               <a:ext uri="{FF2B5EF4-FFF2-40B4-BE49-F238E27FC236}">
-                <a16:creationId xmlns:a16="http://schemas.microsoft.com/office/drawing/2014/main" id="{4CC9D08D-A330-065D-B982-D792D996573E}"/>
+                <a16:creationId xmlns:a16="http://schemas.microsoft.com/office/drawing/2014/main" id="{D52F9750-F9D9-3123-547B-1636A542B762}"/>
               </a:ext>
             </a:extLst>
           </p:cNvPr>
           <p:cNvCxnSpPr>
-            <a:cxnSpLocks xmlns:a="http://schemas.openxmlformats.org/drawingml/2006/main"/>
+            <a:cxnSpLocks/>
           </p:cNvCxnSpPr>
           <p:nvPr/>
         </p:nvCxnSpPr>
         <p:spPr>
-          <a:xfrm xmlns:a="http://schemas.openxmlformats.org/drawingml/2006/main">
-            <a:off x="345486" y="872723"/>
-            <a:ext cx="11501023" cy="0"/>
-          </a:xfrm>
-          <a:prstGeom xmlns:a="http://schemas.openxmlformats.org/drawingml/2006/main" prst="line">
+          <a:xfrm flipH="1">
+            <a:off x="11700783" y="1301726"/>
+            <a:ext cx="146154" cy="200055"/>
+          </a:xfrm>
+          <a:prstGeom prst="line">
             <a:avLst/>
           </a:prstGeom>
-          <a:ln xmlns:a="http://schemas.openxmlformats.org/drawingml/2006/main">
+          <a:ln cap="rnd">
             <a:solidFill>
               <a:schemeClr val="tx2"/>
             </a:solidFill>
           </a:ln>
         </p:spPr>
         <p:style>
-          <a:lnRef xmlns:a="http://schemas.openxmlformats.org/drawingml/2006/main" idx="2">
+          <a:lnRef idx="2">
             <a:schemeClr val="accent1"/>
           </a:lnRef>
-          <a:fillRef xmlns:a="http://schemas.openxmlformats.org/drawingml/2006/main" idx="0">
+          <a:fillRef idx="0">
             <a:schemeClr val="accent1"/>
           </a:fillRef>
-          <a:effectRef xmlns:a="http://schemas.openxmlformats.org/drawingml/2006/main" idx="1">
+          <a:effectRef idx="1">
             <a:schemeClr val="accent1"/>
           </a:effectRef>
-          <a:fontRef xmlns:a="http://schemas.openxmlformats.org/drawingml/2006/main" idx="minor">
+          <a:fontRef idx="minor">
             <a:schemeClr val="tx1"/>
           </a:fontRef>
         </p:style>
       </p:cxnSp>
       <p:cxnSp>
         <p:nvCxnSpPr>
-          <p:cNvPr id="10004" name="直线连接符 78">
-            <a:extLst xmlns:a="http://schemas.openxmlformats.org/drawingml/2006/main">
+          <p:cNvPr id="42" name="直线连接符 41">
+            <a:extLst>
               <a:ext uri="{FF2B5EF4-FFF2-40B4-BE49-F238E27FC236}">
-                <a16:creationId xmlns:a16="http://schemas.microsoft.com/office/drawing/2014/main" id="{7B9A5B20-BEFA-0ADD-2D2A-70ED7D6302C9}"/>
+                <a16:creationId xmlns:a16="http://schemas.microsoft.com/office/drawing/2014/main" id="{B858C90B-882B-9F0F-E1C6-32A81A3999F1}"/>
               </a:ext>
             </a:extLst>
           </p:cNvPr>
           <p:cNvCxnSpPr>
-            <a:cxnSpLocks xmlns:a="http://schemas.openxmlformats.org/drawingml/2006/main"/>
+            <a:cxnSpLocks/>
           </p:cNvCxnSpPr>
           <p:nvPr/>
         </p:nvCxnSpPr>
         <p:spPr>
-          <a:xfrm xmlns:a="http://schemas.openxmlformats.org/drawingml/2006/main">
-            <a:off x="345486" y="2444416"/>
-            <a:ext cx="4093812" cy="0"/>
-          </a:xfrm>
-          <a:prstGeom xmlns:a="http://schemas.openxmlformats.org/drawingml/2006/main" prst="line">
+          <a:xfrm>
+            <a:off x="11696607" y="1082253"/>
+            <a:ext cx="154505" cy="209998"/>
+          </a:xfrm>
+          <a:prstGeom prst="line">
             <a:avLst/>
           </a:prstGeom>
-          <a:ln xmlns:a="http://schemas.openxmlformats.org/drawingml/2006/main">
+          <a:ln cap="rnd">
             <a:solidFill>
               <a:schemeClr val="tx2"/>
             </a:solidFill>
           </a:ln>
         </p:spPr>
         <p:style>
-          <a:lnRef xmlns:a="http://schemas.openxmlformats.org/drawingml/2006/main" idx="2">
+          <a:lnRef idx="2">
             <a:schemeClr val="accent1"/>
           </a:lnRef>
-          <a:fillRef xmlns:a="http://schemas.openxmlformats.org/drawingml/2006/main" idx="0">
+          <a:fillRef idx="0">
             <a:schemeClr val="accent1"/>
           </a:fillRef>
-          <a:effectRef xmlns:a="http://schemas.openxmlformats.org/drawingml/2006/main" idx="1">
+          <a:effectRef idx="1">
             <a:schemeClr val="accent1"/>
           </a:effectRef>
-          <a:fontRef xmlns:a="http://schemas.openxmlformats.org/drawingml/2006/main" idx="minor">
+          <a:fontRef idx="minor">
+            <a:schemeClr val="tx1"/>
+          </a:fontRef>
+        </p:style>
+      </p:cxnSp>
+      <p:sp>
+        <p:nvSpPr>
+          <p:cNvPr id="44" name="矩形 43">
+            <a:extLst>
+              <a:ext uri="{FF2B5EF4-FFF2-40B4-BE49-F238E27FC236}">
+                <a16:creationId xmlns:a16="http://schemas.microsoft.com/office/drawing/2014/main" id="{D7EA58E7-1FB5-602C-80D7-AECF5131149E}"/>
+              </a:ext>
+            </a:extLst>
+          </p:cNvPr>
+          <p:cNvSpPr/>
+          <p:nvPr/>
+        </p:nvSpPr>
+        <p:spPr>
+          <a:xfrm>
+            <a:off x="2003918" y="4248001"/>
+            <a:ext cx="3126882" cy="1409784"/>
+          </a:xfrm>
+          <a:prstGeom prst="rect">
+            <a:avLst/>
+          </a:prstGeom>
+          <a:solidFill>
+            <a:schemeClr val="bg1">
+              <a:lumMod val="95000"/>
+            </a:schemeClr>
+          </a:solidFill>
+          <a:ln w="19050">
+            <a:noFill/>
+          </a:ln>
+        </p:spPr>
+        <p:style>
+          <a:lnRef idx="2">
+            <a:schemeClr val="accent1">
+              <a:shade val="15000"/>
+            </a:schemeClr>
+          </a:lnRef>
+          <a:fillRef idx="1">
+            <a:schemeClr val="accent1"/>
+          </a:fillRef>
+          <a:effectRef idx="0">
+            <a:schemeClr val="accent1"/>
+          </a:effectRef>
+          <a:fontRef idx="minor">
+            <a:schemeClr val="lt1"/>
+          </a:fontRef>
+        </p:style>
+        <p:txBody>
+          <a:bodyPr rtlCol="0" anchor="ctr"/>
+          <a:lstStyle/>
+          <a:p>
+            <a:r>
+              <a:rPr lang="en-US" altLang="zh-CN" dirty="0">
+                <a:solidFill>
+                  <a:schemeClr val="tx1"/>
+                </a:solidFill>
+              </a:rPr>
+              <a:t>Yada should capture market trends and meet the increasing demand for elderly care services, as a reputable company. </a:t>
+            </a:r>
+          </a:p>
+        </p:txBody>
+      </p:sp>
+      <p:sp>
+        <p:nvSpPr>
+          <p:cNvPr id="46" name="圆角矩形 45">
+            <a:extLst>
+              <a:ext uri="{FF2B5EF4-FFF2-40B4-BE49-F238E27FC236}">
+                <a16:creationId xmlns:a16="http://schemas.microsoft.com/office/drawing/2014/main" id="{48465E15-3D27-AC57-3B36-44A500942880}"/>
+              </a:ext>
+            </a:extLst>
+          </p:cNvPr>
+          <p:cNvSpPr/>
+          <p:nvPr/>
+        </p:nvSpPr>
+        <p:spPr>
+          <a:xfrm>
+            <a:off x="2003918" y="5915287"/>
+            <a:ext cx="9842591" cy="400108"/>
+          </a:xfrm>
+          <a:prstGeom prst="roundRect">
+            <a:avLst>
+              <a:gd name="adj" fmla="val 0"/>
+            </a:avLst>
+          </a:prstGeom>
+          <a:solidFill>
+            <a:schemeClr val="tx2"/>
+          </a:solidFill>
+          <a:ln w="6350">
+            <a:noFill/>
+          </a:ln>
+        </p:spPr>
+        <p:style>
+          <a:lnRef idx="2">
+            <a:schemeClr val="accent1">
+              <a:shade val="15000"/>
+            </a:schemeClr>
+          </a:lnRef>
+          <a:fillRef idx="1">
+            <a:schemeClr val="accent1"/>
+          </a:fillRef>
+          <a:effectRef idx="0">
+            <a:schemeClr val="accent1"/>
+          </a:effectRef>
+          <a:fontRef idx="minor">
+            <a:schemeClr val="lt1"/>
+          </a:fontRef>
+        </p:style>
+        <p:txBody>
+          <a:bodyPr rtlCol="0" anchor="ctr"/>
+          <a:lstStyle/>
+          <a:p>
+            <a:pPr algn="ctr"/>
+            <a:r>
+              <a:rPr kumimoji="1" lang="en-US" altLang="zh-CN" b="1" dirty="0"/>
+              <a:t>Achieve healthy revenue growth in Mainland China senior living &amp; care market</a:t>
+            </a:r>
+            <a:endParaRPr kumimoji="1" lang="zh-CN" altLang="en-US" b="1" dirty="0"/>
+          </a:p>
+        </p:txBody>
+      </p:sp>
+      <p:sp>
+        <p:nvSpPr>
+          <p:cNvPr id="8" name="矩形 7">
+            <a:extLst>
+              <a:ext uri="{FF2B5EF4-FFF2-40B4-BE49-F238E27FC236}">
+                <a16:creationId xmlns:a16="http://schemas.microsoft.com/office/drawing/2014/main" id="{AF98BE3B-63F5-6F17-7C83-2FB7961EAA1A}"/>
+              </a:ext>
+            </a:extLst>
+          </p:cNvPr>
+          <p:cNvSpPr/>
+          <p:nvPr/>
+        </p:nvSpPr>
+        <p:spPr>
+          <a:xfrm>
+            <a:off x="2003918" y="1704825"/>
+            <a:ext cx="3126882" cy="2280449"/>
+          </a:xfrm>
+          <a:prstGeom prst="rect">
+            <a:avLst/>
+          </a:prstGeom>
+          <a:solidFill>
+            <a:schemeClr val="bg1"/>
+          </a:solidFill>
+          <a:ln>
+            <a:noFill/>
+          </a:ln>
+          <a:effectLst>
+            <a:outerShdw blurRad="50800" dist="38100" dir="2700000" algn="tl" rotWithShape="0">
+              <a:prstClr val="black">
+                <a:alpha val="10000"/>
+              </a:prstClr>
+            </a:outerShdw>
+          </a:effectLst>
+        </p:spPr>
+        <p:style>
+          <a:lnRef idx="2">
+            <a:schemeClr val="accent1">
+              <a:shade val="15000"/>
+            </a:schemeClr>
+          </a:lnRef>
+          <a:fillRef idx="1">
+            <a:schemeClr val="accent1"/>
+          </a:fillRef>
+          <a:effectRef idx="0">
+            <a:schemeClr val="accent1"/>
+          </a:effectRef>
+          <a:fontRef idx="minor">
+            <a:schemeClr val="lt1"/>
+          </a:fontRef>
+        </p:style>
+        <p:txBody>
+          <a:bodyPr rtlCol="0" anchor="ctr"/>
+          <a:lstStyle/>
+          <a:p>
+            <a:pPr marL="285750" indent="-285750">
+              <a:buFont typeface="Arial" panose="020B0604020202020204" pitchFamily="34" charset="0"/>
+              <a:buChar char="•"/>
+            </a:pPr>
+            <a:r>
+              <a:rPr kumimoji="1" lang="en-US" altLang="zh-CN" dirty="0">
+                <a:solidFill>
+                  <a:schemeClr val="tx1"/>
+                </a:solidFill>
+              </a:rPr>
+              <a:t>Policy Sorting</a:t>
+            </a:r>
+          </a:p>
+          <a:p>
+            <a:pPr marL="285750" indent="-285750">
+              <a:buFont typeface="Arial" panose="020B0604020202020204" pitchFamily="34" charset="0"/>
+              <a:buChar char="•"/>
+            </a:pPr>
+            <a:r>
+              <a:rPr kumimoji="1" lang="en-US" altLang="zh-CN" dirty="0">
+                <a:solidFill>
+                  <a:schemeClr val="tx1"/>
+                </a:solidFill>
+              </a:rPr>
+              <a:t>Market Overview</a:t>
+            </a:r>
+          </a:p>
+          <a:p>
+            <a:pPr marL="285750" indent="-285750">
+              <a:buFont typeface="Arial" panose="020B0604020202020204" pitchFamily="34" charset="0"/>
+              <a:buChar char="•"/>
+            </a:pPr>
+            <a:r>
+              <a:rPr kumimoji="1" lang="en-US" altLang="zh-CN" dirty="0">
+                <a:solidFill>
+                  <a:schemeClr val="tx1"/>
+                </a:solidFill>
+              </a:rPr>
+              <a:t>Customer Analysis</a:t>
+            </a:r>
+          </a:p>
+          <a:p>
+            <a:pPr marL="285750" indent="-285750">
+              <a:buFont typeface="Arial" panose="020B0604020202020204" pitchFamily="34" charset="0"/>
+              <a:buChar char="•"/>
+            </a:pPr>
+            <a:r>
+              <a:rPr kumimoji="1" lang="en-US" altLang="zh-CN" dirty="0">
+                <a:solidFill>
+                  <a:schemeClr val="tx1"/>
+                </a:solidFill>
+              </a:rPr>
+              <a:t>Industry Chain</a:t>
+            </a:r>
+          </a:p>
+          <a:p>
+            <a:pPr marL="285750" indent="-285750">
+              <a:buFont typeface="Arial" panose="020B0604020202020204" pitchFamily="34" charset="0"/>
+              <a:buChar char="•"/>
+            </a:pPr>
+            <a:r>
+              <a:rPr kumimoji="1" lang="en-US" altLang="zh-CN" dirty="0">
+                <a:solidFill>
+                  <a:schemeClr val="tx1"/>
+                </a:solidFill>
+              </a:rPr>
+              <a:t>Competitive Analysis</a:t>
+            </a:r>
+          </a:p>
+          <a:p>
+            <a:pPr marL="285750" indent="-285750">
+              <a:buFont typeface="Arial" panose="020B0604020202020204" pitchFamily="34" charset="0"/>
+              <a:buChar char="•"/>
+            </a:pPr>
+            <a:r>
+              <a:rPr kumimoji="1" lang="en-US" altLang="zh-CN" dirty="0">
+                <a:solidFill>
+                  <a:schemeClr val="tx1"/>
+                </a:solidFill>
+              </a:rPr>
+              <a:t>Pain Points</a:t>
+            </a:r>
+            <a:endParaRPr kumimoji="1" lang="zh-CN" altLang="en-US" dirty="0">
+              <a:solidFill>
+                <a:schemeClr val="tx1"/>
+              </a:solidFill>
+            </a:endParaRPr>
+          </a:p>
+        </p:txBody>
+      </p:sp>
+      <p:pic>
+        <p:nvPicPr>
+          <p:cNvPr id="55" name="图形 54">
+            <a:extLst>
+              <a:ext uri="{FF2B5EF4-FFF2-40B4-BE49-F238E27FC236}">
+                <a16:creationId xmlns:a16="http://schemas.microsoft.com/office/drawing/2014/main" id="{F4D7DA8E-4E03-A554-6B44-D5C19068CA38}"/>
+              </a:ext>
+            </a:extLst>
+          </p:cNvPr>
+          <p:cNvPicPr>
+            <a:picLocks noChangeAspect="1"/>
+          </p:cNvPicPr>
+          <p:nvPr/>
+        </p:nvPicPr>
+        <p:blipFill>
+          <a:blip>
+            <a:extLst>
+              <a:ext uri="{96DAC541-7B7A-43D3-8B79-37D633B846F1}">
+                <asvg:svgBlip xmlns:asvg="http://schemas.microsoft.com/office/drawing/2016/SVG/main" r:embed="rId3"/>
+              </a:ext>
+            </a:extLst>
+          </a:blip>
+          <a:srcRect/>
+          <a:stretch/>
+        </p:blipFill>
+        <p:spPr>
+          <a:xfrm>
+            <a:off x="10888462" y="6534398"/>
+            <a:ext cx="762838" cy="203586"/>
+          </a:xfrm>
+          <a:prstGeom prst="rect">
+            <a:avLst/>
+          </a:prstGeom>
+        </p:spPr>
+      </p:pic>
+      <p:sp>
+        <p:nvSpPr>
+          <p:cNvPr id="56" name="文本框 55">
+            <a:extLst>
+              <a:ext uri="{FF2B5EF4-FFF2-40B4-BE49-F238E27FC236}">
+                <a16:creationId xmlns:a16="http://schemas.microsoft.com/office/drawing/2014/main" id="{96436AE1-1181-444C-84DF-D21DFE98E7DC}"/>
+              </a:ext>
+            </a:extLst>
+          </p:cNvPr>
+          <p:cNvSpPr txBox="1"/>
+          <p:nvPr/>
+        </p:nvSpPr>
+        <p:spPr>
+          <a:xfrm>
+            <a:off x="297118" y="6510854"/>
+            <a:ext cx="6835202" cy="276999"/>
+          </a:xfrm>
+          <a:prstGeom prst="rect">
+            <a:avLst/>
+          </a:prstGeom>
+          <a:noFill/>
+        </p:spPr>
+        <p:txBody>
+          <a:bodyPr wrap="square" rtlCol="0" anchor="b">
+            <a:spAutoFit/>
+          </a:bodyPr>
+          <a:lstStyle/>
+          <a:p>
+            <a:r>
+              <a:rPr kumimoji="1" lang="en-US" altLang="zh-CN" sz="1200" dirty="0">
+                <a:solidFill>
+                  <a:schemeClr val="tx1">
+                    <a:lumMod val="50000"/>
+                    <a:lumOff val="50000"/>
+                  </a:schemeClr>
+                </a:solidFill>
+              </a:rPr>
+              <a:t>Source: expert interviews, literature review, analysis (Aptos, Regular, 12pt)</a:t>
+            </a:r>
+            <a:endParaRPr kumimoji="1" lang="zh-CN" altLang="en-US" sz="1400" dirty="0">
+              <a:solidFill>
+                <a:schemeClr val="tx1">
+                  <a:lumMod val="50000"/>
+                  <a:lumOff val="50000"/>
+                </a:schemeClr>
+              </a:solidFill>
+            </a:endParaRPr>
+          </a:p>
+        </p:txBody>
+      </p:sp>
+      <p:sp>
+        <p:nvSpPr>
+          <p:cNvPr id="57" name="文本框 56">
+            <a:extLst>
+              <a:ext uri="{FF2B5EF4-FFF2-40B4-BE49-F238E27FC236}">
+                <a16:creationId xmlns:a16="http://schemas.microsoft.com/office/drawing/2014/main" id="{BA7811FA-D8C2-5661-9AB4-B07CA1ABE26E}"/>
+              </a:ext>
+            </a:extLst>
+          </p:cNvPr>
+          <p:cNvSpPr txBox="1"/>
+          <p:nvPr/>
+        </p:nvSpPr>
+        <p:spPr>
+          <a:xfrm>
+            <a:off x="11150825" y="6480075"/>
+            <a:ext cx="824276" cy="307777"/>
+          </a:xfrm>
+          <a:prstGeom prst="rect">
+            <a:avLst/>
+          </a:prstGeom>
+          <a:noFill/>
+        </p:spPr>
+        <p:txBody>
+          <a:bodyPr wrap="square" rtlCol="0" anchor="b">
+            <a:spAutoFit/>
+          </a:bodyPr>
+          <a:lstStyle/>
+          <a:p>
+            <a:pPr algn="r"/>
+            <a:fld id="{C6A1A2BA-6D83-C443-9823-3CD30E13C10E}" type="slidenum">
+              <a:rPr kumimoji="1" lang="zh-CN" altLang="en-US" sz="1400" smtClean="0">
+                <a:solidFill>
+                  <a:schemeClr val="tx1">
+                    <a:lumMod val="50000"/>
+                    <a:lumOff val="50000"/>
+                  </a:schemeClr>
+                </a:solidFill>
+              </a:rPr>
+              <a:t>2</a:t>
+            </a:fld>
+            <a:endParaRPr kumimoji="1" lang="zh-CN" altLang="en-US" sz="1400" dirty="0">
+              <a:solidFill>
+                <a:schemeClr val="tx1">
+                  <a:lumMod val="50000"/>
+                  <a:lumOff val="50000"/>
+                </a:schemeClr>
+              </a:solidFill>
+            </a:endParaRPr>
+          </a:p>
+        </p:txBody>
+      </p:sp>
+    </p:spTree>
+    <p:extLst>
+      <p:ext uri="{BB962C8B-B14F-4D97-AF65-F5344CB8AC3E}">
+        <p14:creationId xmlns:p14="http://schemas.microsoft.com/office/powerpoint/2010/main" val="72835610"/>
+      </p:ext>
+    </p:extLst>
+  </p:cSld>
+  <p:clrMapOvr>
+    <a:masterClrMapping/>
+  </p:clrMapOvr>
+</p:sld>
+</file>
+
+<file path=ppt/slides/slide3.xml><?xml version="1.0" encoding="utf-8"?>
+<p:sld xmlns:a="http://schemas.openxmlformats.org/drawingml/2006/main" xmlns:r="http://schemas.openxmlformats.org/officeDocument/2006/relationships" xmlns:p="http://schemas.openxmlformats.org/presentationml/2006/main">
+  <p:cSld>
+    <p:spTree>
+      <p:nvGrpSpPr>
+        <p:cNvPr id="1" name=""/>
+        <p:cNvGrpSpPr/>
+        <p:nvPr/>
+      </p:nvGrpSpPr>
+      <p:grpSpPr>
+        <a:xfrm>
+          <a:off x="0" y="0"/>
+          <a:ext cx="0" cy="0"/>
+          <a:chOff x="0" y="0"/>
+          <a:chExt cx="0" cy="0"/>
+        </a:xfrm>
+      </p:grpSpPr>
+      <p:sp>
+        <p:nvSpPr>
+          <p:cNvPr id="4" name="文本框 3">
+            <a:extLst>
+              <a:ext uri="{FF2B5EF4-FFF2-40B4-BE49-F238E27FC236}">
+                <a16:creationId xmlns:a16="http://schemas.microsoft.com/office/drawing/2014/main" id="{0E1CE934-85F8-0826-B36E-D69350947AEA}"/>
+              </a:ext>
+            </a:extLst>
+          </p:cNvPr>
+          <p:cNvSpPr txBox="1"/>
+          <p:nvPr/>
+        </p:nvSpPr>
+        <p:spPr>
+          <a:xfrm>
+            <a:off x="244988" y="31016"/>
+            <a:ext cx="10063933" cy="830997"/>
+          </a:xfrm>
+          <a:prstGeom prst="rect">
+            <a:avLst/>
+          </a:prstGeom>
+          <a:noFill/>
+        </p:spPr>
+        <p:txBody>
+          <a:bodyPr wrap="square" anchor="ctr">
+            <a:spAutoFit/>
+          </a:bodyPr>
+          <a:lstStyle/>
+          <a:p>
+            <a:r>
+              <a:rPr kumimoji="1" lang="en-US" altLang="zh-CN" sz="2400" b="1" dirty="0">
+                <a:latin typeface="Aptos Narrow" panose="020B0004020202020204" pitchFamily="34" charset="0"/>
+                <a:ea typeface="Palatino" pitchFamily="2" charset="0"/>
+                <a:cs typeface="Mongolian Baiti" panose="03000500000000000000" pitchFamily="66" charset="0"/>
+              </a:rPr>
+              <a:t>Building Long- Term Value in Australia: Co-developing BESS with ongoing Australian solar projects prevents a recurrence of volatility driven weak returns</a:t>
+            </a:r>
+          </a:p>
+        </p:txBody>
+      </p:sp>
+      <p:cxnSp>
+        <p:nvCxnSpPr>
+          <p:cNvPr id="5" name="直线连接符 4">
+            <a:extLst>
+              <a:ext uri="{FF2B5EF4-FFF2-40B4-BE49-F238E27FC236}">
+                <a16:creationId xmlns:a16="http://schemas.microsoft.com/office/drawing/2014/main" id="{92DE8C43-F71D-E261-E900-A4AF4124A7CC}"/>
+              </a:ext>
+            </a:extLst>
+          </p:cNvPr>
+          <p:cNvCxnSpPr>
+            <a:cxnSpLocks/>
+          </p:cNvCxnSpPr>
+          <p:nvPr/>
+        </p:nvCxnSpPr>
+        <p:spPr>
+          <a:xfrm>
+            <a:off x="345486" y="872723"/>
+            <a:ext cx="11501023" cy="0"/>
+          </a:xfrm>
+          <a:prstGeom prst="line">
+            <a:avLst/>
+          </a:prstGeom>
+          <a:ln>
+            <a:solidFill>
+              <a:schemeClr val="tx2"/>
+            </a:solidFill>
+          </a:ln>
+        </p:spPr>
+        <p:style>
+          <a:lnRef idx="2">
+            <a:schemeClr val="accent1"/>
+          </a:lnRef>
+          <a:fillRef idx="0">
+            <a:schemeClr val="accent1"/>
+          </a:fillRef>
+          <a:effectRef idx="1">
+            <a:schemeClr val="accent1"/>
+          </a:effectRef>
+          <a:fontRef idx="minor">
+            <a:schemeClr val="tx1"/>
+          </a:fontRef>
+        </p:style>
+      </p:cxnSp>
+      <p:graphicFrame>
+        <p:nvGraphicFramePr>
+          <p:cNvPr id="7" name="表格 6">
+            <a:extLst>
+              <a:ext uri="{FF2B5EF4-FFF2-40B4-BE49-F238E27FC236}">
+                <a16:creationId xmlns:a16="http://schemas.microsoft.com/office/drawing/2014/main" id="{B6BFAE83-F5E5-D2C2-386B-D95345B9B9A1}"/>
+              </a:ext>
+            </a:extLst>
+          </p:cNvPr>
+          <p:cNvGraphicFramePr>
+            <a:graphicFrameLocks noGrp="1"/>
+          </p:cNvGraphicFramePr>
+          <p:nvPr>
+            <p:extLst>
+              <p:ext uri="{D42A27DB-BD31-4B8C-83A1-F6EECF244321}">
+                <p14:modId xmlns:p14="http://schemas.microsoft.com/office/powerpoint/2010/main" val="480228421"/>
+              </p:ext>
+            </p:extLst>
+          </p:nvPr>
+        </p:nvGraphicFramePr>
+        <p:xfrm>
+          <a:off x="345486" y="1150694"/>
+          <a:ext cx="5347102" cy="1371600"/>
+        </p:xfrm>
+        <a:graphic>
+          <a:graphicData uri="http://schemas.openxmlformats.org/drawingml/2006/table">
+            <a:tbl>
+              <a:tblPr firstRow="1" bandRow="1">
+                <a:effectLst/>
+                <a:tableStyleId>{5C22544A-7EE6-4342-B048-85BDC9FD1C3A}</a:tableStyleId>
+              </a:tblPr>
+              <a:tblGrid>
+                <a:gridCol w="1191766">
+                  <a:extLst>
+                    <a:ext uri="{9D8B030D-6E8A-4147-A177-3AD203B41FA5}">
+                      <a16:colId xmlns:a16="http://schemas.microsoft.com/office/drawing/2014/main" val="505092938"/>
+                    </a:ext>
+                  </a:extLst>
+                </a:gridCol>
+                <a:gridCol w="4155336">
+                  <a:extLst>
+                    <a:ext uri="{9D8B030D-6E8A-4147-A177-3AD203B41FA5}">
+                      <a16:colId xmlns:a16="http://schemas.microsoft.com/office/drawing/2014/main" val="2270245355"/>
+                    </a:ext>
+                  </a:extLst>
+                </a:gridCol>
+              </a:tblGrid>
+              <a:tr h="297153">
+                <a:tc>
+                  <a:txBody>
+                    <a:bodyPr/>
+                    <a:lstStyle/>
+                    <a:p>
+                      <a:pPr algn="r"/>
+                      <a:r>
+                        <a:rPr lang="en-US" altLang="zh-CN" sz="2400" b="1" i="0" dirty="0">
+                          <a:solidFill>
+                            <a:schemeClr val="tx2"/>
+                          </a:solidFill>
+                          <a:latin typeface="Aptos Narrow" panose="020B0004020202020204" pitchFamily="34" charset="0"/>
+                        </a:rPr>
+                        <a:t>23</a:t>
+                      </a:r>
+                      <a:r>
+                        <a:rPr lang="en-US" altLang="zh-CN" sz="1600" b="1" i="0" dirty="0">
+                          <a:solidFill>
+                            <a:schemeClr val="tx2"/>
+                          </a:solidFill>
+                          <a:latin typeface="Aptos Narrow" panose="020B0004020202020204" pitchFamily="34" charset="0"/>
+                        </a:rPr>
+                        <a:t>%</a:t>
+                      </a:r>
+                      <a:endParaRPr lang="zh-CN" altLang="en-US" sz="2400" b="1" i="0" dirty="0">
+                        <a:solidFill>
+                          <a:schemeClr val="tx2"/>
+                        </a:solidFill>
+                        <a:latin typeface="Aptos Narrow" panose="020B0004020202020204" pitchFamily="34" charset="0"/>
+                      </a:endParaRPr>
+                    </a:p>
+                  </a:txBody>
+                  <a:tcPr anchor="ctr">
+                    <a:lnL w="76200" cap="flat" cmpd="sng" algn="ctr">
+                      <a:solidFill>
+                        <a:schemeClr val="bg2"/>
+                      </a:solidFill>
+                      <a:prstDash val="solid"/>
+                      <a:round/>
+                      <a:headEnd type="none" w="med" len="med"/>
+                      <a:tailEnd type="none" w="med" len="med"/>
+                    </a:lnL>
+                    <a:lnR w="76200" cap="flat" cmpd="sng" algn="ctr">
+                      <a:solidFill>
+                        <a:schemeClr val="bg1"/>
+                      </a:solidFill>
+                      <a:prstDash val="solid"/>
+                      <a:round/>
+                      <a:headEnd type="none" w="med" len="med"/>
+                      <a:tailEnd type="none" w="med" len="med"/>
+                    </a:lnR>
+                    <a:lnT w="76200" cap="flat" cmpd="sng" algn="ctr">
+                      <a:noFill/>
+                      <a:prstDash val="solid"/>
+                      <a:round/>
+                      <a:headEnd type="none" w="med" len="med"/>
+                      <a:tailEnd type="none" w="med" len="med"/>
+                    </a:lnT>
+                    <a:lnB w="76200" cap="flat" cmpd="sng" algn="ctr">
+                      <a:noFill/>
+                      <a:prstDash val="solid"/>
+                      <a:round/>
+                      <a:headEnd type="none" w="med" len="med"/>
+                      <a:tailEnd type="none" w="med" len="med"/>
+                    </a:lnB>
+                    <a:lnTlToBr w="12700" cmpd="sng">
+                      <a:noFill/>
+                      <a:prstDash val="solid"/>
+                    </a:lnTlToBr>
+                    <a:lnBlToTr w="12700" cmpd="sng">
+                      <a:noFill/>
+                      <a:prstDash val="solid"/>
+                    </a:lnBlToTr>
+                    <a:solidFill>
+                      <a:schemeClr val="bg1"/>
+                    </a:solidFill>
+                  </a:tcPr>
+                </a:tc>
+                <a:tc>
+                  <a:txBody>
+                    <a:bodyPr/>
+                    <a:lstStyle/>
+                    <a:p>
+                      <a:pPr algn="l"/>
+                      <a:r>
+                        <a:rPr lang="en-US" altLang="zh-CN" sz="1600" b="0" dirty="0">
+                          <a:solidFill>
+                            <a:schemeClr val="tx1"/>
+                          </a:solidFill>
+                        </a:rPr>
+                        <a:t>record </a:t>
+                      </a:r>
+                      <a:r>
+                        <a:rPr lang="en-US" altLang="zh-CN" sz="1600" b="1" dirty="0">
+                          <a:solidFill>
+                            <a:schemeClr val="tx1"/>
+                          </a:solidFill>
+                        </a:rPr>
+                        <a:t>high negative price </a:t>
+                      </a:r>
+                      <a:r>
+                        <a:rPr lang="en-US" altLang="zh-CN" sz="1600" b="0" dirty="0">
+                          <a:solidFill>
+                            <a:schemeClr val="tx1"/>
+                          </a:solidFill>
+                        </a:rPr>
+                        <a:t>dispatch interval</a:t>
+                      </a:r>
+                      <a:endParaRPr lang="zh-CN" altLang="en-US" sz="1600" b="0" dirty="0">
+                        <a:solidFill>
+                          <a:schemeClr val="tx1"/>
+                        </a:solidFill>
+                      </a:endParaRPr>
+                    </a:p>
+                  </a:txBody>
+                  <a:tcPr anchor="ctr">
+                    <a:lnL w="76200" cap="flat" cmpd="sng" algn="ctr">
+                      <a:solidFill>
+                        <a:schemeClr val="bg1"/>
+                      </a:solidFill>
+                      <a:prstDash val="solid"/>
+                      <a:round/>
+                      <a:headEnd type="none" w="med" len="med"/>
+                      <a:tailEnd type="none" w="med" len="med"/>
+                    </a:lnL>
+                    <a:lnR w="76200" cap="flat" cmpd="sng" algn="ctr">
+                      <a:solidFill>
+                        <a:schemeClr val="bg1"/>
+                      </a:solidFill>
+                      <a:prstDash val="solid"/>
+                      <a:round/>
+                      <a:headEnd type="none" w="med" len="med"/>
+                      <a:tailEnd type="none" w="med" len="med"/>
+                    </a:lnR>
+                    <a:lnT w="76200" cap="flat" cmpd="sng" algn="ctr">
+                      <a:noFill/>
+                      <a:prstDash val="solid"/>
+                      <a:round/>
+                      <a:headEnd type="none" w="med" len="med"/>
+                      <a:tailEnd type="none" w="med" len="med"/>
+                    </a:lnT>
+                    <a:lnB w="76200" cap="flat" cmpd="sng" algn="ctr">
+                      <a:noFill/>
+                      <a:prstDash val="solid"/>
+                      <a:round/>
+                      <a:headEnd type="none" w="med" len="med"/>
+                      <a:tailEnd type="none" w="med" len="med"/>
+                    </a:lnB>
+                    <a:lnTlToBr w="12700" cmpd="sng">
+                      <a:noFill/>
+                      <a:prstDash val="solid"/>
+                    </a:lnTlToBr>
+                    <a:lnBlToTr w="12700" cmpd="sng">
+                      <a:noFill/>
+                      <a:prstDash val="solid"/>
+                    </a:lnBlToTr>
+                    <a:solidFill>
+                      <a:schemeClr val="bg1"/>
+                    </a:solidFill>
+                  </a:tcPr>
+                </a:tc>
+                <a:extLst>
+                  <a:ext uri="{0D108BD9-81ED-4DB2-BD59-A6C34878D82A}">
+                    <a16:rowId xmlns:a16="http://schemas.microsoft.com/office/drawing/2014/main" val="3866418244"/>
+                  </a:ext>
+                </a:extLst>
+              </a:tr>
+              <a:tr h="297153">
+                <a:tc>
+                  <a:txBody>
+                    <a:bodyPr/>
+                    <a:lstStyle/>
+                    <a:p>
+                      <a:pPr algn="r"/>
+                      <a:r>
+                        <a:rPr lang="en-US" altLang="zh-CN" sz="2400" b="1" i="0" dirty="0">
+                          <a:solidFill>
+                            <a:schemeClr val="tx2"/>
+                          </a:solidFill>
+                          <a:latin typeface="Aptos Narrow" panose="020B0004020202020204" pitchFamily="34" charset="0"/>
+                        </a:rPr>
+                        <a:t>10</a:t>
+                      </a:r>
+                      <a:r>
+                        <a:rPr lang="en-US" altLang="zh-CN" sz="1600" b="1" i="0" dirty="0">
+                          <a:solidFill>
+                            <a:schemeClr val="tx2"/>
+                          </a:solidFill>
+                          <a:latin typeface="Aptos Narrow" panose="020B0004020202020204" pitchFamily="34" charset="0"/>
+                        </a:rPr>
+                        <a:t>GW+</a:t>
+                      </a:r>
+                      <a:endParaRPr lang="zh-CN" altLang="en-US" sz="2400" b="1" i="0" dirty="0">
+                        <a:solidFill>
+                          <a:schemeClr val="tx2"/>
+                        </a:solidFill>
+                        <a:latin typeface="Aptos Narrow" panose="020B0004020202020204" pitchFamily="34" charset="0"/>
+                      </a:endParaRPr>
+                    </a:p>
+                  </a:txBody>
+                  <a:tcPr anchor="ctr">
+                    <a:lnL w="76200" cap="flat" cmpd="sng" algn="ctr">
+                      <a:solidFill>
+                        <a:schemeClr val="bg2"/>
+                      </a:solidFill>
+                      <a:prstDash val="solid"/>
+                      <a:round/>
+                      <a:headEnd type="none" w="med" len="med"/>
+                      <a:tailEnd type="none" w="med" len="med"/>
+                    </a:lnL>
+                    <a:lnR w="76200" cap="flat" cmpd="sng" algn="ctr">
+                      <a:solidFill>
+                        <a:schemeClr val="bg1"/>
+                      </a:solidFill>
+                      <a:prstDash val="solid"/>
+                      <a:round/>
+                      <a:headEnd type="none" w="med" len="med"/>
+                      <a:tailEnd type="none" w="med" len="med"/>
+                    </a:lnR>
+                    <a:lnT w="76200" cap="flat" cmpd="sng" algn="ctr">
+                      <a:noFill/>
+                      <a:prstDash val="solid"/>
+                      <a:round/>
+                      <a:headEnd type="none" w="med" len="med"/>
+                      <a:tailEnd type="none" w="med" len="med"/>
+                    </a:lnT>
+                    <a:lnB w="76200" cap="flat" cmpd="sng" algn="ctr">
+                      <a:noFill/>
+                      <a:prstDash val="solid"/>
+                      <a:round/>
+                      <a:headEnd type="none" w="med" len="med"/>
+                      <a:tailEnd type="none" w="med" len="med"/>
+                    </a:lnB>
+                    <a:lnTlToBr w="12700" cmpd="sng">
+                      <a:noFill/>
+                      <a:prstDash val="solid"/>
+                    </a:lnTlToBr>
+                    <a:lnBlToTr w="12700" cmpd="sng">
+                      <a:noFill/>
+                      <a:prstDash val="solid"/>
+                    </a:lnBlToTr>
+                    <a:solidFill>
+                      <a:schemeClr val="bg1"/>
+                    </a:solidFill>
+                  </a:tcPr>
+                </a:tc>
+                <a:tc>
+                  <a:txBody>
+                    <a:bodyPr/>
+                    <a:lstStyle/>
+                    <a:p>
+                      <a:pPr algn="l"/>
+                      <a:r>
+                        <a:rPr lang="en-US" altLang="zh-CN" sz="1600" dirty="0">
+                          <a:solidFill>
+                            <a:schemeClr val="tx1"/>
+                          </a:solidFill>
+                        </a:rPr>
+                        <a:t>project </a:t>
+                      </a:r>
+                      <a:r>
+                        <a:rPr lang="en-US" altLang="zh-CN" sz="1600" b="1" dirty="0">
+                          <a:solidFill>
+                            <a:schemeClr val="tx1"/>
+                          </a:solidFill>
+                        </a:rPr>
+                        <a:t>pipeline active </a:t>
+                      </a:r>
+                      <a:r>
+                        <a:rPr lang="en-US" altLang="zh-CN" sz="1600" dirty="0">
+                          <a:solidFill>
+                            <a:schemeClr val="tx1"/>
+                          </a:solidFill>
+                        </a:rPr>
+                        <a:t>in Australia</a:t>
+                      </a:r>
+                      <a:endParaRPr lang="zh-CN" altLang="en-US" sz="1600" dirty="0">
+                        <a:solidFill>
+                          <a:schemeClr val="tx1"/>
+                        </a:solidFill>
+                      </a:endParaRPr>
+                    </a:p>
+                  </a:txBody>
+                  <a:tcPr anchor="ctr">
+                    <a:lnL w="76200" cap="flat" cmpd="sng" algn="ctr">
+                      <a:solidFill>
+                        <a:schemeClr val="bg1"/>
+                      </a:solidFill>
+                      <a:prstDash val="solid"/>
+                      <a:round/>
+                      <a:headEnd type="none" w="med" len="med"/>
+                      <a:tailEnd type="none" w="med" len="med"/>
+                    </a:lnL>
+                    <a:lnR w="76200" cap="flat" cmpd="sng" algn="ctr">
+                      <a:solidFill>
+                        <a:schemeClr val="bg1"/>
+                      </a:solidFill>
+                      <a:prstDash val="solid"/>
+                      <a:round/>
+                      <a:headEnd type="none" w="med" len="med"/>
+                      <a:tailEnd type="none" w="med" len="med"/>
+                    </a:lnR>
+                    <a:lnT w="76200" cap="flat" cmpd="sng" algn="ctr">
+                      <a:noFill/>
+                      <a:prstDash val="solid"/>
+                      <a:round/>
+                      <a:headEnd type="none" w="med" len="med"/>
+                      <a:tailEnd type="none" w="med" len="med"/>
+                    </a:lnT>
+                    <a:lnB w="76200" cap="flat" cmpd="sng" algn="ctr">
+                      <a:noFill/>
+                      <a:prstDash val="solid"/>
+                      <a:round/>
+                      <a:headEnd type="none" w="med" len="med"/>
+                      <a:tailEnd type="none" w="med" len="med"/>
+                    </a:lnB>
+                    <a:lnTlToBr w="12700" cmpd="sng">
+                      <a:noFill/>
+                      <a:prstDash val="solid"/>
+                    </a:lnTlToBr>
+                    <a:lnBlToTr w="12700" cmpd="sng">
+                      <a:noFill/>
+                      <a:prstDash val="solid"/>
+                    </a:lnBlToTr>
+                    <a:solidFill>
+                      <a:schemeClr val="bg1"/>
+                    </a:solidFill>
+                  </a:tcPr>
+                </a:tc>
+                <a:extLst>
+                  <a:ext uri="{0D108BD9-81ED-4DB2-BD59-A6C34878D82A}">
+                    <a16:rowId xmlns:a16="http://schemas.microsoft.com/office/drawing/2014/main" val="596144150"/>
+                  </a:ext>
+                </a:extLst>
+              </a:tr>
+              <a:tr h="297153">
+                <a:tc>
+                  <a:txBody>
+                    <a:bodyPr/>
+                    <a:lstStyle/>
+                    <a:p>
+                      <a:pPr algn="r"/>
+                      <a:r>
+                        <a:rPr lang="en-US" altLang="zh-CN" sz="1600" b="1" i="0" dirty="0">
+                          <a:solidFill>
+                            <a:schemeClr val="tx2"/>
+                          </a:solidFill>
+                          <a:latin typeface="Aptos Narrow" panose="020B0004020202020204" pitchFamily="34" charset="0"/>
+                        </a:rPr>
+                        <a:t>$</a:t>
+                      </a:r>
+                      <a:r>
+                        <a:rPr lang="en-US" altLang="zh-CN" sz="2400" b="1" i="0" dirty="0">
+                          <a:solidFill>
+                            <a:schemeClr val="tx2"/>
+                          </a:solidFill>
+                          <a:latin typeface="Aptos Narrow" panose="020B0004020202020204" pitchFamily="34" charset="0"/>
+                        </a:rPr>
+                        <a:t>13.6</a:t>
+                      </a:r>
+                      <a:r>
+                        <a:rPr lang="en-US" altLang="zh-CN" sz="1600" b="1" i="0" dirty="0">
+                          <a:solidFill>
+                            <a:schemeClr val="tx2"/>
+                          </a:solidFill>
+                          <a:latin typeface="Aptos Narrow" panose="020B0004020202020204" pitchFamily="34" charset="0"/>
+                        </a:rPr>
+                        <a:t>Bn</a:t>
+                      </a:r>
+                      <a:endParaRPr lang="zh-CN" altLang="en-US" sz="2400" b="1" i="0" dirty="0">
+                        <a:solidFill>
+                          <a:schemeClr val="tx2"/>
+                        </a:solidFill>
+                        <a:latin typeface="Aptos Narrow" panose="020B0004020202020204" pitchFamily="34" charset="0"/>
+                      </a:endParaRPr>
+                    </a:p>
+                  </a:txBody>
+                  <a:tcPr anchor="ctr">
+                    <a:lnL w="76200" cap="flat" cmpd="sng" algn="ctr">
+                      <a:solidFill>
+                        <a:schemeClr val="bg2"/>
+                      </a:solidFill>
+                      <a:prstDash val="solid"/>
+                      <a:round/>
+                      <a:headEnd type="none" w="med" len="med"/>
+                      <a:tailEnd type="none" w="med" len="med"/>
+                    </a:lnL>
+                    <a:lnR w="76200" cap="flat" cmpd="sng" algn="ctr">
+                      <a:solidFill>
+                        <a:schemeClr val="bg1"/>
+                      </a:solidFill>
+                      <a:prstDash val="solid"/>
+                      <a:round/>
+                      <a:headEnd type="none" w="med" len="med"/>
+                      <a:tailEnd type="none" w="med" len="med"/>
+                    </a:lnR>
+                    <a:lnT w="76200" cap="flat" cmpd="sng" algn="ctr">
+                      <a:noFill/>
+                      <a:prstDash val="solid"/>
+                      <a:round/>
+                      <a:headEnd type="none" w="med" len="med"/>
+                      <a:tailEnd type="none" w="med" len="med"/>
+                    </a:lnT>
+                    <a:lnB w="76200" cap="flat" cmpd="sng" algn="ctr">
+                      <a:noFill/>
+                      <a:prstDash val="solid"/>
+                      <a:round/>
+                      <a:headEnd type="none" w="med" len="med"/>
+                      <a:tailEnd type="none" w="med" len="med"/>
+                    </a:lnB>
+                    <a:lnTlToBr w="12700" cmpd="sng">
+                      <a:noFill/>
+                      <a:prstDash val="solid"/>
+                    </a:lnTlToBr>
+                    <a:lnBlToTr w="12700" cmpd="sng">
+                      <a:noFill/>
+                      <a:prstDash val="solid"/>
+                    </a:lnBlToTr>
+                    <a:solidFill>
+                      <a:schemeClr val="bg1"/>
+                    </a:solidFill>
+                  </a:tcPr>
+                </a:tc>
+                <a:tc>
+                  <a:txBody>
+                    <a:bodyPr/>
+                    <a:lstStyle/>
+                    <a:p>
+                      <a:pPr algn="l"/>
+                      <a:r>
+                        <a:rPr lang="en-US" altLang="zh-CN" sz="1600" dirty="0">
+                          <a:solidFill>
+                            <a:schemeClr val="tx1"/>
+                          </a:solidFill>
+                        </a:rPr>
+                        <a:t>record </a:t>
+                      </a:r>
+                      <a:r>
+                        <a:rPr lang="en-US" altLang="zh-CN" sz="1600" b="1" dirty="0">
+                          <a:solidFill>
+                            <a:schemeClr val="tx1"/>
+                          </a:solidFill>
+                        </a:rPr>
+                        <a:t>quarterly investment </a:t>
+                      </a:r>
+                      <a:r>
+                        <a:rPr lang="en-US" altLang="zh-CN" sz="1600" dirty="0">
+                          <a:solidFill>
+                            <a:schemeClr val="tx1"/>
+                          </a:solidFill>
+                        </a:rPr>
+                        <a:t>in BESS</a:t>
+                      </a:r>
+                      <a:endParaRPr lang="zh-CN" altLang="en-US" sz="1600" dirty="0">
+                        <a:solidFill>
+                          <a:schemeClr val="tx1"/>
+                        </a:solidFill>
+                      </a:endParaRPr>
+                    </a:p>
+                  </a:txBody>
+                  <a:tcPr anchor="ctr">
+                    <a:lnL w="76200" cap="flat" cmpd="sng" algn="ctr">
+                      <a:solidFill>
+                        <a:schemeClr val="bg1"/>
+                      </a:solidFill>
+                      <a:prstDash val="solid"/>
+                      <a:round/>
+                      <a:headEnd type="none" w="med" len="med"/>
+                      <a:tailEnd type="none" w="med" len="med"/>
+                    </a:lnL>
+                    <a:lnR w="76200" cap="flat" cmpd="sng" algn="ctr">
+                      <a:solidFill>
+                        <a:schemeClr val="bg1"/>
+                      </a:solidFill>
+                      <a:prstDash val="solid"/>
+                      <a:round/>
+                      <a:headEnd type="none" w="med" len="med"/>
+                      <a:tailEnd type="none" w="med" len="med"/>
+                    </a:lnR>
+                    <a:lnT w="76200" cap="flat" cmpd="sng" algn="ctr">
+                      <a:noFill/>
+                      <a:prstDash val="solid"/>
+                      <a:round/>
+                      <a:headEnd type="none" w="med" len="med"/>
+                      <a:tailEnd type="none" w="med" len="med"/>
+                    </a:lnT>
+                    <a:lnB w="76200" cap="flat" cmpd="sng" algn="ctr">
+                      <a:noFill/>
+                      <a:prstDash val="solid"/>
+                      <a:round/>
+                      <a:headEnd type="none" w="med" len="med"/>
+                      <a:tailEnd type="none" w="med" len="med"/>
+                    </a:lnB>
+                    <a:lnTlToBr w="12700" cmpd="sng">
+                      <a:noFill/>
+                      <a:prstDash val="solid"/>
+                    </a:lnTlToBr>
+                    <a:lnBlToTr w="12700" cmpd="sng">
+                      <a:noFill/>
+                      <a:prstDash val="solid"/>
+                    </a:lnBlToTr>
+                    <a:solidFill>
+                      <a:schemeClr val="bg1"/>
+                    </a:solidFill>
+                  </a:tcPr>
+                </a:tc>
+                <a:extLst>
+                  <a:ext uri="{0D108BD9-81ED-4DB2-BD59-A6C34878D82A}">
+                    <a16:rowId xmlns:a16="http://schemas.microsoft.com/office/drawing/2014/main" val="833449463"/>
+                  </a:ext>
+                </a:extLst>
+              </a:tr>
+            </a:tbl>
+          </a:graphicData>
+        </a:graphic>
+      </p:graphicFrame>
+      <p:sp>
+        <p:nvSpPr>
+          <p:cNvPr id="12" name="矩形 11">
+            <a:extLst>
+              <a:ext uri="{FF2B5EF4-FFF2-40B4-BE49-F238E27FC236}">
+                <a16:creationId xmlns:a16="http://schemas.microsoft.com/office/drawing/2014/main" id="{F9A12CFF-2053-1A0E-7B5B-9C20C82C2559}"/>
+              </a:ext>
+            </a:extLst>
+          </p:cNvPr>
+          <p:cNvSpPr/>
+          <p:nvPr/>
+        </p:nvSpPr>
+        <p:spPr>
+          <a:xfrm>
+            <a:off x="345486" y="3899687"/>
+            <a:ext cx="3713897" cy="926645"/>
+          </a:xfrm>
+          <a:prstGeom prst="rect">
+            <a:avLst/>
+          </a:prstGeom>
+          <a:noFill/>
+          <a:ln>
+            <a:solidFill>
+              <a:schemeClr val="bg2"/>
+            </a:solidFill>
+          </a:ln>
+        </p:spPr>
+        <p:style>
+          <a:lnRef idx="2">
+            <a:schemeClr val="accent1">
+              <a:shade val="15000"/>
+            </a:schemeClr>
+          </a:lnRef>
+          <a:fillRef idx="1">
+            <a:schemeClr val="accent1"/>
+          </a:fillRef>
+          <a:effectRef idx="0">
+            <a:schemeClr val="accent1"/>
+          </a:effectRef>
+          <a:fontRef idx="minor">
+            <a:schemeClr val="lt1"/>
+          </a:fontRef>
+        </p:style>
+        <p:txBody>
+          <a:bodyPr rtlCol="0" anchor="ctr"/>
+          <a:lstStyle/>
+          <a:p>
+            <a:pPr marL="285750" indent="-285750">
+              <a:buFont typeface="Arial" panose="020B0604020202020204" pitchFamily="34" charset="0"/>
+              <a:buChar char="•"/>
+            </a:pPr>
+            <a:r>
+              <a:rPr kumimoji="1" lang="en-US" altLang="zh-CN" sz="1400" dirty="0">
+                <a:solidFill>
+                  <a:schemeClr val="tx1"/>
+                </a:solidFill>
+              </a:rPr>
+              <a:t>Leverage existing and under-construction and existing projects as anchor sites</a:t>
+            </a:r>
+          </a:p>
+          <a:p>
+            <a:pPr marL="285750" indent="-285750">
+              <a:buFont typeface="Arial" panose="020B0604020202020204" pitchFamily="34" charset="0"/>
+              <a:buChar char="•"/>
+            </a:pPr>
+            <a:r>
+              <a:rPr kumimoji="1" lang="en-US" altLang="zh-CN" sz="1400" dirty="0">
+                <a:solidFill>
+                  <a:schemeClr val="tx1"/>
+                </a:solidFill>
+              </a:rPr>
+              <a:t>Accelerate time to market as a flexibility trade with merchant offtake agreement</a:t>
+            </a:r>
+            <a:endParaRPr kumimoji="1" lang="en-US" altLang="zh-CN" sz="1400" b="1" dirty="0">
+              <a:solidFill>
+                <a:schemeClr val="tx1"/>
+              </a:solidFill>
+            </a:endParaRPr>
+          </a:p>
+        </p:txBody>
+      </p:sp>
+      <p:sp>
+        <p:nvSpPr>
+          <p:cNvPr id="11" name="圆角矩形 10">
+            <a:extLst>
+              <a:ext uri="{FF2B5EF4-FFF2-40B4-BE49-F238E27FC236}">
+                <a16:creationId xmlns:a16="http://schemas.microsoft.com/office/drawing/2014/main" id="{78234A61-9194-2290-DA55-FE48C0B4A6C9}"/>
+              </a:ext>
+            </a:extLst>
+          </p:cNvPr>
+          <p:cNvSpPr/>
+          <p:nvPr/>
+        </p:nvSpPr>
+        <p:spPr>
+          <a:xfrm>
+            <a:off x="345486" y="3436501"/>
+            <a:ext cx="3713897" cy="464513"/>
+          </a:xfrm>
+          <a:prstGeom prst="roundRect">
+            <a:avLst>
+              <a:gd name="adj" fmla="val 0"/>
+            </a:avLst>
+          </a:prstGeom>
+          <a:solidFill>
+            <a:schemeClr val="bg2"/>
+          </a:solidFill>
+          <a:ln w="19050">
+            <a:solidFill>
+              <a:schemeClr val="bg2"/>
+            </a:solidFill>
+          </a:ln>
+        </p:spPr>
+        <p:style>
+          <a:lnRef idx="2">
+            <a:schemeClr val="accent1">
+              <a:shade val="15000"/>
+            </a:schemeClr>
+          </a:lnRef>
+          <a:fillRef idx="1">
+            <a:schemeClr val="accent1"/>
+          </a:fillRef>
+          <a:effectRef idx="0">
+            <a:schemeClr val="accent1"/>
+          </a:effectRef>
+          <a:fontRef idx="minor">
+            <a:schemeClr val="lt1"/>
+          </a:fontRef>
+        </p:style>
+        <p:txBody>
+          <a:bodyPr rtlCol="0" anchor="ctr"/>
+          <a:lstStyle/>
+          <a:p>
+            <a:pPr algn="ctr">
+              <a:lnSpc>
+                <a:spcPct val="90000"/>
+              </a:lnSpc>
+            </a:pPr>
+            <a:r>
+              <a:rPr kumimoji="1" lang="en-US" altLang="zh-CN" sz="1400" b="1" dirty="0">
+                <a:solidFill>
+                  <a:schemeClr val="tx2"/>
+                </a:solidFill>
+              </a:rPr>
+              <a:t>Improve Viability in New</a:t>
+            </a:r>
+            <a:br>
+              <a:rPr kumimoji="1" lang="en-US" altLang="zh-CN" sz="1400" b="1" dirty="0">
+                <a:solidFill>
+                  <a:schemeClr val="tx2"/>
+                </a:solidFill>
+              </a:rPr>
+            </a:br>
+            <a:r>
+              <a:rPr kumimoji="1" lang="en-US" altLang="zh-CN" sz="1400" b="1" dirty="0">
+                <a:solidFill>
+                  <a:schemeClr val="tx2"/>
+                </a:solidFill>
+              </a:rPr>
+              <a:t>and Expanding Geography</a:t>
+            </a:r>
+          </a:p>
+        </p:txBody>
+      </p:sp>
+      <p:sp>
+        <p:nvSpPr>
+          <p:cNvPr id="13" name="矩形 12">
+            <a:extLst>
+              <a:ext uri="{FF2B5EF4-FFF2-40B4-BE49-F238E27FC236}">
+                <a16:creationId xmlns:a16="http://schemas.microsoft.com/office/drawing/2014/main" id="{F71654AB-1E63-738F-6188-2B2D9578C25B}"/>
+              </a:ext>
+            </a:extLst>
+          </p:cNvPr>
+          <p:cNvSpPr/>
+          <p:nvPr/>
+        </p:nvSpPr>
+        <p:spPr>
+          <a:xfrm>
+            <a:off x="4238613" y="3896036"/>
+            <a:ext cx="3713897" cy="926646"/>
+          </a:xfrm>
+          <a:prstGeom prst="rect">
+            <a:avLst/>
+          </a:prstGeom>
+          <a:noFill/>
+          <a:ln>
+            <a:solidFill>
+              <a:schemeClr val="bg2"/>
+            </a:solidFill>
+          </a:ln>
+        </p:spPr>
+        <p:style>
+          <a:lnRef idx="2">
+            <a:schemeClr val="accent1">
+              <a:shade val="15000"/>
+            </a:schemeClr>
+          </a:lnRef>
+          <a:fillRef idx="1">
+            <a:schemeClr val="accent1"/>
+          </a:fillRef>
+          <a:effectRef idx="0">
+            <a:schemeClr val="accent1"/>
+          </a:effectRef>
+          <a:fontRef idx="minor">
+            <a:schemeClr val="lt1"/>
+          </a:fontRef>
+        </p:style>
+        <p:txBody>
+          <a:bodyPr rtlCol="0" anchor="t"/>
+          <a:lstStyle/>
+          <a:p>
+            <a:pPr marL="285750" indent="-285750">
+              <a:buFont typeface="Arial" panose="020B0604020202020204" pitchFamily="34" charset="0"/>
+              <a:buChar char="•"/>
+            </a:pPr>
+            <a:r>
+              <a:rPr kumimoji="1" lang="en-US" altLang="zh-CN" sz="1400" dirty="0">
+                <a:solidFill>
+                  <a:schemeClr val="tx1"/>
+                </a:solidFill>
+              </a:rPr>
+              <a:t>Co-deploy BESS with ongoing projects to prevent future generation revenue gaps.</a:t>
+            </a:r>
+          </a:p>
+          <a:p>
+            <a:pPr marL="285750" indent="-285750">
+              <a:buFont typeface="Arial" panose="020B0604020202020204" pitchFamily="34" charset="0"/>
+              <a:buChar char="•"/>
+            </a:pPr>
+            <a:r>
+              <a:rPr kumimoji="1" lang="en-US" altLang="zh-CN" sz="1400" dirty="0">
+                <a:solidFill>
+                  <a:schemeClr val="tx1"/>
+                </a:solidFill>
+              </a:rPr>
+              <a:t>Capture potential inefficiency gains whilst hedging downside</a:t>
+            </a:r>
+            <a:endParaRPr kumimoji="1" lang="en-US" altLang="zh-CN" sz="1400" b="1" dirty="0">
+              <a:solidFill>
+                <a:schemeClr val="tx1"/>
+              </a:solidFill>
+            </a:endParaRPr>
+          </a:p>
+        </p:txBody>
+      </p:sp>
+      <p:sp>
+        <p:nvSpPr>
+          <p:cNvPr id="14" name="圆角矩形 13">
+            <a:extLst>
+              <a:ext uri="{FF2B5EF4-FFF2-40B4-BE49-F238E27FC236}">
+                <a16:creationId xmlns:a16="http://schemas.microsoft.com/office/drawing/2014/main" id="{3403EC62-5731-3FE5-1137-179FF704109A}"/>
+              </a:ext>
+            </a:extLst>
+          </p:cNvPr>
+          <p:cNvSpPr/>
+          <p:nvPr/>
+        </p:nvSpPr>
+        <p:spPr>
+          <a:xfrm>
+            <a:off x="4243718" y="3618577"/>
+            <a:ext cx="3713897" cy="282437"/>
+          </a:xfrm>
+          <a:prstGeom prst="roundRect">
+            <a:avLst>
+              <a:gd name="adj" fmla="val 0"/>
+            </a:avLst>
+          </a:prstGeom>
+          <a:solidFill>
+            <a:schemeClr val="bg2"/>
+          </a:solidFill>
+          <a:ln w="19050">
+            <a:solidFill>
+              <a:schemeClr val="bg2"/>
+            </a:solidFill>
+          </a:ln>
+        </p:spPr>
+        <p:style>
+          <a:lnRef idx="2">
+            <a:schemeClr val="accent1">
+              <a:shade val="15000"/>
+            </a:schemeClr>
+          </a:lnRef>
+          <a:fillRef idx="1">
+            <a:schemeClr val="accent1"/>
+          </a:fillRef>
+          <a:effectRef idx="0">
+            <a:schemeClr val="accent1"/>
+          </a:effectRef>
+          <a:fontRef idx="minor">
+            <a:schemeClr val="lt1"/>
+          </a:fontRef>
+        </p:style>
+        <p:txBody>
+          <a:bodyPr rtlCol="0" anchor="ctr"/>
+          <a:lstStyle/>
+          <a:p>
+            <a:pPr algn="ctr">
+              <a:lnSpc>
+                <a:spcPct val="90000"/>
+              </a:lnSpc>
+            </a:pPr>
+            <a:r>
+              <a:rPr kumimoji="1" lang="en-US" altLang="zh-CN" sz="1400" b="1" dirty="0">
+                <a:solidFill>
+                  <a:schemeClr val="tx2"/>
+                </a:solidFill>
+              </a:rPr>
+              <a:t>Future Proofing</a:t>
+            </a:r>
+          </a:p>
+        </p:txBody>
+      </p:sp>
+      <p:sp>
+        <p:nvSpPr>
+          <p:cNvPr id="15" name="矩形 14">
+            <a:extLst>
+              <a:ext uri="{FF2B5EF4-FFF2-40B4-BE49-F238E27FC236}">
+                <a16:creationId xmlns:a16="http://schemas.microsoft.com/office/drawing/2014/main" id="{07138092-F4B2-C32E-972A-A181FB876E96}"/>
+              </a:ext>
+            </a:extLst>
+          </p:cNvPr>
+          <p:cNvSpPr/>
+          <p:nvPr/>
+        </p:nvSpPr>
+        <p:spPr>
+          <a:xfrm>
+            <a:off x="8131740" y="3711437"/>
+            <a:ext cx="3713897" cy="1120869"/>
+          </a:xfrm>
+          <a:prstGeom prst="rect">
+            <a:avLst/>
+          </a:prstGeom>
+          <a:noFill/>
+          <a:ln>
+            <a:solidFill>
+              <a:schemeClr val="bg2"/>
+            </a:solidFill>
+          </a:ln>
+        </p:spPr>
+        <p:style>
+          <a:lnRef idx="2">
+            <a:schemeClr val="accent1">
+              <a:shade val="15000"/>
+            </a:schemeClr>
+          </a:lnRef>
+          <a:fillRef idx="1">
+            <a:schemeClr val="accent1"/>
+          </a:fillRef>
+          <a:effectRef idx="0">
+            <a:schemeClr val="accent1"/>
+          </a:effectRef>
+          <a:fontRef idx="minor">
+            <a:schemeClr val="lt1"/>
+          </a:fontRef>
+        </p:style>
+        <p:txBody>
+          <a:bodyPr rtlCol="0" anchor="ctr"/>
+          <a:lstStyle/>
+          <a:p>
+            <a:pPr marL="285750" indent="-285750">
+              <a:buFont typeface="Arial" panose="020B0604020202020204" pitchFamily="34" charset="0"/>
+              <a:buChar char="•"/>
+            </a:pPr>
+            <a:r>
+              <a:rPr kumimoji="1" lang="en-US" altLang="zh-CN" sz="1400" dirty="0">
+                <a:solidFill>
+                  <a:schemeClr val="tx1"/>
+                </a:solidFill>
+              </a:rPr>
+              <a:t>Australia’s NEM exhibits higher trading volatility and structural inefficiencies</a:t>
+            </a:r>
+          </a:p>
+          <a:p>
+            <a:pPr marL="285750" indent="-285750">
+              <a:buFont typeface="Arial" panose="020B0604020202020204" pitchFamily="34" charset="0"/>
+              <a:buChar char="•"/>
+            </a:pPr>
+            <a:r>
+              <a:rPr kumimoji="1" lang="en-US" altLang="zh-CN" sz="1400" dirty="0">
+                <a:solidFill>
+                  <a:schemeClr val="tx1"/>
+                </a:solidFill>
+              </a:rPr>
+              <a:t>Capture arbitrate revenue during surges</a:t>
+            </a:r>
+          </a:p>
+          <a:p>
+            <a:pPr marL="285750" indent="-285750">
+              <a:buFont typeface="Arial" panose="020B0604020202020204" pitchFamily="34" charset="0"/>
+              <a:buChar char="•"/>
+            </a:pPr>
+            <a:r>
+              <a:rPr kumimoji="1" lang="en-US" altLang="zh-CN" sz="1400" dirty="0">
+                <a:solidFill>
+                  <a:schemeClr val="tx1"/>
+                </a:solidFill>
+              </a:rPr>
+              <a:t>Utilize machine learning to optimize PPAs and dispatch strategies</a:t>
+            </a:r>
+            <a:endParaRPr kumimoji="1" lang="en-US" altLang="zh-CN" sz="1400" b="1" dirty="0">
+              <a:solidFill>
+                <a:schemeClr val="tx1"/>
+              </a:solidFill>
+            </a:endParaRPr>
+          </a:p>
+        </p:txBody>
+      </p:sp>
+      <p:sp>
+        <p:nvSpPr>
+          <p:cNvPr id="16" name="圆角矩形 15">
+            <a:extLst>
+              <a:ext uri="{FF2B5EF4-FFF2-40B4-BE49-F238E27FC236}">
+                <a16:creationId xmlns:a16="http://schemas.microsoft.com/office/drawing/2014/main" id="{EFBC0108-0B27-AFE1-FC89-55A2928905BA}"/>
+              </a:ext>
+            </a:extLst>
+          </p:cNvPr>
+          <p:cNvSpPr/>
+          <p:nvPr/>
+        </p:nvSpPr>
+        <p:spPr>
+          <a:xfrm>
+            <a:off x="8131740" y="3429000"/>
+            <a:ext cx="3713897" cy="282437"/>
+          </a:xfrm>
+          <a:prstGeom prst="roundRect">
+            <a:avLst>
+              <a:gd name="adj" fmla="val 0"/>
+            </a:avLst>
+          </a:prstGeom>
+          <a:solidFill>
+            <a:schemeClr val="bg2"/>
+          </a:solidFill>
+          <a:ln w="19050">
+            <a:solidFill>
+              <a:schemeClr val="bg2"/>
+            </a:solidFill>
+          </a:ln>
+        </p:spPr>
+        <p:style>
+          <a:lnRef idx="2">
+            <a:schemeClr val="accent1">
+              <a:shade val="15000"/>
+            </a:schemeClr>
+          </a:lnRef>
+          <a:fillRef idx="1">
+            <a:schemeClr val="accent1"/>
+          </a:fillRef>
+          <a:effectRef idx="0">
+            <a:schemeClr val="accent1"/>
+          </a:effectRef>
+          <a:fontRef idx="minor">
+            <a:schemeClr val="lt1"/>
+          </a:fontRef>
+        </p:style>
+        <p:txBody>
+          <a:bodyPr rtlCol="0" anchor="ctr"/>
+          <a:lstStyle/>
+          <a:p>
+            <a:pPr algn="ctr">
+              <a:lnSpc>
+                <a:spcPct val="90000"/>
+              </a:lnSpc>
+            </a:pPr>
+            <a:r>
+              <a:rPr kumimoji="1" lang="en-US" altLang="zh-CN" sz="1400" b="1" dirty="0">
+                <a:solidFill>
+                  <a:schemeClr val="tx2"/>
+                </a:solidFill>
+              </a:rPr>
+              <a:t>Leverage Trading Inefficiencies</a:t>
+            </a:r>
+          </a:p>
+        </p:txBody>
+      </p:sp>
+      <p:sp>
+        <p:nvSpPr>
+          <p:cNvPr id="17" name="半闭框 16">
+            <a:extLst>
+              <a:ext uri="{FF2B5EF4-FFF2-40B4-BE49-F238E27FC236}">
+                <a16:creationId xmlns:a16="http://schemas.microsoft.com/office/drawing/2014/main" id="{11E4A961-217E-B4CC-8F4C-4670978CA02F}"/>
+              </a:ext>
+            </a:extLst>
+          </p:cNvPr>
+          <p:cNvSpPr/>
+          <p:nvPr/>
+        </p:nvSpPr>
+        <p:spPr>
+          <a:xfrm rot="13500000">
+            <a:off x="2049716" y="4790912"/>
+            <a:ext cx="305436" cy="305436"/>
+          </a:xfrm>
+          <a:prstGeom prst="halfFrame">
+            <a:avLst/>
+          </a:prstGeom>
+          <a:solidFill>
+            <a:schemeClr val="tx2"/>
+          </a:solidFill>
+          <a:ln>
+            <a:noFill/>
+          </a:ln>
+        </p:spPr>
+        <p:style>
+          <a:lnRef idx="2">
+            <a:schemeClr val="accent1">
+              <a:shade val="15000"/>
+            </a:schemeClr>
+          </a:lnRef>
+          <a:fillRef idx="1">
+            <a:schemeClr val="accent1"/>
+          </a:fillRef>
+          <a:effectRef idx="0">
+            <a:schemeClr val="accent1"/>
+          </a:effectRef>
+          <a:fontRef idx="minor">
+            <a:schemeClr val="lt1"/>
+          </a:fontRef>
+        </p:style>
+        <p:txBody>
+          <a:bodyPr rtlCol="0" anchor="ctr"/>
+          <a:lstStyle/>
+          <a:p>
+            <a:pPr algn="ctr"/>
+            <a:endParaRPr kumimoji="1" lang="zh-CN" altLang="en-US">
+              <a:solidFill>
+                <a:schemeClr val="tx1"/>
+              </a:solidFill>
+            </a:endParaRPr>
+          </a:p>
+        </p:txBody>
+      </p:sp>
+      <p:sp>
+        <p:nvSpPr>
+          <p:cNvPr id="19" name="圆角矩形 18">
+            <a:extLst>
+              <a:ext uri="{FF2B5EF4-FFF2-40B4-BE49-F238E27FC236}">
+                <a16:creationId xmlns:a16="http://schemas.microsoft.com/office/drawing/2014/main" id="{5832FA94-8BEB-240A-539A-1F63A8B14BCA}"/>
+              </a:ext>
+            </a:extLst>
+          </p:cNvPr>
+          <p:cNvSpPr/>
+          <p:nvPr/>
+        </p:nvSpPr>
+        <p:spPr>
+          <a:xfrm>
+            <a:off x="345486" y="5258345"/>
+            <a:ext cx="3713897" cy="488748"/>
+          </a:xfrm>
+          <a:prstGeom prst="roundRect">
+            <a:avLst>
+              <a:gd name="adj" fmla="val 0"/>
+            </a:avLst>
+          </a:prstGeom>
+          <a:solidFill>
+            <a:schemeClr val="bg1">
+              <a:lumMod val="95000"/>
+            </a:schemeClr>
+          </a:solidFill>
+          <a:ln w="19050">
+            <a:noFill/>
+          </a:ln>
+        </p:spPr>
+        <p:style>
+          <a:lnRef idx="2">
+            <a:schemeClr val="accent1">
+              <a:shade val="15000"/>
+            </a:schemeClr>
+          </a:lnRef>
+          <a:fillRef idx="1">
+            <a:schemeClr val="accent1"/>
+          </a:fillRef>
+          <a:effectRef idx="0">
+            <a:schemeClr val="accent1"/>
+          </a:effectRef>
+          <a:fontRef idx="minor">
+            <a:schemeClr val="lt1"/>
+          </a:fontRef>
+        </p:style>
+        <p:txBody>
+          <a:bodyPr rtlCol="0" anchor="ctr"/>
+          <a:lstStyle/>
+          <a:p>
+            <a:pPr algn="ctr">
+              <a:lnSpc>
+                <a:spcPct val="90000"/>
+              </a:lnSpc>
+            </a:pPr>
+            <a:r>
+              <a:rPr kumimoji="1" lang="en-US" altLang="zh-CN" sz="1400" dirty="0">
+                <a:solidFill>
+                  <a:schemeClr val="tx1"/>
+                </a:solidFill>
+              </a:rPr>
+              <a:t>Establish an </a:t>
+            </a:r>
+            <a:r>
+              <a:rPr kumimoji="1" lang="en-US" altLang="zh-CN" sz="1400" b="1" dirty="0">
+                <a:solidFill>
+                  <a:schemeClr val="tx1"/>
+                </a:solidFill>
+              </a:rPr>
+              <a:t>efficient, low-risk foothold</a:t>
+            </a:r>
+            <a:r>
+              <a:rPr kumimoji="1" lang="en-US" altLang="zh-CN" sz="1400" dirty="0">
+                <a:solidFill>
+                  <a:schemeClr val="tx1"/>
+                </a:solidFill>
+              </a:rPr>
+              <a:t> in a volatile but high-potential market</a:t>
+            </a:r>
+          </a:p>
+        </p:txBody>
+      </p:sp>
+      <p:sp>
+        <p:nvSpPr>
+          <p:cNvPr id="20" name="半闭框 19">
+            <a:extLst>
+              <a:ext uri="{FF2B5EF4-FFF2-40B4-BE49-F238E27FC236}">
+                <a16:creationId xmlns:a16="http://schemas.microsoft.com/office/drawing/2014/main" id="{17B99E14-4EFC-7938-5876-FBE644675ED6}"/>
+              </a:ext>
+            </a:extLst>
+          </p:cNvPr>
+          <p:cNvSpPr/>
+          <p:nvPr/>
+        </p:nvSpPr>
+        <p:spPr>
+          <a:xfrm rot="13500000">
+            <a:off x="5946307" y="4790912"/>
+            <a:ext cx="305436" cy="305436"/>
+          </a:xfrm>
+          <a:prstGeom prst="halfFrame">
+            <a:avLst/>
+          </a:prstGeom>
+          <a:solidFill>
+            <a:schemeClr val="tx2"/>
+          </a:solidFill>
+          <a:ln>
+            <a:noFill/>
+          </a:ln>
+        </p:spPr>
+        <p:style>
+          <a:lnRef idx="2">
+            <a:schemeClr val="accent1">
+              <a:shade val="15000"/>
+            </a:schemeClr>
+          </a:lnRef>
+          <a:fillRef idx="1">
+            <a:schemeClr val="accent1"/>
+          </a:fillRef>
+          <a:effectRef idx="0">
+            <a:schemeClr val="accent1"/>
+          </a:effectRef>
+          <a:fontRef idx="minor">
+            <a:schemeClr val="lt1"/>
+          </a:fontRef>
+        </p:style>
+        <p:txBody>
+          <a:bodyPr rtlCol="0" anchor="ctr"/>
+          <a:lstStyle/>
+          <a:p>
+            <a:pPr algn="ctr"/>
+            <a:endParaRPr kumimoji="1" lang="zh-CN" altLang="en-US">
+              <a:solidFill>
+                <a:schemeClr val="tx1"/>
+              </a:solidFill>
+            </a:endParaRPr>
+          </a:p>
+        </p:txBody>
+      </p:sp>
+      <p:sp>
+        <p:nvSpPr>
+          <p:cNvPr id="21" name="圆角矩形 20">
+            <a:extLst>
+              <a:ext uri="{FF2B5EF4-FFF2-40B4-BE49-F238E27FC236}">
+                <a16:creationId xmlns:a16="http://schemas.microsoft.com/office/drawing/2014/main" id="{F545E689-0D59-E65F-D0F5-AC86423E6547}"/>
+              </a:ext>
+            </a:extLst>
+          </p:cNvPr>
+          <p:cNvSpPr/>
+          <p:nvPr/>
+        </p:nvSpPr>
+        <p:spPr>
+          <a:xfrm>
+            <a:off x="4242077" y="5258345"/>
+            <a:ext cx="3713897" cy="488748"/>
+          </a:xfrm>
+          <a:prstGeom prst="roundRect">
+            <a:avLst>
+              <a:gd name="adj" fmla="val 0"/>
+            </a:avLst>
+          </a:prstGeom>
+          <a:solidFill>
+            <a:schemeClr val="bg1">
+              <a:lumMod val="95000"/>
+            </a:schemeClr>
+          </a:solidFill>
+          <a:ln w="19050">
+            <a:noFill/>
+          </a:ln>
+        </p:spPr>
+        <p:style>
+          <a:lnRef idx="2">
+            <a:schemeClr val="accent1">
+              <a:shade val="15000"/>
+            </a:schemeClr>
+          </a:lnRef>
+          <a:fillRef idx="1">
+            <a:schemeClr val="accent1"/>
+          </a:fillRef>
+          <a:effectRef idx="0">
+            <a:schemeClr val="accent1"/>
+          </a:effectRef>
+          <a:fontRef idx="minor">
+            <a:schemeClr val="lt1"/>
+          </a:fontRef>
+        </p:style>
+        <p:txBody>
+          <a:bodyPr rtlCol="0" anchor="ctr"/>
+          <a:lstStyle/>
+          <a:p>
+            <a:pPr algn="ctr">
+              <a:lnSpc>
+                <a:spcPct val="90000"/>
+              </a:lnSpc>
+            </a:pPr>
+            <a:r>
+              <a:rPr kumimoji="1" lang="en-US" altLang="zh-CN" sz="1400" dirty="0">
+                <a:solidFill>
+                  <a:schemeClr val="tx1"/>
+                </a:solidFill>
+              </a:rPr>
+              <a:t>Build </a:t>
+            </a:r>
+            <a:r>
+              <a:rPr kumimoji="1" lang="en-US" altLang="zh-CN" sz="1400" b="1" dirty="0">
+                <a:solidFill>
+                  <a:schemeClr val="tx1"/>
+                </a:solidFill>
+              </a:rPr>
+              <a:t>resilience against curtailment </a:t>
+            </a:r>
+            <a:r>
+              <a:rPr kumimoji="1" lang="en-US" altLang="zh-CN" sz="1400" dirty="0">
+                <a:solidFill>
+                  <a:schemeClr val="tx1"/>
+                </a:solidFill>
+              </a:rPr>
+              <a:t>and long-term revenue compression</a:t>
+            </a:r>
+          </a:p>
+        </p:txBody>
+      </p:sp>
+      <p:sp>
+        <p:nvSpPr>
+          <p:cNvPr id="22" name="半闭框 21">
+            <a:extLst>
+              <a:ext uri="{FF2B5EF4-FFF2-40B4-BE49-F238E27FC236}">
+                <a16:creationId xmlns:a16="http://schemas.microsoft.com/office/drawing/2014/main" id="{DEDF063F-6A27-0558-EDFB-647A7A8DC6AF}"/>
+              </a:ext>
+            </a:extLst>
+          </p:cNvPr>
+          <p:cNvSpPr/>
+          <p:nvPr/>
+        </p:nvSpPr>
+        <p:spPr>
+          <a:xfrm rot="13500000">
+            <a:off x="9832507" y="4790912"/>
+            <a:ext cx="305436" cy="305436"/>
+          </a:xfrm>
+          <a:prstGeom prst="halfFrame">
+            <a:avLst/>
+          </a:prstGeom>
+          <a:solidFill>
+            <a:schemeClr val="tx2"/>
+          </a:solidFill>
+          <a:ln>
+            <a:noFill/>
+          </a:ln>
+        </p:spPr>
+        <p:style>
+          <a:lnRef idx="2">
+            <a:schemeClr val="accent1">
+              <a:shade val="15000"/>
+            </a:schemeClr>
+          </a:lnRef>
+          <a:fillRef idx="1">
+            <a:schemeClr val="accent1"/>
+          </a:fillRef>
+          <a:effectRef idx="0">
+            <a:schemeClr val="accent1"/>
+          </a:effectRef>
+          <a:fontRef idx="minor">
+            <a:schemeClr val="lt1"/>
+          </a:fontRef>
+        </p:style>
+        <p:txBody>
+          <a:bodyPr rtlCol="0" anchor="ctr"/>
+          <a:lstStyle/>
+          <a:p>
+            <a:pPr algn="ctr"/>
+            <a:endParaRPr kumimoji="1" lang="zh-CN" altLang="en-US">
+              <a:solidFill>
+                <a:schemeClr val="tx1"/>
+              </a:solidFill>
+            </a:endParaRPr>
+          </a:p>
+        </p:txBody>
+      </p:sp>
+      <p:sp>
+        <p:nvSpPr>
+          <p:cNvPr id="23" name="圆角矩形 22">
+            <a:extLst>
+              <a:ext uri="{FF2B5EF4-FFF2-40B4-BE49-F238E27FC236}">
+                <a16:creationId xmlns:a16="http://schemas.microsoft.com/office/drawing/2014/main" id="{51549D3C-8DE1-4B31-AB68-03938C52F095}"/>
+              </a:ext>
+            </a:extLst>
+          </p:cNvPr>
+          <p:cNvSpPr/>
+          <p:nvPr/>
+        </p:nvSpPr>
+        <p:spPr>
+          <a:xfrm>
+            <a:off x="8128277" y="5258345"/>
+            <a:ext cx="3713897" cy="488748"/>
+          </a:xfrm>
+          <a:prstGeom prst="roundRect">
+            <a:avLst>
+              <a:gd name="adj" fmla="val 0"/>
+            </a:avLst>
+          </a:prstGeom>
+          <a:solidFill>
+            <a:schemeClr val="bg1">
+              <a:lumMod val="95000"/>
+            </a:schemeClr>
+          </a:solidFill>
+          <a:ln w="19050">
+            <a:noFill/>
+          </a:ln>
+        </p:spPr>
+        <p:style>
+          <a:lnRef idx="2">
+            <a:schemeClr val="accent1">
+              <a:shade val="15000"/>
+            </a:schemeClr>
+          </a:lnRef>
+          <a:fillRef idx="1">
+            <a:schemeClr val="accent1"/>
+          </a:fillRef>
+          <a:effectRef idx="0">
+            <a:schemeClr val="accent1"/>
+          </a:effectRef>
+          <a:fontRef idx="minor">
+            <a:schemeClr val="lt1"/>
+          </a:fontRef>
+        </p:style>
+        <p:txBody>
+          <a:bodyPr rtlCol="0" anchor="ctr"/>
+          <a:lstStyle/>
+          <a:p>
+            <a:pPr algn="ctr">
+              <a:lnSpc>
+                <a:spcPct val="90000"/>
+              </a:lnSpc>
+            </a:pPr>
+            <a:r>
+              <a:rPr kumimoji="1" lang="en-US" altLang="zh-CN" sz="1400" dirty="0">
+                <a:solidFill>
+                  <a:schemeClr val="tx1"/>
+                </a:solidFill>
+              </a:rPr>
+              <a:t>Turn Australia’s market volatility into a </a:t>
+            </a:r>
+            <a:br>
+              <a:rPr kumimoji="1" lang="en-US" altLang="zh-CN" sz="1400" dirty="0">
+                <a:solidFill>
+                  <a:schemeClr val="tx1"/>
+                </a:solidFill>
+              </a:rPr>
+            </a:br>
+            <a:r>
+              <a:rPr kumimoji="1" lang="en-US" altLang="zh-CN" sz="1400" b="1" dirty="0">
+                <a:solidFill>
+                  <a:schemeClr val="tx1"/>
+                </a:solidFill>
+              </a:rPr>
+              <a:t>data-driven competitive edge</a:t>
+            </a:r>
+          </a:p>
+        </p:txBody>
+      </p:sp>
+      <p:pic>
+        <p:nvPicPr>
+          <p:cNvPr id="24" name="图形 23">
+            <a:extLst>
+              <a:ext uri="{FF2B5EF4-FFF2-40B4-BE49-F238E27FC236}">
+                <a16:creationId xmlns:a16="http://schemas.microsoft.com/office/drawing/2014/main" id="{FAFC9884-6246-F634-E0FD-A3070E684E44}"/>
+              </a:ext>
+            </a:extLst>
+          </p:cNvPr>
+          <p:cNvPicPr>
+            <a:picLocks noChangeAspect="1"/>
+          </p:cNvPicPr>
+          <p:nvPr/>
+        </p:nvPicPr>
+        <p:blipFill>
+          <a:blip>
+            <a:extLst>
+              <a:ext uri="{96DAC541-7B7A-43D3-8B79-37D633B846F1}">
+                <asvg:svgBlip xmlns:asvg="http://schemas.microsoft.com/office/drawing/2016/SVG/main" r:embed="rId3"/>
+              </a:ext>
+            </a:extLst>
+          </a:blip>
+          <a:srcRect/>
+          <a:stretch/>
+        </p:blipFill>
+        <p:spPr>
+          <a:xfrm>
+            <a:off x="10888462" y="6534398"/>
+            <a:ext cx="762838" cy="203586"/>
+          </a:xfrm>
+          <a:prstGeom prst="rect">
+            <a:avLst/>
+          </a:prstGeom>
+        </p:spPr>
+      </p:pic>
+      <p:sp>
+        <p:nvSpPr>
+          <p:cNvPr id="25" name="文本框 24">
+            <a:extLst>
+              <a:ext uri="{FF2B5EF4-FFF2-40B4-BE49-F238E27FC236}">
+                <a16:creationId xmlns:a16="http://schemas.microsoft.com/office/drawing/2014/main" id="{9BB15453-D652-794B-55FC-16712E1ED423}"/>
+              </a:ext>
+            </a:extLst>
+          </p:cNvPr>
+          <p:cNvSpPr txBox="1"/>
+          <p:nvPr/>
+        </p:nvSpPr>
+        <p:spPr>
+          <a:xfrm>
+            <a:off x="297118" y="6510854"/>
+            <a:ext cx="6835202" cy="276999"/>
+          </a:xfrm>
+          <a:prstGeom prst="rect">
+            <a:avLst/>
+          </a:prstGeom>
+          <a:noFill/>
+        </p:spPr>
+        <p:txBody>
+          <a:bodyPr wrap="square" rtlCol="0" anchor="b">
+            <a:spAutoFit/>
+          </a:bodyPr>
+          <a:lstStyle/>
+          <a:p>
+            <a:r>
+              <a:rPr kumimoji="1" lang="en-US" altLang="zh-CN" sz="1200" dirty="0">
+                <a:solidFill>
+                  <a:schemeClr val="tx1">
+                    <a:lumMod val="50000"/>
+                    <a:lumOff val="50000"/>
+                  </a:schemeClr>
+                </a:solidFill>
+              </a:rPr>
+              <a:t>Source: expert interviews, literature review, analysis (Aptos, Regular, 12pt)</a:t>
+            </a:r>
+            <a:endParaRPr kumimoji="1" lang="zh-CN" altLang="en-US" sz="1400" dirty="0">
+              <a:solidFill>
+                <a:schemeClr val="tx1">
+                  <a:lumMod val="50000"/>
+                  <a:lumOff val="50000"/>
+                </a:schemeClr>
+              </a:solidFill>
+            </a:endParaRPr>
+          </a:p>
+        </p:txBody>
+      </p:sp>
+      <p:sp>
+        <p:nvSpPr>
+          <p:cNvPr id="26" name="文本框 25">
+            <a:extLst>
+              <a:ext uri="{FF2B5EF4-FFF2-40B4-BE49-F238E27FC236}">
+                <a16:creationId xmlns:a16="http://schemas.microsoft.com/office/drawing/2014/main" id="{9BCFF956-0E02-B37C-A090-15397127068A}"/>
+              </a:ext>
+            </a:extLst>
+          </p:cNvPr>
+          <p:cNvSpPr txBox="1"/>
+          <p:nvPr/>
+        </p:nvSpPr>
+        <p:spPr>
+          <a:xfrm>
+            <a:off x="11150825" y="6480075"/>
+            <a:ext cx="824276" cy="307777"/>
+          </a:xfrm>
+          <a:prstGeom prst="rect">
+            <a:avLst/>
+          </a:prstGeom>
+          <a:noFill/>
+        </p:spPr>
+        <p:txBody>
+          <a:bodyPr wrap="square" rtlCol="0" anchor="b">
+            <a:spAutoFit/>
+          </a:bodyPr>
+          <a:lstStyle/>
+          <a:p>
+            <a:pPr algn="r"/>
+            <a:fld id="{C6A1A2BA-6D83-C443-9823-3CD30E13C10E}" type="slidenum">
+              <a:rPr kumimoji="1" lang="zh-CN" altLang="en-US" sz="1400" smtClean="0">
+                <a:solidFill>
+                  <a:schemeClr val="tx1">
+                    <a:lumMod val="50000"/>
+                    <a:lumOff val="50000"/>
+                  </a:schemeClr>
+                </a:solidFill>
+              </a:rPr>
+              <a:t>3</a:t>
+            </a:fld>
+            <a:endParaRPr kumimoji="1" lang="zh-CN" altLang="en-US" sz="1400" dirty="0">
+              <a:solidFill>
+                <a:schemeClr val="tx1">
+                  <a:lumMod val="50000"/>
+                  <a:lumOff val="50000"/>
+                </a:schemeClr>
+              </a:solidFill>
+            </a:endParaRPr>
+          </a:p>
+        </p:txBody>
+      </p:sp>
+    </p:spTree>
+    <p:extLst>
+      <p:ext uri="{BB962C8B-B14F-4D97-AF65-F5344CB8AC3E}">
+        <p14:creationId xmlns:p14="http://schemas.microsoft.com/office/powerpoint/2010/main" val="3254875438"/>
+      </p:ext>
+    </p:extLst>
+  </p:cSld>
+  <p:clrMapOvr>
+    <a:masterClrMapping/>
+  </p:clrMapOvr>
+</p:sld>
+</file>
+
+<file path=ppt/slides/slide4.xml><?xml version="1.0" encoding="utf-8"?>
+<p:sld xmlns:a="http://schemas.openxmlformats.org/drawingml/2006/main" xmlns:r="http://schemas.openxmlformats.org/officeDocument/2006/relationships" xmlns:p="http://schemas.openxmlformats.org/presentationml/2006/main">
+  <p:cSld>
+    <p:spTree>
+      <p:nvGrpSpPr>
+        <p:cNvPr id="1" name=""/>
+        <p:cNvGrpSpPr/>
+        <p:nvPr/>
+      </p:nvGrpSpPr>
+      <p:grpSpPr>
+        <a:xfrm>
+          <a:off x="0" y="0"/>
+          <a:ext cx="0" cy="0"/>
+          <a:chOff x="0" y="0"/>
+          <a:chExt cx="0" cy="0"/>
+        </a:xfrm>
+      </p:grpSpPr>
+      <p:pic>
+        <p:nvPicPr>
+          <p:cNvPr id="4" name="图形 3">
+            <a:extLst>
+              <a:ext uri="{FF2B5EF4-FFF2-40B4-BE49-F238E27FC236}">
+                <a16:creationId xmlns:a16="http://schemas.microsoft.com/office/drawing/2014/main" id="{90C2D6C3-F672-03CB-95B6-7768AA384B7E}"/>
+              </a:ext>
+            </a:extLst>
+          </p:cNvPr>
+          <p:cNvPicPr>
+            <a:picLocks noChangeAspect="1"/>
+          </p:cNvPicPr>
+          <p:nvPr/>
+        </p:nvPicPr>
+        <p:blipFill>
+          <a:blip>
+            <a:extLst>
+              <a:ext uri="{96DAC541-7B7A-43D3-8B79-37D633B846F1}">
+                <asvg:svgBlip xmlns:asvg="http://schemas.microsoft.com/office/drawing/2016/SVG/main" r:embed="rId3"/>
+              </a:ext>
+            </a:extLst>
+          </a:blip>
+          <a:srcRect/>
+          <a:stretch/>
+        </p:blipFill>
+        <p:spPr>
+          <a:xfrm>
+            <a:off x="10888462" y="6534398"/>
+            <a:ext cx="762838" cy="203586"/>
+          </a:xfrm>
+          <a:prstGeom prst="rect">
+            <a:avLst/>
+          </a:prstGeom>
+        </p:spPr>
+      </p:pic>
+      <p:sp>
+        <p:nvSpPr>
+          <p:cNvPr id="5" name="文本框 4">
+            <a:extLst>
+              <a:ext uri="{FF2B5EF4-FFF2-40B4-BE49-F238E27FC236}">
+                <a16:creationId xmlns:a16="http://schemas.microsoft.com/office/drawing/2014/main" id="{840BB8C5-317F-655D-5BE1-0210F7527F90}"/>
+              </a:ext>
+            </a:extLst>
+          </p:cNvPr>
+          <p:cNvSpPr txBox="1"/>
+          <p:nvPr/>
+        </p:nvSpPr>
+        <p:spPr>
+          <a:xfrm>
+            <a:off x="297118" y="6510854"/>
+            <a:ext cx="6835202" cy="276999"/>
+          </a:xfrm>
+          <a:prstGeom prst="rect">
+            <a:avLst/>
+          </a:prstGeom>
+          <a:noFill/>
+        </p:spPr>
+        <p:txBody>
+          <a:bodyPr wrap="square" rtlCol="0" anchor="b">
+            <a:spAutoFit/>
+          </a:bodyPr>
+          <a:lstStyle/>
+          <a:p>
+            <a:r>
+              <a:rPr kumimoji="1" lang="en-US" altLang="zh-CN" sz="1200" dirty="0">
+                <a:solidFill>
+                  <a:schemeClr val="tx1">
+                    <a:lumMod val="50000"/>
+                    <a:lumOff val="50000"/>
+                  </a:schemeClr>
+                </a:solidFill>
+              </a:rPr>
+              <a:t>Source: expert interviews, literature review, analysis (Aptos, Regular, 12pt)</a:t>
+            </a:r>
+            <a:endParaRPr kumimoji="1" lang="zh-CN" altLang="en-US" sz="1400" dirty="0">
+              <a:solidFill>
+                <a:schemeClr val="tx1">
+                  <a:lumMod val="50000"/>
+                  <a:lumOff val="50000"/>
+                </a:schemeClr>
+              </a:solidFill>
+            </a:endParaRPr>
+          </a:p>
+        </p:txBody>
+      </p:sp>
+      <p:sp>
+        <p:nvSpPr>
+          <p:cNvPr id="6" name="文本框 5">
+            <a:extLst>
+              <a:ext uri="{FF2B5EF4-FFF2-40B4-BE49-F238E27FC236}">
+                <a16:creationId xmlns:a16="http://schemas.microsoft.com/office/drawing/2014/main" id="{835F0B02-6935-E3A8-E599-4F3824E24311}"/>
+              </a:ext>
+            </a:extLst>
+          </p:cNvPr>
+          <p:cNvSpPr txBox="1"/>
+          <p:nvPr/>
+        </p:nvSpPr>
+        <p:spPr>
+          <a:xfrm>
+            <a:off x="11150825" y="6480075"/>
+            <a:ext cx="824276" cy="307777"/>
+          </a:xfrm>
+          <a:prstGeom prst="rect">
+            <a:avLst/>
+          </a:prstGeom>
+          <a:noFill/>
+        </p:spPr>
+        <p:txBody>
+          <a:bodyPr wrap="square" rtlCol="0" anchor="b">
+            <a:spAutoFit/>
+          </a:bodyPr>
+          <a:lstStyle/>
+          <a:p>
+            <a:pPr algn="r"/>
+            <a:fld id="{C6A1A2BA-6D83-C443-9823-3CD30E13C10E}" type="slidenum">
+              <a:rPr kumimoji="1" lang="zh-CN" altLang="en-US" sz="1400" smtClean="0">
+                <a:solidFill>
+                  <a:schemeClr val="tx1">
+                    <a:lumMod val="50000"/>
+                    <a:lumOff val="50000"/>
+                  </a:schemeClr>
+                </a:solidFill>
+              </a:rPr>
+              <a:t>4</a:t>
+            </a:fld>
+            <a:endParaRPr kumimoji="1" lang="zh-CN" altLang="en-US" sz="1400" dirty="0">
+              <a:solidFill>
+                <a:schemeClr val="tx1">
+                  <a:lumMod val="50000"/>
+                  <a:lumOff val="50000"/>
+                </a:schemeClr>
+              </a:solidFill>
+            </a:endParaRPr>
+          </a:p>
+        </p:txBody>
+      </p:sp>
+      <p:sp>
+        <p:nvSpPr>
+          <p:cNvPr id="7" name="文本框 6">
+            <a:extLst>
+              <a:ext uri="{FF2B5EF4-FFF2-40B4-BE49-F238E27FC236}">
+                <a16:creationId xmlns:a16="http://schemas.microsoft.com/office/drawing/2014/main" id="{BC217ACF-4130-49D3-4C52-EA50A97F4F6F}"/>
+              </a:ext>
+            </a:extLst>
+          </p:cNvPr>
+          <p:cNvSpPr txBox="1"/>
+          <p:nvPr/>
+        </p:nvSpPr>
+        <p:spPr>
+          <a:xfrm>
+            <a:off x="244988" y="31016"/>
+            <a:ext cx="8819493" cy="830997"/>
+          </a:xfrm>
+          <a:prstGeom prst="rect">
+            <a:avLst/>
+          </a:prstGeom>
+          <a:noFill/>
+        </p:spPr>
+        <p:txBody>
+          <a:bodyPr wrap="square" anchor="ctr">
+            <a:spAutoFit/>
+          </a:bodyPr>
+          <a:lstStyle/>
+          <a:p>
+            <a:r>
+              <a:rPr kumimoji="1" lang="en-US" altLang="zh-CN" sz="2400" b="1" dirty="0">
+                <a:latin typeface="Aptos Narrow" panose="020B0004020202020204" pitchFamily="34" charset="0"/>
+                <a:ea typeface="Palatino" pitchFamily="2" charset="0"/>
+                <a:cs typeface="Mongolian Baiti" panose="03000500000000000000" pitchFamily="66" charset="0"/>
+              </a:rPr>
+              <a:t>Risk Mitigation: The blended ownership model offsets the proposal's most critical risks, protecting against severe downside</a:t>
+            </a:r>
+          </a:p>
+        </p:txBody>
+      </p:sp>
+      <p:cxnSp>
+        <p:nvCxnSpPr>
+          <p:cNvPr id="8" name="直线连接符 7">
+            <a:extLst>
+              <a:ext uri="{FF2B5EF4-FFF2-40B4-BE49-F238E27FC236}">
+                <a16:creationId xmlns:a16="http://schemas.microsoft.com/office/drawing/2014/main" id="{C986A6CE-D2DC-B17A-8342-F5B4591BBA0C}"/>
+              </a:ext>
+            </a:extLst>
+          </p:cNvPr>
+          <p:cNvCxnSpPr>
+            <a:cxnSpLocks/>
+          </p:cNvCxnSpPr>
+          <p:nvPr/>
+        </p:nvCxnSpPr>
+        <p:spPr>
+          <a:xfrm>
+            <a:off x="345486" y="872723"/>
+            <a:ext cx="11501023" cy="0"/>
+          </a:xfrm>
+          <a:prstGeom prst="line">
+            <a:avLst/>
+          </a:prstGeom>
+          <a:ln>
+            <a:solidFill>
+              <a:schemeClr val="tx2"/>
+            </a:solidFill>
+          </a:ln>
+        </p:spPr>
+        <p:style>
+          <a:lnRef idx="2">
+            <a:schemeClr val="accent1"/>
+          </a:lnRef>
+          <a:fillRef idx="0">
+            <a:schemeClr val="accent1"/>
+          </a:fillRef>
+          <a:effectRef idx="1">
+            <a:schemeClr val="accent1"/>
+          </a:effectRef>
+          <a:fontRef idx="minor">
+            <a:schemeClr val="tx1"/>
+          </a:fontRef>
+        </p:style>
+      </p:cxnSp>
+      <p:sp>
+        <p:nvSpPr>
+          <p:cNvPr id="9" name="矩形 8">
+            <a:extLst>
+              <a:ext uri="{FF2B5EF4-FFF2-40B4-BE49-F238E27FC236}">
+                <a16:creationId xmlns:a16="http://schemas.microsoft.com/office/drawing/2014/main" id="{CA88D83A-5172-4079-3EE0-40D82178B9D6}"/>
+              </a:ext>
+            </a:extLst>
+          </p:cNvPr>
+          <p:cNvSpPr/>
+          <p:nvPr/>
+        </p:nvSpPr>
+        <p:spPr>
+          <a:xfrm>
+            <a:off x="5728242" y="1321262"/>
+            <a:ext cx="2139917" cy="488748"/>
+          </a:xfrm>
+          <a:prstGeom prst="rect">
+            <a:avLst/>
+          </a:prstGeom>
+          <a:solidFill>
+            <a:schemeClr val="bg2"/>
+          </a:solidFill>
+          <a:ln>
+            <a:noFill/>
+          </a:ln>
+        </p:spPr>
+        <p:style>
+          <a:lnRef idx="2">
+            <a:schemeClr val="accent1">
+              <a:shade val="15000"/>
+            </a:schemeClr>
+          </a:lnRef>
+          <a:fillRef idx="1">
+            <a:schemeClr val="accent1"/>
+          </a:fillRef>
+          <a:effectRef idx="0">
+            <a:schemeClr val="accent1"/>
+          </a:effectRef>
+          <a:fontRef idx="minor">
+            <a:schemeClr val="lt1"/>
+          </a:fontRef>
+        </p:style>
+        <p:txBody>
+          <a:bodyPr rtlCol="0" anchor="ctr"/>
+          <a:lstStyle/>
+          <a:p>
+            <a:r>
+              <a:rPr kumimoji="1" lang="en-US" altLang="zh-CN" sz="1400" b="1" dirty="0">
+                <a:solidFill>
+                  <a:schemeClr val="tx1"/>
+                </a:solidFill>
+              </a:rPr>
+              <a:t>Germany Regulatory</a:t>
+            </a:r>
+          </a:p>
+          <a:p>
+            <a:r>
+              <a:rPr kumimoji="1" lang="en-US" altLang="zh-CN" sz="1400" b="1" dirty="0">
+                <a:solidFill>
+                  <a:schemeClr val="tx1"/>
+                </a:solidFill>
+              </a:rPr>
+              <a:t>Environment</a:t>
+            </a:r>
+          </a:p>
+        </p:txBody>
+      </p:sp>
+      <p:sp>
+        <p:nvSpPr>
+          <p:cNvPr id="10" name="圆角矩形 9">
+            <a:extLst>
+              <a:ext uri="{FF2B5EF4-FFF2-40B4-BE49-F238E27FC236}">
+                <a16:creationId xmlns:a16="http://schemas.microsoft.com/office/drawing/2014/main" id="{B49B9359-07E6-9820-71DF-F889BAE58EFC}"/>
+              </a:ext>
+            </a:extLst>
+          </p:cNvPr>
+          <p:cNvSpPr/>
+          <p:nvPr/>
+        </p:nvSpPr>
+        <p:spPr>
+          <a:xfrm>
+            <a:off x="5466825" y="1321266"/>
+            <a:ext cx="261417" cy="488743"/>
+          </a:xfrm>
+          <a:prstGeom prst="roundRect">
+            <a:avLst>
+              <a:gd name="adj" fmla="val 0"/>
+            </a:avLst>
+          </a:prstGeom>
+          <a:solidFill>
+            <a:schemeClr val="tx2"/>
+          </a:solidFill>
+          <a:ln w="6350">
+            <a:noFill/>
+          </a:ln>
+        </p:spPr>
+        <p:style>
+          <a:lnRef idx="2">
+            <a:schemeClr val="accent1">
+              <a:shade val="15000"/>
+            </a:schemeClr>
+          </a:lnRef>
+          <a:fillRef idx="1">
+            <a:schemeClr val="accent1"/>
+          </a:fillRef>
+          <a:effectRef idx="0">
+            <a:schemeClr val="accent1"/>
+          </a:effectRef>
+          <a:fontRef idx="minor">
+            <a:schemeClr val="lt1"/>
+          </a:fontRef>
+        </p:style>
+        <p:txBody>
+          <a:bodyPr rtlCol="0" anchor="ctr"/>
+          <a:lstStyle/>
+          <a:p>
+            <a:pPr algn="ctr"/>
+            <a:r>
+              <a:rPr kumimoji="1" lang="en-US" altLang="zh-CN" sz="1600" b="1" dirty="0"/>
+              <a:t>1</a:t>
+            </a:r>
+            <a:endParaRPr kumimoji="1" lang="zh-CN" altLang="en-US" sz="1600" b="1" dirty="0"/>
+          </a:p>
+        </p:txBody>
+      </p:sp>
+      <p:sp>
+        <p:nvSpPr>
+          <p:cNvPr id="11" name="圆角矩形 10">
+            <a:extLst>
+              <a:ext uri="{FF2B5EF4-FFF2-40B4-BE49-F238E27FC236}">
+                <a16:creationId xmlns:a16="http://schemas.microsoft.com/office/drawing/2014/main" id="{17A0A004-9899-2873-E37E-ADB0C445D411}"/>
+              </a:ext>
+            </a:extLst>
+          </p:cNvPr>
+          <p:cNvSpPr/>
+          <p:nvPr/>
+        </p:nvSpPr>
+        <p:spPr>
+          <a:xfrm>
+            <a:off x="8052335" y="1321261"/>
+            <a:ext cx="3790588" cy="488748"/>
+          </a:xfrm>
+          <a:prstGeom prst="roundRect">
+            <a:avLst>
+              <a:gd name="adj" fmla="val 0"/>
+            </a:avLst>
+          </a:prstGeom>
+          <a:solidFill>
+            <a:schemeClr val="bg1">
+              <a:lumMod val="95000"/>
+            </a:schemeClr>
+          </a:solidFill>
+          <a:ln w="19050">
+            <a:noFill/>
+          </a:ln>
+        </p:spPr>
+        <p:style>
+          <a:lnRef idx="2">
+            <a:schemeClr val="accent1">
+              <a:shade val="15000"/>
+            </a:schemeClr>
+          </a:lnRef>
+          <a:fillRef idx="1">
+            <a:schemeClr val="accent1"/>
+          </a:fillRef>
+          <a:effectRef idx="0">
+            <a:schemeClr val="accent1"/>
+          </a:effectRef>
+          <a:fontRef idx="minor">
+            <a:schemeClr val="lt1"/>
+          </a:fontRef>
+        </p:style>
+        <p:txBody>
+          <a:bodyPr rtlCol="0" anchor="ctr"/>
+          <a:lstStyle/>
+          <a:p>
+            <a:pPr>
+              <a:lnSpc>
+                <a:spcPct val="90000"/>
+              </a:lnSpc>
+            </a:pPr>
+            <a:r>
+              <a:rPr kumimoji="1" lang="en-US" altLang="zh-CN" sz="1400" dirty="0">
+                <a:solidFill>
+                  <a:schemeClr val="tx1"/>
+                </a:solidFill>
+              </a:rPr>
+              <a:t>Slow project approval and project sales could</a:t>
+            </a:r>
+          </a:p>
+          <a:p>
+            <a:pPr>
+              <a:lnSpc>
+                <a:spcPct val="90000"/>
+              </a:lnSpc>
+            </a:pPr>
+            <a:r>
+              <a:rPr kumimoji="1" lang="en-US" altLang="zh-CN" sz="1400" dirty="0">
+                <a:solidFill>
+                  <a:schemeClr val="tx1"/>
+                </a:solidFill>
+              </a:rPr>
+              <a:t>significantly slow ability to cash recycle</a:t>
+            </a:r>
+          </a:p>
+        </p:txBody>
+      </p:sp>
+      <p:cxnSp>
+        <p:nvCxnSpPr>
+          <p:cNvPr id="12" name="直线连接符 11">
+            <a:extLst>
+              <a:ext uri="{FF2B5EF4-FFF2-40B4-BE49-F238E27FC236}">
+                <a16:creationId xmlns:a16="http://schemas.microsoft.com/office/drawing/2014/main" id="{9E7E5E45-CEB0-9F21-275B-46E1846C6AE9}"/>
+              </a:ext>
+            </a:extLst>
+          </p:cNvPr>
+          <p:cNvCxnSpPr>
+            <a:cxnSpLocks/>
+            <a:stCxn id="9" idx="3"/>
+            <a:endCxn id="11" idx="1"/>
+          </p:cNvCxnSpPr>
+          <p:nvPr/>
+        </p:nvCxnSpPr>
+        <p:spPr>
+          <a:xfrm flipV="1">
+            <a:off x="7868159" y="1565635"/>
+            <a:ext cx="184176" cy="1"/>
+          </a:xfrm>
+          <a:prstGeom prst="line">
+            <a:avLst/>
+          </a:prstGeom>
+          <a:ln>
+            <a:solidFill>
+              <a:schemeClr val="tx2"/>
+            </a:solidFill>
+          </a:ln>
+        </p:spPr>
+        <p:style>
+          <a:lnRef idx="2">
+            <a:schemeClr val="accent1"/>
+          </a:lnRef>
+          <a:fillRef idx="0">
+            <a:schemeClr val="accent1"/>
+          </a:fillRef>
+          <a:effectRef idx="1">
+            <a:schemeClr val="accent1"/>
+          </a:effectRef>
+          <a:fontRef idx="minor">
+            <a:schemeClr val="tx1"/>
+          </a:fontRef>
+        </p:style>
+      </p:cxnSp>
+      <p:sp>
+        <p:nvSpPr>
+          <p:cNvPr id="15" name="矩形 14">
+            <a:extLst>
+              <a:ext uri="{FF2B5EF4-FFF2-40B4-BE49-F238E27FC236}">
+                <a16:creationId xmlns:a16="http://schemas.microsoft.com/office/drawing/2014/main" id="{A4D0989F-24AA-FCBF-C03A-C64320E1B2DB}"/>
+              </a:ext>
+            </a:extLst>
+          </p:cNvPr>
+          <p:cNvSpPr/>
+          <p:nvPr/>
+        </p:nvSpPr>
+        <p:spPr>
+          <a:xfrm>
+            <a:off x="5728242" y="1923935"/>
+            <a:ext cx="2139918" cy="488748"/>
+          </a:xfrm>
+          <a:prstGeom prst="rect">
+            <a:avLst/>
+          </a:prstGeom>
+          <a:solidFill>
+            <a:schemeClr val="bg2"/>
+          </a:solidFill>
+          <a:ln>
+            <a:noFill/>
+          </a:ln>
+        </p:spPr>
+        <p:style>
+          <a:lnRef idx="2">
+            <a:schemeClr val="accent1">
+              <a:shade val="15000"/>
+            </a:schemeClr>
+          </a:lnRef>
+          <a:fillRef idx="1">
+            <a:schemeClr val="accent1"/>
+          </a:fillRef>
+          <a:effectRef idx="0">
+            <a:schemeClr val="accent1"/>
+          </a:effectRef>
+          <a:fontRef idx="minor">
+            <a:schemeClr val="lt1"/>
+          </a:fontRef>
+        </p:style>
+        <p:txBody>
+          <a:bodyPr rtlCol="0" anchor="ctr"/>
+          <a:lstStyle/>
+          <a:p>
+            <a:r>
+              <a:rPr kumimoji="1" lang="en-US" altLang="zh-CN" sz="1400" b="1" dirty="0">
+                <a:solidFill>
+                  <a:schemeClr val="tx1"/>
+                </a:solidFill>
+              </a:rPr>
+              <a:t>High Leverage Risk from Merchant Agreements</a:t>
+            </a:r>
+          </a:p>
+        </p:txBody>
+      </p:sp>
+      <p:sp>
+        <p:nvSpPr>
+          <p:cNvPr id="16" name="圆角矩形 15">
+            <a:extLst>
+              <a:ext uri="{FF2B5EF4-FFF2-40B4-BE49-F238E27FC236}">
+                <a16:creationId xmlns:a16="http://schemas.microsoft.com/office/drawing/2014/main" id="{C4DDBA0C-C25A-6AEF-7143-E55E2FB6DF0C}"/>
+              </a:ext>
+            </a:extLst>
+          </p:cNvPr>
+          <p:cNvSpPr/>
+          <p:nvPr/>
+        </p:nvSpPr>
+        <p:spPr>
+          <a:xfrm>
+            <a:off x="5466825" y="1923934"/>
+            <a:ext cx="261417" cy="488743"/>
+          </a:xfrm>
+          <a:prstGeom prst="roundRect">
+            <a:avLst>
+              <a:gd name="adj" fmla="val 0"/>
+            </a:avLst>
+          </a:prstGeom>
+          <a:solidFill>
+            <a:schemeClr val="tx2"/>
+          </a:solidFill>
+          <a:ln w="6350">
+            <a:noFill/>
+          </a:ln>
+        </p:spPr>
+        <p:style>
+          <a:lnRef idx="2">
+            <a:schemeClr val="accent1">
+              <a:shade val="15000"/>
+            </a:schemeClr>
+          </a:lnRef>
+          <a:fillRef idx="1">
+            <a:schemeClr val="accent1"/>
+          </a:fillRef>
+          <a:effectRef idx="0">
+            <a:schemeClr val="accent1"/>
+          </a:effectRef>
+          <a:fontRef idx="minor">
+            <a:schemeClr val="lt1"/>
+          </a:fontRef>
+        </p:style>
+        <p:txBody>
+          <a:bodyPr rtlCol="0" anchor="ctr"/>
+          <a:lstStyle/>
+          <a:p>
+            <a:pPr algn="ctr"/>
+            <a:r>
+              <a:rPr kumimoji="1" lang="en-US" altLang="zh-CN" sz="1600" b="1" dirty="0"/>
+              <a:t>2</a:t>
+            </a:r>
+            <a:endParaRPr kumimoji="1" lang="zh-CN" altLang="en-US" sz="1600" b="1" dirty="0"/>
+          </a:p>
+        </p:txBody>
+      </p:sp>
+      <p:sp>
+        <p:nvSpPr>
+          <p:cNvPr id="17" name="圆角矩形 16">
+            <a:extLst>
+              <a:ext uri="{FF2B5EF4-FFF2-40B4-BE49-F238E27FC236}">
+                <a16:creationId xmlns:a16="http://schemas.microsoft.com/office/drawing/2014/main" id="{1754FC1E-411B-4701-DFE6-6AB447D98DBB}"/>
+              </a:ext>
+            </a:extLst>
+          </p:cNvPr>
+          <p:cNvSpPr/>
+          <p:nvPr/>
+        </p:nvSpPr>
+        <p:spPr>
+          <a:xfrm>
+            <a:off x="8052335" y="1923934"/>
+            <a:ext cx="3790588" cy="488748"/>
+          </a:xfrm>
+          <a:prstGeom prst="roundRect">
+            <a:avLst>
+              <a:gd name="adj" fmla="val 0"/>
+            </a:avLst>
+          </a:prstGeom>
+          <a:solidFill>
+            <a:schemeClr val="bg1">
+              <a:lumMod val="95000"/>
+            </a:schemeClr>
+          </a:solidFill>
+          <a:ln w="19050">
+            <a:noFill/>
+          </a:ln>
+        </p:spPr>
+        <p:style>
+          <a:lnRef idx="2">
+            <a:schemeClr val="accent1">
+              <a:shade val="15000"/>
+            </a:schemeClr>
+          </a:lnRef>
+          <a:fillRef idx="1">
+            <a:schemeClr val="accent1"/>
+          </a:fillRef>
+          <a:effectRef idx="0">
+            <a:schemeClr val="accent1"/>
+          </a:effectRef>
+          <a:fontRef idx="minor">
+            <a:schemeClr val="lt1"/>
+          </a:fontRef>
+        </p:style>
+        <p:txBody>
+          <a:bodyPr rtlCol="0" anchor="ctr"/>
+          <a:lstStyle/>
+          <a:p>
+            <a:pPr>
+              <a:lnSpc>
+                <a:spcPct val="90000"/>
+              </a:lnSpc>
+            </a:pPr>
+            <a:r>
+              <a:rPr kumimoji="1" lang="en-US" altLang="zh-CN" sz="1400" dirty="0">
+                <a:solidFill>
+                  <a:schemeClr val="tx1"/>
+                </a:solidFill>
+              </a:rPr>
+              <a:t>If price volatility stabilizes, long-term ROI could sharply decline without floor price guarantee</a:t>
+            </a:r>
+          </a:p>
+        </p:txBody>
+      </p:sp>
+      <p:cxnSp>
+        <p:nvCxnSpPr>
+          <p:cNvPr id="18" name="直线连接符 17">
+            <a:extLst>
+              <a:ext uri="{FF2B5EF4-FFF2-40B4-BE49-F238E27FC236}">
+                <a16:creationId xmlns:a16="http://schemas.microsoft.com/office/drawing/2014/main" id="{3830BEC9-46DA-BADE-3E40-3BEEA161BAE6}"/>
+              </a:ext>
+            </a:extLst>
+          </p:cNvPr>
+          <p:cNvCxnSpPr>
+            <a:cxnSpLocks/>
+            <a:stCxn id="15" idx="3"/>
+            <a:endCxn id="17" idx="1"/>
+          </p:cNvCxnSpPr>
+          <p:nvPr/>
+        </p:nvCxnSpPr>
+        <p:spPr>
+          <a:xfrm flipV="1">
+            <a:off x="7868160" y="2168308"/>
+            <a:ext cx="184175" cy="1"/>
+          </a:xfrm>
+          <a:prstGeom prst="line">
+            <a:avLst/>
+          </a:prstGeom>
+          <a:ln>
+            <a:solidFill>
+              <a:schemeClr val="tx2"/>
+            </a:solidFill>
+          </a:ln>
+        </p:spPr>
+        <p:style>
+          <a:lnRef idx="2">
+            <a:schemeClr val="accent1"/>
+          </a:lnRef>
+          <a:fillRef idx="0">
+            <a:schemeClr val="accent1"/>
+          </a:fillRef>
+          <a:effectRef idx="1">
+            <a:schemeClr val="accent1"/>
+          </a:effectRef>
+          <a:fontRef idx="minor">
+            <a:schemeClr val="tx1"/>
+          </a:fontRef>
+        </p:style>
+      </p:cxnSp>
+      <p:sp>
+        <p:nvSpPr>
+          <p:cNvPr id="25" name="矩形 24">
+            <a:extLst>
+              <a:ext uri="{FF2B5EF4-FFF2-40B4-BE49-F238E27FC236}">
+                <a16:creationId xmlns:a16="http://schemas.microsoft.com/office/drawing/2014/main" id="{4B0AB8FE-C0B0-876D-9324-48366A51C7BA}"/>
+              </a:ext>
+            </a:extLst>
+          </p:cNvPr>
+          <p:cNvSpPr/>
+          <p:nvPr/>
+        </p:nvSpPr>
+        <p:spPr>
+          <a:xfrm>
+            <a:off x="5728242" y="2529952"/>
+            <a:ext cx="2139917" cy="488748"/>
+          </a:xfrm>
+          <a:prstGeom prst="rect">
+            <a:avLst/>
+          </a:prstGeom>
+          <a:solidFill>
+            <a:schemeClr val="bg2"/>
+          </a:solidFill>
+          <a:ln>
+            <a:noFill/>
+          </a:ln>
+        </p:spPr>
+        <p:style>
+          <a:lnRef idx="2">
+            <a:schemeClr val="accent1">
+              <a:shade val="15000"/>
+            </a:schemeClr>
+          </a:lnRef>
+          <a:fillRef idx="1">
+            <a:schemeClr val="accent1"/>
+          </a:fillRef>
+          <a:effectRef idx="0">
+            <a:schemeClr val="accent1"/>
+          </a:effectRef>
+          <a:fontRef idx="minor">
+            <a:schemeClr val="lt1"/>
+          </a:fontRef>
+        </p:style>
+        <p:txBody>
+          <a:bodyPr rtlCol="0" anchor="ctr"/>
+          <a:lstStyle/>
+          <a:p>
+            <a:r>
+              <a:rPr kumimoji="1" lang="en-US" altLang="zh-CN" sz="1400" b="1" dirty="0">
+                <a:solidFill>
+                  <a:schemeClr val="tx1"/>
+                </a:solidFill>
+              </a:rPr>
+              <a:t>Rapid BESS Technology Advancements</a:t>
+            </a:r>
+          </a:p>
+        </p:txBody>
+      </p:sp>
+      <p:sp>
+        <p:nvSpPr>
+          <p:cNvPr id="26" name="圆角矩形 25">
+            <a:extLst>
+              <a:ext uri="{FF2B5EF4-FFF2-40B4-BE49-F238E27FC236}">
+                <a16:creationId xmlns:a16="http://schemas.microsoft.com/office/drawing/2014/main" id="{19858136-2129-88C5-46ED-4BB09E66E53E}"/>
+              </a:ext>
+            </a:extLst>
+          </p:cNvPr>
+          <p:cNvSpPr/>
+          <p:nvPr/>
+        </p:nvSpPr>
+        <p:spPr>
+          <a:xfrm>
+            <a:off x="5466825" y="2529956"/>
+            <a:ext cx="261417" cy="488743"/>
+          </a:xfrm>
+          <a:prstGeom prst="roundRect">
+            <a:avLst>
+              <a:gd name="adj" fmla="val 0"/>
+            </a:avLst>
+          </a:prstGeom>
+          <a:solidFill>
+            <a:schemeClr val="tx2"/>
+          </a:solidFill>
+          <a:ln w="6350">
+            <a:noFill/>
+          </a:ln>
+        </p:spPr>
+        <p:style>
+          <a:lnRef idx="2">
+            <a:schemeClr val="accent1">
+              <a:shade val="15000"/>
+            </a:schemeClr>
+          </a:lnRef>
+          <a:fillRef idx="1">
+            <a:schemeClr val="accent1"/>
+          </a:fillRef>
+          <a:effectRef idx="0">
+            <a:schemeClr val="accent1"/>
+          </a:effectRef>
+          <a:fontRef idx="minor">
+            <a:schemeClr val="lt1"/>
+          </a:fontRef>
+        </p:style>
+        <p:txBody>
+          <a:bodyPr rtlCol="0" anchor="ctr"/>
+          <a:lstStyle/>
+          <a:p>
+            <a:pPr algn="ctr"/>
+            <a:r>
+              <a:rPr kumimoji="1" lang="en-US" altLang="zh-CN" sz="1600" b="1" dirty="0"/>
+              <a:t>3</a:t>
+            </a:r>
+            <a:endParaRPr kumimoji="1" lang="zh-CN" altLang="en-US" sz="1600" b="1" dirty="0"/>
+          </a:p>
+        </p:txBody>
+      </p:sp>
+      <p:sp>
+        <p:nvSpPr>
+          <p:cNvPr id="27" name="圆角矩形 26">
+            <a:extLst>
+              <a:ext uri="{FF2B5EF4-FFF2-40B4-BE49-F238E27FC236}">
+                <a16:creationId xmlns:a16="http://schemas.microsoft.com/office/drawing/2014/main" id="{35024976-FD49-3DF0-A388-945A5177D634}"/>
+              </a:ext>
+            </a:extLst>
+          </p:cNvPr>
+          <p:cNvSpPr/>
+          <p:nvPr/>
+        </p:nvSpPr>
+        <p:spPr>
+          <a:xfrm>
+            <a:off x="8052335" y="2529951"/>
+            <a:ext cx="3790588" cy="488748"/>
+          </a:xfrm>
+          <a:prstGeom prst="roundRect">
+            <a:avLst>
+              <a:gd name="adj" fmla="val 0"/>
+            </a:avLst>
+          </a:prstGeom>
+          <a:solidFill>
+            <a:schemeClr val="bg1">
+              <a:lumMod val="95000"/>
+            </a:schemeClr>
+          </a:solidFill>
+          <a:ln w="19050">
+            <a:noFill/>
+          </a:ln>
+        </p:spPr>
+        <p:style>
+          <a:lnRef idx="2">
+            <a:schemeClr val="accent1">
+              <a:shade val="15000"/>
+            </a:schemeClr>
+          </a:lnRef>
+          <a:fillRef idx="1">
+            <a:schemeClr val="accent1"/>
+          </a:fillRef>
+          <a:effectRef idx="0">
+            <a:schemeClr val="accent1"/>
+          </a:effectRef>
+          <a:fontRef idx="minor">
+            <a:schemeClr val="lt1"/>
+          </a:fontRef>
+        </p:style>
+        <p:txBody>
+          <a:bodyPr rtlCol="0" anchor="ctr"/>
+          <a:lstStyle/>
+          <a:p>
+            <a:pPr>
+              <a:lnSpc>
+                <a:spcPct val="90000"/>
+              </a:lnSpc>
+            </a:pPr>
+            <a:r>
+              <a:rPr kumimoji="1" lang="en-US" altLang="zh-CN" sz="1400" dirty="0">
+                <a:solidFill>
+                  <a:schemeClr val="tx1"/>
+                </a:solidFill>
+              </a:rPr>
+              <a:t>Rapid BESS advancement and adoption could</a:t>
+            </a:r>
+          </a:p>
+          <a:p>
+            <a:pPr>
+              <a:lnSpc>
+                <a:spcPct val="90000"/>
+              </a:lnSpc>
+            </a:pPr>
+            <a:r>
+              <a:rPr kumimoji="1" lang="en-US" altLang="zh-CN" sz="1400" dirty="0">
+                <a:solidFill>
+                  <a:schemeClr val="tx1"/>
+                </a:solidFill>
+              </a:rPr>
+              <a:t>leave existing projects inefficient, reducing ROI</a:t>
+            </a:r>
+          </a:p>
+        </p:txBody>
+      </p:sp>
+      <p:cxnSp>
+        <p:nvCxnSpPr>
+          <p:cNvPr id="28" name="直线连接符 27">
+            <a:extLst>
+              <a:ext uri="{FF2B5EF4-FFF2-40B4-BE49-F238E27FC236}">
+                <a16:creationId xmlns:a16="http://schemas.microsoft.com/office/drawing/2014/main" id="{E5EBD285-70D0-099D-1D2D-55F56054C099}"/>
+              </a:ext>
+            </a:extLst>
+          </p:cNvPr>
+          <p:cNvCxnSpPr>
+            <a:cxnSpLocks/>
+            <a:stCxn id="25" idx="3"/>
+            <a:endCxn id="27" idx="1"/>
+          </p:cNvCxnSpPr>
+          <p:nvPr/>
+        </p:nvCxnSpPr>
+        <p:spPr>
+          <a:xfrm flipV="1">
+            <a:off x="7868159" y="2774325"/>
+            <a:ext cx="184176" cy="1"/>
+          </a:xfrm>
+          <a:prstGeom prst="line">
+            <a:avLst/>
+          </a:prstGeom>
+          <a:ln>
+            <a:solidFill>
+              <a:schemeClr val="tx2"/>
+            </a:solidFill>
+          </a:ln>
+        </p:spPr>
+        <p:style>
+          <a:lnRef idx="2">
+            <a:schemeClr val="accent1"/>
+          </a:lnRef>
+          <a:fillRef idx="0">
+            <a:schemeClr val="accent1"/>
+          </a:fillRef>
+          <a:effectRef idx="1">
+            <a:schemeClr val="accent1"/>
+          </a:effectRef>
+          <a:fontRef idx="minor">
+            <a:schemeClr val="tx1"/>
+          </a:fontRef>
+        </p:style>
+      </p:cxnSp>
+      <p:sp>
+        <p:nvSpPr>
+          <p:cNvPr id="29" name="矩形 28">
+            <a:extLst>
+              <a:ext uri="{FF2B5EF4-FFF2-40B4-BE49-F238E27FC236}">
+                <a16:creationId xmlns:a16="http://schemas.microsoft.com/office/drawing/2014/main" id="{A1402583-D522-0786-F803-8030FE8817B5}"/>
+              </a:ext>
+            </a:extLst>
+          </p:cNvPr>
+          <p:cNvSpPr/>
+          <p:nvPr/>
+        </p:nvSpPr>
+        <p:spPr>
+          <a:xfrm>
+            <a:off x="5728242" y="3132625"/>
+            <a:ext cx="2139918" cy="488748"/>
+          </a:xfrm>
+          <a:prstGeom prst="rect">
+            <a:avLst/>
+          </a:prstGeom>
+          <a:solidFill>
+            <a:schemeClr val="bg2"/>
+          </a:solidFill>
+          <a:ln>
+            <a:noFill/>
+          </a:ln>
+        </p:spPr>
+        <p:style>
+          <a:lnRef idx="2">
+            <a:schemeClr val="accent1">
+              <a:shade val="15000"/>
+            </a:schemeClr>
+          </a:lnRef>
+          <a:fillRef idx="1">
+            <a:schemeClr val="accent1"/>
+          </a:fillRef>
+          <a:effectRef idx="0">
+            <a:schemeClr val="accent1"/>
+          </a:effectRef>
+          <a:fontRef idx="minor">
+            <a:schemeClr val="lt1"/>
+          </a:fontRef>
+        </p:style>
+        <p:txBody>
+          <a:bodyPr rtlCol="0" anchor="ctr"/>
+          <a:lstStyle/>
+          <a:p>
+            <a:r>
+              <a:rPr kumimoji="1" lang="en-US" altLang="zh-CN" sz="1400" b="1" dirty="0">
+                <a:solidFill>
+                  <a:schemeClr val="tx1"/>
+                </a:solidFill>
+              </a:rPr>
+              <a:t>Operation &amp; Construction Delays</a:t>
+            </a:r>
+          </a:p>
+        </p:txBody>
+      </p:sp>
+      <p:sp>
+        <p:nvSpPr>
+          <p:cNvPr id="30" name="圆角矩形 29">
+            <a:extLst>
+              <a:ext uri="{FF2B5EF4-FFF2-40B4-BE49-F238E27FC236}">
+                <a16:creationId xmlns:a16="http://schemas.microsoft.com/office/drawing/2014/main" id="{0D16923E-CBF3-B76B-8EAB-AA7ED2684812}"/>
+              </a:ext>
+            </a:extLst>
+          </p:cNvPr>
+          <p:cNvSpPr/>
+          <p:nvPr/>
+        </p:nvSpPr>
+        <p:spPr>
+          <a:xfrm>
+            <a:off x="5466825" y="3132624"/>
+            <a:ext cx="261417" cy="488743"/>
+          </a:xfrm>
+          <a:prstGeom prst="roundRect">
+            <a:avLst>
+              <a:gd name="adj" fmla="val 0"/>
+            </a:avLst>
+          </a:prstGeom>
+          <a:solidFill>
+            <a:schemeClr val="tx2"/>
+          </a:solidFill>
+          <a:ln w="6350">
+            <a:noFill/>
+          </a:ln>
+        </p:spPr>
+        <p:style>
+          <a:lnRef idx="2">
+            <a:schemeClr val="accent1">
+              <a:shade val="15000"/>
+            </a:schemeClr>
+          </a:lnRef>
+          <a:fillRef idx="1">
+            <a:schemeClr val="accent1"/>
+          </a:fillRef>
+          <a:effectRef idx="0">
+            <a:schemeClr val="accent1"/>
+          </a:effectRef>
+          <a:fontRef idx="minor">
+            <a:schemeClr val="lt1"/>
+          </a:fontRef>
+        </p:style>
+        <p:txBody>
+          <a:bodyPr rtlCol="0" anchor="ctr"/>
+          <a:lstStyle/>
+          <a:p>
+            <a:pPr algn="ctr"/>
+            <a:r>
+              <a:rPr kumimoji="1" lang="en-US" altLang="zh-CN" sz="1600" b="1" dirty="0"/>
+              <a:t>4</a:t>
+            </a:r>
+            <a:endParaRPr kumimoji="1" lang="zh-CN" altLang="en-US" sz="1600" b="1" dirty="0"/>
+          </a:p>
+        </p:txBody>
+      </p:sp>
+      <p:sp>
+        <p:nvSpPr>
+          <p:cNvPr id="31" name="圆角矩形 30">
+            <a:extLst>
+              <a:ext uri="{FF2B5EF4-FFF2-40B4-BE49-F238E27FC236}">
+                <a16:creationId xmlns:a16="http://schemas.microsoft.com/office/drawing/2014/main" id="{FEEF2A6E-76AF-2D6C-9A2C-56530C7B4BBC}"/>
+              </a:ext>
+            </a:extLst>
+          </p:cNvPr>
+          <p:cNvSpPr/>
+          <p:nvPr/>
+        </p:nvSpPr>
+        <p:spPr>
+          <a:xfrm>
+            <a:off x="8052335" y="3132624"/>
+            <a:ext cx="3790588" cy="488748"/>
+          </a:xfrm>
+          <a:prstGeom prst="roundRect">
+            <a:avLst>
+              <a:gd name="adj" fmla="val 0"/>
+            </a:avLst>
+          </a:prstGeom>
+          <a:solidFill>
+            <a:schemeClr val="bg1">
+              <a:lumMod val="95000"/>
+            </a:schemeClr>
+          </a:solidFill>
+          <a:ln w="19050">
+            <a:noFill/>
+          </a:ln>
+        </p:spPr>
+        <p:style>
+          <a:lnRef idx="2">
+            <a:schemeClr val="accent1">
+              <a:shade val="15000"/>
+            </a:schemeClr>
+          </a:lnRef>
+          <a:fillRef idx="1">
+            <a:schemeClr val="accent1"/>
+          </a:fillRef>
+          <a:effectRef idx="0">
+            <a:schemeClr val="accent1"/>
+          </a:effectRef>
+          <a:fontRef idx="minor">
+            <a:schemeClr val="lt1"/>
+          </a:fontRef>
+        </p:style>
+        <p:txBody>
+          <a:bodyPr rtlCol="0" anchor="ctr"/>
+          <a:lstStyle/>
+          <a:p>
+            <a:pPr>
+              <a:lnSpc>
+                <a:spcPct val="90000"/>
+              </a:lnSpc>
+            </a:pPr>
+            <a:r>
+              <a:rPr kumimoji="1" lang="en-US" altLang="zh-CN" sz="1400" dirty="0">
+                <a:solidFill>
+                  <a:schemeClr val="tx1"/>
+                </a:solidFill>
+              </a:rPr>
+              <a:t>Delays could tie up capital and prevent EE's ability to secure a dominant market position</a:t>
+            </a:r>
+          </a:p>
+        </p:txBody>
+      </p:sp>
+      <p:cxnSp>
+        <p:nvCxnSpPr>
+          <p:cNvPr id="32" name="直线连接符 31">
+            <a:extLst>
+              <a:ext uri="{FF2B5EF4-FFF2-40B4-BE49-F238E27FC236}">
+                <a16:creationId xmlns:a16="http://schemas.microsoft.com/office/drawing/2014/main" id="{AC805526-DA2C-B57F-FC7B-0BFFC8F77A77}"/>
+              </a:ext>
+            </a:extLst>
+          </p:cNvPr>
+          <p:cNvCxnSpPr>
+            <a:cxnSpLocks/>
+            <a:stCxn id="29" idx="3"/>
+            <a:endCxn id="31" idx="1"/>
+          </p:cNvCxnSpPr>
+          <p:nvPr/>
+        </p:nvCxnSpPr>
+        <p:spPr>
+          <a:xfrm flipV="1">
+            <a:off x="7868160" y="3376998"/>
+            <a:ext cx="184175" cy="1"/>
+          </a:xfrm>
+          <a:prstGeom prst="line">
+            <a:avLst/>
+          </a:prstGeom>
+          <a:ln>
+            <a:solidFill>
+              <a:schemeClr val="tx2"/>
+            </a:solidFill>
+          </a:ln>
+        </p:spPr>
+        <p:style>
+          <a:lnRef idx="2">
+            <a:schemeClr val="accent1"/>
+          </a:lnRef>
+          <a:fillRef idx="0">
+            <a:schemeClr val="accent1"/>
+          </a:fillRef>
+          <a:effectRef idx="1">
+            <a:schemeClr val="accent1"/>
+          </a:effectRef>
+          <a:fontRef idx="minor">
+            <a:schemeClr val="tx1"/>
+          </a:fontRef>
+        </p:style>
+      </p:cxnSp>
+      <p:sp>
+        <p:nvSpPr>
+          <p:cNvPr id="33" name="矩形 32">
+            <a:extLst>
+              <a:ext uri="{FF2B5EF4-FFF2-40B4-BE49-F238E27FC236}">
+                <a16:creationId xmlns:a16="http://schemas.microsoft.com/office/drawing/2014/main" id="{D523052D-9F1C-0FF7-415E-49C912C3984D}"/>
+              </a:ext>
+            </a:extLst>
+          </p:cNvPr>
+          <p:cNvSpPr/>
+          <p:nvPr/>
+        </p:nvSpPr>
+        <p:spPr>
+          <a:xfrm>
+            <a:off x="5728242" y="3738641"/>
+            <a:ext cx="2139917" cy="488748"/>
+          </a:xfrm>
+          <a:prstGeom prst="rect">
+            <a:avLst/>
+          </a:prstGeom>
+          <a:solidFill>
+            <a:schemeClr val="bg2"/>
+          </a:solidFill>
+          <a:ln>
+            <a:noFill/>
+          </a:ln>
+        </p:spPr>
+        <p:style>
+          <a:lnRef idx="2">
+            <a:schemeClr val="accent1">
+              <a:shade val="15000"/>
+            </a:schemeClr>
+          </a:lnRef>
+          <a:fillRef idx="1">
+            <a:schemeClr val="accent1"/>
+          </a:fillRef>
+          <a:effectRef idx="0">
+            <a:schemeClr val="accent1"/>
+          </a:effectRef>
+          <a:fontRef idx="minor">
+            <a:schemeClr val="lt1"/>
+          </a:fontRef>
+        </p:style>
+        <p:txBody>
+          <a:bodyPr rtlCol="0" anchor="ctr"/>
+          <a:lstStyle/>
+          <a:p>
+            <a:r>
+              <a:rPr kumimoji="1" lang="en-US" altLang="zh-CN" sz="1400" b="1" dirty="0">
+                <a:solidFill>
+                  <a:schemeClr val="tx1"/>
+                </a:solidFill>
+              </a:rPr>
+              <a:t>Lack of Project </a:t>
+            </a:r>
+            <a:br>
+              <a:rPr kumimoji="1" lang="en-US" altLang="zh-CN" sz="1400" b="1" dirty="0">
+                <a:solidFill>
+                  <a:schemeClr val="tx1"/>
+                </a:solidFill>
+              </a:rPr>
+            </a:br>
+            <a:r>
+              <a:rPr kumimoji="1" lang="en-US" altLang="zh-CN" sz="1400" b="1" dirty="0">
+                <a:solidFill>
+                  <a:schemeClr val="tx1"/>
+                </a:solidFill>
+              </a:rPr>
+              <a:t>Sale Buyers</a:t>
+            </a:r>
+          </a:p>
+        </p:txBody>
+      </p:sp>
+      <p:sp>
+        <p:nvSpPr>
+          <p:cNvPr id="34" name="圆角矩形 33">
+            <a:extLst>
+              <a:ext uri="{FF2B5EF4-FFF2-40B4-BE49-F238E27FC236}">
+                <a16:creationId xmlns:a16="http://schemas.microsoft.com/office/drawing/2014/main" id="{5C2F44BB-ADC7-2B4E-6D28-C28FC78BF845}"/>
+              </a:ext>
+            </a:extLst>
+          </p:cNvPr>
+          <p:cNvSpPr/>
+          <p:nvPr/>
+        </p:nvSpPr>
+        <p:spPr>
+          <a:xfrm>
+            <a:off x="5466825" y="3738645"/>
+            <a:ext cx="261417" cy="488743"/>
+          </a:xfrm>
+          <a:prstGeom prst="roundRect">
+            <a:avLst>
+              <a:gd name="adj" fmla="val 0"/>
+            </a:avLst>
+          </a:prstGeom>
+          <a:solidFill>
+            <a:schemeClr val="tx2"/>
+          </a:solidFill>
+          <a:ln w="6350">
+            <a:noFill/>
+          </a:ln>
+        </p:spPr>
+        <p:style>
+          <a:lnRef idx="2">
+            <a:schemeClr val="accent1">
+              <a:shade val="15000"/>
+            </a:schemeClr>
+          </a:lnRef>
+          <a:fillRef idx="1">
+            <a:schemeClr val="accent1"/>
+          </a:fillRef>
+          <a:effectRef idx="0">
+            <a:schemeClr val="accent1"/>
+          </a:effectRef>
+          <a:fontRef idx="minor">
+            <a:schemeClr val="lt1"/>
+          </a:fontRef>
+        </p:style>
+        <p:txBody>
+          <a:bodyPr rtlCol="0" anchor="ctr"/>
+          <a:lstStyle/>
+          <a:p>
+            <a:pPr algn="ctr"/>
+            <a:r>
+              <a:rPr kumimoji="1" lang="en-US" altLang="zh-CN" sz="1600" b="1" dirty="0"/>
+              <a:t>5</a:t>
+            </a:r>
+            <a:endParaRPr kumimoji="1" lang="zh-CN" altLang="en-US" sz="1600" b="1" dirty="0"/>
+          </a:p>
+        </p:txBody>
+      </p:sp>
+      <p:sp>
+        <p:nvSpPr>
+          <p:cNvPr id="35" name="圆角矩形 34">
+            <a:extLst>
+              <a:ext uri="{FF2B5EF4-FFF2-40B4-BE49-F238E27FC236}">
+                <a16:creationId xmlns:a16="http://schemas.microsoft.com/office/drawing/2014/main" id="{B845EDE1-421E-B1DF-DBB7-81857931A447}"/>
+              </a:ext>
+            </a:extLst>
+          </p:cNvPr>
+          <p:cNvSpPr/>
+          <p:nvPr/>
+        </p:nvSpPr>
+        <p:spPr>
+          <a:xfrm>
+            <a:off x="8052335" y="3738640"/>
+            <a:ext cx="3790588" cy="488748"/>
+          </a:xfrm>
+          <a:prstGeom prst="roundRect">
+            <a:avLst>
+              <a:gd name="adj" fmla="val 0"/>
+            </a:avLst>
+          </a:prstGeom>
+          <a:solidFill>
+            <a:schemeClr val="bg1">
+              <a:lumMod val="95000"/>
+            </a:schemeClr>
+          </a:solidFill>
+          <a:ln w="19050">
+            <a:noFill/>
+          </a:ln>
+        </p:spPr>
+        <p:style>
+          <a:lnRef idx="2">
+            <a:schemeClr val="accent1">
+              <a:shade val="15000"/>
+            </a:schemeClr>
+          </a:lnRef>
+          <a:fillRef idx="1">
+            <a:schemeClr val="accent1"/>
+          </a:fillRef>
+          <a:effectRef idx="0">
+            <a:schemeClr val="accent1"/>
+          </a:effectRef>
+          <a:fontRef idx="minor">
+            <a:schemeClr val="lt1"/>
+          </a:fontRef>
+        </p:style>
+        <p:txBody>
+          <a:bodyPr rtlCol="0" anchor="ctr"/>
+          <a:lstStyle/>
+          <a:p>
+            <a:pPr>
+              <a:lnSpc>
+                <a:spcPct val="90000"/>
+              </a:lnSpc>
+            </a:pPr>
+            <a:r>
+              <a:rPr kumimoji="1" lang="en-US" altLang="zh-CN" sz="1400" dirty="0">
+                <a:solidFill>
+                  <a:schemeClr val="tx1"/>
+                </a:solidFill>
+              </a:rPr>
+              <a:t>Slow project sales could slow cash recycling, but EE would generate returns in intermediary</a:t>
+            </a:r>
+          </a:p>
+        </p:txBody>
+      </p:sp>
+      <p:cxnSp>
+        <p:nvCxnSpPr>
+          <p:cNvPr id="36" name="直线连接符 35">
+            <a:extLst>
+              <a:ext uri="{FF2B5EF4-FFF2-40B4-BE49-F238E27FC236}">
+                <a16:creationId xmlns:a16="http://schemas.microsoft.com/office/drawing/2014/main" id="{81E98287-C8FD-6728-B59D-FBFCA5A72965}"/>
+              </a:ext>
+            </a:extLst>
+          </p:cNvPr>
+          <p:cNvCxnSpPr>
+            <a:cxnSpLocks/>
+            <a:stCxn id="33" idx="3"/>
+            <a:endCxn id="35" idx="1"/>
+          </p:cNvCxnSpPr>
+          <p:nvPr/>
+        </p:nvCxnSpPr>
+        <p:spPr>
+          <a:xfrm flipV="1">
+            <a:off x="7868159" y="3983014"/>
+            <a:ext cx="184176" cy="1"/>
+          </a:xfrm>
+          <a:prstGeom prst="line">
+            <a:avLst/>
+          </a:prstGeom>
+          <a:ln>
+            <a:solidFill>
+              <a:schemeClr val="tx2"/>
+            </a:solidFill>
+          </a:ln>
+        </p:spPr>
+        <p:style>
+          <a:lnRef idx="2">
+            <a:schemeClr val="accent1"/>
+          </a:lnRef>
+          <a:fillRef idx="0">
+            <a:schemeClr val="accent1"/>
+          </a:fillRef>
+          <a:effectRef idx="1">
+            <a:schemeClr val="accent1"/>
+          </a:effectRef>
+          <a:fontRef idx="minor">
+            <a:schemeClr val="tx1"/>
+          </a:fontRef>
+        </p:style>
+      </p:cxnSp>
+      <p:sp>
+        <p:nvSpPr>
+          <p:cNvPr id="37" name="矩形 36">
+            <a:extLst>
+              <a:ext uri="{FF2B5EF4-FFF2-40B4-BE49-F238E27FC236}">
+                <a16:creationId xmlns:a16="http://schemas.microsoft.com/office/drawing/2014/main" id="{34BAA28E-3856-E0AE-E749-4F7906A2EC43}"/>
+              </a:ext>
+            </a:extLst>
+          </p:cNvPr>
+          <p:cNvSpPr/>
+          <p:nvPr/>
+        </p:nvSpPr>
+        <p:spPr>
+          <a:xfrm>
+            <a:off x="5728242" y="4341314"/>
+            <a:ext cx="2139918" cy="488748"/>
+          </a:xfrm>
+          <a:prstGeom prst="rect">
+            <a:avLst/>
+          </a:prstGeom>
+          <a:solidFill>
+            <a:schemeClr val="bg2"/>
+          </a:solidFill>
+          <a:ln>
+            <a:noFill/>
+          </a:ln>
+        </p:spPr>
+        <p:style>
+          <a:lnRef idx="2">
+            <a:schemeClr val="accent1">
+              <a:shade val="15000"/>
+            </a:schemeClr>
+          </a:lnRef>
+          <a:fillRef idx="1">
+            <a:schemeClr val="accent1"/>
+          </a:fillRef>
+          <a:effectRef idx="0">
+            <a:schemeClr val="accent1"/>
+          </a:effectRef>
+          <a:fontRef idx="minor">
+            <a:schemeClr val="lt1"/>
+          </a:fontRef>
+        </p:style>
+        <p:txBody>
+          <a:bodyPr rtlCol="0" anchor="ctr"/>
+          <a:lstStyle/>
+          <a:p>
+            <a:r>
+              <a:rPr kumimoji="1" lang="en-US" altLang="zh-CN" sz="1400" b="1" dirty="0">
+                <a:solidFill>
+                  <a:schemeClr val="tx1"/>
+                </a:solidFill>
+              </a:rPr>
+              <a:t>Fail to Secure Sufficient Debt Financing</a:t>
+            </a:r>
+          </a:p>
+        </p:txBody>
+      </p:sp>
+      <p:sp>
+        <p:nvSpPr>
+          <p:cNvPr id="38" name="圆角矩形 37">
+            <a:extLst>
+              <a:ext uri="{FF2B5EF4-FFF2-40B4-BE49-F238E27FC236}">
+                <a16:creationId xmlns:a16="http://schemas.microsoft.com/office/drawing/2014/main" id="{BD70D279-69C5-9A47-A831-EAB4F046C336}"/>
+              </a:ext>
+            </a:extLst>
+          </p:cNvPr>
+          <p:cNvSpPr/>
+          <p:nvPr/>
+        </p:nvSpPr>
+        <p:spPr>
+          <a:xfrm>
+            <a:off x="5466825" y="4341313"/>
+            <a:ext cx="261417" cy="488743"/>
+          </a:xfrm>
+          <a:prstGeom prst="roundRect">
+            <a:avLst>
+              <a:gd name="adj" fmla="val 0"/>
+            </a:avLst>
+          </a:prstGeom>
+          <a:solidFill>
+            <a:schemeClr val="tx2"/>
+          </a:solidFill>
+          <a:ln w="6350">
+            <a:noFill/>
+          </a:ln>
+        </p:spPr>
+        <p:style>
+          <a:lnRef idx="2">
+            <a:schemeClr val="accent1">
+              <a:shade val="15000"/>
+            </a:schemeClr>
+          </a:lnRef>
+          <a:fillRef idx="1">
+            <a:schemeClr val="accent1"/>
+          </a:fillRef>
+          <a:effectRef idx="0">
+            <a:schemeClr val="accent1"/>
+          </a:effectRef>
+          <a:fontRef idx="minor">
+            <a:schemeClr val="lt1"/>
+          </a:fontRef>
+        </p:style>
+        <p:txBody>
+          <a:bodyPr rtlCol="0" anchor="ctr"/>
+          <a:lstStyle/>
+          <a:p>
+            <a:pPr algn="ctr"/>
+            <a:r>
+              <a:rPr kumimoji="1" lang="en-US" altLang="zh-CN" sz="1600" b="1" dirty="0"/>
+              <a:t>6</a:t>
+            </a:r>
+            <a:endParaRPr kumimoji="1" lang="zh-CN" altLang="en-US" sz="1600" b="1" dirty="0"/>
+          </a:p>
+        </p:txBody>
+      </p:sp>
+      <p:sp>
+        <p:nvSpPr>
+          <p:cNvPr id="39" name="圆角矩形 38">
+            <a:extLst>
+              <a:ext uri="{FF2B5EF4-FFF2-40B4-BE49-F238E27FC236}">
+                <a16:creationId xmlns:a16="http://schemas.microsoft.com/office/drawing/2014/main" id="{1C675C16-97F2-9B3A-3AB7-2DDBF14BFC28}"/>
+              </a:ext>
+            </a:extLst>
+          </p:cNvPr>
+          <p:cNvSpPr/>
+          <p:nvPr/>
+        </p:nvSpPr>
+        <p:spPr>
+          <a:xfrm>
+            <a:off x="8052335" y="4341313"/>
+            <a:ext cx="3790588" cy="488748"/>
+          </a:xfrm>
+          <a:prstGeom prst="roundRect">
+            <a:avLst>
+              <a:gd name="adj" fmla="val 0"/>
+            </a:avLst>
+          </a:prstGeom>
+          <a:solidFill>
+            <a:schemeClr val="bg1">
+              <a:lumMod val="95000"/>
+            </a:schemeClr>
+          </a:solidFill>
+          <a:ln w="19050">
+            <a:noFill/>
+          </a:ln>
+        </p:spPr>
+        <p:style>
+          <a:lnRef idx="2">
+            <a:schemeClr val="accent1">
+              <a:shade val="15000"/>
+            </a:schemeClr>
+          </a:lnRef>
+          <a:fillRef idx="1">
+            <a:schemeClr val="accent1"/>
+          </a:fillRef>
+          <a:effectRef idx="0">
+            <a:schemeClr val="accent1"/>
+          </a:effectRef>
+          <a:fontRef idx="minor">
+            <a:schemeClr val="lt1"/>
+          </a:fontRef>
+        </p:style>
+        <p:txBody>
+          <a:bodyPr rtlCol="0" anchor="ctr"/>
+          <a:lstStyle/>
+          <a:p>
+            <a:pPr>
+              <a:lnSpc>
+                <a:spcPct val="90000"/>
+              </a:lnSpc>
+            </a:pPr>
+            <a:r>
+              <a:rPr kumimoji="1" lang="en-US" altLang="zh-CN" sz="1400" dirty="0">
+                <a:solidFill>
+                  <a:schemeClr val="tx1"/>
+                </a:solidFill>
+              </a:rPr>
+              <a:t>Projections depend on sufficient debt</a:t>
+            </a:r>
+          </a:p>
+          <a:p>
+            <a:pPr>
+              <a:lnSpc>
+                <a:spcPct val="90000"/>
+              </a:lnSpc>
+            </a:pPr>
+            <a:r>
+              <a:rPr kumimoji="1" lang="en-US" altLang="zh-CN" sz="1400" dirty="0">
+                <a:solidFill>
+                  <a:schemeClr val="tx1"/>
+                </a:solidFill>
+              </a:rPr>
+              <a:t>financers, influenced by macro trends</a:t>
+            </a:r>
+          </a:p>
+        </p:txBody>
+      </p:sp>
+      <p:cxnSp>
+        <p:nvCxnSpPr>
+          <p:cNvPr id="40" name="直线连接符 39">
+            <a:extLst>
+              <a:ext uri="{FF2B5EF4-FFF2-40B4-BE49-F238E27FC236}">
+                <a16:creationId xmlns:a16="http://schemas.microsoft.com/office/drawing/2014/main" id="{30F0A141-20ED-51D7-D489-2313FFB6C9E2}"/>
+              </a:ext>
+            </a:extLst>
+          </p:cNvPr>
+          <p:cNvCxnSpPr>
+            <a:cxnSpLocks/>
+            <a:stCxn id="37" idx="3"/>
+            <a:endCxn id="39" idx="1"/>
+          </p:cNvCxnSpPr>
+          <p:nvPr/>
+        </p:nvCxnSpPr>
+        <p:spPr>
+          <a:xfrm flipV="1">
+            <a:off x="7868160" y="4585687"/>
+            <a:ext cx="184175" cy="1"/>
+          </a:xfrm>
+          <a:prstGeom prst="line">
+            <a:avLst/>
+          </a:prstGeom>
+          <a:ln>
+            <a:solidFill>
+              <a:schemeClr val="tx2"/>
+            </a:solidFill>
+          </a:ln>
+        </p:spPr>
+        <p:style>
+          <a:lnRef idx="2">
+            <a:schemeClr val="accent1"/>
+          </a:lnRef>
+          <a:fillRef idx="0">
+            <a:schemeClr val="accent1"/>
+          </a:fillRef>
+          <a:effectRef idx="1">
+            <a:schemeClr val="accent1"/>
+          </a:effectRef>
+          <a:fontRef idx="minor">
+            <a:schemeClr val="tx1"/>
+          </a:fontRef>
+        </p:style>
+      </p:cxnSp>
+      <p:sp>
+        <p:nvSpPr>
+          <p:cNvPr id="41" name="矩形 40">
+            <a:extLst>
+              <a:ext uri="{FF2B5EF4-FFF2-40B4-BE49-F238E27FC236}">
+                <a16:creationId xmlns:a16="http://schemas.microsoft.com/office/drawing/2014/main" id="{F04773C9-C3D6-C275-AECD-55A2DE1E4EEE}"/>
+              </a:ext>
+            </a:extLst>
+          </p:cNvPr>
+          <p:cNvSpPr/>
+          <p:nvPr/>
+        </p:nvSpPr>
+        <p:spPr>
+          <a:xfrm>
+            <a:off x="5466825" y="5311531"/>
+            <a:ext cx="6376098" cy="774330"/>
+          </a:xfrm>
+          <a:prstGeom prst="rect">
+            <a:avLst/>
+          </a:prstGeom>
+          <a:noFill/>
+          <a:ln>
+            <a:solidFill>
+              <a:schemeClr val="bg2"/>
+            </a:solidFill>
+          </a:ln>
+        </p:spPr>
+        <p:style>
+          <a:lnRef idx="2">
+            <a:schemeClr val="accent1">
+              <a:shade val="15000"/>
+            </a:schemeClr>
+          </a:lnRef>
+          <a:fillRef idx="1">
+            <a:schemeClr val="accent1"/>
+          </a:fillRef>
+          <a:effectRef idx="0">
+            <a:schemeClr val="accent1"/>
+          </a:effectRef>
+          <a:fontRef idx="minor">
+            <a:schemeClr val="lt1"/>
+          </a:fontRef>
+        </p:style>
+        <p:txBody>
+          <a:bodyPr rtlCol="0" anchor="t"/>
+          <a:lstStyle/>
+          <a:p>
+            <a:r>
+              <a:rPr kumimoji="1" lang="en-US" altLang="zh-CN" sz="1400" dirty="0">
+                <a:solidFill>
+                  <a:schemeClr val="tx1"/>
+                </a:solidFill>
+              </a:rPr>
+              <a:t>The proposed two-phase approach involves both long-term merchant retrofit ownership and short-term project sales. This means that the risks of each phase (1) and (3) offset each other because they have different ownership timeframes.</a:t>
+            </a:r>
+          </a:p>
+        </p:txBody>
+      </p:sp>
+      <p:cxnSp>
+        <p:nvCxnSpPr>
+          <p:cNvPr id="43" name="直线箭头连接符 42">
+            <a:extLst>
+              <a:ext uri="{FF2B5EF4-FFF2-40B4-BE49-F238E27FC236}">
+                <a16:creationId xmlns:a16="http://schemas.microsoft.com/office/drawing/2014/main" id="{DE573C71-4EB3-04E5-F546-5E6627FD2E12}"/>
+              </a:ext>
+            </a:extLst>
+          </p:cNvPr>
+          <p:cNvCxnSpPr>
+            <a:cxnSpLocks/>
+          </p:cNvCxnSpPr>
+          <p:nvPr/>
+        </p:nvCxnSpPr>
+        <p:spPr>
+          <a:xfrm flipV="1">
+            <a:off x="744135" y="1223725"/>
+            <a:ext cx="0" cy="4475326"/>
+          </a:xfrm>
+          <a:prstGeom prst="straightConnector1">
+            <a:avLst/>
+          </a:prstGeom>
+          <a:ln w="38100" cap="sq">
+            <a:solidFill>
+              <a:schemeClr val="tx1"/>
+            </a:solidFill>
+            <a:tailEnd type="triangle"/>
+          </a:ln>
+        </p:spPr>
+        <p:style>
+          <a:lnRef idx="2">
+            <a:schemeClr val="accent1"/>
+          </a:lnRef>
+          <a:fillRef idx="0">
+            <a:schemeClr val="accent1"/>
+          </a:fillRef>
+          <a:effectRef idx="1">
+            <a:schemeClr val="accent1"/>
+          </a:effectRef>
+          <a:fontRef idx="minor">
             <a:schemeClr val="tx1"/>
           </a:fontRef>
         </p:style>
       </p:cxnSp>
       <p:cxnSp>
         <p:nvCxnSpPr>
-          <p:cNvPr id="10005" name="直线连接符 87">
-            <a:extLst xmlns:a="http://schemas.openxmlformats.org/drawingml/2006/main">
+          <p:cNvPr id="45" name="直线箭头连接符 44">
+            <a:extLst>
               <a:ext uri="{FF2B5EF4-FFF2-40B4-BE49-F238E27FC236}">
-                <a16:creationId xmlns:a16="http://schemas.microsoft.com/office/drawing/2014/main" id="{90C26054-AA2D-AD8B-BC84-E6DEC9B17FA7}"/>
+                <a16:creationId xmlns:a16="http://schemas.microsoft.com/office/drawing/2014/main" id="{5B9583AF-2CD8-F729-B5D2-650C50100BFF}"/>
               </a:ext>
             </a:extLst>
           </p:cNvPr>
           <p:cNvCxnSpPr>
-            <a:cxnSpLocks xmlns:a="http://schemas.openxmlformats.org/drawingml/2006/main"/>
+            <a:cxnSpLocks/>
           </p:cNvCxnSpPr>
           <p:nvPr/>
         </p:nvCxnSpPr>
         <p:spPr>
-          <a:xfrm xmlns:a="http://schemas.openxmlformats.org/drawingml/2006/main">
-            <a:off x="5139910" y="4756113"/>
-            <a:ext cx="6708559" cy="0"/>
-          </a:xfrm>
-          <a:prstGeom xmlns:a="http://schemas.openxmlformats.org/drawingml/2006/main" prst="line">
+          <a:xfrm>
+            <a:off x="744135" y="5699051"/>
+            <a:ext cx="4178739" cy="0"/>
+          </a:xfrm>
+          <a:prstGeom prst="straightConnector1">
             <a:avLst/>
           </a:prstGeom>
-          <a:ln xmlns:a="http://schemas.openxmlformats.org/drawingml/2006/main">
+          <a:ln w="38100" cap="sq">
             <a:solidFill>
-              <a:schemeClr val="tx2"/>
+              <a:schemeClr val="tx1"/>
             </a:solidFill>
+            <a:tailEnd type="triangle"/>
           </a:ln>
         </p:spPr>
         <p:style>
-          <a:lnRef xmlns:a="http://schemas.openxmlformats.org/drawingml/2006/main" idx="2">
+          <a:lnRef idx="2">
             <a:schemeClr val="accent1"/>
           </a:lnRef>
-          <a:fillRef xmlns:a="http://schemas.openxmlformats.org/drawingml/2006/main" idx="0">
+          <a:fillRef idx="0">
             <a:schemeClr val="accent1"/>
           </a:fillRef>
-          <a:effectRef xmlns:a="http://schemas.openxmlformats.org/drawingml/2006/main" idx="1">
+          <a:effectRef idx="1">
             <a:schemeClr val="accent1"/>
           </a:effectRef>
-          <a:fontRef xmlns:a="http://schemas.openxmlformats.org/drawingml/2006/main" idx="minor">
+          <a:fontRef idx="minor">
             <a:schemeClr val="tx1"/>
           </a:fontRef>
         </p:style>
       </p:cxnSp>
       <p:sp>
         <p:nvSpPr>
-          <p:cNvPr id="10006" name="矩形 91">
-            <a:extLst xmlns:a="http://schemas.openxmlformats.org/drawingml/2006/main">
+          <p:cNvPr id="48" name="文本框 47">
+            <a:extLst>
               <a:ext uri="{FF2B5EF4-FFF2-40B4-BE49-F238E27FC236}">
-                <a16:creationId xmlns:a16="http://schemas.microsoft.com/office/drawing/2014/main" id="{8867E2AE-94E7-1A73-6E90-690A565127A1}"/>
+                <a16:creationId xmlns:a16="http://schemas.microsoft.com/office/drawing/2014/main" id="{FD6D3F2F-BBB4-5B3F-DC8D-827497154566}"/>
+              </a:ext>
+            </a:extLst>
+          </p:cNvPr>
+          <p:cNvSpPr txBox="1"/>
+          <p:nvPr/>
+        </p:nvSpPr>
+        <p:spPr>
+          <a:xfrm>
+            <a:off x="203602" y="1055862"/>
+            <a:ext cx="540533" cy="307777"/>
+          </a:xfrm>
+          <a:prstGeom prst="rect">
+            <a:avLst/>
+          </a:prstGeom>
+          <a:noFill/>
+        </p:spPr>
+        <p:txBody>
+          <a:bodyPr wrap="none" rtlCol="0">
+            <a:spAutoFit/>
+          </a:bodyPr>
+          <a:lstStyle/>
+          <a:p>
+            <a:pPr algn="r"/>
+            <a:r>
+              <a:rPr kumimoji="1" lang="en-US" altLang="zh-CN" sz="1400" dirty="0"/>
+              <a:t>High</a:t>
+            </a:r>
+            <a:endParaRPr kumimoji="1" lang="zh-CN" altLang="en-US" sz="1400" dirty="0"/>
+          </a:p>
+        </p:txBody>
+      </p:sp>
+      <p:sp>
+        <p:nvSpPr>
+          <p:cNvPr id="49" name="文本框 48">
+            <a:extLst>
+              <a:ext uri="{FF2B5EF4-FFF2-40B4-BE49-F238E27FC236}">
+                <a16:creationId xmlns:a16="http://schemas.microsoft.com/office/drawing/2014/main" id="{345A5E05-C14F-A5E9-D2A7-4D3DD0777A1C}"/>
+              </a:ext>
+            </a:extLst>
+          </p:cNvPr>
+          <p:cNvSpPr txBox="1"/>
+          <p:nvPr/>
+        </p:nvSpPr>
+        <p:spPr>
+          <a:xfrm>
+            <a:off x="279330" y="5662921"/>
+            <a:ext cx="502382" cy="307777"/>
+          </a:xfrm>
+          <a:prstGeom prst="rect">
+            <a:avLst/>
+          </a:prstGeom>
+          <a:noFill/>
+        </p:spPr>
+        <p:txBody>
+          <a:bodyPr wrap="none" rtlCol="0">
+            <a:spAutoFit/>
+          </a:bodyPr>
+          <a:lstStyle/>
+          <a:p>
+            <a:pPr algn="r"/>
+            <a:r>
+              <a:rPr kumimoji="1" lang="en-US" altLang="zh-CN" sz="1400" dirty="0"/>
+              <a:t>Low</a:t>
+            </a:r>
+            <a:endParaRPr kumimoji="1" lang="zh-CN" altLang="en-US" sz="1400" dirty="0"/>
+          </a:p>
+        </p:txBody>
+      </p:sp>
+      <p:sp>
+        <p:nvSpPr>
+          <p:cNvPr id="50" name="文本框 49">
+            <a:extLst>
+              <a:ext uri="{FF2B5EF4-FFF2-40B4-BE49-F238E27FC236}">
+                <a16:creationId xmlns:a16="http://schemas.microsoft.com/office/drawing/2014/main" id="{AF680207-6CC0-C917-B514-81982B146BD0}"/>
+              </a:ext>
+            </a:extLst>
+          </p:cNvPr>
+          <p:cNvSpPr txBox="1"/>
+          <p:nvPr/>
+        </p:nvSpPr>
+        <p:spPr>
+          <a:xfrm>
+            <a:off x="4785088" y="5700077"/>
+            <a:ext cx="540533" cy="307777"/>
+          </a:xfrm>
+          <a:prstGeom prst="rect">
+            <a:avLst/>
+          </a:prstGeom>
+          <a:noFill/>
+        </p:spPr>
+        <p:txBody>
+          <a:bodyPr wrap="none" rtlCol="0">
+            <a:spAutoFit/>
+          </a:bodyPr>
+          <a:lstStyle/>
+          <a:p>
+            <a:r>
+              <a:rPr kumimoji="1" lang="en-US" altLang="zh-CN" sz="1400" dirty="0"/>
+              <a:t>High</a:t>
+            </a:r>
+            <a:endParaRPr kumimoji="1" lang="zh-CN" altLang="en-US" sz="1400" dirty="0"/>
+          </a:p>
+        </p:txBody>
+      </p:sp>
+      <p:sp>
+        <p:nvSpPr>
+          <p:cNvPr id="51" name="文本框 50">
+            <a:extLst>
+              <a:ext uri="{FF2B5EF4-FFF2-40B4-BE49-F238E27FC236}">
+                <a16:creationId xmlns:a16="http://schemas.microsoft.com/office/drawing/2014/main" id="{0E426A3A-4FD9-0353-6827-3E9E21C2CB9B}"/>
+              </a:ext>
+            </a:extLst>
+          </p:cNvPr>
+          <p:cNvSpPr txBox="1"/>
+          <p:nvPr/>
+        </p:nvSpPr>
+        <p:spPr>
+          <a:xfrm>
+            <a:off x="2235167" y="5698026"/>
+            <a:ext cx="1196674" cy="338554"/>
+          </a:xfrm>
+          <a:prstGeom prst="rect">
+            <a:avLst/>
+          </a:prstGeom>
+          <a:noFill/>
+        </p:spPr>
+        <p:txBody>
+          <a:bodyPr wrap="none" rtlCol="0">
+            <a:spAutoFit/>
+          </a:bodyPr>
+          <a:lstStyle/>
+          <a:p>
+            <a:r>
+              <a:rPr kumimoji="1" lang="en-US" altLang="zh-CN" sz="1600" b="1" dirty="0"/>
+              <a:t>Probability</a:t>
+            </a:r>
+            <a:endParaRPr kumimoji="1" lang="zh-CN" altLang="en-US" sz="1600" b="1" dirty="0"/>
+          </a:p>
+        </p:txBody>
+      </p:sp>
+      <p:sp>
+        <p:nvSpPr>
+          <p:cNvPr id="52" name="文本框 51">
+            <a:extLst>
+              <a:ext uri="{FF2B5EF4-FFF2-40B4-BE49-F238E27FC236}">
+                <a16:creationId xmlns:a16="http://schemas.microsoft.com/office/drawing/2014/main" id="{2FF55E5A-B686-CF5B-3C26-7F6544F69FFB}"/>
+              </a:ext>
+            </a:extLst>
+          </p:cNvPr>
+          <p:cNvSpPr txBox="1"/>
+          <p:nvPr/>
+        </p:nvSpPr>
+        <p:spPr>
+          <a:xfrm rot="16200000">
+            <a:off x="150704" y="3259723"/>
+            <a:ext cx="848309" cy="338554"/>
+          </a:xfrm>
+          <a:prstGeom prst="rect">
+            <a:avLst/>
+          </a:prstGeom>
+          <a:noFill/>
+        </p:spPr>
+        <p:txBody>
+          <a:bodyPr wrap="none" rtlCol="0">
+            <a:spAutoFit/>
+          </a:bodyPr>
+          <a:lstStyle/>
+          <a:p>
+            <a:r>
+              <a:rPr kumimoji="1" lang="en-US" altLang="zh-CN" sz="1600" b="1" dirty="0"/>
+              <a:t>Impact</a:t>
+            </a:r>
+            <a:endParaRPr kumimoji="1" lang="zh-CN" altLang="en-US" sz="1600" b="1" dirty="0"/>
+          </a:p>
+        </p:txBody>
+      </p:sp>
+      <p:sp>
+        <p:nvSpPr>
+          <p:cNvPr id="53" name="矩形 52">
+            <a:extLst>
+              <a:ext uri="{FF2B5EF4-FFF2-40B4-BE49-F238E27FC236}">
+                <a16:creationId xmlns:a16="http://schemas.microsoft.com/office/drawing/2014/main" id="{18A2D3C3-6EE5-37F2-7946-12EA6D6D0544}"/>
               </a:ext>
             </a:extLst>
           </p:cNvPr>
@@ -4618,58 +10777,922 @@
           <p:nvPr/>
         </p:nvSpPr>
         <p:spPr>
-          <a:xfrm xmlns:a="http://schemas.openxmlformats.org/drawingml/2006/main">
-            <a:off x="345486" y="2133920"/>
-            <a:ext cx="4093812" cy="2035744"/>
-          </a:xfrm>
-          <a:prstGeom xmlns:a="http://schemas.openxmlformats.org/drawingml/2006/main" prst="rect">
+          <a:xfrm>
+            <a:off x="989556" y="1565635"/>
+            <a:ext cx="3670126" cy="3870661"/>
+          </a:xfrm>
+          <a:prstGeom prst="rect">
             <a:avLst/>
           </a:prstGeom>
-          <a:solidFill xmlns:a="http://schemas.openxmlformats.org/drawingml/2006/main">
-            <a:schemeClr val="bg1"/>
-          </a:solidFill>
-          <a:ln xmlns:a="http://schemas.openxmlformats.org/drawingml/2006/main">
+          <a:gradFill flip="none" rotWithShape="1">
+            <a:gsLst>
+              <a:gs pos="0">
+                <a:schemeClr val="tx2"/>
+              </a:gs>
+              <a:gs pos="100000">
+                <a:schemeClr val="bg2"/>
+              </a:gs>
+            </a:gsLst>
+            <a:path path="circle">
+              <a:fillToRect l="100000" b="100000"/>
+            </a:path>
+            <a:tileRect t="-100000" r="-100000"/>
+          </a:gradFill>
+          <a:ln>
             <a:noFill/>
           </a:ln>
-          <a:effectLst xmlns:a="http://schemas.openxmlformats.org/drawingml/2006/main">
-            <a:outerShdw blurRad="50800" dist="38100" dir="2700000" algn="tl" rotWithShape="0">
-              <a:prstClr val="black">
-                <a:alpha val="10000"/>
-              </a:prstClr>
-            </a:outerShdw>
-          </a:effectLst>
         </p:spPr>
         <p:style>
-          <a:lnRef xmlns:a="http://schemas.openxmlformats.org/drawingml/2006/main" idx="2">
+          <a:lnRef idx="2">
             <a:schemeClr val="accent1">
               <a:shade val="15000"/>
             </a:schemeClr>
           </a:lnRef>
-          <a:fillRef xmlns:a="http://schemas.openxmlformats.org/drawingml/2006/main" idx="1">
+          <a:fillRef idx="1">
             <a:schemeClr val="accent1"/>
           </a:fillRef>
-          <a:effectRef xmlns:a="http://schemas.openxmlformats.org/drawingml/2006/main" idx="0">
+          <a:effectRef idx="0">
             <a:schemeClr val="accent1"/>
           </a:effectRef>
-          <a:fontRef xmlns:a="http://schemas.openxmlformats.org/drawingml/2006/main" idx="minor">
+          <a:fontRef idx="minor">
             <a:schemeClr val="lt1"/>
           </a:fontRef>
         </p:style>
         <p:txBody>
-          <a:bodyPr xmlns:a="http://schemas.openxmlformats.org/drawingml/2006/main" rtlCol="0" anchor="ctr"/>
-          <a:lstStyle xmlns:a="http://schemas.openxmlformats.org/drawingml/2006/main"/>
-          <a:p xmlns:a="http://schemas.openxmlformats.org/drawingml/2006/main">
+          <a:bodyPr rtlCol="0" anchor="ctr"/>
+          <a:lstStyle/>
+          <a:p>
             <a:pPr algn="ctr"/>
             <a:endParaRPr kumimoji="1" lang="zh-CN" altLang="en-US"/>
           </a:p>
         </p:txBody>
       </p:sp>
-      <p:sp>
-        <p:nvSpPr>
-          <p:cNvPr id="10007" name="圆角矩形 24">
-            <a:extLst xmlns:a="http://schemas.openxmlformats.org/drawingml/2006/main">
+      <p:graphicFrame>
+        <p:nvGraphicFramePr>
+          <p:cNvPr id="54" name="表格 53">
+            <a:extLst>
               <a:ext uri="{FF2B5EF4-FFF2-40B4-BE49-F238E27FC236}">
-                <a16:creationId xmlns:a16="http://schemas.microsoft.com/office/drawing/2014/main" id="{E397D437-4E52-D22D-6B27-72E8C793A13C}"/>
+                <a16:creationId xmlns:a16="http://schemas.microsoft.com/office/drawing/2014/main" id="{69146E72-F524-5E61-E816-3FAA55312A72}"/>
+              </a:ext>
+            </a:extLst>
+          </p:cNvPr>
+          <p:cNvGraphicFramePr>
+            <a:graphicFrameLocks noGrp="1"/>
+          </p:cNvGraphicFramePr>
+          <p:nvPr>
+            <p:extLst>
+              <p:ext uri="{D42A27DB-BD31-4B8C-83A1-F6EECF244321}">
+                <p14:modId xmlns:p14="http://schemas.microsoft.com/office/powerpoint/2010/main" val="1177745909"/>
+              </p:ext>
+            </p:extLst>
+          </p:nvPr>
+        </p:nvGraphicFramePr>
+        <p:xfrm>
+          <a:off x="989556" y="1565091"/>
+          <a:ext cx="3670116" cy="3870660"/>
+        </p:xfrm>
+        <a:graphic>
+          <a:graphicData uri="http://schemas.openxmlformats.org/drawingml/2006/table">
+            <a:tbl>
+              <a:tblPr firstRow="1" bandRow="1">
+                <a:tableStyleId>{5C22544A-7EE6-4342-B048-85BDC9FD1C3A}</a:tableStyleId>
+              </a:tblPr>
+              <a:tblGrid>
+                <a:gridCol w="917529">
+                  <a:extLst>
+                    <a:ext uri="{9D8B030D-6E8A-4147-A177-3AD203B41FA5}">
+                      <a16:colId xmlns:a16="http://schemas.microsoft.com/office/drawing/2014/main" val="1127300106"/>
+                    </a:ext>
+                  </a:extLst>
+                </a:gridCol>
+                <a:gridCol w="917529">
+                  <a:extLst>
+                    <a:ext uri="{9D8B030D-6E8A-4147-A177-3AD203B41FA5}">
+                      <a16:colId xmlns:a16="http://schemas.microsoft.com/office/drawing/2014/main" val="2601541386"/>
+                    </a:ext>
+                  </a:extLst>
+                </a:gridCol>
+                <a:gridCol w="917529">
+                  <a:extLst>
+                    <a:ext uri="{9D8B030D-6E8A-4147-A177-3AD203B41FA5}">
+                      <a16:colId xmlns:a16="http://schemas.microsoft.com/office/drawing/2014/main" val="3660385216"/>
+                    </a:ext>
+                  </a:extLst>
+                </a:gridCol>
+                <a:gridCol w="917529">
+                  <a:extLst>
+                    <a:ext uri="{9D8B030D-6E8A-4147-A177-3AD203B41FA5}">
+                      <a16:colId xmlns:a16="http://schemas.microsoft.com/office/drawing/2014/main" val="326007348"/>
+                    </a:ext>
+                  </a:extLst>
+                </a:gridCol>
+              </a:tblGrid>
+              <a:tr h="967665">
+                <a:tc>
+                  <a:txBody>
+                    <a:bodyPr/>
+                    <a:lstStyle/>
+                    <a:p>
+                      <a:endParaRPr lang="zh-CN" altLang="en-US"/>
+                    </a:p>
+                  </a:txBody>
+                  <a:tcPr>
+                    <a:lnL w="76200" cap="flat" cmpd="sng" algn="ctr">
+                      <a:solidFill>
+                        <a:schemeClr val="bg1"/>
+                      </a:solidFill>
+                      <a:prstDash val="solid"/>
+                      <a:round/>
+                      <a:headEnd type="none" w="med" len="med"/>
+                      <a:tailEnd type="none" w="med" len="med"/>
+                    </a:lnL>
+                    <a:lnR w="76200" cap="flat" cmpd="sng" algn="ctr">
+                      <a:solidFill>
+                        <a:schemeClr val="bg1"/>
+                      </a:solidFill>
+                      <a:prstDash val="solid"/>
+                      <a:round/>
+                      <a:headEnd type="none" w="med" len="med"/>
+                      <a:tailEnd type="none" w="med" len="med"/>
+                    </a:lnR>
+                    <a:lnT w="76200" cap="flat" cmpd="sng" algn="ctr">
+                      <a:solidFill>
+                        <a:schemeClr val="bg1"/>
+                      </a:solidFill>
+                      <a:prstDash val="solid"/>
+                      <a:round/>
+                      <a:headEnd type="none" w="med" len="med"/>
+                      <a:tailEnd type="none" w="med" len="med"/>
+                    </a:lnT>
+                    <a:lnB w="76200" cap="flat" cmpd="sng" algn="ctr">
+                      <a:solidFill>
+                        <a:schemeClr val="bg1"/>
+                      </a:solidFill>
+                      <a:prstDash val="solid"/>
+                      <a:round/>
+                      <a:headEnd type="none" w="med" len="med"/>
+                      <a:tailEnd type="none" w="med" len="med"/>
+                    </a:lnB>
+                    <a:noFill/>
+                  </a:tcPr>
+                </a:tc>
+                <a:tc>
+                  <a:txBody>
+                    <a:bodyPr/>
+                    <a:lstStyle/>
+                    <a:p>
+                      <a:endParaRPr lang="zh-CN" altLang="en-US"/>
+                    </a:p>
+                  </a:txBody>
+                  <a:tcPr>
+                    <a:lnL w="76200" cap="flat" cmpd="sng" algn="ctr">
+                      <a:solidFill>
+                        <a:schemeClr val="bg1"/>
+                      </a:solidFill>
+                      <a:prstDash val="solid"/>
+                      <a:round/>
+                      <a:headEnd type="none" w="med" len="med"/>
+                      <a:tailEnd type="none" w="med" len="med"/>
+                    </a:lnL>
+                    <a:lnR w="76200" cap="flat" cmpd="sng" algn="ctr">
+                      <a:solidFill>
+                        <a:schemeClr val="bg1"/>
+                      </a:solidFill>
+                      <a:prstDash val="solid"/>
+                      <a:round/>
+                      <a:headEnd type="none" w="med" len="med"/>
+                      <a:tailEnd type="none" w="med" len="med"/>
+                    </a:lnR>
+                    <a:lnT w="76200" cap="flat" cmpd="sng" algn="ctr">
+                      <a:solidFill>
+                        <a:schemeClr val="bg1"/>
+                      </a:solidFill>
+                      <a:prstDash val="solid"/>
+                      <a:round/>
+                      <a:headEnd type="none" w="med" len="med"/>
+                      <a:tailEnd type="none" w="med" len="med"/>
+                    </a:lnT>
+                    <a:lnB w="76200" cap="flat" cmpd="sng" algn="ctr">
+                      <a:solidFill>
+                        <a:schemeClr val="bg1"/>
+                      </a:solidFill>
+                      <a:prstDash val="solid"/>
+                      <a:round/>
+                      <a:headEnd type="none" w="med" len="med"/>
+                      <a:tailEnd type="none" w="med" len="med"/>
+                    </a:lnB>
+                    <a:noFill/>
+                  </a:tcPr>
+                </a:tc>
+                <a:tc>
+                  <a:txBody>
+                    <a:bodyPr/>
+                    <a:lstStyle/>
+                    <a:p>
+                      <a:endParaRPr lang="zh-CN" altLang="en-US"/>
+                    </a:p>
+                  </a:txBody>
+                  <a:tcPr>
+                    <a:lnL w="76200" cap="flat" cmpd="sng" algn="ctr">
+                      <a:solidFill>
+                        <a:schemeClr val="bg1"/>
+                      </a:solidFill>
+                      <a:prstDash val="solid"/>
+                      <a:round/>
+                      <a:headEnd type="none" w="med" len="med"/>
+                      <a:tailEnd type="none" w="med" len="med"/>
+                    </a:lnL>
+                    <a:lnR w="76200" cap="flat" cmpd="sng" algn="ctr">
+                      <a:solidFill>
+                        <a:schemeClr val="bg1"/>
+                      </a:solidFill>
+                      <a:prstDash val="solid"/>
+                      <a:round/>
+                      <a:headEnd type="none" w="med" len="med"/>
+                      <a:tailEnd type="none" w="med" len="med"/>
+                    </a:lnR>
+                    <a:lnT w="76200" cap="flat" cmpd="sng" algn="ctr">
+                      <a:solidFill>
+                        <a:schemeClr val="bg1"/>
+                      </a:solidFill>
+                      <a:prstDash val="solid"/>
+                      <a:round/>
+                      <a:headEnd type="none" w="med" len="med"/>
+                      <a:tailEnd type="none" w="med" len="med"/>
+                    </a:lnT>
+                    <a:lnB w="76200" cap="flat" cmpd="sng" algn="ctr">
+                      <a:solidFill>
+                        <a:schemeClr val="bg1"/>
+                      </a:solidFill>
+                      <a:prstDash val="solid"/>
+                      <a:round/>
+                      <a:headEnd type="none" w="med" len="med"/>
+                      <a:tailEnd type="none" w="med" len="med"/>
+                    </a:lnB>
+                    <a:noFill/>
+                  </a:tcPr>
+                </a:tc>
+                <a:tc>
+                  <a:txBody>
+                    <a:bodyPr/>
+                    <a:lstStyle/>
+                    <a:p>
+                      <a:endParaRPr lang="zh-CN" altLang="en-US"/>
+                    </a:p>
+                  </a:txBody>
+                  <a:tcPr>
+                    <a:lnL w="76200" cap="flat" cmpd="sng" algn="ctr">
+                      <a:solidFill>
+                        <a:schemeClr val="bg1"/>
+                      </a:solidFill>
+                      <a:prstDash val="solid"/>
+                      <a:round/>
+                      <a:headEnd type="none" w="med" len="med"/>
+                      <a:tailEnd type="none" w="med" len="med"/>
+                    </a:lnL>
+                    <a:lnR w="76200" cap="flat" cmpd="sng" algn="ctr">
+                      <a:solidFill>
+                        <a:schemeClr val="bg1"/>
+                      </a:solidFill>
+                      <a:prstDash val="solid"/>
+                      <a:round/>
+                      <a:headEnd type="none" w="med" len="med"/>
+                      <a:tailEnd type="none" w="med" len="med"/>
+                    </a:lnR>
+                    <a:lnT w="76200" cap="flat" cmpd="sng" algn="ctr">
+                      <a:solidFill>
+                        <a:schemeClr val="bg1"/>
+                      </a:solidFill>
+                      <a:prstDash val="solid"/>
+                      <a:round/>
+                      <a:headEnd type="none" w="med" len="med"/>
+                      <a:tailEnd type="none" w="med" len="med"/>
+                    </a:lnT>
+                    <a:lnB w="76200" cap="flat" cmpd="sng" algn="ctr">
+                      <a:solidFill>
+                        <a:schemeClr val="bg1"/>
+                      </a:solidFill>
+                      <a:prstDash val="solid"/>
+                      <a:round/>
+                      <a:headEnd type="none" w="med" len="med"/>
+                      <a:tailEnd type="none" w="med" len="med"/>
+                    </a:lnB>
+                    <a:noFill/>
+                  </a:tcPr>
+                </a:tc>
+                <a:extLst>
+                  <a:ext uri="{0D108BD9-81ED-4DB2-BD59-A6C34878D82A}">
+                    <a16:rowId xmlns:a16="http://schemas.microsoft.com/office/drawing/2014/main" val="1954347298"/>
+                  </a:ext>
+                </a:extLst>
+              </a:tr>
+              <a:tr h="967665">
+                <a:tc>
+                  <a:txBody>
+                    <a:bodyPr/>
+                    <a:lstStyle/>
+                    <a:p>
+                      <a:endParaRPr lang="zh-CN" altLang="en-US"/>
+                    </a:p>
+                  </a:txBody>
+                  <a:tcPr>
+                    <a:lnL w="76200" cap="flat" cmpd="sng" algn="ctr">
+                      <a:solidFill>
+                        <a:schemeClr val="bg1"/>
+                      </a:solidFill>
+                      <a:prstDash val="solid"/>
+                      <a:round/>
+                      <a:headEnd type="none" w="med" len="med"/>
+                      <a:tailEnd type="none" w="med" len="med"/>
+                    </a:lnL>
+                    <a:lnR w="76200" cap="flat" cmpd="sng" algn="ctr">
+                      <a:solidFill>
+                        <a:schemeClr val="bg1"/>
+                      </a:solidFill>
+                      <a:prstDash val="solid"/>
+                      <a:round/>
+                      <a:headEnd type="none" w="med" len="med"/>
+                      <a:tailEnd type="none" w="med" len="med"/>
+                    </a:lnR>
+                    <a:lnT w="76200" cap="flat" cmpd="sng" algn="ctr">
+                      <a:solidFill>
+                        <a:schemeClr val="bg1"/>
+                      </a:solidFill>
+                      <a:prstDash val="solid"/>
+                      <a:round/>
+                      <a:headEnd type="none" w="med" len="med"/>
+                      <a:tailEnd type="none" w="med" len="med"/>
+                    </a:lnT>
+                    <a:lnB w="76200" cap="flat" cmpd="sng" algn="ctr">
+                      <a:solidFill>
+                        <a:schemeClr val="bg1"/>
+                      </a:solidFill>
+                      <a:prstDash val="solid"/>
+                      <a:round/>
+                      <a:headEnd type="none" w="med" len="med"/>
+                      <a:tailEnd type="none" w="med" len="med"/>
+                    </a:lnB>
+                    <a:noFill/>
+                  </a:tcPr>
+                </a:tc>
+                <a:tc>
+                  <a:txBody>
+                    <a:bodyPr/>
+                    <a:lstStyle/>
+                    <a:p>
+                      <a:endParaRPr lang="zh-CN" altLang="en-US"/>
+                    </a:p>
+                  </a:txBody>
+                  <a:tcPr>
+                    <a:lnL w="76200" cap="flat" cmpd="sng" algn="ctr">
+                      <a:solidFill>
+                        <a:schemeClr val="bg1"/>
+                      </a:solidFill>
+                      <a:prstDash val="solid"/>
+                      <a:round/>
+                      <a:headEnd type="none" w="med" len="med"/>
+                      <a:tailEnd type="none" w="med" len="med"/>
+                    </a:lnL>
+                    <a:lnR w="76200" cap="flat" cmpd="sng" algn="ctr">
+                      <a:solidFill>
+                        <a:schemeClr val="bg1"/>
+                      </a:solidFill>
+                      <a:prstDash val="solid"/>
+                      <a:round/>
+                      <a:headEnd type="none" w="med" len="med"/>
+                      <a:tailEnd type="none" w="med" len="med"/>
+                    </a:lnR>
+                    <a:lnT w="76200" cap="flat" cmpd="sng" algn="ctr">
+                      <a:solidFill>
+                        <a:schemeClr val="bg1"/>
+                      </a:solidFill>
+                      <a:prstDash val="solid"/>
+                      <a:round/>
+                      <a:headEnd type="none" w="med" len="med"/>
+                      <a:tailEnd type="none" w="med" len="med"/>
+                    </a:lnT>
+                    <a:lnB w="76200" cap="flat" cmpd="sng" algn="ctr">
+                      <a:solidFill>
+                        <a:schemeClr val="bg1"/>
+                      </a:solidFill>
+                      <a:prstDash val="solid"/>
+                      <a:round/>
+                      <a:headEnd type="none" w="med" len="med"/>
+                      <a:tailEnd type="none" w="med" len="med"/>
+                    </a:lnB>
+                    <a:noFill/>
+                  </a:tcPr>
+                </a:tc>
+                <a:tc>
+                  <a:txBody>
+                    <a:bodyPr/>
+                    <a:lstStyle/>
+                    <a:p>
+                      <a:endParaRPr lang="zh-CN" altLang="en-US"/>
+                    </a:p>
+                  </a:txBody>
+                  <a:tcPr>
+                    <a:lnL w="76200" cap="flat" cmpd="sng" algn="ctr">
+                      <a:solidFill>
+                        <a:schemeClr val="bg1"/>
+                      </a:solidFill>
+                      <a:prstDash val="solid"/>
+                      <a:round/>
+                      <a:headEnd type="none" w="med" len="med"/>
+                      <a:tailEnd type="none" w="med" len="med"/>
+                    </a:lnL>
+                    <a:lnR w="76200" cap="flat" cmpd="sng" algn="ctr">
+                      <a:solidFill>
+                        <a:schemeClr val="bg1"/>
+                      </a:solidFill>
+                      <a:prstDash val="solid"/>
+                      <a:round/>
+                      <a:headEnd type="none" w="med" len="med"/>
+                      <a:tailEnd type="none" w="med" len="med"/>
+                    </a:lnR>
+                    <a:lnT w="76200" cap="flat" cmpd="sng" algn="ctr">
+                      <a:solidFill>
+                        <a:schemeClr val="bg1"/>
+                      </a:solidFill>
+                      <a:prstDash val="solid"/>
+                      <a:round/>
+                      <a:headEnd type="none" w="med" len="med"/>
+                      <a:tailEnd type="none" w="med" len="med"/>
+                    </a:lnT>
+                    <a:lnB w="76200" cap="flat" cmpd="sng" algn="ctr">
+                      <a:solidFill>
+                        <a:schemeClr val="bg1"/>
+                      </a:solidFill>
+                      <a:prstDash val="solid"/>
+                      <a:round/>
+                      <a:headEnd type="none" w="med" len="med"/>
+                      <a:tailEnd type="none" w="med" len="med"/>
+                    </a:lnB>
+                    <a:noFill/>
+                  </a:tcPr>
+                </a:tc>
+                <a:tc>
+                  <a:txBody>
+                    <a:bodyPr/>
+                    <a:lstStyle/>
+                    <a:p>
+                      <a:endParaRPr lang="zh-CN" altLang="en-US"/>
+                    </a:p>
+                  </a:txBody>
+                  <a:tcPr>
+                    <a:lnL w="76200" cap="flat" cmpd="sng" algn="ctr">
+                      <a:solidFill>
+                        <a:schemeClr val="bg1"/>
+                      </a:solidFill>
+                      <a:prstDash val="solid"/>
+                      <a:round/>
+                      <a:headEnd type="none" w="med" len="med"/>
+                      <a:tailEnd type="none" w="med" len="med"/>
+                    </a:lnL>
+                    <a:lnR w="76200" cap="flat" cmpd="sng" algn="ctr">
+                      <a:solidFill>
+                        <a:schemeClr val="bg1"/>
+                      </a:solidFill>
+                      <a:prstDash val="solid"/>
+                      <a:round/>
+                      <a:headEnd type="none" w="med" len="med"/>
+                      <a:tailEnd type="none" w="med" len="med"/>
+                    </a:lnR>
+                    <a:lnT w="76200" cap="flat" cmpd="sng" algn="ctr">
+                      <a:solidFill>
+                        <a:schemeClr val="bg1"/>
+                      </a:solidFill>
+                      <a:prstDash val="solid"/>
+                      <a:round/>
+                      <a:headEnd type="none" w="med" len="med"/>
+                      <a:tailEnd type="none" w="med" len="med"/>
+                    </a:lnT>
+                    <a:lnB w="76200" cap="flat" cmpd="sng" algn="ctr">
+                      <a:solidFill>
+                        <a:schemeClr val="bg1"/>
+                      </a:solidFill>
+                      <a:prstDash val="solid"/>
+                      <a:round/>
+                      <a:headEnd type="none" w="med" len="med"/>
+                      <a:tailEnd type="none" w="med" len="med"/>
+                    </a:lnB>
+                    <a:noFill/>
+                  </a:tcPr>
+                </a:tc>
+                <a:extLst>
+                  <a:ext uri="{0D108BD9-81ED-4DB2-BD59-A6C34878D82A}">
+                    <a16:rowId xmlns:a16="http://schemas.microsoft.com/office/drawing/2014/main" val="1746936162"/>
+                  </a:ext>
+                </a:extLst>
+              </a:tr>
+              <a:tr h="967665">
+                <a:tc>
+                  <a:txBody>
+                    <a:bodyPr/>
+                    <a:lstStyle/>
+                    <a:p>
+                      <a:endParaRPr lang="zh-CN" altLang="en-US"/>
+                    </a:p>
+                  </a:txBody>
+                  <a:tcPr>
+                    <a:lnL w="76200" cap="flat" cmpd="sng" algn="ctr">
+                      <a:solidFill>
+                        <a:schemeClr val="bg1"/>
+                      </a:solidFill>
+                      <a:prstDash val="solid"/>
+                      <a:round/>
+                      <a:headEnd type="none" w="med" len="med"/>
+                      <a:tailEnd type="none" w="med" len="med"/>
+                    </a:lnL>
+                    <a:lnR w="76200" cap="flat" cmpd="sng" algn="ctr">
+                      <a:solidFill>
+                        <a:schemeClr val="bg1"/>
+                      </a:solidFill>
+                      <a:prstDash val="solid"/>
+                      <a:round/>
+                      <a:headEnd type="none" w="med" len="med"/>
+                      <a:tailEnd type="none" w="med" len="med"/>
+                    </a:lnR>
+                    <a:lnT w="76200" cap="flat" cmpd="sng" algn="ctr">
+                      <a:solidFill>
+                        <a:schemeClr val="bg1"/>
+                      </a:solidFill>
+                      <a:prstDash val="solid"/>
+                      <a:round/>
+                      <a:headEnd type="none" w="med" len="med"/>
+                      <a:tailEnd type="none" w="med" len="med"/>
+                    </a:lnT>
+                    <a:lnB w="76200" cap="flat" cmpd="sng" algn="ctr">
+                      <a:solidFill>
+                        <a:schemeClr val="bg1"/>
+                      </a:solidFill>
+                      <a:prstDash val="solid"/>
+                      <a:round/>
+                      <a:headEnd type="none" w="med" len="med"/>
+                      <a:tailEnd type="none" w="med" len="med"/>
+                    </a:lnB>
+                    <a:noFill/>
+                  </a:tcPr>
+                </a:tc>
+                <a:tc>
+                  <a:txBody>
+                    <a:bodyPr/>
+                    <a:lstStyle/>
+                    <a:p>
+                      <a:endParaRPr lang="zh-CN" altLang="en-US"/>
+                    </a:p>
+                  </a:txBody>
+                  <a:tcPr>
+                    <a:lnL w="76200" cap="flat" cmpd="sng" algn="ctr">
+                      <a:solidFill>
+                        <a:schemeClr val="bg1"/>
+                      </a:solidFill>
+                      <a:prstDash val="solid"/>
+                      <a:round/>
+                      <a:headEnd type="none" w="med" len="med"/>
+                      <a:tailEnd type="none" w="med" len="med"/>
+                    </a:lnL>
+                    <a:lnR w="76200" cap="flat" cmpd="sng" algn="ctr">
+                      <a:solidFill>
+                        <a:schemeClr val="bg1"/>
+                      </a:solidFill>
+                      <a:prstDash val="solid"/>
+                      <a:round/>
+                      <a:headEnd type="none" w="med" len="med"/>
+                      <a:tailEnd type="none" w="med" len="med"/>
+                    </a:lnR>
+                    <a:lnT w="76200" cap="flat" cmpd="sng" algn="ctr">
+                      <a:solidFill>
+                        <a:schemeClr val="bg1"/>
+                      </a:solidFill>
+                      <a:prstDash val="solid"/>
+                      <a:round/>
+                      <a:headEnd type="none" w="med" len="med"/>
+                      <a:tailEnd type="none" w="med" len="med"/>
+                    </a:lnT>
+                    <a:lnB w="76200" cap="flat" cmpd="sng" algn="ctr">
+                      <a:solidFill>
+                        <a:schemeClr val="bg1"/>
+                      </a:solidFill>
+                      <a:prstDash val="solid"/>
+                      <a:round/>
+                      <a:headEnd type="none" w="med" len="med"/>
+                      <a:tailEnd type="none" w="med" len="med"/>
+                    </a:lnB>
+                    <a:noFill/>
+                  </a:tcPr>
+                </a:tc>
+                <a:tc>
+                  <a:txBody>
+                    <a:bodyPr/>
+                    <a:lstStyle/>
+                    <a:p>
+                      <a:endParaRPr lang="zh-CN" altLang="en-US"/>
+                    </a:p>
+                  </a:txBody>
+                  <a:tcPr>
+                    <a:lnL w="76200" cap="flat" cmpd="sng" algn="ctr">
+                      <a:solidFill>
+                        <a:schemeClr val="bg1"/>
+                      </a:solidFill>
+                      <a:prstDash val="solid"/>
+                      <a:round/>
+                      <a:headEnd type="none" w="med" len="med"/>
+                      <a:tailEnd type="none" w="med" len="med"/>
+                    </a:lnL>
+                    <a:lnR w="76200" cap="flat" cmpd="sng" algn="ctr">
+                      <a:solidFill>
+                        <a:schemeClr val="bg1"/>
+                      </a:solidFill>
+                      <a:prstDash val="solid"/>
+                      <a:round/>
+                      <a:headEnd type="none" w="med" len="med"/>
+                      <a:tailEnd type="none" w="med" len="med"/>
+                    </a:lnR>
+                    <a:lnT w="76200" cap="flat" cmpd="sng" algn="ctr">
+                      <a:solidFill>
+                        <a:schemeClr val="bg1"/>
+                      </a:solidFill>
+                      <a:prstDash val="solid"/>
+                      <a:round/>
+                      <a:headEnd type="none" w="med" len="med"/>
+                      <a:tailEnd type="none" w="med" len="med"/>
+                    </a:lnT>
+                    <a:lnB w="76200" cap="flat" cmpd="sng" algn="ctr">
+                      <a:solidFill>
+                        <a:schemeClr val="bg1"/>
+                      </a:solidFill>
+                      <a:prstDash val="solid"/>
+                      <a:round/>
+                      <a:headEnd type="none" w="med" len="med"/>
+                      <a:tailEnd type="none" w="med" len="med"/>
+                    </a:lnB>
+                    <a:noFill/>
+                  </a:tcPr>
+                </a:tc>
+                <a:tc>
+                  <a:txBody>
+                    <a:bodyPr/>
+                    <a:lstStyle/>
+                    <a:p>
+                      <a:endParaRPr lang="zh-CN" altLang="en-US"/>
+                    </a:p>
+                  </a:txBody>
+                  <a:tcPr>
+                    <a:lnL w="76200" cap="flat" cmpd="sng" algn="ctr">
+                      <a:solidFill>
+                        <a:schemeClr val="bg1"/>
+                      </a:solidFill>
+                      <a:prstDash val="solid"/>
+                      <a:round/>
+                      <a:headEnd type="none" w="med" len="med"/>
+                      <a:tailEnd type="none" w="med" len="med"/>
+                    </a:lnL>
+                    <a:lnR w="76200" cap="flat" cmpd="sng" algn="ctr">
+                      <a:solidFill>
+                        <a:schemeClr val="bg1"/>
+                      </a:solidFill>
+                      <a:prstDash val="solid"/>
+                      <a:round/>
+                      <a:headEnd type="none" w="med" len="med"/>
+                      <a:tailEnd type="none" w="med" len="med"/>
+                    </a:lnR>
+                    <a:lnT w="76200" cap="flat" cmpd="sng" algn="ctr">
+                      <a:solidFill>
+                        <a:schemeClr val="bg1"/>
+                      </a:solidFill>
+                      <a:prstDash val="solid"/>
+                      <a:round/>
+                      <a:headEnd type="none" w="med" len="med"/>
+                      <a:tailEnd type="none" w="med" len="med"/>
+                    </a:lnT>
+                    <a:lnB w="76200" cap="flat" cmpd="sng" algn="ctr">
+                      <a:solidFill>
+                        <a:schemeClr val="bg1"/>
+                      </a:solidFill>
+                      <a:prstDash val="solid"/>
+                      <a:round/>
+                      <a:headEnd type="none" w="med" len="med"/>
+                      <a:tailEnd type="none" w="med" len="med"/>
+                    </a:lnB>
+                    <a:noFill/>
+                  </a:tcPr>
+                </a:tc>
+                <a:extLst>
+                  <a:ext uri="{0D108BD9-81ED-4DB2-BD59-A6C34878D82A}">
+                    <a16:rowId xmlns:a16="http://schemas.microsoft.com/office/drawing/2014/main" val="2131626881"/>
+                  </a:ext>
+                </a:extLst>
+              </a:tr>
+              <a:tr h="967665">
+                <a:tc>
+                  <a:txBody>
+                    <a:bodyPr/>
+                    <a:lstStyle/>
+                    <a:p>
+                      <a:endParaRPr lang="zh-CN" altLang="en-US" dirty="0"/>
+                    </a:p>
+                  </a:txBody>
+                  <a:tcPr>
+                    <a:lnL w="76200" cap="flat" cmpd="sng" algn="ctr">
+                      <a:solidFill>
+                        <a:schemeClr val="bg1"/>
+                      </a:solidFill>
+                      <a:prstDash val="solid"/>
+                      <a:round/>
+                      <a:headEnd type="none" w="med" len="med"/>
+                      <a:tailEnd type="none" w="med" len="med"/>
+                    </a:lnL>
+                    <a:lnR w="76200" cap="flat" cmpd="sng" algn="ctr">
+                      <a:solidFill>
+                        <a:schemeClr val="bg1"/>
+                      </a:solidFill>
+                      <a:prstDash val="solid"/>
+                      <a:round/>
+                      <a:headEnd type="none" w="med" len="med"/>
+                      <a:tailEnd type="none" w="med" len="med"/>
+                    </a:lnR>
+                    <a:lnT w="76200" cap="flat" cmpd="sng" algn="ctr">
+                      <a:solidFill>
+                        <a:schemeClr val="bg1"/>
+                      </a:solidFill>
+                      <a:prstDash val="solid"/>
+                      <a:round/>
+                      <a:headEnd type="none" w="med" len="med"/>
+                      <a:tailEnd type="none" w="med" len="med"/>
+                    </a:lnT>
+                    <a:lnB w="76200" cap="flat" cmpd="sng" algn="ctr">
+                      <a:solidFill>
+                        <a:schemeClr val="bg1"/>
+                      </a:solidFill>
+                      <a:prstDash val="solid"/>
+                      <a:round/>
+                      <a:headEnd type="none" w="med" len="med"/>
+                      <a:tailEnd type="none" w="med" len="med"/>
+                    </a:lnB>
+                    <a:noFill/>
+                  </a:tcPr>
+                </a:tc>
+                <a:tc>
+                  <a:txBody>
+                    <a:bodyPr/>
+                    <a:lstStyle/>
+                    <a:p>
+                      <a:endParaRPr lang="zh-CN" altLang="en-US"/>
+                    </a:p>
+                  </a:txBody>
+                  <a:tcPr>
+                    <a:lnL w="76200" cap="flat" cmpd="sng" algn="ctr">
+                      <a:solidFill>
+                        <a:schemeClr val="bg1"/>
+                      </a:solidFill>
+                      <a:prstDash val="solid"/>
+                      <a:round/>
+                      <a:headEnd type="none" w="med" len="med"/>
+                      <a:tailEnd type="none" w="med" len="med"/>
+                    </a:lnL>
+                    <a:lnR w="76200" cap="flat" cmpd="sng" algn="ctr">
+                      <a:solidFill>
+                        <a:schemeClr val="bg1"/>
+                      </a:solidFill>
+                      <a:prstDash val="solid"/>
+                      <a:round/>
+                      <a:headEnd type="none" w="med" len="med"/>
+                      <a:tailEnd type="none" w="med" len="med"/>
+                    </a:lnR>
+                    <a:lnT w="76200" cap="flat" cmpd="sng" algn="ctr">
+                      <a:solidFill>
+                        <a:schemeClr val="bg1"/>
+                      </a:solidFill>
+                      <a:prstDash val="solid"/>
+                      <a:round/>
+                      <a:headEnd type="none" w="med" len="med"/>
+                      <a:tailEnd type="none" w="med" len="med"/>
+                    </a:lnT>
+                    <a:lnB w="76200" cap="flat" cmpd="sng" algn="ctr">
+                      <a:solidFill>
+                        <a:schemeClr val="bg1"/>
+                      </a:solidFill>
+                      <a:prstDash val="solid"/>
+                      <a:round/>
+                      <a:headEnd type="none" w="med" len="med"/>
+                      <a:tailEnd type="none" w="med" len="med"/>
+                    </a:lnB>
+                    <a:noFill/>
+                  </a:tcPr>
+                </a:tc>
+                <a:tc>
+                  <a:txBody>
+                    <a:bodyPr/>
+                    <a:lstStyle/>
+                    <a:p>
+                      <a:endParaRPr lang="zh-CN" altLang="en-US"/>
+                    </a:p>
+                  </a:txBody>
+                  <a:tcPr>
+                    <a:lnL w="76200" cap="flat" cmpd="sng" algn="ctr">
+                      <a:solidFill>
+                        <a:schemeClr val="bg1"/>
+                      </a:solidFill>
+                      <a:prstDash val="solid"/>
+                      <a:round/>
+                      <a:headEnd type="none" w="med" len="med"/>
+                      <a:tailEnd type="none" w="med" len="med"/>
+                    </a:lnL>
+                    <a:lnR w="76200" cap="flat" cmpd="sng" algn="ctr">
+                      <a:solidFill>
+                        <a:schemeClr val="bg1"/>
+                      </a:solidFill>
+                      <a:prstDash val="solid"/>
+                      <a:round/>
+                      <a:headEnd type="none" w="med" len="med"/>
+                      <a:tailEnd type="none" w="med" len="med"/>
+                    </a:lnR>
+                    <a:lnT w="76200" cap="flat" cmpd="sng" algn="ctr">
+                      <a:solidFill>
+                        <a:schemeClr val="bg1"/>
+                      </a:solidFill>
+                      <a:prstDash val="solid"/>
+                      <a:round/>
+                      <a:headEnd type="none" w="med" len="med"/>
+                      <a:tailEnd type="none" w="med" len="med"/>
+                    </a:lnT>
+                    <a:lnB w="76200" cap="flat" cmpd="sng" algn="ctr">
+                      <a:solidFill>
+                        <a:schemeClr val="bg1"/>
+                      </a:solidFill>
+                      <a:prstDash val="solid"/>
+                      <a:round/>
+                      <a:headEnd type="none" w="med" len="med"/>
+                      <a:tailEnd type="none" w="med" len="med"/>
+                    </a:lnB>
+                    <a:noFill/>
+                  </a:tcPr>
+                </a:tc>
+                <a:tc>
+                  <a:txBody>
+                    <a:bodyPr/>
+                    <a:lstStyle/>
+                    <a:p>
+                      <a:endParaRPr lang="zh-CN" altLang="en-US" dirty="0"/>
+                    </a:p>
+                  </a:txBody>
+                  <a:tcPr>
+                    <a:lnL w="76200" cap="flat" cmpd="sng" algn="ctr">
+                      <a:solidFill>
+                        <a:schemeClr val="bg1"/>
+                      </a:solidFill>
+                      <a:prstDash val="solid"/>
+                      <a:round/>
+                      <a:headEnd type="none" w="med" len="med"/>
+                      <a:tailEnd type="none" w="med" len="med"/>
+                    </a:lnL>
+                    <a:lnR w="76200" cap="flat" cmpd="sng" algn="ctr">
+                      <a:solidFill>
+                        <a:schemeClr val="bg1"/>
+                      </a:solidFill>
+                      <a:prstDash val="solid"/>
+                      <a:round/>
+                      <a:headEnd type="none" w="med" len="med"/>
+                      <a:tailEnd type="none" w="med" len="med"/>
+                    </a:lnR>
+                    <a:lnT w="76200" cap="flat" cmpd="sng" algn="ctr">
+                      <a:solidFill>
+                        <a:schemeClr val="bg1"/>
+                      </a:solidFill>
+                      <a:prstDash val="solid"/>
+                      <a:round/>
+                      <a:headEnd type="none" w="med" len="med"/>
+                      <a:tailEnd type="none" w="med" len="med"/>
+                    </a:lnT>
+                    <a:lnB w="76200" cap="flat" cmpd="sng" algn="ctr">
+                      <a:solidFill>
+                        <a:schemeClr val="bg1"/>
+                      </a:solidFill>
+                      <a:prstDash val="solid"/>
+                      <a:round/>
+                      <a:headEnd type="none" w="med" len="med"/>
+                      <a:tailEnd type="none" w="med" len="med"/>
+                    </a:lnB>
+                    <a:noFill/>
+                  </a:tcPr>
+                </a:tc>
+                <a:extLst>
+                  <a:ext uri="{0D108BD9-81ED-4DB2-BD59-A6C34878D82A}">
+                    <a16:rowId xmlns:a16="http://schemas.microsoft.com/office/drawing/2014/main" val="1657601458"/>
+                  </a:ext>
+                </a:extLst>
+              </a:tr>
+            </a:tbl>
+          </a:graphicData>
+        </a:graphic>
+      </p:graphicFrame>
+      <p:sp>
+        <p:nvSpPr>
+          <p:cNvPr id="56" name="椭圆 55">
+            <a:extLst>
+              <a:ext uri="{FF2B5EF4-FFF2-40B4-BE49-F238E27FC236}">
+                <a16:creationId xmlns:a16="http://schemas.microsoft.com/office/drawing/2014/main" id="{86392C13-B4F2-9ADF-44BC-4A067779C3EC}"/>
               </a:ext>
             </a:extLst>
           </p:cNvPr>
@@ -4677,57 +11700,57 @@
           <p:nvPr/>
         </p:nvSpPr>
         <p:spPr>
-          <a:xfrm xmlns:a="http://schemas.openxmlformats.org/drawingml/2006/main">
-            <a:off x="345489" y="1076700"/>
-            <a:ext cx="2012699" cy="282437"/>
-          </a:xfrm>
-          <a:prstGeom xmlns:a="http://schemas.openxmlformats.org/drawingml/2006/main" prst="roundRect">
-            <a:avLst>
-              <a:gd name="adj" fmla="val 0"/>
-            </a:avLst>
+          <a:xfrm>
+            <a:off x="3541425" y="3327127"/>
+            <a:ext cx="346587" cy="346587"/>
+          </a:xfrm>
+          <a:prstGeom prst="ellipse">
+            <a:avLst/>
           </a:prstGeom>
-          <a:solidFill xmlns:a="http://schemas.openxmlformats.org/drawingml/2006/main">
+          <a:solidFill>
             <a:schemeClr val="tx2"/>
           </a:solidFill>
-          <a:ln xmlns:a="http://schemas.openxmlformats.org/drawingml/2006/main" w="6350">
-            <a:noFill/>
+          <a:ln w="38100">
+            <a:solidFill>
+              <a:schemeClr val="bg1"/>
+            </a:solidFill>
           </a:ln>
         </p:spPr>
         <p:style>
-          <a:lnRef xmlns:a="http://schemas.openxmlformats.org/drawingml/2006/main" idx="2">
+          <a:lnRef idx="2">
             <a:schemeClr val="accent1">
               <a:shade val="15000"/>
             </a:schemeClr>
           </a:lnRef>
-          <a:fillRef xmlns:a="http://schemas.openxmlformats.org/drawingml/2006/main" idx="1">
+          <a:fillRef idx="1">
             <a:schemeClr val="accent1"/>
           </a:fillRef>
-          <a:effectRef xmlns:a="http://schemas.openxmlformats.org/drawingml/2006/main" idx="0">
+          <a:effectRef idx="0">
             <a:schemeClr val="accent1"/>
           </a:effectRef>
-          <a:fontRef xmlns:a="http://schemas.openxmlformats.org/drawingml/2006/main" idx="minor">
+          <a:fontRef idx="minor">
             <a:schemeClr val="lt1"/>
           </a:fontRef>
         </p:style>
         <p:txBody>
-          <a:bodyPr xmlns:a="http://schemas.openxmlformats.org/drawingml/2006/main" rtlCol="0" anchor="ctr"/>
-          <a:lstStyle xmlns:a="http://schemas.openxmlformats.org/drawingml/2006/main"/>
-          <a:p xmlns:a="http://schemas.openxmlformats.org/drawingml/2006/main">
+          <a:bodyPr rtlCol="0" anchor="ctr"/>
+          <a:lstStyle/>
+          <a:p>
             <a:pPr algn="ctr"/>
             <a:r>
-              <a:rPr kumimoji="1" lang="en-US" altLang="zh-CN" sz="1600" b="1" dirty="0"/>
-              <a:t>Optimizing Returns</a:t>
-            </a:r>
-            <a:endParaRPr kumimoji="1" lang="zh-CN" altLang="en-US" sz="1600" b="1" dirty="0"/>
-          </a:p>
-        </p:txBody>
-      </p:sp>
-      <p:sp>
-        <p:nvSpPr>
-          <p:cNvPr id="10008" name="矩形 27">
-            <a:extLst xmlns:a="http://schemas.openxmlformats.org/drawingml/2006/main">
+              <a:rPr kumimoji="1" lang="en-US" altLang="zh-CN" b="1" dirty="0"/>
+              <a:t>1</a:t>
+            </a:r>
+            <a:endParaRPr kumimoji="1" lang="zh-CN" altLang="en-US" b="1" dirty="0"/>
+          </a:p>
+        </p:txBody>
+      </p:sp>
+      <p:sp>
+        <p:nvSpPr>
+          <p:cNvPr id="57" name="椭圆 56">
+            <a:extLst>
               <a:ext uri="{FF2B5EF4-FFF2-40B4-BE49-F238E27FC236}">
-                <a16:creationId xmlns:a16="http://schemas.microsoft.com/office/drawing/2014/main" id="{79E0164F-8AEF-E13C-5944-82136D1891B0}"/>
+                <a16:creationId xmlns:a16="http://schemas.microsoft.com/office/drawing/2014/main" id="{A344EB1F-9D76-AE55-964E-38D01157DC7C}"/>
               </a:ext>
             </a:extLst>
           </p:cNvPr>
@@ -4735,66 +11758,57 @@
           <p:nvPr/>
         </p:nvSpPr>
         <p:spPr>
-          <a:xfrm xmlns:a="http://schemas.openxmlformats.org/drawingml/2006/main">
-            <a:off x="345488" y="1356860"/>
-            <a:ext cx="11501023" cy="612535"/>
-          </a:xfrm>
-          <a:prstGeom xmlns:a="http://schemas.openxmlformats.org/drawingml/2006/main" prst="rect">
+          <a:xfrm>
+            <a:off x="2061873" y="3024665"/>
+            <a:ext cx="346587" cy="346587"/>
+          </a:xfrm>
+          <a:prstGeom prst="ellipse">
             <a:avLst/>
           </a:prstGeom>
-          <a:solidFill xmlns:a="http://schemas.openxmlformats.org/drawingml/2006/main">
-            <a:schemeClr val="bg2"/>
+          <a:solidFill>
+            <a:schemeClr val="tx2"/>
           </a:solidFill>
-          <a:ln xmlns:a="http://schemas.openxmlformats.org/drawingml/2006/main">
-            <a:noFill/>
+          <a:ln w="38100">
+            <a:solidFill>
+              <a:schemeClr val="bg1"/>
+            </a:solidFill>
           </a:ln>
         </p:spPr>
         <p:style>
-          <a:lnRef xmlns:a="http://schemas.openxmlformats.org/drawingml/2006/main" idx="2">
+          <a:lnRef idx="2">
             <a:schemeClr val="accent1">
               <a:shade val="15000"/>
             </a:schemeClr>
           </a:lnRef>
-          <a:fillRef xmlns:a="http://schemas.openxmlformats.org/drawingml/2006/main" idx="1">
+          <a:fillRef idx="1">
             <a:schemeClr val="accent1"/>
           </a:fillRef>
-          <a:effectRef xmlns:a="http://schemas.openxmlformats.org/drawingml/2006/main" idx="0">
+          <a:effectRef idx="0">
             <a:schemeClr val="accent1"/>
           </a:effectRef>
-          <a:fontRef xmlns:a="http://schemas.openxmlformats.org/drawingml/2006/main" idx="minor">
+          <a:fontRef idx="minor">
             <a:schemeClr val="lt1"/>
           </a:fontRef>
         </p:style>
         <p:txBody>
-          <a:bodyPr xmlns:a="http://schemas.openxmlformats.org/drawingml/2006/main" rtlCol="0" anchor="ctr"/>
-          <a:lstStyle xmlns:a="http://schemas.openxmlformats.org/drawingml/2006/main"/>
-          <a:p xmlns:a="http://schemas.openxmlformats.org/drawingml/2006/main">
-            <a:pPr algn="just"/>
-            <a:r>
-              <a:rPr kumimoji="1" lang="en-US" altLang="zh-CN" sz="1400" dirty="0">
-                <a:solidFill>
-                  <a:schemeClr val="tx1"/>
-                </a:solidFill>
-              </a:rPr>
-              <a:t>Retrofit merchant projects to stabilize cash flows while expanding EE’s global BESS network in high-return markets. Convert German standalone tolling projects to boost equity growth. Optimized portfolio equity allocations were achieved using </a:t>
-            </a:r>
-            <a:r>
-              <a:rPr kumimoji="1" lang="en-US" altLang="zh-CN" sz="1400" b="1" dirty="0">
-                <a:solidFill>
-                  <a:schemeClr val="tx1"/>
-                </a:solidFill>
-              </a:rPr>
-              <a:t>Mixed-Integer Linear Programming.</a:t>
-            </a:r>
-          </a:p>
-        </p:txBody>
-      </p:sp>
-      <p:sp>
-        <p:nvSpPr>
-          <p:cNvPr id="10009" name="圆角矩形 61">
-            <a:extLst xmlns:a="http://schemas.openxmlformats.org/drawingml/2006/main">
+          <a:bodyPr rtlCol="0" anchor="ctr"/>
+          <a:lstStyle/>
+          <a:p>
+            <a:pPr algn="ctr"/>
+            <a:r>
+              <a:rPr kumimoji="1" lang="en-US" altLang="zh-CN" b="1" dirty="0"/>
+              <a:t>2</a:t>
+            </a:r>
+            <a:endParaRPr kumimoji="1" lang="zh-CN" altLang="en-US" b="1" dirty="0"/>
+          </a:p>
+        </p:txBody>
+      </p:sp>
+      <p:sp>
+        <p:nvSpPr>
+          <p:cNvPr id="58" name="椭圆 57">
+            <a:extLst>
               <a:ext uri="{FF2B5EF4-FFF2-40B4-BE49-F238E27FC236}">
-                <a16:creationId xmlns:a16="http://schemas.microsoft.com/office/drawing/2014/main" id="{E69AE45E-1DE2-4DAB-7FF4-44303F245327}"/>
+                <a16:creationId xmlns:a16="http://schemas.microsoft.com/office/drawing/2014/main" id="{0069C9AF-796B-4E36-C415-840EB663EC65}"/>
               </a:ext>
             </a:extLst>
           </p:cNvPr>
@@ -4802,67 +11816,57 @@
           <p:nvPr/>
         </p:nvSpPr>
         <p:spPr>
-          <a:xfrm xmlns:a="http://schemas.openxmlformats.org/drawingml/2006/main">
-            <a:off x="345485" y="4332458"/>
-            <a:ext cx="4093811" cy="282437"/>
-          </a:xfrm>
-          <a:prstGeom xmlns:a="http://schemas.openxmlformats.org/drawingml/2006/main" prst="roundRect">
-            <a:avLst>
-              <a:gd name="adj" fmla="val 0"/>
-            </a:avLst>
+          <a:xfrm>
+            <a:off x="2716308" y="2222929"/>
+            <a:ext cx="346587" cy="346587"/>
+          </a:xfrm>
+          <a:prstGeom prst="ellipse">
+            <a:avLst/>
           </a:prstGeom>
-          <a:solidFill xmlns:a="http://schemas.openxmlformats.org/drawingml/2006/main">
-            <a:schemeClr val="bg2"/>
+          <a:solidFill>
+            <a:schemeClr val="tx2"/>
           </a:solidFill>
-          <a:ln xmlns:a="http://schemas.openxmlformats.org/drawingml/2006/main" w="19050">
+          <a:ln w="38100">
             <a:solidFill>
-              <a:schemeClr val="bg2"/>
+              <a:schemeClr val="bg1"/>
             </a:solidFill>
           </a:ln>
         </p:spPr>
         <p:style>
-          <a:lnRef xmlns:a="http://schemas.openxmlformats.org/drawingml/2006/main" idx="2">
+          <a:lnRef idx="2">
             <a:schemeClr val="accent1">
               <a:shade val="15000"/>
             </a:schemeClr>
           </a:lnRef>
-          <a:fillRef xmlns:a="http://schemas.openxmlformats.org/drawingml/2006/main" idx="1">
+          <a:fillRef idx="1">
             <a:schemeClr val="accent1"/>
           </a:fillRef>
-          <a:effectRef xmlns:a="http://schemas.openxmlformats.org/drawingml/2006/main" idx="0">
+          <a:effectRef idx="0">
             <a:schemeClr val="accent1"/>
           </a:effectRef>
-          <a:fontRef xmlns:a="http://schemas.openxmlformats.org/drawingml/2006/main" idx="minor">
+          <a:fontRef idx="minor">
             <a:schemeClr val="lt1"/>
           </a:fontRef>
         </p:style>
         <p:txBody>
-          <a:bodyPr xmlns:a="http://schemas.openxmlformats.org/drawingml/2006/main" rtlCol="0" anchor="ctr"/>
-          <a:lstStyle xmlns:a="http://schemas.openxmlformats.org/drawingml/2006/main"/>
-          <a:p xmlns:a="http://schemas.openxmlformats.org/drawingml/2006/main">
+          <a:bodyPr rtlCol="0" anchor="ctr"/>
+          <a:lstStyle/>
+          <a:p>
             <a:pPr algn="ctr"/>
             <a:r>
-              <a:rPr kumimoji="1" lang="en-US" altLang="zh-CN" sz="1600" b="1" dirty="0">
-                <a:solidFill>
-                  <a:schemeClr val="tx2"/>
-                </a:solidFill>
-              </a:rPr>
-              <a:t>Key Priorities</a:t>
-            </a:r>
-            <a:endParaRPr kumimoji="1" lang="zh-CN" altLang="en-US" sz="1600" b="1" dirty="0">
-              <a:solidFill>
-                <a:schemeClr val="tx2"/>
-              </a:solidFill>
-            </a:endParaRPr>
-          </a:p>
-        </p:txBody>
-      </p:sp>
-      <p:sp>
-        <p:nvSpPr>
-          <p:cNvPr id="10010" name="矩形 84">
-            <a:extLst xmlns:a="http://schemas.openxmlformats.org/drawingml/2006/main">
+              <a:rPr kumimoji="1" lang="en-US" altLang="zh-CN" b="1" dirty="0"/>
+              <a:t>3</a:t>
+            </a:r>
+            <a:endParaRPr kumimoji="1" lang="zh-CN" altLang="en-US" b="1" dirty="0"/>
+          </a:p>
+        </p:txBody>
+      </p:sp>
+      <p:sp>
+        <p:nvSpPr>
+          <p:cNvPr id="59" name="椭圆 58">
+            <a:extLst>
               <a:ext uri="{FF2B5EF4-FFF2-40B4-BE49-F238E27FC236}">
-                <a16:creationId xmlns:a16="http://schemas.microsoft.com/office/drawing/2014/main" id="{746FE38C-0400-C837-CAC2-BBFE1F7867E4}"/>
+                <a16:creationId xmlns:a16="http://schemas.microsoft.com/office/drawing/2014/main" id="{F3886199-7519-9174-EBC7-D16FD8C24C1D}"/>
               </a:ext>
             </a:extLst>
           </p:cNvPr>
@@ -4870,86 +11874,57 @@
           <p:nvPr/>
         </p:nvSpPr>
         <p:spPr>
-          <a:xfrm xmlns:a="http://schemas.openxmlformats.org/drawingml/2006/main">
-            <a:off x="5137950" y="4993701"/>
-            <a:ext cx="6708559" cy="885478"/>
-          </a:xfrm>
-          <a:prstGeom xmlns:a="http://schemas.openxmlformats.org/drawingml/2006/main" prst="rect">
+          <a:xfrm>
+            <a:off x="1248843" y="2429407"/>
+            <a:ext cx="346587" cy="346587"/>
+          </a:xfrm>
+          <a:prstGeom prst="ellipse">
             <a:avLst/>
           </a:prstGeom>
-          <a:solidFill xmlns:a="http://schemas.openxmlformats.org/drawingml/2006/main">
-            <a:schemeClr val="bg2"/>
+          <a:solidFill>
+            <a:schemeClr val="tx2"/>
           </a:solidFill>
-          <a:ln xmlns:a="http://schemas.openxmlformats.org/drawingml/2006/main">
-            <a:noFill/>
+          <a:ln w="38100">
+            <a:solidFill>
+              <a:schemeClr val="bg1"/>
+            </a:solidFill>
           </a:ln>
         </p:spPr>
         <p:style>
-          <a:lnRef xmlns:a="http://schemas.openxmlformats.org/drawingml/2006/main" idx="2">
+          <a:lnRef idx="2">
             <a:schemeClr val="accent1">
               <a:shade val="15000"/>
             </a:schemeClr>
           </a:lnRef>
-          <a:fillRef xmlns:a="http://schemas.openxmlformats.org/drawingml/2006/main" idx="1">
+          <a:fillRef idx="1">
             <a:schemeClr val="accent1"/>
           </a:fillRef>
-          <a:effectRef xmlns:a="http://schemas.openxmlformats.org/drawingml/2006/main" idx="0">
+          <a:effectRef idx="0">
             <a:schemeClr val="accent1"/>
           </a:effectRef>
-          <a:fontRef xmlns:a="http://schemas.openxmlformats.org/drawingml/2006/main" idx="minor">
+          <a:fontRef idx="minor">
             <a:schemeClr val="lt1"/>
           </a:fontRef>
         </p:style>
         <p:txBody>
-          <a:bodyPr xmlns:a="http://schemas.openxmlformats.org/drawingml/2006/main" rtlCol="0" anchor="ctr"/>
-          <a:lstStyle xmlns:a="http://schemas.openxmlformats.org/drawingml/2006/main"/>
-          <a:p xmlns:a="http://schemas.openxmlformats.org/drawingml/2006/main">
-            <a:pPr algn="just"/>
-            <a:r>
-              <a:rPr kumimoji="1" lang="en-US" altLang="zh-CN" sz="1400" b="1" dirty="0">
-                <a:solidFill>
-                  <a:schemeClr val="tx1"/>
-                </a:solidFill>
-              </a:rPr>
-              <a:t>Genki Forest is suggested to raise ex-factory price by CN¥0.25–0.30 per bottle</a:t>
-            </a:r>
-          </a:p>
-          <a:p xmlns:a="http://schemas.openxmlformats.org/drawingml/2006/main">
-            <a:pPr marL="285750" indent="-285750" algn="just">
-              <a:buFont typeface="Arial" panose="020B0604020202020204" pitchFamily="34" charset="0"/>
-              <a:buChar char="•"/>
-            </a:pPr>
-            <a:r>
-              <a:rPr kumimoji="1" lang="en-US" altLang="zh-CN" sz="1400" dirty="0">
-                <a:solidFill>
-                  <a:schemeClr val="tx1"/>
-                </a:solidFill>
-              </a:rPr>
-              <a:t>Terminal price could raise CN¥0.30–0.50 per bottle</a:t>
-            </a:r>
-          </a:p>
-          <a:p xmlns:a="http://schemas.openxmlformats.org/drawingml/2006/main">
-            <a:pPr marL="285750" indent="-285750" algn="just">
-              <a:buFont typeface="Arial" panose="020B0604020202020204" pitchFamily="34" charset="0"/>
-              <a:buChar char="•"/>
-            </a:pPr>
-            <a:r>
-              <a:rPr kumimoji="1" lang="en-US" altLang="zh-CN" sz="1400" dirty="0">
-                <a:solidFill>
-                  <a:schemeClr val="tx1"/>
-                </a:solidFill>
-              </a:rPr>
-              <a:t>Potential risk and mitigation exist in implementation</a:t>
-            </a:r>
-          </a:p>
-        </p:txBody>
-      </p:sp>
-      <p:sp>
-        <p:nvSpPr>
-          <p:cNvPr id="10011" name="矩形 92">
-            <a:extLst xmlns:a="http://schemas.openxmlformats.org/drawingml/2006/main">
+          <a:bodyPr rtlCol="0" anchor="ctr"/>
+          <a:lstStyle/>
+          <a:p>
+            <a:pPr algn="ctr"/>
+            <a:r>
+              <a:rPr kumimoji="1" lang="en-US" altLang="zh-CN" b="1" dirty="0"/>
+              <a:t>6</a:t>
+            </a:r>
+            <a:endParaRPr kumimoji="1" lang="zh-CN" altLang="en-US" b="1" dirty="0"/>
+          </a:p>
+        </p:txBody>
+      </p:sp>
+      <p:sp>
+        <p:nvSpPr>
+          <p:cNvPr id="60" name="椭圆 59">
+            <a:extLst>
               <a:ext uri="{FF2B5EF4-FFF2-40B4-BE49-F238E27FC236}">
-                <a16:creationId xmlns:a16="http://schemas.microsoft.com/office/drawing/2014/main" id="{EFCC0494-57AE-3F1D-B961-E866DE11BFD4}"/>
+                <a16:creationId xmlns:a16="http://schemas.microsoft.com/office/drawing/2014/main" id="{270CD78F-09F6-2B91-845C-54BF945750C3}"/>
               </a:ext>
             </a:extLst>
           </p:cNvPr>
@@ -4957,113 +11932,57 @@
           <p:nvPr/>
         </p:nvSpPr>
         <p:spPr>
-          <a:xfrm xmlns:a="http://schemas.openxmlformats.org/drawingml/2006/main">
-            <a:off x="345486" y="2472474"/>
-            <a:ext cx="4093812" cy="1694464"/>
-          </a:xfrm>
-          <a:prstGeom xmlns:a="http://schemas.openxmlformats.org/drawingml/2006/main" prst="rect">
+          <a:xfrm>
+            <a:off x="1130856" y="3646149"/>
+            <a:ext cx="346587" cy="346587"/>
+          </a:xfrm>
+          <a:prstGeom prst="ellipse">
             <a:avLst/>
           </a:prstGeom>
-          <a:noFill xmlns:a="http://schemas.openxmlformats.org/drawingml/2006/main"/>
-          <a:ln xmlns:a="http://schemas.openxmlformats.org/drawingml/2006/main">
-            <a:noFill/>
+          <a:solidFill>
+            <a:schemeClr val="tx2"/>
+          </a:solidFill>
+          <a:ln w="38100">
+            <a:solidFill>
+              <a:schemeClr val="bg1"/>
+            </a:solidFill>
           </a:ln>
         </p:spPr>
         <p:style>
-          <a:lnRef xmlns:a="http://schemas.openxmlformats.org/drawingml/2006/main" idx="2">
+          <a:lnRef idx="2">
             <a:schemeClr val="accent1">
               <a:shade val="15000"/>
             </a:schemeClr>
           </a:lnRef>
-          <a:fillRef xmlns:a="http://schemas.openxmlformats.org/drawingml/2006/main" idx="1">
+          <a:fillRef idx="1">
             <a:schemeClr val="accent1"/>
           </a:fillRef>
-          <a:effectRef xmlns:a="http://schemas.openxmlformats.org/drawingml/2006/main" idx="0">
+          <a:effectRef idx="0">
             <a:schemeClr val="accent1"/>
           </a:effectRef>
-          <a:fontRef xmlns:a="http://schemas.openxmlformats.org/drawingml/2006/main" idx="minor">
+          <a:fontRef idx="minor">
             <a:schemeClr val="lt1"/>
           </a:fontRef>
         </p:style>
         <p:txBody>
-          <a:bodyPr xmlns:a="http://schemas.openxmlformats.org/drawingml/2006/main" rtlCol="0" anchor="t"/>
-          <a:lstStyle xmlns:a="http://schemas.openxmlformats.org/drawingml/2006/main"/>
-          <a:p xmlns:a="http://schemas.openxmlformats.org/drawingml/2006/main">
-            <a:pPr>
-              <a:lnSpc>
-                <a:spcPct val="150000"/>
-              </a:lnSpc>
-            </a:pPr>
-            <a:r>
-              <a:rPr kumimoji="1" lang="en-US" altLang="zh-CN" sz="1400" b="1" dirty="0">
-                <a:solidFill>
-                  <a:schemeClr val="tx1"/>
-                </a:solidFill>
-              </a:rPr>
-              <a:t>Long-Term Value Creation</a:t>
-            </a:r>
-          </a:p>
-          <a:p xmlns:a="http://schemas.openxmlformats.org/drawingml/2006/main">
-            <a:pPr marL="285750" indent="-285750">
-              <a:buFont typeface="Arial" panose="020B0604020202020204" pitchFamily="34" charset="0"/>
-              <a:buChar char="•"/>
-            </a:pPr>
-            <a:r>
-              <a:rPr kumimoji="1" lang="en-US" altLang="zh-CN" sz="1400" dirty="0">
-                <a:solidFill>
-                  <a:schemeClr val="tx1"/>
-                </a:solidFill>
-              </a:rPr>
-              <a:t>Close the value gap between high-output and low-revenue markets through full-chain control</a:t>
-            </a:r>
-            <a:endParaRPr kumimoji="1" lang="en-US" altLang="zh-CN" sz="1400" b="1" dirty="0">
-              <a:solidFill>
-                <a:schemeClr val="tx1"/>
-              </a:solidFill>
-            </a:endParaRPr>
-          </a:p>
-          <a:p xmlns:a="http://schemas.openxmlformats.org/drawingml/2006/main">
-            <a:pPr>
-              <a:lnSpc>
-                <a:spcPct val="150000"/>
-              </a:lnSpc>
-            </a:pPr>
-            <a:r>
-              <a:rPr kumimoji="1" lang="en-US" altLang="zh-CN" sz="1400" b="1" dirty="0">
-                <a:solidFill>
-                  <a:schemeClr val="tx1"/>
-                </a:solidFill>
-              </a:rPr>
-              <a:t>Capital Recycling</a:t>
-            </a:r>
-          </a:p>
-          <a:p xmlns:a="http://schemas.openxmlformats.org/drawingml/2006/main">
-            <a:pPr marL="285750" indent="-285750">
-              <a:buFont typeface="Arial" panose="020B0604020202020204" pitchFamily="34" charset="0"/>
-              <a:buChar char="•"/>
-            </a:pPr>
-            <a:r>
-              <a:rPr kumimoji="1" lang="en-US" altLang="zh-CN" sz="1400" dirty="0">
-                <a:solidFill>
-                  <a:schemeClr val="tx1"/>
-                </a:solidFill>
-              </a:rPr>
-              <a:t>Anchor BESS growth in high-capability markets for reliable expansion</a:t>
-            </a:r>
-            <a:endParaRPr kumimoji="1" lang="en-US" altLang="zh-CN" sz="1400" b="1" dirty="0">
-              <a:solidFill>
-                <a:schemeClr val="tx1"/>
-              </a:solidFill>
-            </a:endParaRPr>
-          </a:p>
-        </p:txBody>
-      </p:sp>
-      <p:sp>
-        <p:nvSpPr>
-          <p:cNvPr id="10012" name="圆角矩形 76">
-            <a:extLst xmlns:a="http://schemas.openxmlformats.org/drawingml/2006/main">
+          <a:bodyPr rtlCol="0" anchor="ctr"/>
+          <a:lstStyle/>
+          <a:p>
+            <a:pPr algn="ctr"/>
+            <a:r>
+              <a:rPr kumimoji="1" lang="en-US" altLang="zh-CN" b="1" dirty="0"/>
+              <a:t>4</a:t>
+            </a:r>
+            <a:endParaRPr kumimoji="1" lang="zh-CN" altLang="en-US" b="1" dirty="0"/>
+          </a:p>
+        </p:txBody>
+      </p:sp>
+      <p:sp>
+        <p:nvSpPr>
+          <p:cNvPr id="61" name="椭圆 60">
+            <a:extLst>
               <a:ext uri="{FF2B5EF4-FFF2-40B4-BE49-F238E27FC236}">
-                <a16:creationId xmlns:a16="http://schemas.microsoft.com/office/drawing/2014/main" id="{BFAE422C-1765-50D1-BEB2-2C81DA15E6BC}"/>
+                <a16:creationId xmlns:a16="http://schemas.microsoft.com/office/drawing/2014/main" id="{C7F05CD1-2735-4F70-3781-36B3438225AD}"/>
               </a:ext>
             </a:extLst>
           </p:cNvPr>
@@ -5071,57 +11990,201 @@
           <p:nvPr/>
         </p:nvSpPr>
         <p:spPr>
-          <a:xfrm xmlns:a="http://schemas.openxmlformats.org/drawingml/2006/main">
-            <a:off x="345486" y="2161979"/>
-            <a:ext cx="261417" cy="282437"/>
-          </a:xfrm>
-          <a:prstGeom xmlns:a="http://schemas.openxmlformats.org/drawingml/2006/main" prst="roundRect">
-            <a:avLst>
-              <a:gd name="adj" fmla="val 0"/>
-            </a:avLst>
+          <a:xfrm>
+            <a:off x="2008385" y="4272955"/>
+            <a:ext cx="346587" cy="346587"/>
+          </a:xfrm>
+          <a:prstGeom prst="ellipse">
+            <a:avLst/>
           </a:prstGeom>
-          <a:solidFill xmlns:a="http://schemas.openxmlformats.org/drawingml/2006/main">
+          <a:solidFill>
             <a:schemeClr val="tx2"/>
           </a:solidFill>
-          <a:ln xmlns:a="http://schemas.openxmlformats.org/drawingml/2006/main" w="6350">
-            <a:noFill/>
+          <a:ln w="38100">
+            <a:solidFill>
+              <a:schemeClr val="bg1"/>
+            </a:solidFill>
           </a:ln>
         </p:spPr>
         <p:style>
-          <a:lnRef xmlns:a="http://schemas.openxmlformats.org/drawingml/2006/main" idx="2">
+          <a:lnRef idx="2">
             <a:schemeClr val="accent1">
               <a:shade val="15000"/>
             </a:schemeClr>
           </a:lnRef>
-          <a:fillRef xmlns:a="http://schemas.openxmlformats.org/drawingml/2006/main" idx="1">
+          <a:fillRef idx="1">
             <a:schemeClr val="accent1"/>
           </a:fillRef>
-          <a:effectRef xmlns:a="http://schemas.openxmlformats.org/drawingml/2006/main" idx="0">
+          <a:effectRef idx="0">
             <a:schemeClr val="accent1"/>
           </a:effectRef>
-          <a:fontRef xmlns:a="http://schemas.openxmlformats.org/drawingml/2006/main" idx="minor">
+          <a:fontRef idx="minor">
             <a:schemeClr val="lt1"/>
           </a:fontRef>
         </p:style>
         <p:txBody>
-          <a:bodyPr xmlns:a="http://schemas.openxmlformats.org/drawingml/2006/main" rtlCol="0" anchor="ctr"/>
-          <a:lstStyle xmlns:a="http://schemas.openxmlformats.org/drawingml/2006/main"/>
-          <a:p xmlns:a="http://schemas.openxmlformats.org/drawingml/2006/main">
+          <a:bodyPr rtlCol="0" anchor="ctr"/>
+          <a:lstStyle/>
+          <a:p>
             <a:pPr algn="ctr"/>
             <a:r>
-              <a:rPr kumimoji="1" lang="en-US" altLang="zh-CN" sz="1600" b="1" dirty="0"/>
-              <a:t>1</a:t>
-            </a:r>
-            <a:endParaRPr kumimoji="1" lang="zh-CN" altLang="en-US" sz="1600" b="1" dirty="0"/>
-          </a:p>
-        </p:txBody>
-      </p:sp>
-      <p:sp>
-        <p:nvSpPr>
-          <p:cNvPr id="10013" name="圆角矩形 86">
-            <a:extLst xmlns:a="http://schemas.openxmlformats.org/drawingml/2006/main">
+              <a:rPr kumimoji="1" lang="en-US" altLang="zh-CN" b="1" dirty="0"/>
+              <a:t>5</a:t>
+            </a:r>
+            <a:endParaRPr kumimoji="1" lang="zh-CN" altLang="en-US" b="1" dirty="0"/>
+          </a:p>
+        </p:txBody>
+      </p:sp>
+    </p:spTree>
+    <p:extLst>
+      <p:ext uri="{BB962C8B-B14F-4D97-AF65-F5344CB8AC3E}">
+        <p14:creationId xmlns:p14="http://schemas.microsoft.com/office/powerpoint/2010/main" val="2898815384"/>
+      </p:ext>
+    </p:extLst>
+  </p:cSld>
+  <p:clrMapOvr>
+    <a:masterClrMapping/>
+  </p:clrMapOvr>
+</p:sld>
+</file>
+
+<file path=ppt/slides/slide5.xml><?xml version="1.0" encoding="utf-8"?>
+<p:sld xmlns:a="http://schemas.openxmlformats.org/drawingml/2006/main" xmlns:r="http://schemas.openxmlformats.org/officeDocument/2006/relationships" xmlns:p="http://schemas.openxmlformats.org/presentationml/2006/main">
+  <p:cSld>
+    <p:spTree>
+      <p:nvGrpSpPr>
+        <p:cNvPr id="1" name=""/>
+        <p:cNvGrpSpPr/>
+        <p:nvPr/>
+      </p:nvGrpSpPr>
+      <p:grpSpPr>
+        <a:xfrm>
+          <a:off x="0" y="0"/>
+          <a:ext cx="0" cy="0"/>
+          <a:chOff x="0" y="0"/>
+          <a:chExt cx="0" cy="0"/>
+        </a:xfrm>
+      </p:grpSpPr>
+      <p:pic>
+        <p:nvPicPr>
+          <p:cNvPr id="7" name="图片 6">
+            <a:extLst>
               <a:ext uri="{FF2B5EF4-FFF2-40B4-BE49-F238E27FC236}">
-                <a16:creationId xmlns:a16="http://schemas.microsoft.com/office/drawing/2014/main" id="{60904E53-D94C-507F-8CAF-55E868BA4139}"/>
+                <a16:creationId xmlns:a16="http://schemas.microsoft.com/office/drawing/2014/main" id="{119DE721-1443-FD79-5920-94383D44E057}"/>
+              </a:ext>
+            </a:extLst>
+          </p:cNvPr>
+          <p:cNvPicPr>
+            <a:picLocks noChangeAspect="1"/>
+          </p:cNvPicPr>
+          <p:nvPr/>
+        </p:nvPicPr>
+        <p:blipFill>
+          <a:blip r:embed="rId2">
+            <a:alphaModFix amt="16000"/>
+          </a:blip>
+          <a:stretch>
+            <a:fillRect/>
+          </a:stretch>
+        </p:blipFill>
+        <p:spPr>
+          <a:xfrm>
+            <a:off x="47264" y="0"/>
+            <a:ext cx="12144735" cy="6884793"/>
+          </a:xfrm>
+          <a:prstGeom prst="rect">
+            <a:avLst/>
+          </a:prstGeom>
+        </p:spPr>
+      </p:pic>
+      <p:sp>
+        <p:nvSpPr>
+          <p:cNvPr id="8" name="文本框 7">
+            <a:extLst>
+              <a:ext uri="{FF2B5EF4-FFF2-40B4-BE49-F238E27FC236}">
+                <a16:creationId xmlns:a16="http://schemas.microsoft.com/office/drawing/2014/main" id="{0F9330F4-2DE6-0500-E561-86B311AD8FF1}"/>
+              </a:ext>
+            </a:extLst>
+          </p:cNvPr>
+          <p:cNvSpPr txBox="1"/>
+          <p:nvPr/>
+        </p:nvSpPr>
+        <p:spPr>
+          <a:xfrm>
+            <a:off x="244988" y="31016"/>
+            <a:ext cx="9084541" cy="830997"/>
+          </a:xfrm>
+          <a:prstGeom prst="rect">
+            <a:avLst/>
+          </a:prstGeom>
+          <a:noFill/>
+        </p:spPr>
+        <p:txBody>
+          <a:bodyPr wrap="square" anchor="ctr">
+            <a:spAutoFit/>
+          </a:bodyPr>
+          <a:lstStyle/>
+          <a:p>
+            <a:r>
+              <a:rPr kumimoji="1" lang="en-US" altLang="zh-CN" sz="2400" b="1" dirty="0">
+                <a:latin typeface="Aptos Narrow" panose="020B0004020202020204" pitchFamily="34" charset="0"/>
+                <a:ea typeface="Palatino" pitchFamily="2" charset="0"/>
+                <a:cs typeface="Mongolian Baiti" panose="03000500000000000000" pitchFamily="66" charset="0"/>
+              </a:rPr>
+              <a:t>To achieve ideal growth, priority should be considered by potential and feasibility, while proper actions should be taken to mitigate risks</a:t>
+            </a:r>
+          </a:p>
+        </p:txBody>
+      </p:sp>
+      <p:cxnSp>
+        <p:nvCxnSpPr>
+          <p:cNvPr id="9" name="直线连接符 8">
+            <a:extLst>
+              <a:ext uri="{FF2B5EF4-FFF2-40B4-BE49-F238E27FC236}">
+                <a16:creationId xmlns:a16="http://schemas.microsoft.com/office/drawing/2014/main" id="{2F6AAA03-88AA-6B05-B5F0-B16E9B6BA4BC}"/>
+              </a:ext>
+            </a:extLst>
+          </p:cNvPr>
+          <p:cNvCxnSpPr>
+            <a:cxnSpLocks/>
+          </p:cNvCxnSpPr>
+          <p:nvPr/>
+        </p:nvCxnSpPr>
+        <p:spPr>
+          <a:xfrm>
+            <a:off x="345486" y="872723"/>
+            <a:ext cx="11501023" cy="0"/>
+          </a:xfrm>
+          <a:prstGeom prst="line">
+            <a:avLst/>
+          </a:prstGeom>
+          <a:ln>
+            <a:solidFill>
+              <a:schemeClr val="tx2"/>
+            </a:solidFill>
+          </a:ln>
+        </p:spPr>
+        <p:style>
+          <a:lnRef idx="2">
+            <a:schemeClr val="accent1"/>
+          </a:lnRef>
+          <a:fillRef idx="0">
+            <a:schemeClr val="accent1"/>
+          </a:fillRef>
+          <a:effectRef idx="1">
+            <a:schemeClr val="accent1"/>
+          </a:effectRef>
+          <a:fontRef idx="minor">
+            <a:schemeClr val="tx1"/>
+          </a:fontRef>
+        </p:style>
+      </p:cxnSp>
+      <p:sp>
+        <p:nvSpPr>
+          <p:cNvPr id="11" name="圆角矩形 10">
+            <a:extLst>
+              <a:ext uri="{FF2B5EF4-FFF2-40B4-BE49-F238E27FC236}">
+                <a16:creationId xmlns:a16="http://schemas.microsoft.com/office/drawing/2014/main" id="{325C4243-BAE3-41B8-487D-241E8D369232}"/>
               </a:ext>
             </a:extLst>
           </p:cNvPr>
@@ -5129,58 +12192,127 @@
           <p:nvPr/>
         </p:nvSpPr>
         <p:spPr>
-          <a:xfrm xmlns:a="http://schemas.openxmlformats.org/drawingml/2006/main">
-            <a:off x="5139910" y="4473676"/>
-            <a:ext cx="261417" cy="282437"/>
-          </a:xfrm>
-          <a:prstGeom xmlns:a="http://schemas.openxmlformats.org/drawingml/2006/main" prst="roundRect">
+          <a:xfrm>
+            <a:off x="345489" y="1116589"/>
+            <a:ext cx="5750511" cy="301454"/>
+          </a:xfrm>
+          <a:prstGeom prst="roundRect">
             <a:avLst>
               <a:gd name="adj" fmla="val 0"/>
             </a:avLst>
           </a:prstGeom>
-          <a:solidFill xmlns:a="http://schemas.openxmlformats.org/drawingml/2006/main">
+          <a:solidFill>
             <a:schemeClr val="tx2"/>
           </a:solidFill>
-          <a:ln xmlns:a="http://schemas.openxmlformats.org/drawingml/2006/main" w="6350">
+          <a:ln w="6350">
             <a:noFill/>
           </a:ln>
         </p:spPr>
         <p:style>
-          <a:lnRef xmlns:a="http://schemas.openxmlformats.org/drawingml/2006/main" idx="2">
+          <a:lnRef idx="2">
             <a:schemeClr val="accent1">
               <a:shade val="15000"/>
             </a:schemeClr>
           </a:lnRef>
-          <a:fillRef xmlns:a="http://schemas.openxmlformats.org/drawingml/2006/main" idx="1">
+          <a:fillRef idx="1">
             <a:schemeClr val="accent1"/>
           </a:fillRef>
-          <a:effectRef xmlns:a="http://schemas.openxmlformats.org/drawingml/2006/main" idx="0">
+          <a:effectRef idx="0">
             <a:schemeClr val="accent1"/>
           </a:effectRef>
-          <a:fontRef xmlns:a="http://schemas.openxmlformats.org/drawingml/2006/main" idx="minor">
+          <a:fontRef idx="minor">
             <a:schemeClr val="lt1"/>
           </a:fontRef>
         </p:style>
         <p:txBody>
-          <a:bodyPr xmlns:a="http://schemas.openxmlformats.org/drawingml/2006/main" rtlCol="0" anchor="ctr"/>
-          <a:lstStyle xmlns:a="http://schemas.openxmlformats.org/drawingml/2006/main"/>
-          <a:p xmlns:a="http://schemas.openxmlformats.org/drawingml/2006/main">
+          <a:bodyPr rtlCol="0" anchor="ctr"/>
+          <a:lstStyle/>
+          <a:p>
             <a:pPr algn="ctr"/>
             <a:r>
-              <a:rPr kumimoji="1" lang="en-US" altLang="zh-CN" sz="1600" b="1" dirty="0"/>
-              <a:t>3</a:t>
-            </a:r>
-            <a:endParaRPr kumimoji="1" lang="zh-CN" altLang="en-US" sz="1600" b="1" dirty="0"/>
+              <a:rPr kumimoji="1" lang="en-US" altLang="zh-CN" b="1" dirty="0"/>
+              <a:t>Priority and Implementation Timeline</a:t>
+            </a:r>
+            <a:endParaRPr kumimoji="1" lang="zh-CN" altLang="en-US" b="1" dirty="0"/>
+          </a:p>
+        </p:txBody>
+      </p:sp>
+      <p:sp>
+        <p:nvSpPr>
+          <p:cNvPr id="12" name="圆角矩形 11">
+            <a:extLst>
+              <a:ext uri="{FF2B5EF4-FFF2-40B4-BE49-F238E27FC236}">
+                <a16:creationId xmlns:a16="http://schemas.microsoft.com/office/drawing/2014/main" id="{008E939F-9ACD-26FC-28C4-E1D0E49DB28D}"/>
+              </a:ext>
+            </a:extLst>
+          </p:cNvPr>
+          <p:cNvSpPr/>
+          <p:nvPr/>
+        </p:nvSpPr>
+        <p:spPr>
+          <a:xfrm>
+            <a:off x="6394225" y="1116589"/>
+            <a:ext cx="5453219" cy="301454"/>
+          </a:xfrm>
+          <a:prstGeom prst="roundRect">
+            <a:avLst>
+              <a:gd name="adj" fmla="val 0"/>
+            </a:avLst>
+          </a:prstGeom>
+          <a:solidFill>
+            <a:schemeClr val="tx1">
+              <a:lumMod val="50000"/>
+              <a:lumOff val="50000"/>
+            </a:schemeClr>
+          </a:solidFill>
+          <a:ln w="6350">
+            <a:noFill/>
+          </a:ln>
+        </p:spPr>
+        <p:style>
+          <a:lnRef idx="2">
+            <a:schemeClr val="accent1">
+              <a:shade val="15000"/>
+            </a:schemeClr>
+          </a:lnRef>
+          <a:fillRef idx="1">
+            <a:schemeClr val="accent1"/>
+          </a:fillRef>
+          <a:effectRef idx="0">
+            <a:schemeClr val="accent1"/>
+          </a:effectRef>
+          <a:fontRef idx="minor">
+            <a:schemeClr val="lt1"/>
+          </a:fontRef>
+        </p:style>
+        <p:txBody>
+          <a:bodyPr rtlCol="0" anchor="ctr"/>
+          <a:lstStyle/>
+          <a:p>
+            <a:pPr algn="ctr"/>
+            <a:r>
+              <a:rPr kumimoji="1" lang="en-US" altLang="zh-CN" b="1" dirty="0"/>
+              <a:t>Revenue and Margin Forecast</a:t>
+            </a:r>
+            <a:endParaRPr kumimoji="1" lang="zh-CN" altLang="en-US" b="1" dirty="0"/>
           </a:p>
         </p:txBody>
       </p:sp>
     </p:spTree>
+    <p:extLst>
+      <p:ext uri="{BB962C8B-B14F-4D97-AF65-F5344CB8AC3E}">
+        <p14:creationId xmlns:p14="http://schemas.microsoft.com/office/powerpoint/2010/main" val="3696569495"/>
+      </p:ext>
+    </p:extLst>
   </p:cSld>
+  <p:clrMapOvr>
+    <a:masterClrMapping/>
+  </p:clrMapOvr>
 </p:sld>
 </file>
 
 <file path=ppt/theme/theme1.xml><?xml version="1.0" encoding="utf-8"?>
-<a:theme xmlns:thm15="http://schemas.microsoft.com/office/thememl/2012/main" xmlns:a="http://schemas.openxmlformats.org/drawingml/2006/main" name="Office 主题​​">
+<a:theme xmlns:a="http://schemas.openxmlformats.org/drawingml/2006/main" name="Office 主题​​">
   <a:themeElements>
     <a:clrScheme name="自定义 7">
       <a:dk1>
@@ -5494,6 +12626,321 @@
 </a:theme>
 </file>
 
+<file path=ppt/theme/theme2.xml><?xml version="1.0" encoding="utf-8"?>
+<a:theme xmlns:a="http://schemas.openxmlformats.org/drawingml/2006/main" name="Office 主题​​">
+  <a:themeElements>
+    <a:clrScheme name="Office">
+      <a:dk1>
+        <a:sysClr val="windowText" lastClr="000000"/>
+      </a:dk1>
+      <a:lt1>
+        <a:sysClr val="window" lastClr="FFFFFF"/>
+      </a:lt1>
+      <a:dk2>
+        <a:srgbClr val="0E2841"/>
+      </a:dk2>
+      <a:lt2>
+        <a:srgbClr val="E8E8E8"/>
+      </a:lt2>
+      <a:accent1>
+        <a:srgbClr val="156082"/>
+      </a:accent1>
+      <a:accent2>
+        <a:srgbClr val="E97132"/>
+      </a:accent2>
+      <a:accent3>
+        <a:srgbClr val="196B24"/>
+      </a:accent3>
+      <a:accent4>
+        <a:srgbClr val="0F9ED5"/>
+      </a:accent4>
+      <a:accent5>
+        <a:srgbClr val="A02B93"/>
+      </a:accent5>
+      <a:accent6>
+        <a:srgbClr val="4EA72E"/>
+      </a:accent6>
+      <a:hlink>
+        <a:srgbClr val="467886"/>
+      </a:hlink>
+      <a:folHlink>
+        <a:srgbClr val="96607D"/>
+      </a:folHlink>
+    </a:clrScheme>
+    <a:fontScheme name="Office">
+      <a:majorFont>
+        <a:latin typeface="等线 Light" panose="02110004020202020204"/>
+        <a:ea typeface=""/>
+        <a:cs typeface=""/>
+        <a:font script="Jpan" typeface="游ゴシック Light"/>
+        <a:font script="Hang" typeface="맑은 고딕"/>
+        <a:font script="Hans" typeface="等线 Light"/>
+        <a:font script="Hant" typeface="新細明體"/>
+        <a:font script="Arab" typeface="Times New Roman"/>
+        <a:font script="Hebr" typeface="Times New Roman"/>
+        <a:font script="Thai" typeface="Angsana New"/>
+        <a:font script="Ethi" typeface="Nyala"/>
+        <a:font script="Beng" typeface="Vrinda"/>
+        <a:font script="Gujr" typeface="Shruti"/>
+        <a:font script="Khmr" typeface="MoolBoran"/>
+        <a:font script="Knda" typeface="Tunga"/>
+        <a:font script="Guru" typeface="Raavi"/>
+        <a:font script="Cans" typeface="Euphemia"/>
+        <a:font script="Cher" typeface="Plantagenet Cherokee"/>
+        <a:font script="Yiii" typeface="Microsoft Yi Baiti"/>
+        <a:font script="Tibt" typeface="Microsoft Himalaya"/>
+        <a:font script="Thaa" typeface="MV Boli"/>
+        <a:font script="Deva" typeface="Mangal"/>
+        <a:font script="Telu" typeface="Gautami"/>
+        <a:font script="Taml" typeface="Latha"/>
+        <a:font script="Syrc" typeface="Estrangelo Edessa"/>
+        <a:font script="Orya" typeface="Kalinga"/>
+        <a:font script="Mlym" typeface="Kartika"/>
+        <a:font script="Laoo" typeface="DokChampa"/>
+        <a:font script="Sinh" typeface="Iskoola Pota"/>
+        <a:font script="Mong" typeface="Mongolian Baiti"/>
+        <a:font script="Viet" typeface="Times New Roman"/>
+        <a:font script="Uigh" typeface="Microsoft Uighur"/>
+        <a:font script="Geor" typeface="Sylfaen"/>
+        <a:font script="Armn" typeface="Arial"/>
+        <a:font script="Bugi" typeface="Leelawadee UI"/>
+        <a:font script="Bopo" typeface="Microsoft JhengHei"/>
+        <a:font script="Java" typeface="Javanese Text"/>
+        <a:font script="Lisu" typeface="Segoe UI"/>
+        <a:font script="Mymr" typeface="Myanmar Text"/>
+        <a:font script="Nkoo" typeface="Ebrima"/>
+        <a:font script="Olck" typeface="Nirmala UI"/>
+        <a:font script="Osma" typeface="Ebrima"/>
+        <a:font script="Phag" typeface="Phagspa"/>
+        <a:font script="Syrn" typeface="Estrangelo Edessa"/>
+        <a:font script="Syrj" typeface="Estrangelo Edessa"/>
+        <a:font script="Syre" typeface="Estrangelo Edessa"/>
+        <a:font script="Sora" typeface="Nirmala UI"/>
+        <a:font script="Tale" typeface="Microsoft Tai Le"/>
+        <a:font script="Talu" typeface="Microsoft New Tai Lue"/>
+        <a:font script="Tfng" typeface="Ebrima"/>
+      </a:majorFont>
+      <a:minorFont>
+        <a:latin typeface="等线" panose="02110004020202020204"/>
+        <a:ea typeface=""/>
+        <a:cs typeface=""/>
+        <a:font script="Jpan" typeface="游ゴシック"/>
+        <a:font script="Hang" typeface="맑은 고딕"/>
+        <a:font script="Hans" typeface="等线"/>
+        <a:font script="Hant" typeface="新細明體"/>
+        <a:font script="Arab" typeface="Arial"/>
+        <a:font script="Hebr" typeface="Arial"/>
+        <a:font script="Thai" typeface="Cordia New"/>
+        <a:font script="Ethi" typeface="Nyala"/>
+        <a:font script="Beng" typeface="Vrinda"/>
+        <a:font script="Gujr" typeface="Shruti"/>
+        <a:font script="Khmr" typeface="DaunPenh"/>
+        <a:font script="Knda" typeface="Tunga"/>
+        <a:font script="Guru" typeface="Raavi"/>
+        <a:font script="Cans" typeface="Euphemia"/>
+        <a:font script="Cher" typeface="Plantagenet Cherokee"/>
+        <a:font script="Yiii" typeface="Microsoft Yi Baiti"/>
+        <a:font script="Tibt" typeface="Microsoft Himalaya"/>
+        <a:font script="Thaa" typeface="MV Boli"/>
+        <a:font script="Deva" typeface="Mangal"/>
+        <a:font script="Telu" typeface="Gautami"/>
+        <a:font script="Taml" typeface="Latha"/>
+        <a:font script="Syrc" typeface="Estrangelo Edessa"/>
+        <a:font script="Orya" typeface="Kalinga"/>
+        <a:font script="Mlym" typeface="Kartika"/>
+        <a:font script="Laoo" typeface="DokChampa"/>
+        <a:font script="Sinh" typeface="Iskoola Pota"/>
+        <a:font script="Mong" typeface="Mongolian Baiti"/>
+        <a:font script="Viet" typeface="Arial"/>
+        <a:font script="Uigh" typeface="Microsoft Uighur"/>
+        <a:font script="Geor" typeface="Sylfaen"/>
+        <a:font script="Armn" typeface="Arial"/>
+        <a:font script="Bugi" typeface="Leelawadee UI"/>
+        <a:font script="Bopo" typeface="Microsoft JhengHei"/>
+        <a:font script="Java" typeface="Javanese Text"/>
+        <a:font script="Lisu" typeface="Segoe UI"/>
+        <a:font script="Mymr" typeface="Myanmar Text"/>
+        <a:font script="Nkoo" typeface="Ebrima"/>
+        <a:font script="Olck" typeface="Nirmala UI"/>
+        <a:font script="Osma" typeface="Ebrima"/>
+        <a:font script="Phag" typeface="Phagspa"/>
+        <a:font script="Syrn" typeface="Estrangelo Edessa"/>
+        <a:font script="Syrj" typeface="Estrangelo Edessa"/>
+        <a:font script="Syre" typeface="Estrangelo Edessa"/>
+        <a:font script="Sora" typeface="Nirmala UI"/>
+        <a:font script="Tale" typeface="Microsoft Tai Le"/>
+        <a:font script="Talu" typeface="Microsoft New Tai Lue"/>
+        <a:font script="Tfng" typeface="Ebrima"/>
+      </a:minorFont>
+    </a:fontScheme>
+    <a:fmtScheme name="Office">
+      <a:fillStyleLst>
+        <a:solidFill>
+          <a:schemeClr val="phClr"/>
+        </a:solidFill>
+        <a:gradFill rotWithShape="1">
+          <a:gsLst>
+            <a:gs pos="0">
+              <a:schemeClr val="phClr">
+                <a:lumMod val="110000"/>
+                <a:satMod val="105000"/>
+                <a:tint val="67000"/>
+              </a:schemeClr>
+            </a:gs>
+            <a:gs pos="50000">
+              <a:schemeClr val="phClr">
+                <a:lumMod val="105000"/>
+                <a:satMod val="103000"/>
+                <a:tint val="73000"/>
+              </a:schemeClr>
+            </a:gs>
+            <a:gs pos="100000">
+              <a:schemeClr val="phClr">
+                <a:lumMod val="105000"/>
+                <a:satMod val="109000"/>
+                <a:tint val="81000"/>
+              </a:schemeClr>
+            </a:gs>
+          </a:gsLst>
+          <a:lin ang="5400000" scaled="0"/>
+        </a:gradFill>
+        <a:gradFill rotWithShape="1">
+          <a:gsLst>
+            <a:gs pos="0">
+              <a:schemeClr val="phClr">
+                <a:satMod val="103000"/>
+                <a:lumMod val="102000"/>
+                <a:tint val="94000"/>
+              </a:schemeClr>
+            </a:gs>
+            <a:gs pos="50000">
+              <a:schemeClr val="phClr">
+                <a:satMod val="110000"/>
+                <a:lumMod val="100000"/>
+                <a:shade val="100000"/>
+              </a:schemeClr>
+            </a:gs>
+            <a:gs pos="100000">
+              <a:schemeClr val="phClr">
+                <a:lumMod val="99000"/>
+                <a:satMod val="120000"/>
+                <a:shade val="78000"/>
+              </a:schemeClr>
+            </a:gs>
+          </a:gsLst>
+          <a:lin ang="5400000" scaled="0"/>
+        </a:gradFill>
+      </a:fillStyleLst>
+      <a:lnStyleLst>
+        <a:ln w="12700" cap="flat" cmpd="sng" algn="ctr">
+          <a:solidFill>
+            <a:schemeClr val="phClr"/>
+          </a:solidFill>
+          <a:prstDash val="solid"/>
+          <a:miter lim="800000"/>
+        </a:ln>
+        <a:ln w="19050" cap="flat" cmpd="sng" algn="ctr">
+          <a:solidFill>
+            <a:schemeClr val="phClr"/>
+          </a:solidFill>
+          <a:prstDash val="solid"/>
+          <a:miter lim="800000"/>
+        </a:ln>
+        <a:ln w="25400" cap="flat" cmpd="sng" algn="ctr">
+          <a:solidFill>
+            <a:schemeClr val="phClr"/>
+          </a:solidFill>
+          <a:prstDash val="solid"/>
+          <a:miter lim="800000"/>
+        </a:ln>
+      </a:lnStyleLst>
+      <a:effectStyleLst>
+        <a:effectStyle>
+          <a:effectLst/>
+        </a:effectStyle>
+        <a:effectStyle>
+          <a:effectLst/>
+        </a:effectStyle>
+        <a:effectStyle>
+          <a:effectLst>
+            <a:outerShdw blurRad="57150" dist="19050" dir="5400000" algn="ctr" rotWithShape="0">
+              <a:srgbClr val="000000">
+                <a:alpha val="63000"/>
+              </a:srgbClr>
+            </a:outerShdw>
+          </a:effectLst>
+        </a:effectStyle>
+      </a:effectStyleLst>
+      <a:bgFillStyleLst>
+        <a:solidFill>
+          <a:schemeClr val="phClr"/>
+        </a:solidFill>
+        <a:solidFill>
+          <a:schemeClr val="phClr">
+            <a:tint val="95000"/>
+            <a:satMod val="170000"/>
+          </a:schemeClr>
+        </a:solidFill>
+        <a:gradFill rotWithShape="1">
+          <a:gsLst>
+            <a:gs pos="0">
+              <a:schemeClr val="phClr">
+                <a:tint val="93000"/>
+                <a:satMod val="150000"/>
+                <a:shade val="98000"/>
+                <a:lumMod val="102000"/>
+              </a:schemeClr>
+            </a:gs>
+            <a:gs pos="50000">
+              <a:schemeClr val="phClr">
+                <a:tint val="98000"/>
+                <a:satMod val="130000"/>
+                <a:shade val="90000"/>
+                <a:lumMod val="103000"/>
+              </a:schemeClr>
+            </a:gs>
+            <a:gs pos="100000">
+              <a:schemeClr val="phClr">
+                <a:shade val="63000"/>
+                <a:satMod val="120000"/>
+              </a:schemeClr>
+            </a:gs>
+          </a:gsLst>
+          <a:lin ang="5400000" scaled="0"/>
+        </a:gradFill>
+      </a:bgFillStyleLst>
+    </a:fmtScheme>
+  </a:themeElements>
+  <a:objectDefaults>
+    <a:lnDef>
+      <a:spPr/>
+      <a:bodyPr/>
+      <a:lstStyle/>
+      <a:style>
+        <a:lnRef idx="2">
+          <a:schemeClr val="accent1"/>
+        </a:lnRef>
+        <a:fillRef idx="0">
+          <a:schemeClr val="accent1"/>
+        </a:fillRef>
+        <a:effectRef idx="1">
+          <a:schemeClr val="accent1"/>
+        </a:effectRef>
+        <a:fontRef idx="minor">
+          <a:schemeClr val="tx1"/>
+        </a:fontRef>
+      </a:style>
+    </a:lnDef>
+  </a:objectDefaults>
+  <a:extraClrSchemeLst/>
+  <a:extLst>
+    <a:ext uri="{05A4C25C-085E-4340-85A3-A5531E510DB2}">
+      <thm15:themeFamily xmlns:thm15="http://schemas.microsoft.com/office/thememl/2012/main" name="Office Theme" id="{2E142A2C-CD16-42D6-873A-C26D2A0506FA}" vid="{1BDDFF52-6CD6-40A5-AB3C-68EB2F1E4D0A}"/>
+    </a:ext>
+  </a:extLst>
+</a:theme>
+</file>
+
 <file path=ppt/webextensions/taskpanes.xml><?xml version="1.0" encoding="utf-8"?>
 <wetp:taskpanes xmlns:wetp="http://schemas.microsoft.com/office/webextensions/taskpanes/2010/11">
   <wetp:taskpane dockstate="right" visibility="0" width="350" row="0">

--- a/Drafts/Design Draft.pptx
+++ b/Drafts/Design Draft.pptx
@@ -5196,7 +5196,7 @@
             </p:custDataLst>
             <p:extLst>
               <p:ext uri="{D42A27DB-BD31-4B8C-83A1-F6EECF244321}">
-                <p14:modId xmlns:p14="http://schemas.microsoft.com/office/powerpoint/2010/main" val="3469274445"/>
+                <p14:modId xmlns:p14="http://schemas.microsoft.com/office/powerpoint/2010/main" val="3977461652"/>
               </p:ext>
             </p:extLst>
           </p:nvPr>
@@ -40261,6 +40261,9 @@
   <wetp:taskpane dockstate="right" visibility="0" width="350" row="0">
     <wetp:webextensionref xmlns:r="http://schemas.openxmlformats.org/officeDocument/2006/relationships" r:id="rId2"/>
   </wetp:taskpane>
+  <wetp:taskpane dockstate="right" visibility="0" width="350" row="0">
+    <wetp:webextensionref xmlns:r="http://schemas.openxmlformats.org/officeDocument/2006/relationships" r:id="rId3"/>
+  </wetp:taskpane>
 </wetp:taskpanes>
 </file>
 
@@ -40286,4 +40289,18 @@
   <we:bindings/>
   <we:snapshot xmlns:r="http://schemas.openxmlformats.org/officeDocument/2006/relationships"/>
 </we:webextension>
+</file>
+
+<file path=ppt/webextensions/webextension3.xml><?xml version="1.0" encoding="utf-8"?>
+<we:webextension xmlns:we="http://schemas.microsoft.com/office/webextensions/webextension/2010/11" id="{D6383224-8183-6F42-9D6D-ECE34A7F4D6C}">
+  <we:reference id="wa200010001" version="1.0.0.1" store="en-US" storeType="OMEX"/>
+  <we:alternateReferences>
+    <we:reference id="wa200010001" version="1.0.0.1" store="en-US" storeType="OMEX"/>
+  </we:alternateReferences>
+  <we:properties>
+    <we:property name="claude.fileId" value="&quot;290d22f7-937f-47f2-aaae-481a155bf563&quot;"/>
+  </we:properties>
+  <we:bindings/>
+  <we:snapshot xmlns:r="http://schemas.openxmlformats.org/officeDocument/2006/relationships"/>
+</we:webextension>
 </file>